--- a/docs/milestone/om/slides/om_mid_presentation_cmu.pptx
+++ b/docs/milestone/om/slides/om_mid_presentation_cmu.pptx
@@ -16,6 +16,8 @@
     <p:sldId id="261" r:id="rId23"/>
     <p:sldId id="262" r:id="rId24"/>
     <p:sldId id="263" r:id="rId25"/>
+    <p:sldId id="264" r:id="rId26"/>
+    <p:sldId id="265" r:id="rId27"/>
   </p:sldIdLst>
   <p:sldSz cy="5143500" cx="9144000"/>
   <p:notesSz cx="6858000" cy="9144000"/>
@@ -537,7 +539,219 @@
                 </a:solidFill>
                 <a:latin typeface="Open Sans"/>
               </a:rPr>
-              <a:t>32 layers, 1 thread, ms (lower is better)</a:t>
+              <a:t>Same 2×5 asm kernel, % of peak</a:t>
+            </a:r>
+          </a:p>
+        </c:rich>
+      </c:tx>
+      <c:layout/>
+      <c:overlay val="0"/>
+    </c:title>
+    <c:autoTitleDeleted val="0"/>
+    <c:plotArea>
+      <c:barChart>
+        <c:barDir val="col"/>
+        <c:grouping val="clustered"/>
+        <c:ser>
+          <c:idx val="0"/>
+          <c:order val="0"/>
+          <c:tx>
+            <c:strRef>
+              <c:f>Sheet1!$B$1</c:f>
+              <c:strCache>
+                <c:ptCount val="1"/>
+                <c:pt idx="0">
+                  <c:v>% of peak</c:v>
+                </c:pt>
+              </c:strCache>
+            </c:strRef>
+          </c:tx>
+          <c:spPr>
+            <a:solidFill>
+              <a:srgbClr val="0C6A87"/>
+            </a:solidFill>
+          </c:spPr>
+          <c:cat>
+            <c:strRef>
+              <c:f>Sheet1!$A$2:$A$4</c:f>
+              <c:strCache>
+                <c:ptCount val="3"/>
+                <c:pt idx="0">
+                  <c:v>alone (benchmark)</c:v>
+                </c:pt>
+                <c:pt idx="1">
+                  <c:v>in layers, inlined</c:v>
+                </c:pt>
+                <c:pt idx="2">
+                  <c:v>in layers, called as a function</c:v>
+                </c:pt>
+              </c:strCache>
+            </c:strRef>
+          </c:cat>
+          <c:val>
+            <c:numRef>
+              <c:f>Sheet1!$B$2:$B$4</c:f>
+              <c:numCache>
+                <c:formatCode>General</c:formatCode>
+                <c:ptCount val="3"/>
+                <c:pt idx="0">
+                  <c:v>92.2</c:v>
+                </c:pt>
+                <c:pt idx="1">
+                  <c:v>72.5</c:v>
+                </c:pt>
+                <c:pt idx="2">
+                  <c:v>83.1</c:v>
+                </c:pt>
+              </c:numCache>
+            </c:numRef>
+          </c:val>
+        </c:ser>
+        <c:dLbls>
+          <c:numFmt formatCode="0.0&quot;%&quot;" sourceLinked="0"/>
+          <c:txPr>
+            <a:bodyPr/>
+            <a:lstStyle/>
+            <a:p>
+              <a:pPr>
+                <a:defRPr sz="1100">
+                  <a:solidFill>
+                    <a:srgbClr val="1B2630"/>
+                  </a:solidFill>
+                  <a:latin typeface="Open Sans"/>
+                </a:defRPr>
+              </a:pPr>
+            </a:p>
+          </c:txPr>
+          <c:dLblPos val="outEnd"/>
+          <c:showLegendKey val="0"/>
+          <c:showVal val="1"/>
+          <c:showCatName val="0"/>
+          <c:showSerName val="0"/>
+          <c:showPercent val="0"/>
+          <c:showBubbleSize val="0"/>
+          <c:showLeaderLines val="1"/>
+        </c:dLbls>
+        <c:axId val="-2068027336"/>
+        <c:axId val="-2113994440"/>
+      </c:barChart>
+      <c:catAx>
+        <c:axId val="-2068027336"/>
+        <c:scaling>
+          <c:orientation val="minMax"/>
+        </c:scaling>
+        <c:delete val="0"/>
+        <c:axPos val="b"/>
+        <c:majorTickMark val="out"/>
+        <c:minorTickMark val="none"/>
+        <c:tickLblPos val="nextTo"/>
+        <c:spPr>
+          <a:ln>
+            <a:noFill/>
+          </a:ln>
+        </c:spPr>
+        <c:txPr>
+          <a:bodyPr/>
+          <a:lstStyle/>
+          <a:p>
+            <a:pPr>
+              <a:defRPr sz="1000">
+                <a:solidFill>
+                  <a:srgbClr val="5A6875"/>
+                </a:solidFill>
+                <a:latin typeface="Open Sans"/>
+              </a:defRPr>
+            </a:pPr>
+          </a:p>
+        </c:txPr>
+        <c:crossAx val="-2113994440"/>
+        <c:crosses val="autoZero"/>
+        <c:auto val="1"/>
+        <c:lblAlgn val="ctr"/>
+        <c:lblOffset val="100"/>
+        <c:noMultiLvlLbl val="0"/>
+      </c:catAx>
+      <c:valAx>
+        <c:axId val="-2113994440"/>
+        <c:scaling>
+          <c:max val="100.0"/>
+          <c:min val="0.0"/>
+        </c:scaling>
+        <c:delete val="0"/>
+        <c:axPos val="l"/>
+        <c:majorGridlines>
+          <c:spPr>
+            <a:ln>
+              <a:solidFill>
+                <a:srgbClr val="DDE3E7"/>
+              </a:solidFill>
+            </a:ln>
+          </c:spPr>
+        </c:majorGridlines>
+        <c:numFmt formatCode="0&quot;%&quot;" sourceLinked="0"/>
+        <c:majorTickMark val="out"/>
+        <c:minorTickMark val="none"/>
+        <c:tickLblPos val="nextTo"/>
+        <c:spPr>
+          <a:ln>
+            <a:noFill/>
+          </a:ln>
+        </c:spPr>
+        <c:txPr>
+          <a:bodyPr/>
+          <a:lstStyle/>
+          <a:p>
+            <a:pPr>
+              <a:defRPr sz="1000">
+                <a:solidFill>
+                  <a:srgbClr val="5A6875"/>
+                </a:solidFill>
+                <a:latin typeface="Open Sans"/>
+              </a:defRPr>
+            </a:pPr>
+          </a:p>
+        </c:txPr>
+        <c:crossAx val="-2068027336"/>
+        <c:crosses val="autoZero"/>
+        <c:majorUnit val="25.0"/>
+      </c:valAx>
+    </c:plotArea>
+    <c:dispBlanksAs val="gap"/>
+  </c:chart>
+  <c:txPr>
+    <a:bodyPr/>
+    <a:lstStyle/>
+    <a:p>
+      <a:pPr>
+        <a:defRPr sz="1800"/>
+      </a:pPr>
+      <a:endParaRPr lang="en-US"/>
+    </a:p>
+  </c:txPr>
+  <c:externalData r:id="rId1">
+    <c:autoUpdate val="0"/>
+  </c:externalData>
+</c:chartSpace>
+</file>
+
+<file path=ppt/charts/chart3.xml><?xml version="1.0" encoding="utf-8"?>
+<c:chartSpace xmlns:c="http://schemas.openxmlformats.org/drawingml/2006/chart" xmlns:a="http://schemas.openxmlformats.org/drawingml/2006/main" xmlns:r="http://schemas.openxmlformats.org/officeDocument/2006/relationships">
+  <c:date1904 val="0"/>
+  <c:chart>
+    <c:title>
+      <c:tx>
+        <c:rich>
+          <a:bodyPr/>
+          <a:lstStyle/>
+          <a:p>
+            <a:r>
+              <a:rPr sz="1200" b="0">
+                <a:solidFill>
+                  <a:srgbClr val="1B2630"/>
+                </a:solidFill>
+                <a:latin typeface="Open Sans"/>
+              </a:rPr>
+              <a:t>All 32 layers, 1 core, SiLU on: ms (lower is better)</a:t>
             </a:r>
           </a:p>
         </c:rich>
@@ -571,19 +785,16 @@
           </c:spPr>
           <c:cat>
             <c:strRef>
-              <c:f>Sheet1!$A$2:$A$5</c:f>
+              <c:f>Sheet1!$A$2:$A$4</c:f>
               <c:strCache>
-                <c:ptCount val="4"/>
+                <c:ptCount val="3"/>
                 <c:pt idx="0">
-                  <c:v>ONNX Runtime</c:v>
+                  <c:v>v10 (2×6 asm)</c:v>
                 </c:pt>
                 <c:pt idx="1">
-                  <c:v>v10 (2×6 asm)</c:v>
+                  <c:v>v2 (intrinsics)</c:v>
                 </c:pt>
                 <c:pt idx="2">
-                  <c:v>v2 (intrinsics)</c:v>
-                </c:pt>
-                <c:pt idx="3">
                   <c:v>OpenCV DNN</c:v>
                 </c:pt>
               </c:strCache>
@@ -591,20 +802,17 @@
           </c:cat>
           <c:val>
             <c:numRef>
-              <c:f>Sheet1!$B$2:$B$5</c:f>
+              <c:f>Sheet1!$B$2:$B$4</c:f>
               <c:numCache>
                 <c:formatCode>General</c:formatCode>
-                <c:ptCount val="4"/>
+                <c:ptCount val="3"/>
                 <c:pt idx="0">
-                  <c:v>62.6</c:v>
+                  <c:v>63.8</c:v>
                 </c:pt>
                 <c:pt idx="1">
-                  <c:v>63.8</c:v>
+                  <c:v>69.5</c:v>
                 </c:pt>
                 <c:pt idx="2">
-                  <c:v>69.5</c:v>
-                </c:pt>
-                <c:pt idx="3">
                   <c:v>86.4</c:v>
                 </c:pt>
               </c:numCache>
@@ -678,7 +886,7 @@
       <c:valAx>
         <c:axId val="-2113994440"/>
         <c:scaling>
-          <c:max val="110.0"/>
+          <c:max val="100.0"/>
           <c:min val="0.0"/>
         </c:scaling>
         <c:delete val="0"/>
@@ -1975,6 +2183,76 @@
 </p:notes>
 </file>
 
+<file path=ppt/notesSlides/notesSlide10.xml><?xml version="1.0" encoding="utf-8"?>
+<p:notes xmlns:a="http://schemas.openxmlformats.org/drawingml/2006/main" xmlns:p="http://schemas.openxmlformats.org/presentationml/2006/main" xmlns:r="http://schemas.openxmlformats.org/officeDocument/2006/relationships">
+  <p:cSld>
+    <p:spTree>
+      <p:nvGrpSpPr>
+        <p:cNvPr id="1" name=""/>
+        <p:cNvGrpSpPr/>
+        <p:nvPr/>
+      </p:nvGrpSpPr>
+      <p:grpSpPr>
+        <a:xfrm>
+          <a:off x="0" y="0"/>
+          <a:ext cx="0" cy="0"/>
+          <a:chOff x="0" y="0"/>
+          <a:chExt cx="0" cy="0"/>
+        </a:xfrm>
+      </p:grpSpPr>
+      <p:sp>
+        <p:nvSpPr>
+          <p:cNvPr id="2" name="Slide Image Placeholder 1"/>
+          <p:cNvSpPr>
+            <a:spLocks noGrp="1"/>
+          </p:cNvSpPr>
+          <p:nvPr>
+            <p:ph type="sldImg" idx="3"/>
+          </p:nvPr>
+        </p:nvSpPr>
+        <p:spPr/>
+      </p:sp>
+      <p:sp>
+        <p:nvSpPr>
+          <p:cNvPr id="3" name="Notes Placeholder 2"/>
+          <p:cNvSpPr>
+            <a:spLocks noGrp="1"/>
+          </p:cNvSpPr>
+          <p:nvPr>
+            <p:ph type="body" idx="1"/>
+          </p:nvPr>
+        </p:nvSpPr>
+        <p:spPr/>
+        <p:txBody>
+          <a:bodyPr/>
+          <a:lstStyle/>
+          <a:p>
+            <a:r>
+              <a:t>With the fused SiLU on, everything sits about 4 to 5 points lower: SiLU costs a fixed 160 to 290 cycles per call. Right: the 4x3 asm tile is the fastest while its weights are small, then collapses past C about 128 as its weights leave L2: the case cache blocking fixes.</a:t>
+            </a:r>
+          </a:p>
+        </p:txBody>
+      </p:sp>
+      <p:sp>
+        <p:nvSpPr>
+          <p:cNvPr id="4" name="Slide Number Placeholder 3"/>
+          <p:cNvSpPr>
+            <a:spLocks noGrp="1"/>
+          </p:cNvSpPr>
+          <p:nvPr>
+            <p:ph type="sldNum" idx="12"/>
+          </p:nvPr>
+        </p:nvSpPr>
+        <p:spPr/>
+      </p:sp>
+    </p:spTree>
+  </p:cSld>
+  <p:clrMapOvr>
+    <a:masterClrMapping/>
+  </p:clrMapOvr>
+</p:notes>
+</file>
+
 <file path=ppt/notesSlides/notesSlide2.xml><?xml version="1.0" encoding="utf-8"?>
 <p:notes xmlns:a="http://schemas.openxmlformats.org/drawingml/2006/main" xmlns:p="http://schemas.openxmlformats.org/presentationml/2006/main" xmlns:r="http://schemas.openxmlformats.org/officeDocument/2006/relationships">
   <p:cSld>
@@ -2160,7 +2438,7 @@
           <a:lstStyle/>
           <a:p>
             <a:r>
-              <a:t>Step 1: every output is an independent dot product; the only chain is the reduction. Step 2: 5-cycle latency times 2 FMAs per cycle means 10 independent accumulators, 80 outputs in flight. The chart: 1 accumulator is 10%, each adds about 10 points. Step 3: 2x5 gives 10 accumulators in 13 registers, 7 loads per 10 FMAs, and 5 divides 160, 80, 40 and 20. Step 4: benchmark the kernel alone exactly like Assignment 2.</a:t>
+              <a:t>These are the assumptions behind every number in the talk. The important one: cycles are wall time times 3.4 GHz, the CPU's maximum turbo, exactly the Assignment 2 convention. The core can never run faster than that, so the percentages can only understate.</a:t>
             </a:r>
           </a:p>
         </p:txBody>
@@ -2230,7 +2508,7 @@
           <a:lstStyle/>
           <a:p>
             <a:r>
-              <a:t>Every kernel I built, same arithmetic, same layout. Filled dots: the microkernel alone; hollow: all 32 layers. The 2x6 tile loses with intrinsics because GCC adds 11 register copies per tap at 15 live registers, but with the registers fixed in inline asm it is the best kernel, 95% alone. 4x3 needs all 16 registers; GCC spills it to 49%. Unrolling and software pipelining made it worse: full unrolling overflowed the uop cache and partial unrolling made GCC spill.</a:t>
+              <a:t>Step 1: every output is an independent dot product; the only chain is the reduction. Step 2: 5-cycle latency times 2 FMAs per cycle means 10 independent accumulators, 80 outputs in flight. The chart: 1 accumulator is 10%, each adds about 10 points. Step 3: 2x5 gives 10 accumulators in 13 registers, 7 loads per 10 FMAs, and 5 divides 160, 80, 40 and 20. Step 4: benchmark the kernel alone exactly like Assignment 2.</a:t>
             </a:r>
           </a:p>
         </p:txBody>
@@ -2300,7 +2578,7 @@
           <a:lstStyle/>
           <a:p>
             <a:r>
-              <a:t>This is the Assignment 2 figure for my kernel: FLOPs per cycle against the reduction length k. Cycles are time times 3.4 GHz, the max turbo, exactly as in Assignment 2, so this can only understate. 2x6 asm holds 30 to 31 FLOPs per cycle, 94 to 97 percent of peak; 2x5 intrinsics 83 to 89. The dip near k = 500 is the 2x5 weights leaving L1, like k = 315 in A2. Cross-checked: the hardware FP-instruction counter matches our FLOP count exactly.</a:t>
+              <a:t>Every kernel I built, same arithmetic, same layout. Filled dots: the microkernel alone; hollow: all 32 layers. The 2x6 tile loses with intrinsics because GCC adds 11 register copies per tap at 15 live registers, but with the registers fixed in inline asm it is the best kernel, 95% alone. 4x3 needs all 16 registers; GCC spills it to 49%. Unrolling and software pipelining made it worse: full unrolling overflowed the uop cache and partial unrolling made GCC spill.</a:t>
             </a:r>
           </a:p>
         </p:txBody>
@@ -2370,7 +2648,7 @@
           <a:lstStyle/>
           <a:p>
             <a:r>
-              <a:t>Kernel A, 2x5 in asm, beat kernel B, 2x5 intrinsics, by 7 points alone but lost by 4 in the layers. The assembly shows why: inlined into the layer loop, GCC keeps 3 accumulators on the stack and reloads them around every tap. Calling the microkernel as a function, exactly as the benchmark does, fixes it: 83.1% for 2x5 and 83.7% for v10, all at 3.4 GHz. v10 is 1.36 times faster than OpenCV and within 2% of ONNX Runtime on all 32 layers. Next: cache blocking and threading.</a:t>
+              <a:t>This is the Assignment 2 figure for my kernel: FLOPs per cycle against the reduction length k. Cycles are time times 3.4 GHz, the max turbo, exactly as in Assignment 2, so this can only understate. 2x6 asm holds 30 to 31 FLOPs per cycle, 94 to 97 percent of peak; 2x5 intrinsics 83 to 89. The dip near k = 500 is the 2x5 weights leaving L1, like k = 315 in A2. Cross-checked: the hardware FP-instruction counter matches our FLOP count exactly.</a:t>
             </a:r>
           </a:p>
         </p:txBody>
@@ -2440,7 +2718,77 @@
           <a:lstStyle/>
           <a:p>
             <a:r>
-              <a:t>With the fused SiLU on, everything sits about 4 to 5 points lower: SiLU costs a fixed 160 to 290 cycles per call. Right: the 4x3 asm tile is the fastest while its weights are small, then collapses past C about 128 as its weights leave L2: the case cache blocking fixes.</a:t>
+              <a:t>The 2x5 kernel written in assembly was the fastest alone, 92 percent, but inside the real layers it dropped to 72.5 percent, below the plain intrinsics version. The reason is in the code box: the compiler pastes the kernel into the layer loop, runs out of registers, and parks 3 of the 10 running sums in memory. It loads them back before every step and stores them after, which adds about 5 cycles to those chains: the latency problem again. The fix: call the kernel as a separate function, exactly as the benchmark does. Then all 10 sums stay in registers: 83 percent, and 84 percent with the 2x6 tile.</a:t>
+            </a:r>
+          </a:p>
+        </p:txBody>
+      </p:sp>
+      <p:sp>
+        <p:nvSpPr>
+          <p:cNvPr id="4" name="Slide Number Placeholder 3"/>
+          <p:cNvSpPr>
+            <a:spLocks noGrp="1"/>
+          </p:cNvSpPr>
+          <p:nvPr>
+            <p:ph type="sldNum" idx="12"/>
+          </p:nvPr>
+        </p:nvSpPr>
+        <p:spPr/>
+      </p:sp>
+    </p:spTree>
+  </p:cSld>
+  <p:clrMapOvr>
+    <a:masterClrMapping/>
+  </p:clrMapOvr>
+</p:notes>
+</file>
+
+<file path=ppt/notesSlides/notesSlide9.xml><?xml version="1.0" encoding="utf-8"?>
+<p:notes xmlns:a="http://schemas.openxmlformats.org/drawingml/2006/main" xmlns:p="http://schemas.openxmlformats.org/presentationml/2006/main" xmlns:r="http://schemas.openxmlformats.org/officeDocument/2006/relationships">
+  <p:cSld>
+    <p:spTree>
+      <p:nvGrpSpPr>
+        <p:cNvPr id="1" name=""/>
+        <p:cNvGrpSpPr/>
+        <p:nvPr/>
+      </p:nvGrpSpPr>
+      <p:grpSpPr>
+        <a:xfrm>
+          <a:off x="0" y="0"/>
+          <a:ext cx="0" cy="0"/>
+          <a:chOff x="0" y="0"/>
+          <a:chExt cx="0" cy="0"/>
+        </a:xfrm>
+      </p:grpSpPr>
+      <p:sp>
+        <p:nvSpPr>
+          <p:cNvPr id="2" name="Slide Image Placeholder 1"/>
+          <p:cNvSpPr>
+            <a:spLocks noGrp="1"/>
+          </p:cNvSpPr>
+          <p:nvPr>
+            <p:ph type="sldImg" idx="3"/>
+          </p:nvPr>
+        </p:nvSpPr>
+        <p:spPr/>
+      </p:sp>
+      <p:sp>
+        <p:nvSpPr>
+          <p:cNvPr id="3" name="Notes Placeholder 2"/>
+          <p:cNvSpPr>
+            <a:spLocks noGrp="1"/>
+          </p:cNvSpPr>
+          <p:nvPr>
+            <p:ph type="body" idx="1"/>
+          </p:nvPr>
+        </p:nvSpPr>
+        <p:spPr/>
+        <p:txBody>
+          <a:bodyPr/>
+          <a:lstStyle/>
+          <a:p>
+            <a:r>
+              <a:t>Total time for all 32 stride-1 layers, one core, same model and image. OpenCV DNN takes 86.4 milliseconds. Our first kernel, v2 with intrinsics, takes 69.5: 1.24 times faster. Our best, v10 with the 2x6 tile in assembly called as a function, takes 63.8: 1.36 times faster, at 84 percent of peak. Next: cache blocking for the layers with 128 or more input channels, and threading across 20 cores.</a:t>
             </a:r>
           </a:p>
         </p:txBody>
@@ -7085,6 +7433,163 @@
 </p:sld>
 </file>
 
+<file path=ppt/slides/slide10.xml><?xml version="1.0" encoding="utf-8"?>
+<p:sld xmlns:a="http://schemas.openxmlformats.org/drawingml/2006/main" xmlns:p="http://schemas.openxmlformats.org/presentationml/2006/main" xmlns:r="http://schemas.openxmlformats.org/officeDocument/2006/relationships">
+  <p:cSld>
+    <p:spTree>
+      <p:nvGrpSpPr>
+        <p:cNvPr id="1" name=""/>
+        <p:cNvGrpSpPr/>
+        <p:nvPr/>
+      </p:nvGrpSpPr>
+      <p:grpSpPr/>
+      <p:sp>
+        <p:nvSpPr>
+          <p:cNvPr id="2" name="Title 1"/>
+          <p:cNvSpPr>
+            <a:spLocks noGrp="1"/>
+          </p:cNvSpPr>
+          <p:nvPr>
+            <p:ph type="title"/>
+          </p:nvPr>
+        </p:nvSpPr>
+        <p:spPr/>
+        <p:txBody>
+          <a:bodyPr/>
+          <a:lstStyle/>
+          <a:p>
+            <a:r>
+              <a:t>Backup: the same sweeps with SiLU on</a:t>
+            </a:r>
+          </a:p>
+        </p:txBody>
+      </p:sp>
+      <p:pic>
+        <p:nvPicPr>
+          <p:cNvPr id="3" name="Picture 2" descr="ukr_sweep_2x6_34.png"/>
+          <p:cNvPicPr>
+            <a:picLocks noChangeAspect="1"/>
+          </p:cNvPicPr>
+          <p:nvPr/>
+        </p:nvPicPr>
+        <p:blipFill>
+          <a:blip r:embed="rId3"/>
+          <a:stretch>
+            <a:fillRect/>
+          </a:stretch>
+        </p:blipFill>
+        <p:spPr>
+          <a:xfrm>
+            <a:off x="457200" y="1051560"/>
+            <a:ext cx="4023360" cy="2145792"/>
+          </a:xfrm>
+          <a:prstGeom prst="rect">
+            <a:avLst/>
+          </a:prstGeom>
+        </p:spPr>
+      </p:pic>
+      <p:pic>
+        <p:nvPicPr>
+          <p:cNvPr id="4" name="Picture 3" descr="ukr_sweep_34.png"/>
+          <p:cNvPicPr>
+            <a:picLocks noChangeAspect="1"/>
+          </p:cNvPicPr>
+          <p:nvPr/>
+        </p:nvPicPr>
+        <p:blipFill>
+          <a:blip r:embed="rId4"/>
+          <a:stretch>
+            <a:fillRect/>
+          </a:stretch>
+        </p:blipFill>
+        <p:spPr>
+          <a:xfrm>
+            <a:off x="4663440" y="1051560"/>
+            <a:ext cx="4023360" cy="2145792"/>
+          </a:xfrm>
+          <a:prstGeom prst="rect">
+            <a:avLst/>
+          </a:prstGeom>
+        </p:spPr>
+      </p:pic>
+      <p:sp>
+        <p:nvSpPr>
+          <p:cNvPr id="5" name="TextBox 4"/>
+          <p:cNvSpPr txBox="1"/>
+          <p:nvPr/>
+        </p:nvSpPr>
+        <p:spPr>
+          <a:xfrm>
+            <a:off x="457200" y="3291840"/>
+            <a:ext cx="4023360" cy="640080"/>
+          </a:xfrm>
+          <a:prstGeom prst="rect">
+            <a:avLst/>
+          </a:prstGeom>
+          <a:noFill/>
+        </p:spPr>
+        <p:txBody>
+          <a:bodyPr wrap="square" lIns="0" rIns="0" tIns="0" bIns="0" anchor="t">
+            <a:spAutoFit/>
+          </a:bodyPr>
+          <a:lstStyle/>
+          <a:p>
+            <a:pPr algn="l"/>
+            <a:r>
+              <a:rPr sz="1050" b="0" i="0">
+                <a:solidFill>
+                  <a:srgbClr val="5A6875"/>
+                </a:solidFill>
+                <a:latin typeface="Open Sans"/>
+              </a:rPr>
+              <a:t>2×6 asm 90.2% mean (C = 32–256); 2×5 81.4%. SiLU costs a fixed 160–290 cycles per call.</a:t>
+            </a:r>
+          </a:p>
+        </p:txBody>
+      </p:sp>
+      <p:sp>
+        <p:nvSpPr>
+          <p:cNvPr id="6" name="TextBox 5"/>
+          <p:cNvSpPr txBox="1"/>
+          <p:nvPr/>
+        </p:nvSpPr>
+        <p:spPr>
+          <a:xfrm>
+            <a:off x="4663440" y="3291840"/>
+            <a:ext cx="4023360" cy="640080"/>
+          </a:xfrm>
+          <a:prstGeom prst="rect">
+            <a:avLst/>
+          </a:prstGeom>
+          <a:noFill/>
+        </p:spPr>
+        <p:txBody>
+          <a:bodyPr wrap="square" lIns="0" rIns="0" tIns="0" bIns="0" anchor="t">
+            <a:spAutoFit/>
+          </a:bodyPr>
+          <a:lstStyle/>
+          <a:p>
+            <a:pPr algn="l"/>
+            <a:r>
+              <a:rPr sz="1050" b="0" i="0">
+                <a:solidFill>
+                  <a:srgbClr val="5A6875"/>
+                </a:solidFill>
+                <a:latin typeface="Open Sans"/>
+              </a:rPr>
+              <a:t>4×3 asm: best 87.5% at C = 120, 57% at C = 256: its weights leave L2 (cache blocking fixes this).</a:t>
+            </a:r>
+          </a:p>
+        </p:txBody>
+      </p:sp>
+    </p:spTree>
+  </p:cSld>
+  <p:clrMapOvr>
+    <a:masterClrMapping/>
+  </p:clrMapOvr>
+</p:sld>
+</file>
+
 <file path=ppt/slides/slide2.xml><?xml version="1.0" encoding="utf-8"?>
 <p:sld xmlns:a="http://schemas.openxmlformats.org/drawingml/2006/main" xmlns:p="http://schemas.openxmlformats.org/presentationml/2006/main" xmlns:r="http://schemas.openxmlformats.org/officeDocument/2006/relationships">
   <p:cSld>
@@ -8163,8 +8668,8 @@
         </p:blipFill>
         <p:spPr>
           <a:xfrm>
-            <a:off x="457200" y="1051560"/>
-            <a:ext cx="8229600" cy="2396910"/>
+            <a:off x="1097280" y="960120"/>
+            <a:ext cx="6949440" cy="2024057"/>
           </a:xfrm>
           <a:prstGeom prst="rect">
             <a:avLst/>
@@ -8179,8 +8684,8 @@
         </p:nvSpPr>
         <p:spPr>
           <a:xfrm>
-            <a:off x="457200" y="3611880"/>
-            <a:ext cx="7132320" cy="548640"/>
+            <a:off x="457200" y="3017520"/>
+            <a:ext cx="8229600" cy="274320"/>
           </a:xfrm>
           <a:prstGeom prst="rect">
             <a:avLst/>
@@ -8195,13 +8700,477 @@
           <a:p>
             <a:pPr algn="l"/>
             <a:r>
-              <a:rPr sz="1300" b="0" i="0">
+              <a:rPr sz="1150" b="0" i="0">
                 <a:solidFill>
                   <a:srgbClr val="1B2630"/>
                 </a:solidFill>
                 <a:latin typeface="Open Sans"/>
               </a:rPr>
-              <a:t>Per step (one input channel at one of the 9 taps): load 2 weight vectors, broadcast 5 inputs, 10 FMAs. Repeat k = C × 9 times, then bias, SiLU and one store per register.</a:t>
+              <a:t>Per step: 2 weight loads + 5 broadcasts feed 10 FMAs; repeated k = C × 9 times, then bias, SiLU, one store.</a:t>
+            </a:r>
+          </a:p>
+        </p:txBody>
+      </p:sp>
+      <p:sp>
+        <p:nvSpPr>
+          <p:cNvPr id="5" name="strip-0"/>
+          <p:cNvSpPr/>
+          <p:nvPr/>
+        </p:nvSpPr>
+        <p:spPr>
+          <a:xfrm>
+            <a:off x="457200" y="3364992"/>
+            <a:ext cx="1965960" cy="841248"/>
+          </a:xfrm>
+          <a:prstGeom prst="roundRect">
+            <a:avLst>
+              <a:gd name="adj" fmla="val 8000"/>
+            </a:avLst>
+          </a:prstGeom>
+          <a:solidFill>
+            <a:srgbClr val="F8E5E9"/>
+          </a:solidFill>
+          <a:ln>
+            <a:noFill/>
+          </a:ln>
+          <a:effectLst/>
+        </p:spPr>
+        <p:style>
+          <a:lnRef idx="1">
+            <a:schemeClr val="accent1"/>
+          </a:lnRef>
+          <a:fillRef idx="3">
+            <a:schemeClr val="accent1"/>
+          </a:fillRef>
+          <a:effectRef idx="2">
+            <a:schemeClr val="accent1"/>
+          </a:effectRef>
+          <a:fontRef idx="minor">
+            <a:schemeClr val="lt1"/>
+          </a:fontRef>
+        </p:style>
+        <p:txBody>
+          <a:bodyPr rtlCol="0" anchor="ctr"/>
+          <a:lstStyle/>
+          <a:p>
+            <a:pPr algn="ctr"/>
+          </a:p>
+        </p:txBody>
+      </p:sp>
+      <p:sp>
+        <p:nvSpPr>
+          <p:cNvPr id="6" name="TextBox 5"/>
+          <p:cNvSpPr txBox="1"/>
+          <p:nvPr/>
+        </p:nvSpPr>
+        <p:spPr>
+          <a:xfrm>
+            <a:off x="548640" y="3419856"/>
+            <a:ext cx="1783080" cy="228600"/>
+          </a:xfrm>
+          <a:prstGeom prst="rect">
+            <a:avLst/>
+          </a:prstGeom>
+          <a:noFill/>
+        </p:spPr>
+        <p:txBody>
+          <a:bodyPr wrap="square" lIns="0" rIns="0" tIns="0" bIns="0" anchor="t">
+            <a:spAutoFit/>
+          </a:bodyPr>
+          <a:lstStyle/>
+          <a:p>
+            <a:pPr algn="l"/>
+            <a:r>
+              <a:rPr sz="1150" b="1" i="0">
+                <a:solidFill>
+                  <a:srgbClr val="BB0027"/>
+                </a:solidFill>
+                <a:latin typeface="Open Sans"/>
+              </a:rPr>
+              <a:t>SIMD</a:t>
+            </a:r>
+          </a:p>
+        </p:txBody>
+      </p:sp>
+      <p:sp>
+        <p:nvSpPr>
+          <p:cNvPr id="7" name="TextBox 6"/>
+          <p:cNvSpPr txBox="1"/>
+          <p:nvPr/>
+        </p:nvSpPr>
+        <p:spPr>
+          <a:xfrm>
+            <a:off x="548640" y="3648456"/>
+            <a:ext cx="1783080" cy="548640"/>
+          </a:xfrm>
+          <a:prstGeom prst="rect">
+            <a:avLst/>
+          </a:prstGeom>
+          <a:noFill/>
+        </p:spPr>
+        <p:txBody>
+          <a:bodyPr wrap="square" lIns="0" rIns="0" tIns="0" bIns="0" anchor="t">
+            <a:spAutoFit/>
+          </a:bodyPr>
+          <a:lstStyle/>
+          <a:p>
+            <a:pPr algn="l"/>
+            <a:r>
+              <a:rPr sz="950" b="0" i="0">
+                <a:solidFill>
+                  <a:srgbClr val="5A6875"/>
+                </a:solidFill>
+                <a:latin typeface="Open Sans"/>
+              </a:rPr>
+              <a:t>one vfmadd231ps = 8 multiply-adds (8 output channels): 32 FLOPs/cycle vs 4 scalar</a:t>
+            </a:r>
+          </a:p>
+        </p:txBody>
+      </p:sp>
+      <p:sp>
+        <p:nvSpPr>
+          <p:cNvPr id="8" name="strip-1"/>
+          <p:cNvSpPr/>
+          <p:nvPr/>
+        </p:nvSpPr>
+        <p:spPr>
+          <a:xfrm>
+            <a:off x="2542032" y="3364992"/>
+            <a:ext cx="1965960" cy="841248"/>
+          </a:xfrm>
+          <a:prstGeom prst="roundRect">
+            <a:avLst>
+              <a:gd name="adj" fmla="val 8000"/>
+            </a:avLst>
+          </a:prstGeom>
+          <a:solidFill>
+            <a:srgbClr val="F1F3F5"/>
+          </a:solidFill>
+          <a:ln>
+            <a:noFill/>
+          </a:ln>
+          <a:effectLst/>
+        </p:spPr>
+        <p:style>
+          <a:lnRef idx="1">
+            <a:schemeClr val="accent1"/>
+          </a:lnRef>
+          <a:fillRef idx="3">
+            <a:schemeClr val="accent1"/>
+          </a:fillRef>
+          <a:effectRef idx="2">
+            <a:schemeClr val="accent1"/>
+          </a:effectRef>
+          <a:fontRef idx="minor">
+            <a:schemeClr val="lt1"/>
+          </a:fontRef>
+        </p:style>
+        <p:txBody>
+          <a:bodyPr rtlCol="0" anchor="ctr"/>
+          <a:lstStyle/>
+          <a:p>
+            <a:pPr algn="ctr"/>
+          </a:p>
+        </p:txBody>
+      </p:sp>
+      <p:sp>
+        <p:nvSpPr>
+          <p:cNvPr id="9" name="TextBox 8"/>
+          <p:cNvSpPr txBox="1"/>
+          <p:nvPr/>
+        </p:nvSpPr>
+        <p:spPr>
+          <a:xfrm>
+            <a:off x="2633472" y="3419856"/>
+            <a:ext cx="1783080" cy="228600"/>
+          </a:xfrm>
+          <a:prstGeom prst="rect">
+            <a:avLst/>
+          </a:prstGeom>
+          <a:noFill/>
+        </p:spPr>
+        <p:txBody>
+          <a:bodyPr wrap="square" lIns="0" rIns="0" tIns="0" bIns="0" anchor="t">
+            <a:spAutoFit/>
+          </a:bodyPr>
+          <a:lstStyle/>
+          <a:p>
+            <a:pPr algn="l"/>
+            <a:r>
+              <a:rPr sz="1150" b="1" i="0">
+                <a:solidFill>
+                  <a:srgbClr val="1B2630"/>
+                </a:solidFill>
+                <a:latin typeface="Open Sans"/>
+              </a:rPr>
+              <a:t>Intrinsics</a:t>
+            </a:r>
+          </a:p>
+        </p:txBody>
+      </p:sp>
+      <p:sp>
+        <p:nvSpPr>
+          <p:cNvPr id="10" name="TextBox 9"/>
+          <p:cNvSpPr txBox="1"/>
+          <p:nvPr/>
+        </p:nvSpPr>
+        <p:spPr>
+          <a:xfrm>
+            <a:off x="2633472" y="3648456"/>
+            <a:ext cx="1783080" cy="548640"/>
+          </a:xfrm>
+          <a:prstGeom prst="rect">
+            <a:avLst/>
+          </a:prstGeom>
+          <a:noFill/>
+        </p:spPr>
+        <p:txBody>
+          <a:bodyPr wrap="square" lIns="0" rIns="0" tIns="0" bIns="0" anchor="t">
+            <a:spAutoFit/>
+          </a:bodyPr>
+          <a:lstStyle/>
+          <a:p>
+            <a:pPr algn="l"/>
+            <a:r>
+              <a:rPr sz="950" b="0" i="0">
+                <a:solidFill>
+                  <a:srgbClr val="5A6875"/>
+                </a:solidFill>
+                <a:latin typeface="Open Sans"/>
+              </a:rPr>
+              <a:t>C calls that are one instruction each, e.g. _mm256_fmadd_ps = vfmadd231ps</a:t>
+            </a:r>
+          </a:p>
+        </p:txBody>
+      </p:sp>
+      <p:sp>
+        <p:nvSpPr>
+          <p:cNvPr id="11" name="strip-2"/>
+          <p:cNvSpPr/>
+          <p:nvPr/>
+        </p:nvSpPr>
+        <p:spPr>
+          <a:xfrm>
+            <a:off x="4626864" y="3364992"/>
+            <a:ext cx="1965960" cy="841248"/>
+          </a:xfrm>
+          <a:prstGeom prst="roundRect">
+            <a:avLst>
+              <a:gd name="adj" fmla="val 8000"/>
+            </a:avLst>
+          </a:prstGeom>
+          <a:solidFill>
+            <a:srgbClr val="F1F3F5"/>
+          </a:solidFill>
+          <a:ln>
+            <a:noFill/>
+          </a:ln>
+          <a:effectLst/>
+        </p:spPr>
+        <p:style>
+          <a:lnRef idx="1">
+            <a:schemeClr val="accent1"/>
+          </a:lnRef>
+          <a:fillRef idx="3">
+            <a:schemeClr val="accent1"/>
+          </a:fillRef>
+          <a:effectRef idx="2">
+            <a:schemeClr val="accent1"/>
+          </a:effectRef>
+          <a:fontRef idx="minor">
+            <a:schemeClr val="lt1"/>
+          </a:fontRef>
+        </p:style>
+        <p:txBody>
+          <a:bodyPr rtlCol="0" anchor="ctr"/>
+          <a:lstStyle/>
+          <a:p>
+            <a:pPr algn="ctr"/>
+          </a:p>
+        </p:txBody>
+      </p:sp>
+      <p:sp>
+        <p:nvSpPr>
+          <p:cNvPr id="12" name="TextBox 11"/>
+          <p:cNvSpPr txBox="1"/>
+          <p:nvPr/>
+        </p:nvSpPr>
+        <p:spPr>
+          <a:xfrm>
+            <a:off x="4718303" y="3419856"/>
+            <a:ext cx="1783080" cy="228600"/>
+          </a:xfrm>
+          <a:prstGeom prst="rect">
+            <a:avLst/>
+          </a:prstGeom>
+          <a:noFill/>
+        </p:spPr>
+        <p:txBody>
+          <a:bodyPr wrap="square" lIns="0" rIns="0" tIns="0" bIns="0" anchor="t">
+            <a:spAutoFit/>
+          </a:bodyPr>
+          <a:lstStyle/>
+          <a:p>
+            <a:pPr algn="l"/>
+            <a:r>
+              <a:rPr sz="1150" b="1" i="0">
+                <a:solidFill>
+                  <a:srgbClr val="1B2630"/>
+                </a:solidFill>
+                <a:latin typeface="Open Sans"/>
+              </a:rPr>
+              <a:t>Reuse</a:t>
+            </a:r>
+          </a:p>
+        </p:txBody>
+      </p:sp>
+      <p:sp>
+        <p:nvSpPr>
+          <p:cNvPr id="13" name="TextBox 12"/>
+          <p:cNvSpPr txBox="1"/>
+          <p:nvPr/>
+        </p:nvSpPr>
+        <p:spPr>
+          <a:xfrm>
+            <a:off x="4718303" y="3648456"/>
+            <a:ext cx="1783080" cy="548640"/>
+          </a:xfrm>
+          <a:prstGeom prst="rect">
+            <a:avLst/>
+          </a:prstGeom>
+          <a:noFill/>
+        </p:spPr>
+        <p:txBody>
+          <a:bodyPr wrap="square" lIns="0" rIns="0" tIns="0" bIns="0" anchor="t">
+            <a:spAutoFit/>
+          </a:bodyPr>
+          <a:lstStyle/>
+          <a:p>
+            <a:pPr algn="l"/>
+            <a:r>
+              <a:rPr sz="950" b="0" i="0">
+                <a:solidFill>
+                  <a:srgbClr val="5A6875"/>
+                </a:solidFill>
+                <a:latin typeface="Open Sans"/>
+              </a:rPr>
+              <a:t>each weight vector used 5×, each broadcast 2×, each accumulator stored once</a:t>
+            </a:r>
+          </a:p>
+        </p:txBody>
+      </p:sp>
+      <p:sp>
+        <p:nvSpPr>
+          <p:cNvPr id="14" name="strip-3"/>
+          <p:cNvSpPr/>
+          <p:nvPr/>
+        </p:nvSpPr>
+        <p:spPr>
+          <a:xfrm>
+            <a:off x="6711696" y="3364992"/>
+            <a:ext cx="1965960" cy="841248"/>
+          </a:xfrm>
+          <a:prstGeom prst="roundRect">
+            <a:avLst>
+              <a:gd name="adj" fmla="val 8000"/>
+            </a:avLst>
+          </a:prstGeom>
+          <a:solidFill>
+            <a:srgbClr val="F1F3F5"/>
+          </a:solidFill>
+          <a:ln>
+            <a:noFill/>
+          </a:ln>
+          <a:effectLst/>
+        </p:spPr>
+        <p:style>
+          <a:lnRef idx="1">
+            <a:schemeClr val="accent1"/>
+          </a:lnRef>
+          <a:fillRef idx="3">
+            <a:schemeClr val="accent1"/>
+          </a:fillRef>
+          <a:effectRef idx="2">
+            <a:schemeClr val="accent1"/>
+          </a:effectRef>
+          <a:fontRef idx="minor">
+            <a:schemeClr val="lt1"/>
+          </a:fontRef>
+        </p:style>
+        <p:txBody>
+          <a:bodyPr rtlCol="0" anchor="ctr"/>
+          <a:lstStyle/>
+          <a:p>
+            <a:pPr algn="ctr"/>
+          </a:p>
+        </p:txBody>
+      </p:sp>
+      <p:sp>
+        <p:nvSpPr>
+          <p:cNvPr id="15" name="TextBox 14"/>
+          <p:cNvSpPr txBox="1"/>
+          <p:nvPr/>
+        </p:nvSpPr>
+        <p:spPr>
+          <a:xfrm>
+            <a:off x="6803136" y="3419856"/>
+            <a:ext cx="1783080" cy="228600"/>
+          </a:xfrm>
+          <a:prstGeom prst="rect">
+            <a:avLst/>
+          </a:prstGeom>
+          <a:noFill/>
+        </p:spPr>
+        <p:txBody>
+          <a:bodyPr wrap="square" lIns="0" rIns="0" tIns="0" bIns="0" anchor="t">
+            <a:spAutoFit/>
+          </a:bodyPr>
+          <a:lstStyle/>
+          <a:p>
+            <a:pPr algn="l"/>
+            <a:r>
+              <a:rPr sz="1150" b="1" i="0">
+                <a:solidFill>
+                  <a:srgbClr val="1B2630"/>
+                </a:solidFill>
+                <a:latin typeface="Open Sans"/>
+              </a:rPr>
+              <a:t>Layout</a:t>
+            </a:r>
+          </a:p>
+        </p:txBody>
+      </p:sp>
+      <p:sp>
+        <p:nvSpPr>
+          <p:cNvPr id="16" name="TextBox 15"/>
+          <p:cNvSpPr txBox="1"/>
+          <p:nvPr/>
+        </p:nvSpPr>
+        <p:spPr>
+          <a:xfrm>
+            <a:off x="6803136" y="3648456"/>
+            <a:ext cx="1783080" cy="548640"/>
+          </a:xfrm>
+          <a:prstGeom prst="rect">
+            <a:avLst/>
+          </a:prstGeom>
+          <a:noFill/>
+        </p:spPr>
+        <p:txBody>
+          <a:bodyPr wrap="square" lIns="0" rIns="0" tIns="0" bIns="0" anchor="t">
+            <a:spAutoFit/>
+          </a:bodyPr>
+          <a:lstStyle/>
+          <a:p>
+            <a:pPr algn="l"/>
+            <a:r>
+              <a:rPr sz="950" b="0" i="0">
+                <a:solidFill>
+                  <a:srgbClr val="5A6875"/>
+                </a:solidFill>
+                <a:latin typeface="Open Sans"/>
+              </a:rPr>
+              <a:t>8 channels of a pixel are contiguous: one aligned load fills one register</a:t>
             </a:r>
           </a:p>
         </p:txBody>
@@ -8215,6 +9184,973 @@
 </file>
 
 <file path=ppt/slides/slide4.xml><?xml version="1.0" encoding="utf-8"?>
+<p:sld xmlns:a="http://schemas.openxmlformats.org/drawingml/2006/main" xmlns:p="http://schemas.openxmlformats.org/presentationml/2006/main" xmlns:r="http://schemas.openxmlformats.org/officeDocument/2006/relationships">
+  <p:cSld>
+    <p:spTree>
+      <p:nvGrpSpPr>
+        <p:cNvPr id="1" name=""/>
+        <p:cNvGrpSpPr/>
+        <p:nvPr/>
+      </p:nvGrpSpPr>
+      <p:grpSpPr/>
+      <p:sp>
+        <p:nvSpPr>
+          <p:cNvPr id="2" name="Title 1"/>
+          <p:cNvSpPr>
+            <a:spLocks noGrp="1"/>
+          </p:cNvSpPr>
+          <p:nvPr>
+            <p:ph type="title"/>
+          </p:nvPr>
+        </p:nvSpPr>
+        <p:spPr/>
+        <p:txBody>
+          <a:bodyPr/>
+          <a:lstStyle/>
+          <a:p>
+            <a:r>
+              <a:t>How the numbers are measured</a:t>
+            </a:r>
+          </a:p>
+        </p:txBody>
+      </p:sp>
+      <p:sp>
+        <p:nvSpPr>
+          <p:cNvPr id="3" name="assume-0"/>
+          <p:cNvSpPr/>
+          <p:nvPr/>
+        </p:nvSpPr>
+        <p:spPr>
+          <a:xfrm>
+            <a:off x="457200" y="1005840"/>
+            <a:ext cx="4023360" cy="713232"/>
+          </a:xfrm>
+          <a:prstGeom prst="roundRect">
+            <a:avLst>
+              <a:gd name="adj" fmla="val 8000"/>
+            </a:avLst>
+          </a:prstGeom>
+          <a:solidFill>
+            <a:srgbClr val="F1F3F5"/>
+          </a:solidFill>
+          <a:ln>
+            <a:noFill/>
+          </a:ln>
+          <a:effectLst/>
+        </p:spPr>
+        <p:style>
+          <a:lnRef idx="1">
+            <a:schemeClr val="accent1"/>
+          </a:lnRef>
+          <a:fillRef idx="3">
+            <a:schemeClr val="accent1"/>
+          </a:fillRef>
+          <a:effectRef idx="2">
+            <a:schemeClr val="accent1"/>
+          </a:effectRef>
+          <a:fontRef idx="minor">
+            <a:schemeClr val="lt1"/>
+          </a:fontRef>
+        </p:style>
+        <p:txBody>
+          <a:bodyPr rtlCol="0" anchor="ctr"/>
+          <a:lstStyle/>
+          <a:p>
+            <a:pPr algn="ctr"/>
+          </a:p>
+        </p:txBody>
+      </p:sp>
+      <p:sp>
+        <p:nvSpPr>
+          <p:cNvPr id="4" name="TextBox 3"/>
+          <p:cNvSpPr txBox="1"/>
+          <p:nvPr/>
+        </p:nvSpPr>
+        <p:spPr>
+          <a:xfrm>
+            <a:off x="566928" y="1069848"/>
+            <a:ext cx="3749039" cy="228600"/>
+          </a:xfrm>
+          <a:prstGeom prst="rect">
+            <a:avLst/>
+          </a:prstGeom>
+          <a:noFill/>
+        </p:spPr>
+        <p:txBody>
+          <a:bodyPr wrap="square" lIns="0" rIns="0" tIns="0" bIns="0" anchor="t">
+            <a:spAutoFit/>
+          </a:bodyPr>
+          <a:lstStyle/>
+          <a:p>
+            <a:pPr algn="l"/>
+            <a:r>
+              <a:rPr sz="1150" b="1" i="0">
+                <a:solidFill>
+                  <a:srgbClr val="1B2630"/>
+                </a:solidFill>
+                <a:latin typeface="Open Sans"/>
+              </a:rPr>
+              <a:t>Machine</a:t>
+            </a:r>
+          </a:p>
+        </p:txBody>
+      </p:sp>
+      <p:sp>
+        <p:nvSpPr>
+          <p:cNvPr id="5" name="TextBox 4"/>
+          <p:cNvSpPr txBox="1"/>
+          <p:nvPr/>
+        </p:nvSpPr>
+        <p:spPr>
+          <a:xfrm>
+            <a:off x="566928" y="1307592"/>
+            <a:ext cx="3794760" cy="411480"/>
+          </a:xfrm>
+          <a:prstGeom prst="rect">
+            <a:avLst/>
+          </a:prstGeom>
+          <a:noFill/>
+        </p:spPr>
+        <p:txBody>
+          <a:bodyPr wrap="square" lIns="0" rIns="0" tIns="0" bIns="0" anchor="t">
+            <a:spAutoFit/>
+          </a:bodyPr>
+          <a:lstStyle/>
+          <a:p>
+            <a:pPr algn="l"/>
+            <a:r>
+              <a:rPr sz="950" b="0" i="0">
+                <a:solidFill>
+                  <a:srgbClr val="5A6875"/>
+                </a:solidFill>
+                <a:latin typeface="Open Sans"/>
+              </a:rPr>
+              <a:t>ece028, Xeon E5-2640 v4 (Broadwell), 1 core pinned with taskset, GCC 8.5 -O3 -march=broadwell</a:t>
+            </a:r>
+          </a:p>
+        </p:txBody>
+      </p:sp>
+      <p:sp>
+        <p:nvSpPr>
+          <p:cNvPr id="6" name="assume-1"/>
+          <p:cNvSpPr/>
+          <p:nvPr/>
+        </p:nvSpPr>
+        <p:spPr>
+          <a:xfrm>
+            <a:off x="4617720" y="1005840"/>
+            <a:ext cx="4023360" cy="713232"/>
+          </a:xfrm>
+          <a:prstGeom prst="roundRect">
+            <a:avLst>
+              <a:gd name="adj" fmla="val 8000"/>
+            </a:avLst>
+          </a:prstGeom>
+          <a:solidFill>
+            <a:srgbClr val="F1F3F5"/>
+          </a:solidFill>
+          <a:ln>
+            <a:noFill/>
+          </a:ln>
+          <a:effectLst/>
+        </p:spPr>
+        <p:style>
+          <a:lnRef idx="1">
+            <a:schemeClr val="accent1"/>
+          </a:lnRef>
+          <a:fillRef idx="3">
+            <a:schemeClr val="accent1"/>
+          </a:fillRef>
+          <a:effectRef idx="2">
+            <a:schemeClr val="accent1"/>
+          </a:effectRef>
+          <a:fontRef idx="minor">
+            <a:schemeClr val="lt1"/>
+          </a:fontRef>
+        </p:style>
+        <p:txBody>
+          <a:bodyPr rtlCol="0" anchor="ctr"/>
+          <a:lstStyle/>
+          <a:p>
+            <a:pPr algn="ctr"/>
+          </a:p>
+        </p:txBody>
+      </p:sp>
+      <p:sp>
+        <p:nvSpPr>
+          <p:cNvPr id="7" name="TextBox 6"/>
+          <p:cNvSpPr txBox="1"/>
+          <p:nvPr/>
+        </p:nvSpPr>
+        <p:spPr>
+          <a:xfrm>
+            <a:off x="4727448" y="1069848"/>
+            <a:ext cx="3749039" cy="228600"/>
+          </a:xfrm>
+          <a:prstGeom prst="rect">
+            <a:avLst/>
+          </a:prstGeom>
+          <a:noFill/>
+        </p:spPr>
+        <p:txBody>
+          <a:bodyPr wrap="square" lIns="0" rIns="0" tIns="0" bIns="0" anchor="t">
+            <a:spAutoFit/>
+          </a:bodyPr>
+          <a:lstStyle/>
+          <a:p>
+            <a:pPr algn="l"/>
+            <a:r>
+              <a:rPr sz="1150" b="1" i="0">
+                <a:solidFill>
+                  <a:srgbClr val="1B2630"/>
+                </a:solidFill>
+                <a:latin typeface="Open Sans"/>
+              </a:rPr>
+              <a:t>Peak</a:t>
+            </a:r>
+          </a:p>
+        </p:txBody>
+      </p:sp>
+      <p:sp>
+        <p:nvSpPr>
+          <p:cNvPr id="8" name="TextBox 7"/>
+          <p:cNvSpPr txBox="1"/>
+          <p:nvPr/>
+        </p:nvSpPr>
+        <p:spPr>
+          <a:xfrm>
+            <a:off x="4727448" y="1307592"/>
+            <a:ext cx="3794760" cy="411480"/>
+          </a:xfrm>
+          <a:prstGeom prst="rect">
+            <a:avLst/>
+          </a:prstGeom>
+          <a:noFill/>
+        </p:spPr>
+        <p:txBody>
+          <a:bodyPr wrap="square" lIns="0" rIns="0" tIns="0" bIns="0" anchor="t">
+            <a:spAutoFit/>
+          </a:bodyPr>
+          <a:lstStyle/>
+          <a:p>
+            <a:pPr algn="l"/>
+            <a:r>
+              <a:rPr sz="950" b="0" i="0">
+                <a:solidFill>
+                  <a:srgbClr val="5A6875"/>
+                </a:solidFill>
+                <a:latin typeface="Open Sans"/>
+              </a:rPr>
+              <a:t>2 FMA units × 8 FP32 lanes × 2 FLOPs = 32 FLOPs/cycle per core (AVX2, no AVX-512)</a:t>
+            </a:r>
+          </a:p>
+        </p:txBody>
+      </p:sp>
+      <p:sp>
+        <p:nvSpPr>
+          <p:cNvPr id="9" name="assume-2"/>
+          <p:cNvSpPr/>
+          <p:nvPr/>
+        </p:nvSpPr>
+        <p:spPr>
+          <a:xfrm>
+            <a:off x="457200" y="1810512"/>
+            <a:ext cx="4023360" cy="713232"/>
+          </a:xfrm>
+          <a:prstGeom prst="roundRect">
+            <a:avLst>
+              <a:gd name="adj" fmla="val 8000"/>
+            </a:avLst>
+          </a:prstGeom>
+          <a:solidFill>
+            <a:srgbClr val="F1F3F5"/>
+          </a:solidFill>
+          <a:ln>
+            <a:noFill/>
+          </a:ln>
+          <a:effectLst/>
+        </p:spPr>
+        <p:style>
+          <a:lnRef idx="1">
+            <a:schemeClr val="accent1"/>
+          </a:lnRef>
+          <a:fillRef idx="3">
+            <a:schemeClr val="accent1"/>
+          </a:fillRef>
+          <a:effectRef idx="2">
+            <a:schemeClr val="accent1"/>
+          </a:effectRef>
+          <a:fontRef idx="minor">
+            <a:schemeClr val="lt1"/>
+          </a:fontRef>
+        </p:style>
+        <p:txBody>
+          <a:bodyPr rtlCol="0" anchor="ctr"/>
+          <a:lstStyle/>
+          <a:p>
+            <a:pPr algn="ctr"/>
+          </a:p>
+        </p:txBody>
+      </p:sp>
+      <p:sp>
+        <p:nvSpPr>
+          <p:cNvPr id="10" name="TextBox 9"/>
+          <p:cNvSpPr txBox="1"/>
+          <p:nvPr/>
+        </p:nvSpPr>
+        <p:spPr>
+          <a:xfrm>
+            <a:off x="566928" y="1874519"/>
+            <a:ext cx="3749039" cy="228600"/>
+          </a:xfrm>
+          <a:prstGeom prst="rect">
+            <a:avLst/>
+          </a:prstGeom>
+          <a:noFill/>
+        </p:spPr>
+        <p:txBody>
+          <a:bodyPr wrap="square" lIns="0" rIns="0" tIns="0" bIns="0" anchor="t">
+            <a:spAutoFit/>
+          </a:bodyPr>
+          <a:lstStyle/>
+          <a:p>
+            <a:pPr algn="l"/>
+            <a:r>
+              <a:rPr sz="1150" b="1" i="0">
+                <a:solidFill>
+                  <a:srgbClr val="BB0027"/>
+                </a:solidFill>
+                <a:latin typeface="Open Sans"/>
+              </a:rPr>
+              <a:t>Cycles</a:t>
+            </a:r>
+          </a:p>
+        </p:txBody>
+      </p:sp>
+      <p:sp>
+        <p:nvSpPr>
+          <p:cNvPr id="11" name="TextBox 10"/>
+          <p:cNvSpPr txBox="1"/>
+          <p:nvPr/>
+        </p:nvSpPr>
+        <p:spPr>
+          <a:xfrm>
+            <a:off x="566928" y="2112264"/>
+            <a:ext cx="3794760" cy="411480"/>
+          </a:xfrm>
+          <a:prstGeom prst="rect">
+            <a:avLst/>
+          </a:prstGeom>
+          <a:noFill/>
+        </p:spPr>
+        <p:txBody>
+          <a:bodyPr wrap="square" lIns="0" rIns="0" tIns="0" bIns="0" anchor="t">
+            <a:spAutoFit/>
+          </a:bodyPr>
+          <a:lstStyle/>
+          <a:p>
+            <a:pPr algn="l"/>
+            <a:r>
+              <a:rPr sz="950" b="0" i="0">
+                <a:solidFill>
+                  <a:srgbClr val="5A6875"/>
+                </a:solidFill>
+                <a:latin typeface="Open Sans"/>
+              </a:rPr>
+              <a:t>wall time × 3.4 GHz (max turbo), as in Assignment 2: can only understate % of peak</a:t>
+            </a:r>
+          </a:p>
+        </p:txBody>
+      </p:sp>
+      <p:sp>
+        <p:nvSpPr>
+          <p:cNvPr id="12" name="assume-3"/>
+          <p:cNvSpPr/>
+          <p:nvPr/>
+        </p:nvSpPr>
+        <p:spPr>
+          <a:xfrm>
+            <a:off x="4617720" y="1810512"/>
+            <a:ext cx="4023360" cy="713232"/>
+          </a:xfrm>
+          <a:prstGeom prst="roundRect">
+            <a:avLst>
+              <a:gd name="adj" fmla="val 8000"/>
+            </a:avLst>
+          </a:prstGeom>
+          <a:solidFill>
+            <a:srgbClr val="F1F3F5"/>
+          </a:solidFill>
+          <a:ln>
+            <a:noFill/>
+          </a:ln>
+          <a:effectLst/>
+        </p:spPr>
+        <p:style>
+          <a:lnRef idx="1">
+            <a:schemeClr val="accent1"/>
+          </a:lnRef>
+          <a:fillRef idx="3">
+            <a:schemeClr val="accent1"/>
+          </a:fillRef>
+          <a:effectRef idx="2">
+            <a:schemeClr val="accent1"/>
+          </a:effectRef>
+          <a:fontRef idx="minor">
+            <a:schemeClr val="lt1"/>
+          </a:fontRef>
+        </p:style>
+        <p:txBody>
+          <a:bodyPr rtlCol="0" anchor="ctr"/>
+          <a:lstStyle/>
+          <a:p>
+            <a:pPr algn="ctr"/>
+          </a:p>
+        </p:txBody>
+      </p:sp>
+      <p:sp>
+        <p:nvSpPr>
+          <p:cNvPr id="13" name="TextBox 12"/>
+          <p:cNvSpPr txBox="1"/>
+          <p:nvPr/>
+        </p:nvSpPr>
+        <p:spPr>
+          <a:xfrm>
+            <a:off x="4727448" y="1874519"/>
+            <a:ext cx="3749039" cy="228600"/>
+          </a:xfrm>
+          <a:prstGeom prst="rect">
+            <a:avLst/>
+          </a:prstGeom>
+          <a:noFill/>
+        </p:spPr>
+        <p:txBody>
+          <a:bodyPr wrap="square" lIns="0" rIns="0" tIns="0" bIns="0" anchor="t">
+            <a:spAutoFit/>
+          </a:bodyPr>
+          <a:lstStyle/>
+          <a:p>
+            <a:pPr algn="l"/>
+            <a:r>
+              <a:rPr sz="1150" b="1" i="0">
+                <a:solidFill>
+                  <a:srgbClr val="1B2630"/>
+                </a:solidFill>
+                <a:latin typeface="Open Sans"/>
+              </a:rPr>
+              <a:t>FLOPs</a:t>
+            </a:r>
+          </a:p>
+        </p:txBody>
+      </p:sp>
+      <p:sp>
+        <p:nvSpPr>
+          <p:cNvPr id="14" name="TextBox 13"/>
+          <p:cNvSpPr txBox="1"/>
+          <p:nvPr/>
+        </p:nvSpPr>
+        <p:spPr>
+          <a:xfrm>
+            <a:off x="4727448" y="2112264"/>
+            <a:ext cx="3794760" cy="411480"/>
+          </a:xfrm>
+          <a:prstGeom prst="rect">
+            <a:avLst/>
+          </a:prstGeom>
+          <a:noFill/>
+        </p:spPr>
+        <p:txBody>
+          <a:bodyPr wrap="square" lIns="0" rIns="0" tIns="0" bIns="0" anchor="t">
+            <a:spAutoFit/>
+          </a:bodyPr>
+          <a:lstStyle/>
+          <a:p>
+            <a:pPr algn="l"/>
+            <a:r>
+              <a:rPr sz="950" b="0" i="0">
+                <a:solidFill>
+                  <a:srgbClr val="5A6875"/>
+                </a:solidFill>
+                <a:latin typeface="Open Sans"/>
+              </a:rPr>
+              <a:t>2 × outputs × C × 9: only the convolution's multiply-adds; bias and SiLU count as zero</a:t>
+            </a:r>
+          </a:p>
+        </p:txBody>
+      </p:sp>
+      <p:sp>
+        <p:nvSpPr>
+          <p:cNvPr id="15" name="assume-4"/>
+          <p:cNvSpPr/>
+          <p:nvPr/>
+        </p:nvSpPr>
+        <p:spPr>
+          <a:xfrm>
+            <a:off x="457200" y="2615184"/>
+            <a:ext cx="4023360" cy="713232"/>
+          </a:xfrm>
+          <a:prstGeom prst="roundRect">
+            <a:avLst>
+              <a:gd name="adj" fmla="val 8000"/>
+            </a:avLst>
+          </a:prstGeom>
+          <a:solidFill>
+            <a:srgbClr val="F1F3F5"/>
+          </a:solidFill>
+          <a:ln>
+            <a:noFill/>
+          </a:ln>
+          <a:effectLst/>
+        </p:spPr>
+        <p:style>
+          <a:lnRef idx="1">
+            <a:schemeClr val="accent1"/>
+          </a:lnRef>
+          <a:fillRef idx="3">
+            <a:schemeClr val="accent1"/>
+          </a:fillRef>
+          <a:effectRef idx="2">
+            <a:schemeClr val="accent1"/>
+          </a:effectRef>
+          <a:fontRef idx="minor">
+            <a:schemeClr val="lt1"/>
+          </a:fontRef>
+        </p:style>
+        <p:txBody>
+          <a:bodyPr rtlCol="0" anchor="ctr"/>
+          <a:lstStyle/>
+          <a:p>
+            <a:pPr algn="ctr"/>
+          </a:p>
+        </p:txBody>
+      </p:sp>
+      <p:sp>
+        <p:nvSpPr>
+          <p:cNvPr id="16" name="TextBox 15"/>
+          <p:cNvSpPr txBox="1"/>
+          <p:nvPr/>
+        </p:nvSpPr>
+        <p:spPr>
+          <a:xfrm>
+            <a:off x="566928" y="2679192"/>
+            <a:ext cx="3749039" cy="228600"/>
+          </a:xfrm>
+          <a:prstGeom prst="rect">
+            <a:avLst/>
+          </a:prstGeom>
+          <a:noFill/>
+        </p:spPr>
+        <p:txBody>
+          <a:bodyPr wrap="square" lIns="0" rIns="0" tIns="0" bIns="0" anchor="t">
+            <a:spAutoFit/>
+          </a:bodyPr>
+          <a:lstStyle/>
+          <a:p>
+            <a:pPr algn="l"/>
+            <a:r>
+              <a:rPr sz="1150" b="1" i="0">
+                <a:solidFill>
+                  <a:srgbClr val="1B2630"/>
+                </a:solidFill>
+                <a:latin typeface="Open Sans"/>
+              </a:rPr>
+              <a:t>Microkernel alone</a:t>
+            </a:r>
+          </a:p>
+        </p:txBody>
+      </p:sp>
+      <p:sp>
+        <p:nvSpPr>
+          <p:cNvPr id="17" name="TextBox 16"/>
+          <p:cNvSpPr txBox="1"/>
+          <p:nvPr/>
+        </p:nvSpPr>
+        <p:spPr>
+          <a:xfrm>
+            <a:off x="566928" y="2916936"/>
+            <a:ext cx="3794760" cy="411480"/>
+          </a:xfrm>
+          <a:prstGeom prst="rect">
+            <a:avLst/>
+          </a:prstGeom>
+          <a:noFill/>
+        </p:spPr>
+        <p:txBody>
+          <a:bodyPr wrap="square" lIns="0" rIns="0" tIns="0" bIns="0" anchor="t">
+            <a:spAutoFit/>
+          </a:bodyPr>
+          <a:lstStyle/>
+          <a:p>
+            <a:pPr algn="l"/>
+            <a:r>
+              <a:rPr sz="950" b="0" i="0">
+                <a:solidFill>
+                  <a:srgbClr val="5A6875"/>
+                </a:solidFill>
+                <a:latin typeface="Open Sans"/>
+              </a:rPr>
+              <a:t>one tile of data reused (stays in L1/L2), 2 s warm-up, best of 3 runs, SiLU off</a:t>
+            </a:r>
+          </a:p>
+        </p:txBody>
+      </p:sp>
+      <p:sp>
+        <p:nvSpPr>
+          <p:cNvPr id="18" name="assume-5"/>
+          <p:cNvSpPr/>
+          <p:nvPr/>
+        </p:nvSpPr>
+        <p:spPr>
+          <a:xfrm>
+            <a:off x="4617720" y="2615184"/>
+            <a:ext cx="4023360" cy="713232"/>
+          </a:xfrm>
+          <a:prstGeom prst="roundRect">
+            <a:avLst>
+              <a:gd name="adj" fmla="val 8000"/>
+            </a:avLst>
+          </a:prstGeom>
+          <a:solidFill>
+            <a:srgbClr val="F1F3F5"/>
+          </a:solidFill>
+          <a:ln>
+            <a:noFill/>
+          </a:ln>
+          <a:effectLst/>
+        </p:spPr>
+        <p:style>
+          <a:lnRef idx="1">
+            <a:schemeClr val="accent1"/>
+          </a:lnRef>
+          <a:fillRef idx="3">
+            <a:schemeClr val="accent1"/>
+          </a:fillRef>
+          <a:effectRef idx="2">
+            <a:schemeClr val="accent1"/>
+          </a:effectRef>
+          <a:fontRef idx="minor">
+            <a:schemeClr val="lt1"/>
+          </a:fontRef>
+        </p:style>
+        <p:txBody>
+          <a:bodyPr rtlCol="0" anchor="ctr"/>
+          <a:lstStyle/>
+          <a:p>
+            <a:pPr algn="ctr"/>
+          </a:p>
+        </p:txBody>
+      </p:sp>
+      <p:sp>
+        <p:nvSpPr>
+          <p:cNvPr id="19" name="TextBox 18"/>
+          <p:cNvSpPr txBox="1"/>
+          <p:nvPr/>
+        </p:nvSpPr>
+        <p:spPr>
+          <a:xfrm>
+            <a:off x="4727448" y="2679192"/>
+            <a:ext cx="3749039" cy="228600"/>
+          </a:xfrm>
+          <a:prstGeom prst="rect">
+            <a:avLst/>
+          </a:prstGeom>
+          <a:noFill/>
+        </p:spPr>
+        <p:txBody>
+          <a:bodyPr wrap="square" lIns="0" rIns="0" tIns="0" bIns="0" anchor="t">
+            <a:spAutoFit/>
+          </a:bodyPr>
+          <a:lstStyle/>
+          <a:p>
+            <a:pPr algn="l"/>
+            <a:r>
+              <a:rPr sz="1150" b="1" i="0">
+                <a:solidFill>
+                  <a:srgbClr val="1B2630"/>
+                </a:solidFill>
+                <a:latin typeface="Open Sans"/>
+              </a:rPr>
+              <a:t>Full layers</a:t>
+            </a:r>
+          </a:p>
+        </p:txBody>
+      </p:sp>
+      <p:sp>
+        <p:nvSpPr>
+          <p:cNvPr id="20" name="TextBox 19"/>
+          <p:cNvSpPr txBox="1"/>
+          <p:nvPr/>
+        </p:nvSpPr>
+        <p:spPr>
+          <a:xfrm>
+            <a:off x="4727448" y="2916936"/>
+            <a:ext cx="3794760" cy="411480"/>
+          </a:xfrm>
+          <a:prstGeom prst="rect">
+            <a:avLst/>
+          </a:prstGeom>
+          <a:noFill/>
+        </p:spPr>
+        <p:txBody>
+          <a:bodyPr wrap="square" lIns="0" rIns="0" tIns="0" bIns="0" anchor="t">
+            <a:spAutoFit/>
+          </a:bodyPr>
+          <a:lstStyle/>
+          <a:p>
+            <a:pPr algn="l"/>
+            <a:r>
+              <a:rPr sz="950" b="0" i="0">
+                <a:solidFill>
+                  <a:srgbClr val="5A6875"/>
+                </a:solidFill>
+                <a:latin typeface="Open Sans"/>
+              </a:rPr>
+              <a:t>all 32 real YOLOv8n layers, batch 1, 640 × 640 image, FP32, SiLU on</a:t>
+            </a:r>
+          </a:p>
+        </p:txBody>
+      </p:sp>
+      <p:sp>
+        <p:nvSpPr>
+          <p:cNvPr id="21" name="assume-6"/>
+          <p:cNvSpPr/>
+          <p:nvPr/>
+        </p:nvSpPr>
+        <p:spPr>
+          <a:xfrm>
+            <a:off x="457200" y="3419856"/>
+            <a:ext cx="4023360" cy="713232"/>
+          </a:xfrm>
+          <a:prstGeom prst="roundRect">
+            <a:avLst>
+              <a:gd name="adj" fmla="val 8000"/>
+            </a:avLst>
+          </a:prstGeom>
+          <a:solidFill>
+            <a:srgbClr val="F1F3F5"/>
+          </a:solidFill>
+          <a:ln>
+            <a:noFill/>
+          </a:ln>
+          <a:effectLst/>
+        </p:spPr>
+        <p:style>
+          <a:lnRef idx="1">
+            <a:schemeClr val="accent1"/>
+          </a:lnRef>
+          <a:fillRef idx="3">
+            <a:schemeClr val="accent1"/>
+          </a:fillRef>
+          <a:effectRef idx="2">
+            <a:schemeClr val="accent1"/>
+          </a:effectRef>
+          <a:fontRef idx="minor">
+            <a:schemeClr val="lt1"/>
+          </a:fontRef>
+        </p:style>
+        <p:txBody>
+          <a:bodyPr rtlCol="0" anchor="ctr"/>
+          <a:lstStyle/>
+          <a:p>
+            <a:pPr algn="ctr"/>
+          </a:p>
+        </p:txBody>
+      </p:sp>
+      <p:sp>
+        <p:nvSpPr>
+          <p:cNvPr id="22" name="TextBox 21"/>
+          <p:cNvSpPr txBox="1"/>
+          <p:nvPr/>
+        </p:nvSpPr>
+        <p:spPr>
+          <a:xfrm>
+            <a:off x="566928" y="3483864"/>
+            <a:ext cx="3749039" cy="228600"/>
+          </a:xfrm>
+          <a:prstGeom prst="rect">
+            <a:avLst/>
+          </a:prstGeom>
+          <a:noFill/>
+        </p:spPr>
+        <p:txBody>
+          <a:bodyPr wrap="square" lIns="0" rIns="0" tIns="0" bIns="0" anchor="t">
+            <a:spAutoFit/>
+          </a:bodyPr>
+          <a:lstStyle/>
+          <a:p>
+            <a:pPr algn="l"/>
+            <a:r>
+              <a:rPr sz="1150" b="1" i="0">
+                <a:solidFill>
+                  <a:srgbClr val="1B2630"/>
+                </a:solidFill>
+                <a:latin typeface="Open Sans"/>
+              </a:rPr>
+              <a:t>Correct</a:t>
+            </a:r>
+          </a:p>
+        </p:txBody>
+      </p:sp>
+      <p:sp>
+        <p:nvSpPr>
+          <p:cNvPr id="23" name="TextBox 22"/>
+          <p:cNvSpPr txBox="1"/>
+          <p:nvPr/>
+        </p:nvSpPr>
+        <p:spPr>
+          <a:xfrm>
+            <a:off x="566928" y="3721608"/>
+            <a:ext cx="3794760" cy="411480"/>
+          </a:xfrm>
+          <a:prstGeom prst="rect">
+            <a:avLst/>
+          </a:prstGeom>
+          <a:noFill/>
+        </p:spPr>
+        <p:txBody>
+          <a:bodyPr wrap="square" lIns="0" rIns="0" tIns="0" bIns="0" anchor="t">
+            <a:spAutoFit/>
+          </a:bodyPr>
+          <a:lstStyle/>
+          <a:p>
+            <a:pPr algn="l"/>
+            <a:r>
+              <a:rPr sz="950" b="0" i="0">
+                <a:solidFill>
+                  <a:srgbClr val="5A6875"/>
+                </a:solidFill>
+                <a:latin typeface="Open Sans"/>
+              </a:rPr>
+              <a:t>every result checked: max relative error ≤ 1e-4 vs a scalar reference / OpenCV's real outputs</a:t>
+            </a:r>
+          </a:p>
+        </p:txBody>
+      </p:sp>
+      <p:sp>
+        <p:nvSpPr>
+          <p:cNvPr id="24" name="assume-7"/>
+          <p:cNvSpPr/>
+          <p:nvPr/>
+        </p:nvSpPr>
+        <p:spPr>
+          <a:xfrm>
+            <a:off x="4617720" y="3419856"/>
+            <a:ext cx="4023360" cy="713232"/>
+          </a:xfrm>
+          <a:prstGeom prst="roundRect">
+            <a:avLst>
+              <a:gd name="adj" fmla="val 8000"/>
+            </a:avLst>
+          </a:prstGeom>
+          <a:solidFill>
+            <a:srgbClr val="F1F3F5"/>
+          </a:solidFill>
+          <a:ln>
+            <a:noFill/>
+          </a:ln>
+          <a:effectLst/>
+        </p:spPr>
+        <p:style>
+          <a:lnRef idx="1">
+            <a:schemeClr val="accent1"/>
+          </a:lnRef>
+          <a:fillRef idx="3">
+            <a:schemeClr val="accent1"/>
+          </a:fillRef>
+          <a:effectRef idx="2">
+            <a:schemeClr val="accent1"/>
+          </a:effectRef>
+          <a:fontRef idx="minor">
+            <a:schemeClr val="lt1"/>
+          </a:fontRef>
+        </p:style>
+        <p:txBody>
+          <a:bodyPr rtlCol="0" anchor="ctr"/>
+          <a:lstStyle/>
+          <a:p>
+            <a:pPr algn="ctr"/>
+          </a:p>
+        </p:txBody>
+      </p:sp>
+      <p:sp>
+        <p:nvSpPr>
+          <p:cNvPr id="25" name="TextBox 24"/>
+          <p:cNvSpPr txBox="1"/>
+          <p:nvPr/>
+        </p:nvSpPr>
+        <p:spPr>
+          <a:xfrm>
+            <a:off x="4727448" y="3483864"/>
+            <a:ext cx="3749039" cy="228600"/>
+          </a:xfrm>
+          <a:prstGeom prst="rect">
+            <a:avLst/>
+          </a:prstGeom>
+          <a:noFill/>
+        </p:spPr>
+        <p:txBody>
+          <a:bodyPr wrap="square" lIns="0" rIns="0" tIns="0" bIns="0" anchor="t">
+            <a:spAutoFit/>
+          </a:bodyPr>
+          <a:lstStyle/>
+          <a:p>
+            <a:pPr algn="l"/>
+            <a:r>
+              <a:rPr sz="1150" b="1" i="0">
+                <a:solidFill>
+                  <a:srgbClr val="1B2630"/>
+                </a:solidFill>
+                <a:latin typeface="Open Sans"/>
+              </a:rPr>
+              <a:t>Baseline</a:t>
+            </a:r>
+          </a:p>
+        </p:txBody>
+      </p:sp>
+      <p:sp>
+        <p:nvSpPr>
+          <p:cNvPr id="26" name="TextBox 25"/>
+          <p:cNvSpPr txBox="1"/>
+          <p:nvPr/>
+        </p:nvSpPr>
+        <p:spPr>
+          <a:xfrm>
+            <a:off x="4727448" y="3721608"/>
+            <a:ext cx="3794760" cy="411480"/>
+          </a:xfrm>
+          <a:prstGeom prst="rect">
+            <a:avLst/>
+          </a:prstGeom>
+          <a:noFill/>
+        </p:spPr>
+        <p:txBody>
+          <a:bodyPr wrap="square" lIns="0" rIns="0" tIns="0" bIns="0" anchor="t">
+            <a:spAutoFit/>
+          </a:bodyPr>
+          <a:lstStyle/>
+          <a:p>
+            <a:pPr algn="l"/>
+            <a:r>
+              <a:rPr sz="950" b="0" i="0">
+                <a:solidFill>
+                  <a:srgbClr val="5A6875"/>
+                </a:solidFill>
+                <a:latin typeface="Open Sans"/>
+              </a:rPr>
+              <a:t>OpenCV DNN on the same ONNX model, 1 thread, its own per-layer timer</a:t>
+            </a:r>
+          </a:p>
+        </p:txBody>
+      </p:sp>
+    </p:spTree>
+  </p:cSld>
+  <p:clrMapOvr>
+    <a:masterClrMapping/>
+  </p:clrMapOvr>
+</p:sld>
+</file>
+
+<file path=ppt/slides/slide5.xml><?xml version="1.0" encoding="utf-8"?>
 <p:sld xmlns:a="http://schemas.openxmlformats.org/drawingml/2006/main" xmlns:p="http://schemas.openxmlformats.org/presentationml/2006/main" xmlns:r="http://schemas.openxmlformats.org/officeDocument/2006/relationships">
   <p:cSld>
     <p:spTree>
@@ -8867,7 +10803,7 @@
 </p:sld>
 </file>
 
-<file path=ppt/slides/slide5.xml><?xml version="1.0" encoding="utf-8"?>
+<file path=ppt/slides/slide6.xml><?xml version="1.0" encoding="utf-8"?>
 <p:sld xmlns:a="http://schemas.openxmlformats.org/drawingml/2006/main" xmlns:p="http://schemas.openxmlformats.org/presentationml/2006/main" xmlns:r="http://schemas.openxmlformats.org/officeDocument/2006/relationships">
   <p:cSld>
     <p:spTree>
@@ -9011,8 +10947,8 @@
         </p:nvSpPr>
         <p:spPr>
           <a:xfrm>
-            <a:off x="6556248" y="1371600"/>
-            <a:ext cx="2011680" cy="548640"/>
+            <a:off x="6556248" y="1353312"/>
+            <a:ext cx="2011680" cy="594360"/>
           </a:xfrm>
           <a:prstGeom prst="rect">
             <a:avLst/>
@@ -9027,7 +10963,7 @@
           <a:p>
             <a:pPr algn="l"/>
             <a:r>
-              <a:rPr sz="1100" b="0" i="0">
+              <a:rPr sz="1000" b="0" i="0">
                 <a:solidFill>
                   <a:srgbClr val="5A6875"/>
                 </a:solidFill>
@@ -9127,8 +11063,8 @@
         </p:nvSpPr>
         <p:spPr>
           <a:xfrm>
-            <a:off x="6556248" y="2450592"/>
-            <a:ext cx="2011680" cy="548640"/>
+            <a:off x="6556248" y="2432304"/>
+            <a:ext cx="2011680" cy="594360"/>
           </a:xfrm>
           <a:prstGeom prst="rect">
             <a:avLst/>
@@ -9143,13 +11079,13 @@
           <a:p>
             <a:pPr algn="l"/>
             <a:r>
-              <a:rPr sz="1100" b="0" i="0">
+              <a:rPr sz="1000" b="0" i="0">
                 <a:solidFill>
                   <a:srgbClr val="5A6875"/>
                 </a:solidFill>
                 <a:latin typeface="Open Sans"/>
               </a:rPr>
-              <a:t>2×6 by hand: 95% alone, 84% in layers</a:t>
+              <a:t>hand-written CPU instructions, we pick every register: 2×6 at 95% alone, 84% in layers</a:t>
             </a:r>
           </a:p>
         </p:txBody>
@@ -9243,8 +11179,8 @@
         </p:nvSpPr>
         <p:spPr>
           <a:xfrm>
-            <a:off x="6556248" y="3529584"/>
-            <a:ext cx="2011680" cy="548640"/>
+            <a:off x="6556248" y="3511296"/>
+            <a:ext cx="2011680" cy="594360"/>
           </a:xfrm>
           <a:prstGeom prst="rect">
             <a:avLst/>
@@ -9259,321 +11195,13 @@
           <a:p>
             <a:pPr algn="l"/>
             <a:r>
-              <a:rPr sz="1100" b="0" i="0">
+              <a:rPr sz="1000" b="0" i="0">
                 <a:solidFill>
                   <a:srgbClr val="5A6875"/>
                 </a:solidFill>
                 <a:latin typeface="Open Sans"/>
               </a:rPr>
               <a:t>lost: uop cache, spills</a:t>
-            </a:r>
-          </a:p>
-        </p:txBody>
-      </p:sp>
-    </p:spTree>
-  </p:cSld>
-  <p:clrMapOvr>
-    <a:masterClrMapping/>
-  </p:clrMapOvr>
-</p:sld>
-</file>
-
-<file path=ppt/slides/slide6.xml><?xml version="1.0" encoding="utf-8"?>
-<p:sld xmlns:a="http://schemas.openxmlformats.org/drawingml/2006/main" xmlns:p="http://schemas.openxmlformats.org/presentationml/2006/main" xmlns:r="http://schemas.openxmlformats.org/officeDocument/2006/relationships">
-  <p:cSld>
-    <p:spTree>
-      <p:nvGrpSpPr>
-        <p:cNvPr id="1" name=""/>
-        <p:cNvGrpSpPr/>
-        <p:nvPr/>
-      </p:nvGrpSpPr>
-      <p:grpSpPr/>
-      <p:sp>
-        <p:nvSpPr>
-          <p:cNvPr id="2" name="Title 1"/>
-          <p:cNvSpPr>
-            <a:spLocks noGrp="1"/>
-          </p:cNvSpPr>
-          <p:nvPr>
-            <p:ph type="title"/>
-          </p:nvPr>
-        </p:nvSpPr>
-        <p:spPr/>
-        <p:txBody>
-          <a:bodyPr/>
-          <a:lstStyle/>
-          <a:p>
-            <a:r>
-              <a:t>Benchmarked like Assignment 2: FLOPs/cycle vs k</a:t>
-            </a:r>
-          </a:p>
-        </p:txBody>
-      </p:sp>
-      <p:pic>
-        <p:nvPicPr>
-          <p:cNvPr id="3" name="Picture 2" descr="ukr_sweep_nosilu_34.png"/>
-          <p:cNvPicPr>
-            <a:picLocks noChangeAspect="1"/>
-          </p:cNvPicPr>
-          <p:nvPr/>
-        </p:nvPicPr>
-        <p:blipFill>
-          <a:blip r:embed="rId3"/>
-          <a:stretch>
-            <a:fillRect/>
-          </a:stretch>
-        </p:blipFill>
-        <p:spPr>
-          <a:xfrm>
-            <a:off x="457200" y="960120"/>
-            <a:ext cx="5486400" cy="2926080"/>
-          </a:xfrm>
-          <a:prstGeom prst="rect">
-            <a:avLst/>
-          </a:prstGeom>
-        </p:spPr>
-      </p:pic>
-      <p:sp>
-        <p:nvSpPr>
-          <p:cNvPr id="4" name="TextBox 3"/>
-          <p:cNvSpPr txBox="1"/>
-          <p:nvPr/>
-        </p:nvSpPr>
-        <p:spPr>
-          <a:xfrm>
-            <a:off x="457200" y="3931920"/>
-            <a:ext cx="5486400" cy="274320"/>
-          </a:xfrm>
-          <a:prstGeom prst="rect">
-            <a:avLst/>
-          </a:prstGeom>
-          <a:noFill/>
-        </p:spPr>
-        <p:txBody>
-          <a:bodyPr wrap="square" lIns="0" rIns="0" tIns="0" bIns="0" anchor="t">
-            <a:spAutoFit/>
-          </a:bodyPr>
-          <a:lstStyle/>
-          <a:p>
-            <a:pPr algn="l"/>
-            <a:r>
-              <a:rPr sz="1000" b="0" i="0">
-                <a:solidFill>
-                  <a:srgbClr val="5A6875"/>
-                </a:solidFill>
-                <a:latin typeface="Open Sans"/>
-              </a:rPr>
-              <a:t>SiLU off, cycles = time × 3.4 GHz, as in A2. 3 runs, every point checked (576 pass).</a:t>
-            </a:r>
-          </a:p>
-        </p:txBody>
-      </p:sp>
-      <p:sp>
-        <p:nvSpPr>
-          <p:cNvPr id="5" name="TextBox 4"/>
-          <p:cNvSpPr txBox="1"/>
-          <p:nvPr/>
-        </p:nvSpPr>
-        <p:spPr>
-          <a:xfrm>
-            <a:off x="6172200" y="960120"/>
-            <a:ext cx="2514600" cy="548640"/>
-          </a:xfrm>
-          <a:prstGeom prst="rect">
-            <a:avLst/>
-          </a:prstGeom>
-          <a:noFill/>
-        </p:spPr>
-        <p:txBody>
-          <a:bodyPr wrap="square" lIns="0" rIns="0" tIns="0" bIns="0" anchor="t">
-            <a:spAutoFit/>
-          </a:bodyPr>
-          <a:lstStyle/>
-          <a:p>
-            <a:pPr algn="l"/>
-            <a:r>
-              <a:rPr sz="3000" b="1" i="0">
-                <a:solidFill>
-                  <a:srgbClr val="BB0027"/>
-                </a:solidFill>
-                <a:latin typeface="Open Sans"/>
-              </a:rPr>
-              <a:t>94–97%</a:t>
-            </a:r>
-          </a:p>
-        </p:txBody>
-      </p:sp>
-      <p:sp>
-        <p:nvSpPr>
-          <p:cNvPr id="6" name="TextBox 5"/>
-          <p:cNvSpPr txBox="1"/>
-          <p:nvPr/>
-        </p:nvSpPr>
-        <p:spPr>
-          <a:xfrm>
-            <a:off x="6172200" y="1527048"/>
-            <a:ext cx="2514600" cy="548640"/>
-          </a:xfrm>
-          <a:prstGeom prst="rect">
-            <a:avLst/>
-          </a:prstGeom>
-          <a:noFill/>
-        </p:spPr>
-        <p:txBody>
-          <a:bodyPr wrap="square" lIns="0" rIns="0" tIns="0" bIns="0" anchor="t">
-            <a:spAutoFit/>
-          </a:bodyPr>
-          <a:lstStyle/>
-          <a:p>
-            <a:pPr algn="l"/>
-            <a:r>
-              <a:rPr sz="1200" b="0" i="0">
-                <a:solidFill>
-                  <a:srgbClr val="5A6875"/>
-                </a:solidFill>
-                <a:latin typeface="Open Sans"/>
-              </a:rPr>
-              <a:t>2×6 asm: 30–31 FLOPs/cycle, ~102 GFLOP/s on one core</a:t>
-            </a:r>
-          </a:p>
-        </p:txBody>
-      </p:sp>
-      <p:sp>
-        <p:nvSpPr>
-          <p:cNvPr id="7" name="TextBox 6"/>
-          <p:cNvSpPr txBox="1"/>
-          <p:nvPr/>
-        </p:nvSpPr>
-        <p:spPr>
-          <a:xfrm>
-            <a:off x="6172200" y="2011680"/>
-            <a:ext cx="2514600" cy="548640"/>
-          </a:xfrm>
-          <a:prstGeom prst="rect">
-            <a:avLst/>
-          </a:prstGeom>
-          <a:noFill/>
-        </p:spPr>
-        <p:txBody>
-          <a:bodyPr wrap="square" lIns="0" rIns="0" tIns="0" bIns="0" anchor="t">
-            <a:spAutoFit/>
-          </a:bodyPr>
-          <a:lstStyle/>
-          <a:p>
-            <a:pPr algn="l"/>
-            <a:r>
-              <a:rPr sz="3000" b="1" i="0">
-                <a:solidFill>
-                  <a:srgbClr val="6B7782"/>
-                </a:solidFill>
-                <a:latin typeface="Open Sans"/>
-              </a:rPr>
-              <a:t>83–89%</a:t>
-            </a:r>
-          </a:p>
-        </p:txBody>
-      </p:sp>
-      <p:sp>
-        <p:nvSpPr>
-          <p:cNvPr id="8" name="TextBox 7"/>
-          <p:cNvSpPr txBox="1"/>
-          <p:nvPr/>
-        </p:nvSpPr>
-        <p:spPr>
-          <a:xfrm>
-            <a:off x="6172200" y="2578608"/>
-            <a:ext cx="2514600" cy="548640"/>
-          </a:xfrm>
-          <a:prstGeom prst="rect">
-            <a:avLst/>
-          </a:prstGeom>
-          <a:noFill/>
-        </p:spPr>
-        <p:txBody>
-          <a:bodyPr wrap="square" lIns="0" rIns="0" tIns="0" bIns="0" anchor="t">
-            <a:spAutoFit/>
-          </a:bodyPr>
-          <a:lstStyle/>
-          <a:p>
-            <a:pPr algn="l"/>
-            <a:r>
-              <a:rPr sz="1200" b="0" i="0">
-                <a:solidFill>
-                  <a:srgbClr val="5A6875"/>
-                </a:solidFill>
-                <a:latin typeface="Open Sans"/>
-              </a:rPr>
-              <a:t>2×5 intrinsics (v2's tile)</a:t>
-            </a:r>
-          </a:p>
-        </p:txBody>
-      </p:sp>
-      <p:sp>
-        <p:nvSpPr>
-          <p:cNvPr id="9" name="TextBox 8"/>
-          <p:cNvSpPr txBox="1"/>
-          <p:nvPr/>
-        </p:nvSpPr>
-        <p:spPr>
-          <a:xfrm>
-            <a:off x="6172200" y="3063240"/>
-            <a:ext cx="2514600" cy="548640"/>
-          </a:xfrm>
-          <a:prstGeom prst="rect">
-            <a:avLst/>
-          </a:prstGeom>
-          <a:noFill/>
-        </p:spPr>
-        <p:txBody>
-          <a:bodyPr wrap="square" lIns="0" rIns="0" tIns="0" bIns="0" anchor="t">
-            <a:spAutoFit/>
-          </a:bodyPr>
-          <a:lstStyle/>
-          <a:p>
-            <a:pPr algn="l"/>
-            <a:r>
-              <a:rPr sz="3000" b="1" i="0">
-                <a:solidFill>
-                  <a:srgbClr val="B7731A"/>
-                </a:solidFill>
-                <a:latin typeface="Open Sans"/>
-              </a:rPr>
-              <a:t>k ≈ 500</a:t>
-            </a:r>
-          </a:p>
-        </p:txBody>
-      </p:sp>
-      <p:sp>
-        <p:nvSpPr>
-          <p:cNvPr id="10" name="TextBox 9"/>
-          <p:cNvSpPr txBox="1"/>
-          <p:nvPr/>
-        </p:nvSpPr>
-        <p:spPr>
-          <a:xfrm>
-            <a:off x="6172200" y="3630168"/>
-            <a:ext cx="2514600" cy="548640"/>
-          </a:xfrm>
-          <a:prstGeom prst="rect">
-            <a:avLst/>
-          </a:prstGeom>
-          <a:noFill/>
-        </p:spPr>
-        <p:txBody>
-          <a:bodyPr wrap="square" lIns="0" rIns="0" tIns="0" bIns="0" anchor="t">
-            <a:spAutoFit/>
-          </a:bodyPr>
-          <a:lstStyle/>
-          <a:p>
-            <a:pPr algn="l"/>
-            <a:r>
-              <a:rPr sz="1200" b="0" i="0">
-                <a:solidFill>
-                  <a:srgbClr val="5A6875"/>
-                </a:solidFill>
-                <a:latin typeface="Open Sans"/>
-              </a:rPr>
-              <a:t>L1 dip: 2×5 weights pass 32 KB, like k ≈ 315 in A2</a:t>
             </a:r>
           </a:p>
         </p:txBody>
@@ -9612,21 +11240,45 @@
           <a:lstStyle/>
           <a:p>
             <a:r>
-              <a:t>Alone vs in a layer: keep the kernel a function</a:t>
+              <a:t>Benchmarked like Assignment 2: FLOPs/cycle vs k</a:t>
             </a:r>
           </a:p>
         </p:txBody>
       </p:sp>
-      <p:sp>
-        <p:nvSpPr>
-          <p:cNvPr id="3" name="TextBox 2"/>
+      <p:pic>
+        <p:nvPicPr>
+          <p:cNvPr id="3" name="Picture 2" descr="ukr_sweep_nosilu_34.png"/>
+          <p:cNvPicPr>
+            <a:picLocks noChangeAspect="1"/>
+          </p:cNvPicPr>
+          <p:nvPr/>
+        </p:nvPicPr>
+        <p:blipFill>
+          <a:blip r:embed="rId3"/>
+          <a:stretch>
+            <a:fillRect/>
+          </a:stretch>
+        </p:blipFill>
+        <p:spPr>
+          <a:xfrm>
+            <a:off x="457200" y="960120"/>
+            <a:ext cx="5486400" cy="2926080"/>
+          </a:xfrm>
+          <a:prstGeom prst="rect">
+            <a:avLst/>
+          </a:prstGeom>
+        </p:spPr>
+      </p:pic>
+      <p:sp>
+        <p:nvSpPr>
+          <p:cNvPr id="4" name="TextBox 3"/>
           <p:cNvSpPr txBox="1"/>
           <p:nvPr/>
         </p:nvSpPr>
         <p:spPr>
           <a:xfrm>
-            <a:off x="457200" y="1005840"/>
-            <a:ext cx="4206240" cy="502920"/>
+            <a:off x="457200" y="3931920"/>
+            <a:ext cx="5486400" cy="274320"/>
           </a:xfrm>
           <a:prstGeom prst="rect">
             <a:avLst/>
@@ -9641,60 +11293,14 @@
           <a:p>
             <a:pPr algn="l"/>
             <a:r>
-              <a:rPr sz="1300" b="1" i="0">
-                <a:solidFill>
-                  <a:srgbClr val="1B2630"/>
+              <a:rPr sz="1000" b="0" i="0">
+                <a:solidFill>
+                  <a:srgbClr val="5A6875"/>
                 </a:solidFill>
                 <a:latin typeface="Open Sans"/>
               </a:rPr>
-              <a:t>v2a (2×5 asm): 92.2% alone, 72.5% when GCC inlines it into the layer loop</a:t>
+              <a:t>SiLU off, cycles = time × 3.4 GHz, as in A2. 3 runs, every point checked (576 pass).</a:t>
             </a:r>
-          </a:p>
-        </p:txBody>
-      </p:sp>
-      <p:sp>
-        <p:nvSpPr>
-          <p:cNvPr id="4" name="spill-code"/>
-          <p:cNvSpPr/>
-          <p:nvPr/>
-        </p:nvSpPr>
-        <p:spPr>
-          <a:xfrm>
-            <a:off x="457200" y="1600200"/>
-            <a:ext cx="4206240" cy="868680"/>
-          </a:xfrm>
-          <a:prstGeom prst="roundRect">
-            <a:avLst>
-              <a:gd name="adj" fmla="val 8000"/>
-            </a:avLst>
-          </a:prstGeom>
-          <a:solidFill>
-            <a:srgbClr val="F1F3F5"/>
-          </a:solidFill>
-          <a:ln>
-            <a:noFill/>
-          </a:ln>
-          <a:effectLst/>
-        </p:spPr>
-        <p:style>
-          <a:lnRef idx="1">
-            <a:schemeClr val="accent1"/>
-          </a:lnRef>
-          <a:fillRef idx="3">
-            <a:schemeClr val="accent1"/>
-          </a:fillRef>
-          <a:effectRef idx="2">
-            <a:schemeClr val="accent1"/>
-          </a:effectRef>
-          <a:fontRef idx="minor">
-            <a:schemeClr val="lt1"/>
-          </a:fontRef>
-        </p:style>
-        <p:txBody>
-          <a:bodyPr rtlCol="0" anchor="ctr"/>
-          <a:lstStyle/>
-          <a:p>
-            <a:pPr algn="ctr"/>
           </a:p>
         </p:txBody>
       </p:sp>
@@ -9706,8 +11312,8 @@
         </p:nvSpPr>
         <p:spPr>
           <a:xfrm>
-            <a:off x="566928" y="1664208"/>
-            <a:ext cx="4023360" cy="749808"/>
+            <a:off x="6172200" y="960120"/>
+            <a:ext cx="2514600" cy="548640"/>
           </a:xfrm>
           <a:prstGeom prst="rect">
             <a:avLst/>
@@ -9715,52 +11321,20 @@
           <a:noFill/>
         </p:spPr>
         <p:txBody>
-          <a:bodyPr wrap="square" lIns="0" rIns="0" tIns="0" bIns="0" anchor="ctr">
+          <a:bodyPr wrap="square" lIns="0" rIns="0" tIns="0" bIns="0" anchor="t">
             <a:spAutoFit/>
           </a:bodyPr>
           <a:lstStyle/>
           <a:p>
             <a:pPr algn="l"/>
             <a:r>
-              <a:rPr sz="1050" b="0" i="0">
-                <a:solidFill>
-                  <a:srgbClr val="1B2630"/>
-                </a:solidFill>
-                <a:latin typeface="Courier New"/>
+              <a:rPr sz="3000" b="1" i="0">
+                <a:solidFill>
+                  <a:srgbClr val="BB0027"/>
+                </a:solidFill>
+                <a:latin typeface="Open Sans"/>
               </a:rPr>
-              <a:t>vmovaps 168(%rsp), %ymm1   # reload acc</a:t>
-            </a:r>
-          </a:p>
-          <a:p>
-            <a:pPr algn="l">
-              <a:spcBef>
-                <a:spcPts val="600"/>
-              </a:spcBef>
-            </a:pPr>
-            <a:r>
-              <a:rPr sz="1050" b="0" i="0">
-                <a:solidFill>
-                  <a:srgbClr val="1B2630"/>
-                </a:solidFill>
-                <a:latin typeface="Courier New"/>
-              </a:rPr>
-              <a:t>  ...asm block: 80 FMAs...</a:t>
-            </a:r>
-          </a:p>
-          <a:p>
-            <a:pPr algn="l">
-              <a:spcBef>
-                <a:spcPts val="600"/>
-              </a:spcBef>
-            </a:pPr>
-            <a:r>
-              <a:rPr sz="1050" b="0" i="0">
-                <a:solidFill>
-                  <a:srgbClr val="1B2630"/>
-                </a:solidFill>
-                <a:latin typeface="Courier New"/>
-              </a:rPr>
-              <a:t>vmovaps %ymm1, 168(%rsp)   # store acc</a:t>
+              <a:t>94–97%</a:t>
             </a:r>
           </a:p>
         </p:txBody>
@@ -9773,8 +11347,8 @@
         </p:nvSpPr>
         <p:spPr>
           <a:xfrm>
-            <a:off x="457200" y="2578608"/>
-            <a:ext cx="4206240" cy="777240"/>
+            <a:off x="6172200" y="1527048"/>
+            <a:ext cx="2514600" cy="548640"/>
           </a:xfrm>
           <a:prstGeom prst="rect">
             <a:avLst/>
@@ -9789,13 +11363,13 @@
           <a:p>
             <a:pPr algn="l"/>
             <a:r>
-              <a:rPr sz="1150" b="0" i="0">
+              <a:rPr sz="1200" b="0" i="0">
                 <a:solidFill>
                   <a:srgbClr val="5A6875"/>
                 </a:solidFill>
                 <a:latin typeface="Open Sans"/>
               </a:rPr>
-              <a:t>Inlined, GCC keeps 3 of 10 accumulators on the stack around every tap. Called as a function, as in the benchmark: 83.1% (v2b); with the 2×6 tile, 83.7% (v10).</a:t>
+              <a:t>2×6 asm: 30–31 FLOPs/cycle, ~102 GFLOP/s on one core</a:t>
             </a:r>
           </a:p>
         </p:txBody>
@@ -9808,8 +11382,8 @@
         </p:nvSpPr>
         <p:spPr>
           <a:xfrm>
-            <a:off x="457200" y="3474720"/>
-            <a:ext cx="4206240" cy="685800"/>
+            <a:off x="6172200" y="2011680"/>
+            <a:ext cx="2514600" cy="548640"/>
           </a:xfrm>
           <a:prstGeom prst="rect">
             <a:avLst/>
@@ -9824,35 +11398,122 @@
           <a:p>
             <a:pPr algn="l"/>
             <a:r>
-              <a:rPr sz="1150" b="0" i="1">
-                <a:solidFill>
-                  <a:srgbClr val="BB0027"/>
+              <a:rPr sz="3000" b="1" i="0">
+                <a:solidFill>
+                  <a:srgbClr val="6B7782"/>
                 </a:solidFill>
                 <a:latin typeface="Open Sans"/>
               </a:rPr>
-              <a:t>Next: cache blocking for C ≥ 128 (the 4×3 drop-off), NUMA-aware threads (v10 on 20 cores: 4.74 ms).</a:t>
+              <a:t>83–89%</a:t>
             </a:r>
           </a:p>
         </p:txBody>
       </p:sp>
-      <p:graphicFrame>
-        <p:nvGraphicFramePr>
-          <p:cNvPr id="8" name="Chart 7"/>
-          <p:cNvGraphicFramePr>
-            <a:graphicFrameLocks noGrp="1"/>
-          </p:cNvGraphicFramePr>
+      <p:sp>
+        <p:nvSpPr>
+          <p:cNvPr id="8" name="TextBox 7"/>
+          <p:cNvSpPr txBox="1"/>
           <p:nvPr/>
-        </p:nvGraphicFramePr>
-        <p:xfrm>
-          <a:off x="4846320" y="960120"/>
-          <a:ext cx="3840480" cy="3246120"/>
-        </p:xfrm>
-        <a:graphic>
-          <a:graphicData uri="http://schemas.openxmlformats.org/drawingml/2006/chart">
-            <c:chart xmlns:c="http://schemas.openxmlformats.org/drawingml/2006/chart" r:id="rId3"/>
-          </a:graphicData>
-        </a:graphic>
-      </p:graphicFrame>
+        </p:nvSpPr>
+        <p:spPr>
+          <a:xfrm>
+            <a:off x="6172200" y="2578608"/>
+            <a:ext cx="2514600" cy="548640"/>
+          </a:xfrm>
+          <a:prstGeom prst="rect">
+            <a:avLst/>
+          </a:prstGeom>
+          <a:noFill/>
+        </p:spPr>
+        <p:txBody>
+          <a:bodyPr wrap="square" lIns="0" rIns="0" tIns="0" bIns="0" anchor="t">
+            <a:spAutoFit/>
+          </a:bodyPr>
+          <a:lstStyle/>
+          <a:p>
+            <a:pPr algn="l"/>
+            <a:r>
+              <a:rPr sz="1200" b="0" i="0">
+                <a:solidFill>
+                  <a:srgbClr val="5A6875"/>
+                </a:solidFill>
+                <a:latin typeface="Open Sans"/>
+              </a:rPr>
+              <a:t>2×5 intrinsics (v2's tile)</a:t>
+            </a:r>
+          </a:p>
+        </p:txBody>
+      </p:sp>
+      <p:sp>
+        <p:nvSpPr>
+          <p:cNvPr id="9" name="TextBox 8"/>
+          <p:cNvSpPr txBox="1"/>
+          <p:nvPr/>
+        </p:nvSpPr>
+        <p:spPr>
+          <a:xfrm>
+            <a:off x="6172200" y="3063240"/>
+            <a:ext cx="2514600" cy="548640"/>
+          </a:xfrm>
+          <a:prstGeom prst="rect">
+            <a:avLst/>
+          </a:prstGeom>
+          <a:noFill/>
+        </p:spPr>
+        <p:txBody>
+          <a:bodyPr wrap="square" lIns="0" rIns="0" tIns="0" bIns="0" anchor="t">
+            <a:spAutoFit/>
+          </a:bodyPr>
+          <a:lstStyle/>
+          <a:p>
+            <a:pPr algn="l"/>
+            <a:r>
+              <a:rPr sz="3000" b="1" i="0">
+                <a:solidFill>
+                  <a:srgbClr val="B7731A"/>
+                </a:solidFill>
+                <a:latin typeface="Open Sans"/>
+              </a:rPr>
+              <a:t>k ≈ 500</a:t>
+            </a:r>
+          </a:p>
+        </p:txBody>
+      </p:sp>
+      <p:sp>
+        <p:nvSpPr>
+          <p:cNvPr id="10" name="TextBox 9"/>
+          <p:cNvSpPr txBox="1"/>
+          <p:nvPr/>
+        </p:nvSpPr>
+        <p:spPr>
+          <a:xfrm>
+            <a:off x="6172200" y="3630168"/>
+            <a:ext cx="2514600" cy="548640"/>
+          </a:xfrm>
+          <a:prstGeom prst="rect">
+            <a:avLst/>
+          </a:prstGeom>
+          <a:noFill/>
+        </p:spPr>
+        <p:txBody>
+          <a:bodyPr wrap="square" lIns="0" rIns="0" tIns="0" bIns="0" anchor="t">
+            <a:spAutoFit/>
+          </a:bodyPr>
+          <a:lstStyle/>
+          <a:p>
+            <a:pPr algn="l"/>
+            <a:r>
+              <a:rPr sz="1200" b="0" i="0">
+                <a:solidFill>
+                  <a:srgbClr val="5A6875"/>
+                </a:solidFill>
+                <a:latin typeface="Open Sans"/>
+              </a:rPr>
+              <a:t>L1 dip: 2×5 weights pass 32 KB, like k ≈ 315 in A2</a:t>
+            </a:r>
+          </a:p>
+        </p:txBody>
+      </p:sp>
     </p:spTree>
   </p:cSld>
   <p:clrMapOvr>
@@ -9887,59 +11548,373 @@
           <a:lstStyle/>
           <a:p>
             <a:r>
-              <a:t>Backup: the same sweeps with SiLU on</a:t>
+              <a:t>Fastest alone is not fastest in the layer</a:t>
             </a:r>
           </a:p>
         </p:txBody>
       </p:sp>
-      <p:pic>
-        <p:nvPicPr>
-          <p:cNvPr id="3" name="Picture 2" descr="ukr_sweep_2x6_34.png"/>
-          <p:cNvPicPr>
-            <a:picLocks noChangeAspect="1"/>
-          </p:cNvPicPr>
+      <p:graphicFrame>
+        <p:nvGraphicFramePr>
+          <p:cNvPr id="3" name="Chart 2"/>
+          <p:cNvGraphicFramePr>
+            <a:graphicFrameLocks noGrp="1"/>
+          </p:cNvGraphicFramePr>
           <p:nvPr/>
-        </p:nvPicPr>
-        <p:blipFill>
-          <a:blip r:embed="rId3"/>
-          <a:stretch>
-            <a:fillRect/>
-          </a:stretch>
-        </p:blipFill>
-        <p:spPr>
-          <a:xfrm>
-            <a:off x="457200" y="1051560"/>
-            <a:ext cx="4023360" cy="2145792"/>
+        </p:nvGraphicFramePr>
+        <p:xfrm>
+          <a:off x="457200" y="1005840"/>
+          <a:ext cx="4023360" cy="3200400"/>
+        </p:xfrm>
+        <a:graphic>
+          <a:graphicData uri="http://schemas.openxmlformats.org/drawingml/2006/chart">
+            <c:chart xmlns:c="http://schemas.openxmlformats.org/drawingml/2006/chart" r:id="rId3"/>
+          </a:graphicData>
+        </a:graphic>
+      </p:graphicFrame>
+      <p:sp>
+        <p:nvSpPr>
+          <p:cNvPr id="4" name="TextBox 3"/>
+          <p:cNvSpPr txBox="1"/>
+          <p:nvPr/>
+        </p:nvSpPr>
+        <p:spPr>
+          <a:xfrm>
+            <a:off x="4754880" y="1005840"/>
+            <a:ext cx="3931920" cy="274320"/>
           </a:xfrm>
           <a:prstGeom prst="rect">
             <a:avLst/>
           </a:prstGeom>
-        </p:spPr>
-      </p:pic>
-      <p:pic>
-        <p:nvPicPr>
-          <p:cNvPr id="4" name="Picture 3" descr="ukr_sweep_34.png"/>
-          <p:cNvPicPr>
-            <a:picLocks noChangeAspect="1"/>
-          </p:cNvPicPr>
+          <a:noFill/>
+        </p:spPr>
+        <p:txBody>
+          <a:bodyPr wrap="square" lIns="0" rIns="0" tIns="0" bIns="0" anchor="t">
+            <a:spAutoFit/>
+          </a:bodyPr>
+          <a:lstStyle/>
+          <a:p>
+            <a:pPr algn="l"/>
+            <a:r>
+              <a:rPr sz="1200" b="1" i="0">
+                <a:solidFill>
+                  <a:srgbClr val="1B2630"/>
+                </a:solidFill>
+                <a:latin typeface="Open Sans"/>
+              </a:rPr>
+              <a:t>What the compiler did when inlined:</a:t>
+            </a:r>
+          </a:p>
+        </p:txBody>
+      </p:sp>
+      <p:sp>
+        <p:nvSpPr>
+          <p:cNvPr id="5" name="spill-code"/>
+          <p:cNvSpPr/>
           <p:nvPr/>
-        </p:nvPicPr>
-        <p:blipFill>
-          <a:blip r:embed="rId4"/>
-          <a:stretch>
-            <a:fillRect/>
-          </a:stretch>
-        </p:blipFill>
-        <p:spPr>
-          <a:xfrm>
-            <a:off x="4663440" y="1051560"/>
-            <a:ext cx="4023360" cy="2145792"/>
+        </p:nvSpPr>
+        <p:spPr>
+          <a:xfrm>
+            <a:off x="4754880" y="1325880"/>
+            <a:ext cx="3931920" cy="868680"/>
+          </a:xfrm>
+          <a:prstGeom prst="roundRect">
+            <a:avLst>
+              <a:gd name="adj" fmla="val 8000"/>
+            </a:avLst>
+          </a:prstGeom>
+          <a:solidFill>
+            <a:srgbClr val="F1F3F5"/>
+          </a:solidFill>
+          <a:ln>
+            <a:noFill/>
+          </a:ln>
+          <a:effectLst/>
+        </p:spPr>
+        <p:style>
+          <a:lnRef idx="1">
+            <a:schemeClr val="accent1"/>
+          </a:lnRef>
+          <a:fillRef idx="3">
+            <a:schemeClr val="accent1"/>
+          </a:fillRef>
+          <a:effectRef idx="2">
+            <a:schemeClr val="accent1"/>
+          </a:effectRef>
+          <a:fontRef idx="minor">
+            <a:schemeClr val="lt1"/>
+          </a:fontRef>
+        </p:style>
+        <p:txBody>
+          <a:bodyPr rtlCol="0" anchor="ctr"/>
+          <a:lstStyle/>
+          <a:p>
+            <a:pPr algn="ctr"/>
+          </a:p>
+        </p:txBody>
+      </p:sp>
+      <p:sp>
+        <p:nvSpPr>
+          <p:cNvPr id="6" name="TextBox 5"/>
+          <p:cNvSpPr txBox="1"/>
+          <p:nvPr/>
+        </p:nvSpPr>
+        <p:spPr>
+          <a:xfrm>
+            <a:off x="4864608" y="1389888"/>
+            <a:ext cx="3749039" cy="749808"/>
           </a:xfrm>
           <a:prstGeom prst="rect">
             <a:avLst/>
           </a:prstGeom>
-        </p:spPr>
-      </p:pic>
+          <a:noFill/>
+        </p:spPr>
+        <p:txBody>
+          <a:bodyPr wrap="square" lIns="0" rIns="0" tIns="0" bIns="0" anchor="ctr">
+            <a:spAutoFit/>
+          </a:bodyPr>
+          <a:lstStyle/>
+          <a:p>
+            <a:pPr algn="l"/>
+            <a:r>
+              <a:rPr sz="1050" b="0" i="0">
+                <a:solidFill>
+                  <a:srgbClr val="1B2630"/>
+                </a:solidFill>
+                <a:latin typeface="Courier New"/>
+              </a:rPr>
+              <a:t>vmovaps 168(%rsp), %ymm1   # load sum back</a:t>
+            </a:r>
+          </a:p>
+          <a:p>
+            <a:pPr algn="l">
+              <a:spcBef>
+                <a:spcPts val="600"/>
+              </a:spcBef>
+            </a:pPr>
+            <a:r>
+              <a:rPr sz="1050" b="0" i="0">
+                <a:solidFill>
+                  <a:srgbClr val="1B2630"/>
+                </a:solidFill>
+                <a:latin typeface="Courier New"/>
+              </a:rPr>
+              <a:t>  ...kernel: 80 FMAs...</a:t>
+            </a:r>
+          </a:p>
+          <a:p>
+            <a:pPr algn="l">
+              <a:spcBef>
+                <a:spcPts val="600"/>
+              </a:spcBef>
+            </a:pPr>
+            <a:r>
+              <a:rPr sz="1050" b="0" i="0">
+                <a:solidFill>
+                  <a:srgbClr val="1B2630"/>
+                </a:solidFill>
+                <a:latin typeface="Courier New"/>
+              </a:rPr>
+              <a:t>vmovaps %ymm1, 168(%rsp)   # park sum again</a:t>
+            </a:r>
+          </a:p>
+        </p:txBody>
+      </p:sp>
+      <p:sp>
+        <p:nvSpPr>
+          <p:cNvPr id="7" name="TextBox 6"/>
+          <p:cNvSpPr txBox="1"/>
+          <p:nvPr/>
+        </p:nvSpPr>
+        <p:spPr>
+          <a:xfrm>
+            <a:off x="4754880" y="2331720"/>
+            <a:ext cx="3931920" cy="914400"/>
+          </a:xfrm>
+          <a:prstGeom prst="rect">
+            <a:avLst/>
+          </a:prstGeom>
+          <a:noFill/>
+        </p:spPr>
+        <p:txBody>
+          <a:bodyPr wrap="square" lIns="0" rIns="0" tIns="0" bIns="0" anchor="t">
+            <a:spAutoFit/>
+          </a:bodyPr>
+          <a:lstStyle/>
+          <a:p>
+            <a:pPr algn="l"/>
+            <a:r>
+              <a:rPr sz="1150" b="1" i="0">
+                <a:solidFill>
+                  <a:srgbClr val="1B2630"/>
+                </a:solidFill>
+                <a:latin typeface="Open Sans"/>
+              </a:rPr>
+              <a:t>Problem: </a:t>
+            </a:r>
+            <a:r>
+              <a:rPr sz="1150" b="0" i="0">
+                <a:solidFill>
+                  <a:srgbClr val="5A6875"/>
+                </a:solidFill>
+                <a:latin typeface="Open Sans"/>
+              </a:rPr>
+              <a:t>3 of the 10 sums live in memory, so each step waits on a store and a load.</a:t>
+            </a:r>
+          </a:p>
+          <a:p>
+            <a:pPr algn="l">
+              <a:spcBef>
+                <a:spcPts val="600"/>
+              </a:spcBef>
+            </a:pPr>
+            <a:r>
+              <a:rPr sz="1150" b="1" i="0">
+                <a:solidFill>
+                  <a:srgbClr val="1B2630"/>
+                </a:solidFill>
+                <a:latin typeface="Open Sans"/>
+              </a:rPr>
+              <a:t>Fix: </a:t>
+            </a:r>
+            <a:r>
+              <a:rPr sz="1150" b="0" i="0">
+                <a:solidFill>
+                  <a:srgbClr val="5A6875"/>
+                </a:solidFill>
+                <a:latin typeface="Open Sans"/>
+              </a:rPr>
+              <a:t>call the kernel as a function, as the benchmark does; all 10 stay in registers.</a:t>
+            </a:r>
+          </a:p>
+        </p:txBody>
+      </p:sp>
+      <p:sp>
+        <p:nvSpPr>
+          <p:cNvPr id="8" name="TextBox 7"/>
+          <p:cNvSpPr txBox="1"/>
+          <p:nvPr/>
+        </p:nvSpPr>
+        <p:spPr>
+          <a:xfrm>
+            <a:off x="4754880" y="3429000"/>
+            <a:ext cx="3931920" cy="731520"/>
+          </a:xfrm>
+          <a:prstGeom prst="rect">
+            <a:avLst/>
+          </a:prstGeom>
+          <a:noFill/>
+        </p:spPr>
+        <p:txBody>
+          <a:bodyPr wrap="square" lIns="0" rIns="0" tIns="0" bIns="0" anchor="t">
+            <a:spAutoFit/>
+          </a:bodyPr>
+          <a:lstStyle/>
+          <a:p>
+            <a:pPr algn="l"/>
+            <a:r>
+              <a:rPr sz="1400" b="1" i="1">
+                <a:solidFill>
+                  <a:srgbClr val="BB0027"/>
+                </a:solidFill>
+                <a:latin typeface="Open Sans"/>
+              </a:rPr>
+              <a:t>The kernel is only fast if its registers stay its own.</a:t>
+            </a:r>
+          </a:p>
+        </p:txBody>
+      </p:sp>
+    </p:spTree>
+  </p:cSld>
+  <p:clrMapOvr>
+    <a:masterClrMapping/>
+  </p:clrMapOvr>
+</p:sld>
+</file>
+
+<file path=ppt/slides/slide9.xml><?xml version="1.0" encoding="utf-8"?>
+<p:sld xmlns:a="http://schemas.openxmlformats.org/drawingml/2006/main" xmlns:p="http://schemas.openxmlformats.org/presentationml/2006/main" xmlns:r="http://schemas.openxmlformats.org/officeDocument/2006/relationships">
+  <p:cSld>
+    <p:spTree>
+      <p:nvGrpSpPr>
+        <p:cNvPr id="1" name=""/>
+        <p:cNvGrpSpPr/>
+        <p:nvPr/>
+      </p:nvGrpSpPr>
+      <p:grpSpPr/>
+      <p:sp>
+        <p:nvSpPr>
+          <p:cNvPr id="2" name="Title 1"/>
+          <p:cNvSpPr>
+            <a:spLocks noGrp="1"/>
+          </p:cNvSpPr>
+          <p:nvPr>
+            <p:ph type="title"/>
+          </p:nvPr>
+        </p:nvSpPr>
+        <p:spPr/>
+        <p:txBody>
+          <a:bodyPr/>
+          <a:lstStyle/>
+          <a:p>
+            <a:r>
+              <a:t>1.36× faster than OpenCV on all 32 layers</a:t>
+            </a:r>
+          </a:p>
+        </p:txBody>
+      </p:sp>
+      <p:graphicFrame>
+        <p:nvGraphicFramePr>
+          <p:cNvPr id="3" name="Chart 2"/>
+          <p:cNvGraphicFramePr>
+            <a:graphicFrameLocks noGrp="1"/>
+          </p:cNvGraphicFramePr>
+          <p:nvPr/>
+        </p:nvGraphicFramePr>
+        <p:xfrm>
+          <a:off x="457200" y="1005840"/>
+          <a:ext cx="5120640" cy="3108960"/>
+        </p:xfrm>
+        <a:graphic>
+          <a:graphicData uri="http://schemas.openxmlformats.org/drawingml/2006/chart">
+            <c:chart xmlns:c="http://schemas.openxmlformats.org/drawingml/2006/chart" r:id="rId3"/>
+          </a:graphicData>
+        </a:graphic>
+      </p:graphicFrame>
+      <p:sp>
+        <p:nvSpPr>
+          <p:cNvPr id="4" name="TextBox 3"/>
+          <p:cNvSpPr txBox="1"/>
+          <p:nvPr/>
+        </p:nvSpPr>
+        <p:spPr>
+          <a:xfrm>
+            <a:off x="5943600" y="1005840"/>
+            <a:ext cx="2743200" cy="548640"/>
+          </a:xfrm>
+          <a:prstGeom prst="rect">
+            <a:avLst/>
+          </a:prstGeom>
+          <a:noFill/>
+        </p:spPr>
+        <p:txBody>
+          <a:bodyPr wrap="square" lIns="0" rIns="0" tIns="0" bIns="0" anchor="t">
+            <a:spAutoFit/>
+          </a:bodyPr>
+          <a:lstStyle/>
+          <a:p>
+            <a:pPr algn="l"/>
+            <a:r>
+              <a:rPr sz="3000" b="1" i="0">
+                <a:solidFill>
+                  <a:srgbClr val="BB0027"/>
+                </a:solidFill>
+                <a:latin typeface="Open Sans"/>
+              </a:rPr>
+              <a:t>1.36×</a:t>
+            </a:r>
+          </a:p>
+        </p:txBody>
+      </p:sp>
       <p:sp>
         <p:nvSpPr>
           <p:cNvPr id="5" name="TextBox 4"/>
@@ -9948,8 +11923,8 @@
         </p:nvSpPr>
         <p:spPr>
           <a:xfrm>
-            <a:off x="457200" y="3291840"/>
-            <a:ext cx="4023360" cy="640080"/>
+            <a:off x="5943600" y="1572768"/>
+            <a:ext cx="2743200" cy="548640"/>
           </a:xfrm>
           <a:prstGeom prst="rect">
             <a:avLst/>
@@ -9964,13 +11939,13 @@
           <a:p>
             <a:pPr algn="l"/>
             <a:r>
-              <a:rPr sz="1050" b="0" i="0">
+              <a:rPr sz="1200" b="0" i="0">
                 <a:solidFill>
                   <a:srgbClr val="5A6875"/>
                 </a:solidFill>
                 <a:latin typeface="Open Sans"/>
               </a:rPr>
-              <a:t>2×6 asm 90.2% mean (C = 32–256); 2×5 81.4%. SiLU costs a fixed 160–290 cycles per call.</a:t>
+              <a:t>v10 vs OpenCV DNN (84% of peak vs 62%)</a:t>
             </a:r>
           </a:p>
         </p:txBody>
@@ -9983,8 +11958,8 @@
         </p:nvSpPr>
         <p:spPr>
           <a:xfrm>
-            <a:off x="4663440" y="3291840"/>
-            <a:ext cx="4023360" cy="640080"/>
+            <a:off x="5943600" y="2057400"/>
+            <a:ext cx="2743200" cy="548640"/>
           </a:xfrm>
           <a:prstGeom prst="rect">
             <a:avLst/>
@@ -9999,13 +11974,83 @@
           <a:p>
             <a:pPr algn="l"/>
             <a:r>
-              <a:rPr sz="1050" b="0" i="0">
-                <a:solidFill>
-                  <a:srgbClr val="5A6875"/>
+              <a:rPr sz="3000" b="1" i="0">
+                <a:solidFill>
+                  <a:srgbClr val="6B7782"/>
                 </a:solidFill>
                 <a:latin typeface="Open Sans"/>
               </a:rPr>
-              <a:t>4×3 asm: best 87.5% at C = 120, 57% at C = 256: its weights leave L2 (cache blocking fixes this).</a:t>
+              <a:t>1.24×</a:t>
+            </a:r>
+          </a:p>
+        </p:txBody>
+      </p:sp>
+      <p:sp>
+        <p:nvSpPr>
+          <p:cNvPr id="7" name="TextBox 6"/>
+          <p:cNvSpPr txBox="1"/>
+          <p:nvPr/>
+        </p:nvSpPr>
+        <p:spPr>
+          <a:xfrm>
+            <a:off x="5943600" y="2624328"/>
+            <a:ext cx="2743200" cy="548640"/>
+          </a:xfrm>
+          <a:prstGeom prst="rect">
+            <a:avLst/>
+          </a:prstGeom>
+          <a:noFill/>
+        </p:spPr>
+        <p:txBody>
+          <a:bodyPr wrap="square" lIns="0" rIns="0" tIns="0" bIns="0" anchor="t">
+            <a:spAutoFit/>
+          </a:bodyPr>
+          <a:lstStyle/>
+          <a:p>
+            <a:pPr algn="l"/>
+            <a:r>
+              <a:rPr sz="1200" b="0" i="0">
+                <a:solidFill>
+                  <a:srgbClr val="5A6875"/>
+                </a:solidFill>
+                <a:latin typeface="Open Sans"/>
+              </a:rPr>
+              <a:t>v2, the first working kernel, vs OpenCV</a:t>
+            </a:r>
+          </a:p>
+        </p:txBody>
+      </p:sp>
+      <p:sp>
+        <p:nvSpPr>
+          <p:cNvPr id="8" name="TextBox 7"/>
+          <p:cNvSpPr txBox="1"/>
+          <p:nvPr/>
+        </p:nvSpPr>
+        <p:spPr>
+          <a:xfrm>
+            <a:off x="5943600" y="3154680"/>
+            <a:ext cx="2743200" cy="1005840"/>
+          </a:xfrm>
+          <a:prstGeom prst="rect">
+            <a:avLst/>
+          </a:prstGeom>
+          <a:noFill/>
+        </p:spPr>
+        <p:txBody>
+          <a:bodyPr wrap="square" lIns="0" rIns="0" tIns="0" bIns="0" anchor="t">
+            <a:spAutoFit/>
+          </a:bodyPr>
+          <a:lstStyle/>
+          <a:p>
+            <a:pPr algn="l"/>
+            <a:r>
+              <a:rPr sz="1150" b="0" i="1">
+                <a:solidFill>
+                  <a:srgbClr val="5A6875"/>
+                </a:solidFill>
+                <a:latin typeface="Open Sans"/>
+              </a:rPr>
+              <a:t>Next: cache blocking for C ≥ 128 (where 4×3 collapses), then threads on 20 cores.</a:t>
             </a:r>
           </a:p>
         </p:txBody>

--- a/docs/milestone/om/slides/om_mid_presentation_cmu.pptx
+++ b/docs/milestone/om/slides/om_mid_presentation_cmu.pptx
@@ -18,6 +18,8 @@
     <p:sldId id="263" r:id="rId25"/>
     <p:sldId id="264" r:id="rId26"/>
     <p:sldId id="265" r:id="rId27"/>
+    <p:sldId id="266" r:id="rId28"/>
+    <p:sldId id="267" r:id="rId29"/>
   </p:sldIdLst>
   <p:sldSz cy="5143500" cx="9144000"/>
   <p:notesSz cx="6858000" cy="9144000"/>
@@ -539,7 +541,7 @@
                 </a:solidFill>
                 <a:latin typeface="Open Sans"/>
               </a:rPr>
-              <a:t>Same 2×5 asm kernel, % of peak</a:t>
+              <a:t>% of peak: alone (C = 64) vs in layers</a:t>
             </a:r>
           </a:p>
         </c:rich>
@@ -561,7 +563,7 @@
               <c:strCache>
                 <c:ptCount val="1"/>
                 <c:pt idx="0">
-                  <c:v>% of peak</c:v>
+                  <c:v>alone</c:v>
                 </c:pt>
               </c:strCache>
             </c:strRef>
@@ -573,35 +575,78 @@
           </c:spPr>
           <c:cat>
             <c:strRef>
-              <c:f>Sheet1!$A$2:$A$4</c:f>
+              <c:f>Sheet1!$A$2:$A$3</c:f>
               <c:strCache>
-                <c:ptCount val="3"/>
+                <c:ptCount val="2"/>
                 <c:pt idx="0">
-                  <c:v>alone (benchmark)</c:v>
+                  <c:v>1×10 (10 acc)</c:v>
                 </c:pt>
                 <c:pt idx="1">
-                  <c:v>in layers, inlined</c:v>
-                </c:pt>
-                <c:pt idx="2">
-                  <c:v>in layers, called as a function</c:v>
+                  <c:v>2×5 (10 acc)</c:v>
                 </c:pt>
               </c:strCache>
             </c:strRef>
           </c:cat>
           <c:val>
             <c:numRef>
-              <c:f>Sheet1!$B$2:$B$4</c:f>
+              <c:f>Sheet1!$B$2:$B$3</c:f>
               <c:numCache>
                 <c:formatCode>General</c:formatCode>
-                <c:ptCount val="3"/>
+                <c:ptCount val="2"/>
                 <c:pt idx="0">
-                  <c:v>92.2</c:v>
+                  <c:v>85.8</c:v>
                 </c:pt>
                 <c:pt idx="1">
-                  <c:v>72.5</c:v>
+                  <c:v>85.3</c:v>
                 </c:pt>
-                <c:pt idx="2">
-                  <c:v>83.1</c:v>
+              </c:numCache>
+            </c:numRef>
+          </c:val>
+        </c:ser>
+        <c:ser>
+          <c:idx val="1"/>
+          <c:order val="1"/>
+          <c:tx>
+            <c:strRef>
+              <c:f>Sheet1!$C$1</c:f>
+              <c:strCache>
+                <c:ptCount val="1"/>
+                <c:pt idx="0">
+                  <c:v>in layers</c:v>
+                </c:pt>
+              </c:strCache>
+            </c:strRef>
+          </c:tx>
+          <c:spPr>
+            <a:solidFill>
+              <a:srgbClr val="6B7782"/>
+            </a:solidFill>
+          </c:spPr>
+          <c:cat>
+            <c:strRef>
+              <c:f>Sheet1!$A$2:$A$3</c:f>
+              <c:strCache>
+                <c:ptCount val="2"/>
+                <c:pt idx="0">
+                  <c:v>1×10 (10 acc)</c:v>
+                </c:pt>
+                <c:pt idx="1">
+                  <c:v>2×5 (10 acc)</c:v>
+                </c:pt>
+              </c:strCache>
+            </c:strRef>
+          </c:cat>
+          <c:val>
+            <c:numRef>
+              <c:f>Sheet1!$C$2:$C$3</c:f>
+              <c:numCache>
+                <c:formatCode>General</c:formatCode>
+                <c:ptCount val="2"/>
+                <c:pt idx="0">
+                  <c:v>67.0</c:v>
+                </c:pt>
+                <c:pt idx="1">
+                  <c:v>76.8</c:v>
                 </c:pt>
               </c:numCache>
             </c:numRef>
@@ -716,6 +761,21 @@
         <c:majorUnit val="25.0"/>
       </c:valAx>
     </c:plotArea>
+    <c:legend>
+      <c:legendPos val="b"/>
+      <c:overlay val="0"/>
+      <c:txPr>
+        <a:bodyPr/>
+        <a:lstStyle/>
+        <a:p>
+          <a:pPr>
+            <a:defRPr sz="1000">
+              <a:latin typeface="Open Sans"/>
+            </a:defRPr>
+          </a:pPr>
+        </a:p>
+      </c:txPr>
+    </c:legend>
     <c:dispBlanksAs val="gap"/>
   </c:chart>
   <c:txPr>
@@ -785,16 +845,13 @@
           </c:spPr>
           <c:cat>
             <c:strRef>
-              <c:f>Sheet1!$A$2:$A$4</c:f>
+              <c:f>Sheet1!$A$2:$A$3</c:f>
               <c:strCache>
-                <c:ptCount val="3"/>
+                <c:ptCount val="2"/>
                 <c:pt idx="0">
-                  <c:v>v10 (2×6 asm)</c:v>
+                  <c:v>v2 (2×5, intrinsics)</c:v>
                 </c:pt>
                 <c:pt idx="1">
-                  <c:v>v2 (intrinsics)</c:v>
-                </c:pt>
-                <c:pt idx="2">
                   <c:v>OpenCV DNN</c:v>
                 </c:pt>
               </c:strCache>
@@ -802,17 +859,14 @@
           </c:cat>
           <c:val>
             <c:numRef>
-              <c:f>Sheet1!$B$2:$B$4</c:f>
+              <c:f>Sheet1!$B$2:$B$3</c:f>
               <c:numCache>
                 <c:formatCode>General</c:formatCode>
-                <c:ptCount val="3"/>
+                <c:ptCount val="2"/>
                 <c:pt idx="0">
-                  <c:v>63.8</c:v>
+                  <c:v>69.5</c:v>
                 </c:pt>
                 <c:pt idx="1">
-                  <c:v>69.5</c:v>
-                </c:pt>
-                <c:pt idx="2">
                   <c:v>86.4</c:v>
                 </c:pt>
               </c:numCache>
@@ -2158,7 +2212,7 @@
           <a:lstStyle/>
           <a:p>
             <a:r>
-              <a:t>My kernel is the 3x3 stride-1 convolution: 32 layers, the C2f bottlenecks and the Detect head, two thirds of YOLOv8n's work. The story: it is the Assignment 2 kernel, I followed the same four steps, and the measurements chose the tile. Best microkernel alone: 94% of the 32 FLOPs/cycle peak; inside all 32 real layers: 84%. All percentages assume the core runs at 3.4 GHz, as in Assignment 2.</a:t>
+              <a:t>My kernel is the 3x3 stride-1 convolution: 32 layers, the C2f bottlenecks and the Detect head, two thirds of YOLOv8n's work. The story: it is the Assignment 2 kernel, I followed the same four steps, and the measurements chose the tile. The 2x5 microkernel alone: 85% of the 32 FLOPs/cycle peak; inside all 32 real layers: 77%, 1.24 times faster than OpenCV. Intrinsics only, no assembly. All percentages assume the core runs at 3.4 GHz, as in Assignment 2.</a:t>
             </a:r>
           </a:p>
         </p:txBody>
@@ -2228,7 +2282,147 @@
           <a:lstStyle/>
           <a:p>
             <a:r>
-              <a:t>With the fused SiLU on, everything sits about 4 to 5 points lower: SiLU costs a fixed 160 to 290 cycles per call. Right: the 4x3 asm tile is the fastest while its weights are small, then collapses past C about 128 as its weights leave L2: the case cache blocking fixes.</a:t>
+              <a:t>Two tiles with the same 10 accumulators: 1x10, one block of 8 channels times 10 pixels, and 2x5. Alone they tie: 85.8 and 85.3 percent. Inside real layers 2x5 wins by 10 points: 76.8 against 67.0. Alone, everything sits in L1, so 1x10's 11 loads per 10 FMAs still fit through the 2 load ports. In a layer the inputs and weights stream from L2, and because each 1x10 call covers only 8 output channels, the layer reads every input row twice as often as with 2x5. So loads become the limit. 2x5 needs only 7 loads per 10 FMAs, so it has room to spare. Lesson: pick the tile in the real layer, not only alone.</a:t>
+            </a:r>
+          </a:p>
+        </p:txBody>
+      </p:sp>
+      <p:sp>
+        <p:nvSpPr>
+          <p:cNvPr id="4" name="Slide Number Placeholder 3"/>
+          <p:cNvSpPr>
+            <a:spLocks noGrp="1"/>
+          </p:cNvSpPr>
+          <p:nvPr>
+            <p:ph type="sldNum" idx="12"/>
+          </p:nvPr>
+        </p:nvSpPr>
+        <p:spPr/>
+      </p:sp>
+    </p:spTree>
+  </p:cSld>
+  <p:clrMapOvr>
+    <a:masterClrMapping/>
+  </p:clrMapOvr>
+</p:notes>
+</file>
+
+<file path=ppt/notesSlides/notesSlide11.xml><?xml version="1.0" encoding="utf-8"?>
+<p:notes xmlns:a="http://schemas.openxmlformats.org/drawingml/2006/main" xmlns:p="http://schemas.openxmlformats.org/presentationml/2006/main" xmlns:r="http://schemas.openxmlformats.org/officeDocument/2006/relationships">
+  <p:cSld>
+    <p:spTree>
+      <p:nvGrpSpPr>
+        <p:cNvPr id="1" name=""/>
+        <p:cNvGrpSpPr/>
+        <p:nvPr/>
+      </p:nvGrpSpPr>
+      <p:grpSpPr>
+        <a:xfrm>
+          <a:off x="0" y="0"/>
+          <a:ext cx="0" cy="0"/>
+          <a:chOff x="0" y="0"/>
+          <a:chExt cx="0" cy="0"/>
+        </a:xfrm>
+      </p:grpSpPr>
+      <p:sp>
+        <p:nvSpPr>
+          <p:cNvPr id="2" name="Slide Image Placeholder 1"/>
+          <p:cNvSpPr>
+            <a:spLocks noGrp="1"/>
+          </p:cNvSpPr>
+          <p:nvPr>
+            <p:ph type="sldImg" idx="3"/>
+          </p:nvPr>
+        </p:nvSpPr>
+        <p:spPr/>
+      </p:sp>
+      <p:sp>
+        <p:nvSpPr>
+          <p:cNvPr id="3" name="Notes Placeholder 2"/>
+          <p:cNvSpPr>
+            <a:spLocks noGrp="1"/>
+          </p:cNvSpPr>
+          <p:nvPr>
+            <p:ph type="body" idx="1"/>
+          </p:nvPr>
+        </p:nvSpPr>
+        <p:spPr/>
+        <p:txBody>
+          <a:bodyPr/>
+          <a:lstStyle/>
+          <a:p>
+            <a:r>
+              <a:t>Total time for all 32 stride-1 layers, one core, same model and image. OpenCV DNN takes 86.4 milliseconds. Our kernel, v2, the 2x5 tile written with intrinsics, takes 69.5: 1.24 times faster, at 77 percent of peak against OpenCV's 62. Next: cache blocking for the layers with 128 or more input channels, and threading across 20 cores.</a:t>
+            </a:r>
+          </a:p>
+        </p:txBody>
+      </p:sp>
+      <p:sp>
+        <p:nvSpPr>
+          <p:cNvPr id="4" name="Slide Number Placeholder 3"/>
+          <p:cNvSpPr>
+            <a:spLocks noGrp="1"/>
+          </p:cNvSpPr>
+          <p:nvPr>
+            <p:ph type="sldNum" idx="12"/>
+          </p:nvPr>
+        </p:nvSpPr>
+        <p:spPr/>
+      </p:sp>
+    </p:spTree>
+  </p:cSld>
+  <p:clrMapOvr>
+    <a:masterClrMapping/>
+  </p:clrMapOvr>
+</p:notes>
+</file>
+
+<file path=ppt/notesSlides/notesSlide12.xml><?xml version="1.0" encoding="utf-8"?>
+<p:notes xmlns:a="http://schemas.openxmlformats.org/drawingml/2006/main" xmlns:p="http://schemas.openxmlformats.org/presentationml/2006/main" xmlns:r="http://schemas.openxmlformats.org/officeDocument/2006/relationships">
+  <p:cSld>
+    <p:spTree>
+      <p:nvGrpSpPr>
+        <p:cNvPr id="1" name=""/>
+        <p:cNvGrpSpPr/>
+        <p:nvPr/>
+      </p:nvGrpSpPr>
+      <p:grpSpPr>
+        <a:xfrm>
+          <a:off x="0" y="0"/>
+          <a:ext cx="0" cy="0"/>
+          <a:chOff x="0" y="0"/>
+          <a:chExt cx="0" cy="0"/>
+        </a:xfrm>
+      </p:grpSpPr>
+      <p:sp>
+        <p:nvSpPr>
+          <p:cNvPr id="2" name="Slide Image Placeholder 1"/>
+          <p:cNvSpPr>
+            <a:spLocks noGrp="1"/>
+          </p:cNvSpPr>
+          <p:nvPr>
+            <p:ph type="sldImg" idx="3"/>
+          </p:nvPr>
+        </p:nvSpPr>
+        <p:spPr/>
+      </p:sp>
+      <p:sp>
+        <p:nvSpPr>
+          <p:cNvPr id="3" name="Notes Placeholder 2"/>
+          <p:cNvSpPr>
+            <a:spLocks noGrp="1"/>
+          </p:cNvSpPr>
+          <p:nvPr>
+            <p:ph type="body" idx="1"/>
+          </p:nvPr>
+        </p:nvSpPr>
+        <p:spPr/>
+        <p:txBody>
+          <a:bodyPr/>
+          <a:lstStyle/>
+          <a:p>
+            <a:r>
+              <a:t>With the fused SiLU on, the curves sit about 4 to 5 points lower: SiLU costs a fixed 160 to 290 cycles per call, a big share at small k and almost nothing from C = 128 up.</a:t>
             </a:r>
           </a:p>
         </p:txBody>
@@ -2438,7 +2632,7 @@
           <a:lstStyle/>
           <a:p>
             <a:r>
-              <a:t>These are the assumptions behind every number in the talk. The important one: cycles are wall time times 3.4 GHz, the CPU's maximum turbo, exactly the Assignment 2 convention. The core can never run faster than that, so the percentages can only understate.</a:t>
+              <a:t>Answering the handout questions directly. (a) One call computes 80 outputs: 5 pixels of one output row times 16 output channels. (b) It needs 13 YMM registers out of the 16 that AVX2 gives on Broadwell: 10 accumulators, 2 weight vectors, 1 broadcast input. 10 accumulators is the minimum to hide FMA latency: 5 cycles latency times 2 FMA units. (c) Outputs: the 10 accumulators stay in registers for the whole C x 9 reduction. Inputs: the 2 weight registers hold 8 output channels each for one input channel and tap; the broadcast register holds one input value copied to all 8 lanes. Temporaries: none inside the loop; 3 registers stay free. We write intrinsics, so GCC assigns the physical registers; we checked GCC's output for v2 and it keeps all 13 in registers with no spills.</a:t>
             </a:r>
           </a:p>
         </p:txBody>
@@ -2508,7 +2702,7 @@
           <a:lstStyle/>
           <a:p>
             <a:r>
-              <a:t>Step 1: every output is an independent dot product; the only chain is the reduction. Step 2: 5-cycle latency times 2 FMAs per cycle means 10 independent accumulators, 80 outputs in flight. The chart: 1 accumulator is 10%, each adds about 10 points. Step 3: 2x5 gives 10 accumulators in 13 registers, 7 loads per 10 FMAs, and 5 divides 160, 80, 40 and 20. Step 4: benchmark the kernel alone exactly like Assignment 2.</a:t>
+              <a:t>(d) Reuse. Each weight register is loaded once and used by 5 FMAs, one per pixel. Each broadcast input is used by 2 FMAs, one per output block. The single x register is reused 5 times per step, once per pixel, because each broadcast is consumed right away. Each accumulator is reused C x 9 times and written to memory once. So one step is 7 loads for 10 FMAs, which the 2 load ports handle with room to spare. (e) The code: initialize the accumulators with the bias, so the add is free. Then loop over input-channel blocks, the 3 by 3 taps, and the 8 input channels of the block; load 2 weight vectors, then for each of the 5 pixels broadcast one input and issue 2 FMAs. After the loop, apply SiLU in registers and store. The zero halo means no edge branches. GCC fully unrolls the inner 8 channels and 5 pixels, so the loop body is 80 FMAs, 40 broadcasts and 16 loads.</a:t>
             </a:r>
           </a:p>
         </p:txBody>
@@ -2578,7 +2772,7 @@
           <a:lstStyle/>
           <a:p>
             <a:r>
-              <a:t>Every kernel I built, same arithmetic, same layout. Filled dots: the microkernel alone; hollow: all 32 layers. The 2x6 tile loses with intrinsics because GCC adds 11 register copies per tap at 15 live registers, but with the registers fixed in inline asm it is the best kernel, 95% alone. 4x3 needs all 16 registers; GCC spills it to 49%. Unrolling and software pipelining made it worse: full unrolling overflowed the uop cache and partial unrolling made GCC spill.</a:t>
+              <a:t>These are the assumptions behind every number in the talk. The important one: cycles are wall time times 3.4 GHz, the CPU's maximum turbo, exactly the Assignment 2 convention. The core can never run faster than that, so the percentages can only understate.</a:t>
             </a:r>
           </a:p>
         </p:txBody>
@@ -2648,7 +2842,7 @@
           <a:lstStyle/>
           <a:p>
             <a:r>
-              <a:t>This is the Assignment 2 figure for my kernel: FLOPs per cycle against the reduction length k. Cycles are time times 3.4 GHz, the max turbo, exactly as in Assignment 2, so this can only understate. 2x6 asm holds 30 to 31 FLOPs per cycle, 94 to 97 percent of peak; 2x5 intrinsics 83 to 89. The dip near k = 500 is the 2x5 weights leaving L1, like k = 315 in A2. Cross-checked: the hardware FP-instruction counter matches our FLOP count exactly.</a:t>
+              <a:t>Step 1: every output is an independent dot product; the only chain is the reduction. Step 2: 5-cycle latency times 2 FMAs per cycle means 10 independent accumulators, 80 outputs in flight. The chart: 1 accumulator is 10%, each adds about 10 points. Step 3: 2x5 gives 10 accumulators in 13 registers, 7 loads per 10 FMAs, and 5 divides 160, 80, 40 and 20. Step 4: benchmark the kernel alone exactly like Assignment 2.</a:t>
             </a:r>
           </a:p>
         </p:txBody>
@@ -2718,7 +2912,7 @@
           <a:lstStyle/>
           <a:p>
             <a:r>
-              <a:t>The 2x5 kernel written in assembly was the fastest alone, 92 percent, but inside the real layers it dropped to 72.5 percent, below the plain intrinsics version. The reason is in the code box: the compiler pastes the kernel into the layer loop, runs out of registers, and parks 3 of the 10 running sums in memory. It loads them back before every step and stores them after, which adds about 5 cycles to those chains: the latency problem again. The fix: call the kernel as a separate function, exactly as the benchmark does. Then all 10 sums stay in registers: 83 percent, and 84 percent with the 2x6 tile.</a:t>
+              <a:t>Every kernel I built, all intrinsics, same arithmetic, same layout. Filled dots: the microkernel alone; hollow: all 32 layers. 2x5 is the best in the layers: 85% alone, 77% in all 32 layers. Bigger tiles lose because of how GCC allocates registers: at 15 live registers (2x6) it adds 11 register copies per tap, found by reading GCC's generated assembly; at 16 (4x3) it spills accumulators to memory and drops to 49%. Unrolling and software pipelining made it worse: full unrolling overflowed the uop cache and partial unrolling made GCC spill.</a:t>
             </a:r>
           </a:p>
         </p:txBody>
@@ -2788,7 +2982,7 @@
           <a:lstStyle/>
           <a:p>
             <a:r>
-              <a:t>Total time for all 32 stride-1 layers, one core, same model and image. OpenCV DNN takes 86.4 milliseconds. Our first kernel, v2 with intrinsics, takes 69.5: 1.24 times faster. Our best, v10 with the 2x6 tile in assembly called as a function, takes 63.8: 1.36 times faster, at 84 percent of peak. Next: cache blocking for the layers with 128 or more input channels, and threading across 20 cores.</a:t>
+              <a:t>This is the Assignment 2 figure for my kernel: FLOPs per cycle against the reduction length k. Cycles are time times 3.4 GHz, the max turbo, exactly as in Assignment 2, so this can only understate. 2x5 holds 27 to 28.5 FLOPs per cycle, 83 to 89 percent of peak; 2x6 sits about 3 points lower, 80 to 83, because of GCC's register copies. The dip near k = 500 is the 2x5 weights leaving L1, like k = 315 in A2. Cross-checked: the hardware FP-instruction counter matches our FLOP count exactly.</a:t>
             </a:r>
           </a:p>
         </p:txBody>
@@ -7315,7 +7509,7 @@
                 </a:solidFill>
                 <a:latin typeface="Open Sans"/>
               </a:rPr>
-              <a:t>94%</a:t>
+              <a:t>85%</a:t>
             </a:r>
           </a:p>
         </p:txBody>
@@ -7350,7 +7544,7 @@
                 </a:solidFill>
                 <a:latin typeface="Open Sans"/>
               </a:rPr>
-              <a:t>of peak, alone</a:t>
+              <a:t>of peak, kernel alone</a:t>
             </a:r>
           </a:p>
         </p:txBody>
@@ -7385,7 +7579,7 @@
                 </a:solidFill>
                 <a:latin typeface="Open Sans"/>
               </a:rPr>
-              <a:t>84%</a:t>
+              <a:t>77%</a:t>
             </a:r>
           </a:p>
         </p:txBody>
@@ -7459,14 +7653,731 @@
           <a:lstStyle/>
           <a:p>
             <a:r>
-              <a:t>Backup: the same sweeps with SiLU on</a:t>
+              <a:t>Tied alone, 10 points apart in the layers</a:t>
+            </a:r>
+          </a:p>
+        </p:txBody>
+      </p:sp>
+      <p:graphicFrame>
+        <p:nvGraphicFramePr>
+          <p:cNvPr id="3" name="Chart 2"/>
+          <p:cNvGraphicFramePr>
+            <a:graphicFrameLocks noGrp="1"/>
+          </p:cNvGraphicFramePr>
+          <p:nvPr/>
+        </p:nvGraphicFramePr>
+        <p:xfrm>
+          <a:off x="457200" y="1005840"/>
+          <a:ext cx="4023360" cy="3200400"/>
+        </p:xfrm>
+        <a:graphic>
+          <a:graphicData uri="http://schemas.openxmlformats.org/drawingml/2006/chart">
+            <c:chart xmlns:c="http://schemas.openxmlformats.org/drawingml/2006/chart" r:id="rId3"/>
+          </a:graphicData>
+        </a:graphic>
+      </p:graphicFrame>
+      <p:graphicFrame>
+        <p:nvGraphicFramePr>
+          <p:cNvPr id="4" name="Table 3"/>
+          <p:cNvGraphicFramePr>
+            <a:graphicFrameLocks noGrp="1"/>
+          </p:cNvGraphicFramePr>
+          <p:nvPr/>
+        </p:nvGraphicFramePr>
+        <p:xfrm>
+          <a:off x="4754880" y="1051560"/>
+          <a:ext cx="3931920" cy="1371600"/>
+        </p:xfrm>
+        <a:graphic>
+          <a:graphicData uri="http://schemas.openxmlformats.org/drawingml/2006/table">
+            <a:tbl>
+              <a:tblPr firstRow="1" bandRow="1">
+                <a:tableStyleId>{5C22544A-7EE6-4342-B048-85BDC9FD1C3A}</a:tableStyleId>
+              </a:tblPr>
+              <a:tblGrid>
+                <a:gridCol w="2103120"/>
+                <a:gridCol w="914400"/>
+                <a:gridCol w="914400"/>
+              </a:tblGrid>
+              <a:tr h="342900">
+                <a:tc>
+                  <a:txBody>
+                    <a:bodyPr/>
+                    <a:lstStyle/>
+                    <a:p/>
+                  </a:txBody>
+                  <a:tcPr>
+                    <a:solidFill>
+                      <a:srgbClr val="F1F3F5"/>
+                    </a:solidFill>
+                  </a:tcPr>
+                </a:tc>
+                <a:tc>
+                  <a:txBody>
+                    <a:bodyPr/>
+                    <a:lstStyle/>
+                    <a:p>
+                      <a:r>
+                        <a:rPr sz="1100" b="1">
+                          <a:solidFill>
+                            <a:srgbClr val="1B2630"/>
+                          </a:solidFill>
+                          <a:latin typeface="Open Sans"/>
+                        </a:rPr>
+                        <a:t>1×10</a:t>
+                      </a:r>
+                    </a:p>
+                  </a:txBody>
+                  <a:tcPr>
+                    <a:solidFill>
+                      <a:srgbClr val="F1F3F5"/>
+                    </a:solidFill>
+                  </a:tcPr>
+                </a:tc>
+                <a:tc>
+                  <a:txBody>
+                    <a:bodyPr/>
+                    <a:lstStyle/>
+                    <a:p>
+                      <a:r>
+                        <a:rPr sz="1100" b="1">
+                          <a:solidFill>
+                            <a:srgbClr val="1B2630"/>
+                          </a:solidFill>
+                          <a:latin typeface="Open Sans"/>
+                        </a:rPr>
+                        <a:t>2×5</a:t>
+                      </a:r>
+                    </a:p>
+                  </a:txBody>
+                  <a:tcPr>
+                    <a:solidFill>
+                      <a:srgbClr val="F1F3F5"/>
+                    </a:solidFill>
+                  </a:tcPr>
+                </a:tc>
+              </a:tr>
+              <a:tr h="342900">
+                <a:tc>
+                  <a:txBody>
+                    <a:bodyPr/>
+                    <a:lstStyle/>
+                    <a:p>
+                      <a:r>
+                        <a:rPr sz="1100" b="0">
+                          <a:solidFill>
+                            <a:srgbClr val="1B2630"/>
+                          </a:solidFill>
+                          <a:latin typeface="Open Sans"/>
+                        </a:rPr>
+                        <a:t>Loads per 10 FMAs</a:t>
+                      </a:r>
+                    </a:p>
+                  </a:txBody>
+                  <a:tcPr>
+                    <a:solidFill>
+                      <a:srgbClr val="FFFFFF"/>
+                    </a:solidFill>
+                  </a:tcPr>
+                </a:tc>
+                <a:tc>
+                  <a:txBody>
+                    <a:bodyPr/>
+                    <a:lstStyle/>
+                    <a:p>
+                      <a:r>
+                        <a:rPr sz="1100" b="0">
+                          <a:solidFill>
+                            <a:srgbClr val="1B2630"/>
+                          </a:solidFill>
+                          <a:latin typeface="Open Sans"/>
+                        </a:rPr>
+                        <a:t>11</a:t>
+                      </a:r>
+                    </a:p>
+                  </a:txBody>
+                  <a:tcPr>
+                    <a:solidFill>
+                      <a:srgbClr val="FFFFFF"/>
+                    </a:solidFill>
+                  </a:tcPr>
+                </a:tc>
+                <a:tc>
+                  <a:txBody>
+                    <a:bodyPr/>
+                    <a:lstStyle/>
+                    <a:p>
+                      <a:r>
+                        <a:rPr sz="1100" b="0">
+                          <a:solidFill>
+                            <a:srgbClr val="1B2630"/>
+                          </a:solidFill>
+                          <a:latin typeface="Open Sans"/>
+                        </a:rPr>
+                        <a:t>7</a:t>
+                      </a:r>
+                    </a:p>
+                  </a:txBody>
+                  <a:tcPr>
+                    <a:solidFill>
+                      <a:srgbClr val="FFFFFF"/>
+                    </a:solidFill>
+                  </a:tcPr>
+                </a:tc>
+              </a:tr>
+              <a:tr h="342900">
+                <a:tc>
+                  <a:txBody>
+                    <a:bodyPr/>
+                    <a:lstStyle/>
+                    <a:p>
+                      <a:r>
+                        <a:rPr sz="1100" b="0">
+                          <a:solidFill>
+                            <a:srgbClr val="1B2630"/>
+                          </a:solidFill>
+                          <a:latin typeface="Open Sans"/>
+                        </a:rPr>
+                        <a:t>Output channels per call</a:t>
+                      </a:r>
+                    </a:p>
+                  </a:txBody>
+                  <a:tcPr>
+                    <a:solidFill>
+                      <a:srgbClr val="FFFFFF"/>
+                    </a:solidFill>
+                  </a:tcPr>
+                </a:tc>
+                <a:tc>
+                  <a:txBody>
+                    <a:bodyPr/>
+                    <a:lstStyle/>
+                    <a:p>
+                      <a:r>
+                        <a:rPr sz="1100" b="0">
+                          <a:solidFill>
+                            <a:srgbClr val="1B2630"/>
+                          </a:solidFill>
+                          <a:latin typeface="Open Sans"/>
+                        </a:rPr>
+                        <a:t>8</a:t>
+                      </a:r>
+                    </a:p>
+                  </a:txBody>
+                  <a:tcPr>
+                    <a:solidFill>
+                      <a:srgbClr val="FFFFFF"/>
+                    </a:solidFill>
+                  </a:tcPr>
+                </a:tc>
+                <a:tc>
+                  <a:txBody>
+                    <a:bodyPr/>
+                    <a:lstStyle/>
+                    <a:p>
+                      <a:r>
+                        <a:rPr sz="1100" b="0">
+                          <a:solidFill>
+                            <a:srgbClr val="1B2630"/>
+                          </a:solidFill>
+                          <a:latin typeface="Open Sans"/>
+                        </a:rPr>
+                        <a:t>16</a:t>
+                      </a:r>
+                    </a:p>
+                  </a:txBody>
+                  <a:tcPr>
+                    <a:solidFill>
+                      <a:srgbClr val="FFFFFF"/>
+                    </a:solidFill>
+                  </a:tcPr>
+                </a:tc>
+              </a:tr>
+              <a:tr h="342900">
+                <a:tc>
+                  <a:txBody>
+                    <a:bodyPr/>
+                    <a:lstStyle/>
+                    <a:p>
+                      <a:r>
+                        <a:rPr sz="1100" b="0">
+                          <a:solidFill>
+                            <a:srgbClr val="1B2630"/>
+                          </a:solidFill>
+                          <a:latin typeface="Open Sans"/>
+                        </a:rPr>
+                        <a:t>Times each input row is read</a:t>
+                      </a:r>
+                    </a:p>
+                  </a:txBody>
+                  <a:tcPr>
+                    <a:solidFill>
+                      <a:srgbClr val="FFFFFF"/>
+                    </a:solidFill>
+                  </a:tcPr>
+                </a:tc>
+                <a:tc>
+                  <a:txBody>
+                    <a:bodyPr/>
+                    <a:lstStyle/>
+                    <a:p>
+                      <a:r>
+                        <a:rPr sz="1100" b="0">
+                          <a:solidFill>
+                            <a:srgbClr val="1B2630"/>
+                          </a:solidFill>
+                          <a:latin typeface="Open Sans"/>
+                        </a:rPr>
+                        <a:t>2×</a:t>
+                      </a:r>
+                    </a:p>
+                  </a:txBody>
+                  <a:tcPr>
+                    <a:solidFill>
+                      <a:srgbClr val="FFFFFF"/>
+                    </a:solidFill>
+                  </a:tcPr>
+                </a:tc>
+                <a:tc>
+                  <a:txBody>
+                    <a:bodyPr/>
+                    <a:lstStyle/>
+                    <a:p>
+                      <a:r>
+                        <a:rPr sz="1100" b="0">
+                          <a:solidFill>
+                            <a:srgbClr val="1B2630"/>
+                          </a:solidFill>
+                          <a:latin typeface="Open Sans"/>
+                        </a:rPr>
+                        <a:t>1×</a:t>
+                      </a:r>
+                    </a:p>
+                  </a:txBody>
+                  <a:tcPr>
+                    <a:solidFill>
+                      <a:srgbClr val="FFFFFF"/>
+                    </a:solidFill>
+                  </a:tcPr>
+                </a:tc>
+              </a:tr>
+            </a:tbl>
+          </a:graphicData>
+        </a:graphic>
+      </p:graphicFrame>
+      <p:sp>
+        <p:nvSpPr>
+          <p:cNvPr id="5" name="TextBox 4"/>
+          <p:cNvSpPr txBox="1"/>
+          <p:nvPr/>
+        </p:nvSpPr>
+        <p:spPr>
+          <a:xfrm>
+            <a:off x="4754880" y="2606040"/>
+            <a:ext cx="3931920" cy="822960"/>
+          </a:xfrm>
+          <a:prstGeom prst="rect">
+            <a:avLst/>
+          </a:prstGeom>
+          <a:noFill/>
+        </p:spPr>
+        <p:txBody>
+          <a:bodyPr wrap="square" lIns="0" rIns="0" tIns="0" bIns="0" anchor="t">
+            <a:spAutoFit/>
+          </a:bodyPr>
+          <a:lstStyle/>
+          <a:p>
+            <a:pPr algn="l"/>
+            <a:r>
+              <a:rPr sz="1150" b="1" i="0">
+                <a:solidFill>
+                  <a:srgbClr val="1B2630"/>
+                </a:solidFill>
+                <a:latin typeface="Open Sans"/>
+              </a:rPr>
+              <a:t>Alone: </a:t>
+            </a:r>
+            <a:r>
+              <a:rPr sz="1150" b="0" i="0">
+                <a:solidFill>
+                  <a:srgbClr val="5A6875"/>
+                </a:solidFill>
+                <a:latin typeface="Open Sans"/>
+              </a:rPr>
+              <a:t>all data in L1, so 1×10's extra loads still fit.</a:t>
+            </a:r>
+          </a:p>
+          <a:p>
+            <a:pPr algn="l">
+              <a:spcBef>
+                <a:spcPts val="600"/>
+              </a:spcBef>
+            </a:pPr>
+            <a:r>
+              <a:rPr sz="1150" b="1" i="0">
+                <a:solidFill>
+                  <a:srgbClr val="1B2630"/>
+                </a:solidFill>
+                <a:latin typeface="Open Sans"/>
+              </a:rPr>
+              <a:t>In a layer: </a:t>
+            </a:r>
+            <a:r>
+              <a:rPr sz="1150" b="0" i="0">
+                <a:solidFill>
+                  <a:srgbClr val="5A6875"/>
+                </a:solidFill>
+                <a:latin typeface="Open Sans"/>
+              </a:rPr>
+              <a:t>data streams from L2 and 1×10 reads inputs twice as often, so loads become the limit.</a:t>
+            </a:r>
+          </a:p>
+        </p:txBody>
+      </p:sp>
+      <p:sp>
+        <p:nvSpPr>
+          <p:cNvPr id="6" name="TextBox 5"/>
+          <p:cNvSpPr txBox="1"/>
+          <p:nvPr/>
+        </p:nvSpPr>
+        <p:spPr>
+          <a:xfrm>
+            <a:off x="4754880" y="3611880"/>
+            <a:ext cx="3931920" cy="548640"/>
+          </a:xfrm>
+          <a:prstGeom prst="rect">
+            <a:avLst/>
+          </a:prstGeom>
+          <a:noFill/>
+        </p:spPr>
+        <p:txBody>
+          <a:bodyPr wrap="square" lIns="0" rIns="0" tIns="0" bIns="0" anchor="t">
+            <a:spAutoFit/>
+          </a:bodyPr>
+          <a:lstStyle/>
+          <a:p>
+            <a:pPr algn="l"/>
+            <a:r>
+              <a:rPr sz="1400" b="1" i="1">
+                <a:solidFill>
+                  <a:srgbClr val="BB0027"/>
+                </a:solidFill>
+                <a:latin typeface="Open Sans"/>
+              </a:rPr>
+              <a:t>Pick the tile in the real layer, not only alone.</a:t>
+            </a:r>
+          </a:p>
+        </p:txBody>
+      </p:sp>
+      <p:sp>
+        <p:nvSpPr>
+          <p:cNvPr id="7" name="TextBox 6"/>
+          <p:cNvSpPr txBox="1"/>
+          <p:nvPr/>
+        </p:nvSpPr>
+        <p:spPr>
+          <a:xfrm>
+            <a:off x="4754880" y="4114800"/>
+            <a:ext cx="3931920" cy="182880"/>
+          </a:xfrm>
+          <a:prstGeom prst="rect">
+            <a:avLst/>
+          </a:prstGeom>
+          <a:noFill/>
+        </p:spPr>
+        <p:txBody>
+          <a:bodyPr wrap="square" lIns="0" rIns="0" tIns="0" bIns="0" anchor="t">
+            <a:spAutoFit/>
+          </a:bodyPr>
+          <a:lstStyle/>
+          <a:p>
+            <a:pPr algn="l"/>
+            <a:r>
+              <a:rPr sz="900" b="0" i="0">
+                <a:solidFill>
+                  <a:srgbClr val="5A6875"/>
+                </a:solidFill>
+                <a:latin typeface="Open Sans"/>
+              </a:rPr>
+              <a:t>1×10 in layers: 4-layer tile sweep (C = 16–128).</a:t>
+            </a:r>
+          </a:p>
+        </p:txBody>
+      </p:sp>
+    </p:spTree>
+  </p:cSld>
+  <p:clrMapOvr>
+    <a:masterClrMapping/>
+  </p:clrMapOvr>
+</p:sld>
+</file>
+
+<file path=ppt/slides/slide11.xml><?xml version="1.0" encoding="utf-8"?>
+<p:sld xmlns:a="http://schemas.openxmlformats.org/drawingml/2006/main" xmlns:p="http://schemas.openxmlformats.org/presentationml/2006/main" xmlns:r="http://schemas.openxmlformats.org/officeDocument/2006/relationships">
+  <p:cSld>
+    <p:spTree>
+      <p:nvGrpSpPr>
+        <p:cNvPr id="1" name=""/>
+        <p:cNvGrpSpPr/>
+        <p:nvPr/>
+      </p:nvGrpSpPr>
+      <p:grpSpPr/>
+      <p:sp>
+        <p:nvSpPr>
+          <p:cNvPr id="2" name="Title 1"/>
+          <p:cNvSpPr>
+            <a:spLocks noGrp="1"/>
+          </p:cNvSpPr>
+          <p:nvPr>
+            <p:ph type="title"/>
+          </p:nvPr>
+        </p:nvSpPr>
+        <p:spPr/>
+        <p:txBody>
+          <a:bodyPr/>
+          <a:lstStyle/>
+          <a:p>
+            <a:r>
+              <a:t>1.24× faster than OpenCV on all 32 layers</a:t>
+            </a:r>
+          </a:p>
+        </p:txBody>
+      </p:sp>
+      <p:graphicFrame>
+        <p:nvGraphicFramePr>
+          <p:cNvPr id="3" name="Chart 2"/>
+          <p:cNvGraphicFramePr>
+            <a:graphicFrameLocks noGrp="1"/>
+          </p:cNvGraphicFramePr>
+          <p:nvPr/>
+        </p:nvGraphicFramePr>
+        <p:xfrm>
+          <a:off x="457200" y="1005840"/>
+          <a:ext cx="5120640" cy="3108960"/>
+        </p:xfrm>
+        <a:graphic>
+          <a:graphicData uri="http://schemas.openxmlformats.org/drawingml/2006/chart">
+            <c:chart xmlns:c="http://schemas.openxmlformats.org/drawingml/2006/chart" r:id="rId3"/>
+          </a:graphicData>
+        </a:graphic>
+      </p:graphicFrame>
+      <p:sp>
+        <p:nvSpPr>
+          <p:cNvPr id="4" name="TextBox 3"/>
+          <p:cNvSpPr txBox="1"/>
+          <p:nvPr/>
+        </p:nvSpPr>
+        <p:spPr>
+          <a:xfrm>
+            <a:off x="5943600" y="1005840"/>
+            <a:ext cx="2743200" cy="548640"/>
+          </a:xfrm>
+          <a:prstGeom prst="rect">
+            <a:avLst/>
+          </a:prstGeom>
+          <a:noFill/>
+        </p:spPr>
+        <p:txBody>
+          <a:bodyPr wrap="square" lIns="0" rIns="0" tIns="0" bIns="0" anchor="t">
+            <a:spAutoFit/>
+          </a:bodyPr>
+          <a:lstStyle/>
+          <a:p>
+            <a:pPr algn="l"/>
+            <a:r>
+              <a:rPr sz="3000" b="1" i="0">
+                <a:solidFill>
+                  <a:srgbClr val="BB0027"/>
+                </a:solidFill>
+                <a:latin typeface="Open Sans"/>
+              </a:rPr>
+              <a:t>1.24×</a:t>
+            </a:r>
+          </a:p>
+        </p:txBody>
+      </p:sp>
+      <p:sp>
+        <p:nvSpPr>
+          <p:cNvPr id="5" name="TextBox 4"/>
+          <p:cNvSpPr txBox="1"/>
+          <p:nvPr/>
+        </p:nvSpPr>
+        <p:spPr>
+          <a:xfrm>
+            <a:off x="5943600" y="1572768"/>
+            <a:ext cx="2743200" cy="548640"/>
+          </a:xfrm>
+          <a:prstGeom prst="rect">
+            <a:avLst/>
+          </a:prstGeom>
+          <a:noFill/>
+        </p:spPr>
+        <p:txBody>
+          <a:bodyPr wrap="square" lIns="0" rIns="0" tIns="0" bIns="0" anchor="t">
+            <a:spAutoFit/>
+          </a:bodyPr>
+          <a:lstStyle/>
+          <a:p>
+            <a:pPr algn="l"/>
+            <a:r>
+              <a:rPr sz="1200" b="0" i="0">
+                <a:solidFill>
+                  <a:srgbClr val="5A6875"/>
+                </a:solidFill>
+                <a:latin typeface="Open Sans"/>
+              </a:rPr>
+              <a:t>v2 vs OpenCV DNN, all 32 layers, 1 core</a:t>
+            </a:r>
+          </a:p>
+        </p:txBody>
+      </p:sp>
+      <p:sp>
+        <p:nvSpPr>
+          <p:cNvPr id="6" name="TextBox 5"/>
+          <p:cNvSpPr txBox="1"/>
+          <p:nvPr/>
+        </p:nvSpPr>
+        <p:spPr>
+          <a:xfrm>
+            <a:off x="5943600" y="2057400"/>
+            <a:ext cx="2743200" cy="548640"/>
+          </a:xfrm>
+          <a:prstGeom prst="rect">
+            <a:avLst/>
+          </a:prstGeom>
+          <a:noFill/>
+        </p:spPr>
+        <p:txBody>
+          <a:bodyPr wrap="square" lIns="0" rIns="0" tIns="0" bIns="0" anchor="t">
+            <a:spAutoFit/>
+          </a:bodyPr>
+          <a:lstStyle/>
+          <a:p>
+            <a:pPr algn="l"/>
+            <a:r>
+              <a:rPr sz="3000" b="1" i="0">
+                <a:solidFill>
+                  <a:srgbClr val="6B7782"/>
+                </a:solidFill>
+                <a:latin typeface="Open Sans"/>
+              </a:rPr>
+              <a:t>77% vs 62%</a:t>
+            </a:r>
+          </a:p>
+        </p:txBody>
+      </p:sp>
+      <p:sp>
+        <p:nvSpPr>
+          <p:cNvPr id="7" name="TextBox 6"/>
+          <p:cNvSpPr txBox="1"/>
+          <p:nvPr/>
+        </p:nvSpPr>
+        <p:spPr>
+          <a:xfrm>
+            <a:off x="5943600" y="2624328"/>
+            <a:ext cx="2743200" cy="548640"/>
+          </a:xfrm>
+          <a:prstGeom prst="rect">
+            <a:avLst/>
+          </a:prstGeom>
+          <a:noFill/>
+        </p:spPr>
+        <p:txBody>
+          <a:bodyPr wrap="square" lIns="0" rIns="0" tIns="0" bIns="0" anchor="t">
+            <a:spAutoFit/>
+          </a:bodyPr>
+          <a:lstStyle/>
+          <a:p>
+            <a:pPr algn="l"/>
+            <a:r>
+              <a:rPr sz="1200" b="0" i="0">
+                <a:solidFill>
+                  <a:srgbClr val="5A6875"/>
+                </a:solidFill>
+                <a:latin typeface="Open Sans"/>
+              </a:rPr>
+              <a:t>of peak: v2 vs OpenCV DNN</a:t>
+            </a:r>
+          </a:p>
+        </p:txBody>
+      </p:sp>
+      <p:sp>
+        <p:nvSpPr>
+          <p:cNvPr id="8" name="TextBox 7"/>
+          <p:cNvSpPr txBox="1"/>
+          <p:nvPr/>
+        </p:nvSpPr>
+        <p:spPr>
+          <a:xfrm>
+            <a:off x="5943600" y="3154680"/>
+            <a:ext cx="2743200" cy="1005840"/>
+          </a:xfrm>
+          <a:prstGeom prst="rect">
+            <a:avLst/>
+          </a:prstGeom>
+          <a:noFill/>
+        </p:spPr>
+        <p:txBody>
+          <a:bodyPr wrap="square" lIns="0" rIns="0" tIns="0" bIns="0" anchor="t">
+            <a:spAutoFit/>
+          </a:bodyPr>
+          <a:lstStyle/>
+          <a:p>
+            <a:pPr algn="l"/>
+            <a:r>
+              <a:rPr sz="1150" b="0" i="1">
+                <a:solidFill>
+                  <a:srgbClr val="5A6875"/>
+                </a:solidFill>
+                <a:latin typeface="Open Sans"/>
+              </a:rPr>
+              <a:t>Next: cache blocking for C ≥ 128, then threads on 20 cores (v3: 13.5× on 20 cores).</a:t>
+            </a:r>
+          </a:p>
+        </p:txBody>
+      </p:sp>
+    </p:spTree>
+  </p:cSld>
+  <p:clrMapOvr>
+    <a:masterClrMapping/>
+  </p:clrMapOvr>
+</p:sld>
+</file>
+
+<file path=ppt/slides/slide12.xml><?xml version="1.0" encoding="utf-8"?>
+<p:sld xmlns:a="http://schemas.openxmlformats.org/drawingml/2006/main" xmlns:p="http://schemas.openxmlformats.org/presentationml/2006/main" xmlns:r="http://schemas.openxmlformats.org/officeDocument/2006/relationships">
+  <p:cSld>
+    <p:spTree>
+      <p:nvGrpSpPr>
+        <p:cNvPr id="1" name=""/>
+        <p:cNvGrpSpPr/>
+        <p:nvPr/>
+      </p:nvGrpSpPr>
+      <p:grpSpPr/>
+      <p:sp>
+        <p:nvSpPr>
+          <p:cNvPr id="2" name="Title 1"/>
+          <p:cNvSpPr>
+            <a:spLocks noGrp="1"/>
+          </p:cNvSpPr>
+          <p:nvPr>
+            <p:ph type="title"/>
+          </p:nvPr>
+        </p:nvSpPr>
+        <p:spPr/>
+        <p:txBody>
+          <a:bodyPr/>
+          <a:lstStyle/>
+          <a:p>
+            <a:r>
+              <a:t>Backup: the same sweep with SiLU on</a:t>
             </a:r>
           </a:p>
         </p:txBody>
       </p:sp>
       <p:pic>
         <p:nvPicPr>
-          <p:cNvPr id="3" name="Picture 2" descr="ukr_sweep_2x6_34.png"/>
+          <p:cNvPr id="3" name="Picture 2" descr="ukr_sweep_silu_34_intrinsics.png"/>
           <p:cNvPicPr>
             <a:picLocks noChangeAspect="1"/>
           </p:cNvPicPr>
@@ -7480,48 +8391,24 @@
         </p:blipFill>
         <p:spPr>
           <a:xfrm>
-            <a:off x="457200" y="1051560"/>
-            <a:ext cx="4023360" cy="2145792"/>
+            <a:off x="457200" y="960120"/>
+            <a:ext cx="5486400" cy="2926080"/>
           </a:xfrm>
           <a:prstGeom prst="rect">
             <a:avLst/>
           </a:prstGeom>
         </p:spPr>
       </p:pic>
-      <p:pic>
-        <p:nvPicPr>
-          <p:cNvPr id="4" name="Picture 3" descr="ukr_sweep_34.png"/>
-          <p:cNvPicPr>
-            <a:picLocks noChangeAspect="1"/>
-          </p:cNvPicPr>
-          <p:nvPr/>
-        </p:nvPicPr>
-        <p:blipFill>
-          <a:blip r:embed="rId4"/>
-          <a:stretch>
-            <a:fillRect/>
-          </a:stretch>
-        </p:blipFill>
-        <p:spPr>
-          <a:xfrm>
-            <a:off x="4663440" y="1051560"/>
-            <a:ext cx="4023360" cy="2145792"/>
-          </a:xfrm>
-          <a:prstGeom prst="rect">
-            <a:avLst/>
-          </a:prstGeom>
-        </p:spPr>
-      </p:pic>
-      <p:sp>
-        <p:nvSpPr>
-          <p:cNvPr id="5" name="TextBox 4"/>
+      <p:sp>
+        <p:nvSpPr>
+          <p:cNvPr id="4" name="TextBox 3"/>
           <p:cNvSpPr txBox="1"/>
           <p:nvPr/>
         </p:nvSpPr>
         <p:spPr>
           <a:xfrm>
-            <a:off x="457200" y="3291840"/>
-            <a:ext cx="4023360" cy="640080"/>
+            <a:off x="6172200" y="1005840"/>
+            <a:ext cx="2514600" cy="3017520"/>
           </a:xfrm>
           <a:prstGeom prst="rect">
             <a:avLst/>
@@ -7536,48 +8423,47 @@
           <a:p>
             <a:pPr algn="l"/>
             <a:r>
-              <a:rPr sz="1050" b="0" i="0">
-                <a:solidFill>
-                  <a:srgbClr val="5A6875"/>
+              <a:rPr sz="1150" b="1" i="0">
+                <a:solidFill>
+                  <a:srgbClr val="1B2630"/>
                 </a:solidFill>
                 <a:latin typeface="Open Sans"/>
               </a:rPr>
-              <a:t>2×6 asm 90.2% mean (C = 32–256); 2×5 81.4%. SiLU costs a fixed 160–290 cycles per call.</a:t>
-            </a:r>
-          </a:p>
-        </p:txBody>
-      </p:sp>
-      <p:sp>
-        <p:nvSpPr>
-          <p:cNvPr id="6" name="TextBox 5"/>
-          <p:cNvSpPr txBox="1"/>
-          <p:nvPr/>
-        </p:nvSpPr>
-        <p:spPr>
-          <a:xfrm>
-            <a:off x="4663440" y="3291840"/>
-            <a:ext cx="4023360" cy="640080"/>
-          </a:xfrm>
-          <a:prstGeom prst="rect">
-            <a:avLst/>
-          </a:prstGeom>
-          <a:noFill/>
-        </p:spPr>
-        <p:txBody>
-          <a:bodyPr wrap="square" lIns="0" rIns="0" tIns="0" bIns="0" anchor="t">
-            <a:spAutoFit/>
-          </a:bodyPr>
-          <a:lstStyle/>
-          <a:p>
-            <a:pPr algn="l"/>
-            <a:r>
-              <a:rPr sz="1050" b="0" i="0">
+              <a:t>SiLU on: </a:t>
+            </a:r>
+            <a:r>
+              <a:rPr sz="1150" b="0" i="0">
                 <a:solidFill>
                   <a:srgbClr val="5A6875"/>
                 </a:solidFill>
                 <a:latin typeface="Open Sans"/>
               </a:rPr>
-              <a:t>4×3 asm: best 87.5% at C = 120, 57% at C = 256: its weights leave L2 (cache blocking fixes this).</a:t>
+              <a:t>2×5 81.4% mean (C = 32–256), 2×6 about 3 points lower.</a:t>
+            </a:r>
+          </a:p>
+          <a:p>
+            <a:pPr algn="l">
+              <a:spcBef>
+                <a:spcPts val="600"/>
+              </a:spcBef>
+            </a:pPr>
+            <a:r>
+              <a:rPr sz="1150" b="1" i="0">
+                <a:solidFill>
+                  <a:srgbClr val="1B2630"/>
+                </a:solidFill>
+                <a:latin typeface="Open Sans"/>
+              </a:rPr>
+              <a:t>Cost: </a:t>
+            </a:r>
+            <a:r>
+              <a:rPr sz="1150" b="0" i="0">
+                <a:solidFill>
+                  <a:srgbClr val="5A6875"/>
+                </a:solidFill>
+                <a:latin typeface="Open Sans"/>
+              </a:rPr>
+              <a:t>a fixed 160–290 cycles per call, 20% of the call at C = 16, about 4.5% at C = 64, nothing measurable from C = 128.</a:t>
             </a:r>
           </a:p>
         </p:txBody>
@@ -9209,32 +10095,67 @@
           <a:lstStyle/>
           <a:p>
             <a:r>
-              <a:t>How the numbers are measured</a:t>
-            </a:r>
-          </a:p>
-        </p:txBody>
-      </p:sp>
-      <p:sp>
-        <p:nvSpPr>
-          <p:cNvPr id="3" name="assume-0"/>
+              <a:t>(a)–(c): size, registers, allocation</a:t>
+            </a:r>
+          </a:p>
+        </p:txBody>
+      </p:sp>
+      <p:sp>
+        <p:nvSpPr>
+          <p:cNvPr id="3" name="TextBox 2"/>
+          <p:cNvSpPr txBox="1"/>
+          <p:nvPr/>
+        </p:nvSpPr>
+        <p:spPr>
+          <a:xfrm>
+            <a:off x="457200" y="960120"/>
+            <a:ext cx="4297680" cy="274320"/>
+          </a:xfrm>
+          <a:prstGeom prst="rect">
+            <a:avLst/>
+          </a:prstGeom>
+          <a:noFill/>
+        </p:spPr>
+        <p:txBody>
+          <a:bodyPr wrap="square" lIns="0" rIns="0" tIns="0" bIns="0" anchor="t">
+            <a:spAutoFit/>
+          </a:bodyPr>
+          <a:lstStyle/>
+          <a:p>
+            <a:pPr algn="l"/>
+            <a:r>
+              <a:rPr sz="1100" b="1" i="0">
+                <a:solidFill>
+                  <a:srgbClr val="1B2630"/>
+                </a:solidFill>
+                <a:latin typeface="Open Sans"/>
+              </a:rPr>
+              <a:t>16 YMM registers, 8 floats each (row 1: block kb, row 2: kb+1)</a:t>
+            </a:r>
+          </a:p>
+        </p:txBody>
+      </p:sp>
+      <p:sp>
+        <p:nvSpPr>
+          <p:cNvPr id="4" name="Rectangle 3"/>
           <p:cNvSpPr/>
           <p:nvPr/>
         </p:nvSpPr>
         <p:spPr>
           <a:xfrm>
-            <a:off x="457200" y="1005840"/>
-            <a:ext cx="4023360" cy="713232"/>
-          </a:xfrm>
-          <a:prstGeom prst="roundRect">
-            <a:avLst>
-              <a:gd name="adj" fmla="val 8000"/>
-            </a:avLst>
+            <a:off x="457200" y="1325880"/>
+            <a:ext cx="786384" cy="475488"/>
+          </a:xfrm>
+          <a:prstGeom prst="rect">
+            <a:avLst/>
           </a:prstGeom>
           <a:solidFill>
-            <a:srgbClr val="F1F3F5"/>
+            <a:srgbClr val="D7EAF0"/>
           </a:solidFill>
-          <a:ln>
-            <a:noFill/>
+          <a:ln w="15875">
+            <a:solidFill>
+              <a:srgbClr val="0C6A87"/>
+            </a:solidFill>
           </a:ln>
           <a:effectLst/>
         </p:spPr>
@@ -9253,104 +10174,43 @@
           </a:fontRef>
         </p:style>
         <p:txBody>
-          <a:bodyPr rtlCol="0" anchor="ctr"/>
+          <a:bodyPr rtlCol="0" anchor="ctr" lIns="0" rIns="0"/>
           <a:lstStyle/>
           <a:p>
             <a:pPr algn="ctr"/>
-          </a:p>
-        </p:txBody>
-      </p:sp>
-      <p:sp>
-        <p:nvSpPr>
-          <p:cNvPr id="4" name="TextBox 3"/>
-          <p:cNvSpPr txBox="1"/>
-          <p:nvPr/>
-        </p:nvSpPr>
-        <p:spPr>
-          <a:xfrm>
-            <a:off x="566928" y="1069848"/>
-            <a:ext cx="3749039" cy="228600"/>
-          </a:xfrm>
-          <a:prstGeom prst="rect">
-            <a:avLst/>
-          </a:prstGeom>
-          <a:noFill/>
-        </p:spPr>
-        <p:txBody>
-          <a:bodyPr wrap="square" lIns="0" rIns="0" tIns="0" bIns="0" anchor="t">
-            <a:spAutoFit/>
-          </a:bodyPr>
-          <a:lstStyle/>
-          <a:p>
-            <a:pPr algn="l"/>
-            <a:r>
-              <a:rPr sz="1150" b="1" i="0">
-                <a:solidFill>
-                  <a:srgbClr val="1B2630"/>
-                </a:solidFill>
-                <a:latin typeface="Open Sans"/>
+            <a:r>
+              <a:rPr sz="1100" b="1">
+                <a:solidFill>
+                  <a:srgbClr val="0C6A87"/>
+                </a:solidFill>
+                <a:latin typeface="Courier New"/>
               </a:rPr>
-              <a:t>Machine</a:t>
-            </a:r>
-          </a:p>
-        </p:txBody>
-      </p:sp>
-      <p:sp>
-        <p:nvSpPr>
-          <p:cNvPr id="5" name="TextBox 4"/>
-          <p:cNvSpPr txBox="1"/>
-          <p:nvPr/>
-        </p:nvSpPr>
-        <p:spPr>
-          <a:xfrm>
-            <a:off x="566928" y="1307592"/>
-            <a:ext cx="3794760" cy="411480"/>
-          </a:xfrm>
-          <a:prstGeom prst="rect">
-            <a:avLst/>
-          </a:prstGeom>
-          <a:noFill/>
-        </p:spPr>
-        <p:txBody>
-          <a:bodyPr wrap="square" lIns="0" rIns="0" tIns="0" bIns="0" anchor="t">
-            <a:spAutoFit/>
-          </a:bodyPr>
-          <a:lstStyle/>
-          <a:p>
-            <a:pPr algn="l"/>
-            <a:r>
-              <a:rPr sz="950" b="0" i="0">
-                <a:solidFill>
-                  <a:srgbClr val="5A6875"/>
-                </a:solidFill>
-                <a:latin typeface="Open Sans"/>
-              </a:rPr>
-              <a:t>ece028, Xeon E5-2640 v4 (Broadwell), 1 core pinned with taskset, GCC 8.5 -O3 -march=broadwell</a:t>
-            </a:r>
-          </a:p>
-        </p:txBody>
-      </p:sp>
-      <p:sp>
-        <p:nvSpPr>
-          <p:cNvPr id="6" name="assume-1"/>
+              <a:t>c[0][0]</a:t>
+            </a:r>
+          </a:p>
+        </p:txBody>
+      </p:sp>
+      <p:sp>
+        <p:nvSpPr>
+          <p:cNvPr id="5" name="Rectangle 4"/>
           <p:cNvSpPr/>
           <p:nvPr/>
         </p:nvSpPr>
         <p:spPr>
           <a:xfrm>
-            <a:off x="4617720" y="1005840"/>
-            <a:ext cx="4023360" cy="713232"/>
-          </a:xfrm>
-          <a:prstGeom prst="roundRect">
-            <a:avLst>
-              <a:gd name="adj" fmla="val 8000"/>
-            </a:avLst>
+            <a:off x="1298448" y="1325880"/>
+            <a:ext cx="786384" cy="475488"/>
+          </a:xfrm>
+          <a:prstGeom prst="rect">
+            <a:avLst/>
           </a:prstGeom>
           <a:solidFill>
-            <a:srgbClr val="F1F3F5"/>
+            <a:srgbClr val="D7EAF0"/>
           </a:solidFill>
-          <a:ln>
-            <a:noFill/>
+          <a:ln w="15875">
+            <a:solidFill>
+              <a:srgbClr val="0C6A87"/>
+            </a:solidFill>
           </a:ln>
           <a:effectLst/>
         </p:spPr>
@@ -9369,104 +10229,43 @@
           </a:fontRef>
         </p:style>
         <p:txBody>
-          <a:bodyPr rtlCol="0" anchor="ctr"/>
+          <a:bodyPr rtlCol="0" anchor="ctr" lIns="0" rIns="0"/>
           <a:lstStyle/>
           <a:p>
             <a:pPr algn="ctr"/>
-          </a:p>
-        </p:txBody>
-      </p:sp>
-      <p:sp>
-        <p:nvSpPr>
-          <p:cNvPr id="7" name="TextBox 6"/>
-          <p:cNvSpPr txBox="1"/>
-          <p:nvPr/>
-        </p:nvSpPr>
-        <p:spPr>
-          <a:xfrm>
-            <a:off x="4727448" y="1069848"/>
-            <a:ext cx="3749039" cy="228600"/>
-          </a:xfrm>
-          <a:prstGeom prst="rect">
-            <a:avLst/>
-          </a:prstGeom>
-          <a:noFill/>
-        </p:spPr>
-        <p:txBody>
-          <a:bodyPr wrap="square" lIns="0" rIns="0" tIns="0" bIns="0" anchor="t">
-            <a:spAutoFit/>
-          </a:bodyPr>
-          <a:lstStyle/>
-          <a:p>
-            <a:pPr algn="l"/>
-            <a:r>
-              <a:rPr sz="1150" b="1" i="0">
-                <a:solidFill>
-                  <a:srgbClr val="1B2630"/>
-                </a:solidFill>
-                <a:latin typeface="Open Sans"/>
+            <a:r>
+              <a:rPr sz="1100" b="1">
+                <a:solidFill>
+                  <a:srgbClr val="0C6A87"/>
+                </a:solidFill>
+                <a:latin typeface="Courier New"/>
               </a:rPr>
-              <a:t>Peak</a:t>
-            </a:r>
-          </a:p>
-        </p:txBody>
-      </p:sp>
-      <p:sp>
-        <p:nvSpPr>
-          <p:cNvPr id="8" name="TextBox 7"/>
-          <p:cNvSpPr txBox="1"/>
-          <p:nvPr/>
-        </p:nvSpPr>
-        <p:spPr>
-          <a:xfrm>
-            <a:off x="4727448" y="1307592"/>
-            <a:ext cx="3794760" cy="411480"/>
-          </a:xfrm>
-          <a:prstGeom prst="rect">
-            <a:avLst/>
-          </a:prstGeom>
-          <a:noFill/>
-        </p:spPr>
-        <p:txBody>
-          <a:bodyPr wrap="square" lIns="0" rIns="0" tIns="0" bIns="0" anchor="t">
-            <a:spAutoFit/>
-          </a:bodyPr>
-          <a:lstStyle/>
-          <a:p>
-            <a:pPr algn="l"/>
-            <a:r>
-              <a:rPr sz="950" b="0" i="0">
-                <a:solidFill>
-                  <a:srgbClr val="5A6875"/>
-                </a:solidFill>
-                <a:latin typeface="Open Sans"/>
-              </a:rPr>
-              <a:t>2 FMA units × 8 FP32 lanes × 2 FLOPs = 32 FLOPs/cycle per core (AVX2, no AVX-512)</a:t>
-            </a:r>
-          </a:p>
-        </p:txBody>
-      </p:sp>
-      <p:sp>
-        <p:nvSpPr>
-          <p:cNvPr id="9" name="assume-2"/>
+              <a:t>c[0][1]</a:t>
+            </a:r>
+          </a:p>
+        </p:txBody>
+      </p:sp>
+      <p:sp>
+        <p:nvSpPr>
+          <p:cNvPr id="6" name="Rectangle 5"/>
           <p:cNvSpPr/>
           <p:nvPr/>
         </p:nvSpPr>
         <p:spPr>
           <a:xfrm>
-            <a:off x="457200" y="1810512"/>
-            <a:ext cx="4023360" cy="713232"/>
-          </a:xfrm>
-          <a:prstGeom prst="roundRect">
-            <a:avLst>
-              <a:gd name="adj" fmla="val 8000"/>
-            </a:avLst>
+            <a:off x="2139696" y="1325880"/>
+            <a:ext cx="786384" cy="475488"/>
+          </a:xfrm>
+          <a:prstGeom prst="rect">
+            <a:avLst/>
           </a:prstGeom>
           <a:solidFill>
-            <a:srgbClr val="F1F3F5"/>
+            <a:srgbClr val="D7EAF0"/>
           </a:solidFill>
-          <a:ln>
-            <a:noFill/>
+          <a:ln w="15875">
+            <a:solidFill>
+              <a:srgbClr val="0C6A87"/>
+            </a:solidFill>
           </a:ln>
           <a:effectLst/>
         </p:spPr>
@@ -9485,104 +10284,43 @@
           </a:fontRef>
         </p:style>
         <p:txBody>
-          <a:bodyPr rtlCol="0" anchor="ctr"/>
+          <a:bodyPr rtlCol="0" anchor="ctr" lIns="0" rIns="0"/>
           <a:lstStyle/>
           <a:p>
             <a:pPr algn="ctr"/>
-          </a:p>
-        </p:txBody>
-      </p:sp>
-      <p:sp>
-        <p:nvSpPr>
-          <p:cNvPr id="10" name="TextBox 9"/>
-          <p:cNvSpPr txBox="1"/>
-          <p:nvPr/>
-        </p:nvSpPr>
-        <p:spPr>
-          <a:xfrm>
-            <a:off x="566928" y="1874519"/>
-            <a:ext cx="3749039" cy="228600"/>
-          </a:xfrm>
-          <a:prstGeom prst="rect">
-            <a:avLst/>
-          </a:prstGeom>
-          <a:noFill/>
-        </p:spPr>
-        <p:txBody>
-          <a:bodyPr wrap="square" lIns="0" rIns="0" tIns="0" bIns="0" anchor="t">
-            <a:spAutoFit/>
-          </a:bodyPr>
-          <a:lstStyle/>
-          <a:p>
-            <a:pPr algn="l"/>
-            <a:r>
-              <a:rPr sz="1150" b="1" i="0">
-                <a:solidFill>
-                  <a:srgbClr val="BB0027"/>
-                </a:solidFill>
-                <a:latin typeface="Open Sans"/>
+            <a:r>
+              <a:rPr sz="1100" b="1">
+                <a:solidFill>
+                  <a:srgbClr val="0C6A87"/>
+                </a:solidFill>
+                <a:latin typeface="Courier New"/>
               </a:rPr>
-              <a:t>Cycles</a:t>
-            </a:r>
-          </a:p>
-        </p:txBody>
-      </p:sp>
-      <p:sp>
-        <p:nvSpPr>
-          <p:cNvPr id="11" name="TextBox 10"/>
-          <p:cNvSpPr txBox="1"/>
-          <p:nvPr/>
-        </p:nvSpPr>
-        <p:spPr>
-          <a:xfrm>
-            <a:off x="566928" y="2112264"/>
-            <a:ext cx="3794760" cy="411480"/>
-          </a:xfrm>
-          <a:prstGeom prst="rect">
-            <a:avLst/>
-          </a:prstGeom>
-          <a:noFill/>
-        </p:spPr>
-        <p:txBody>
-          <a:bodyPr wrap="square" lIns="0" rIns="0" tIns="0" bIns="0" anchor="t">
-            <a:spAutoFit/>
-          </a:bodyPr>
-          <a:lstStyle/>
-          <a:p>
-            <a:pPr algn="l"/>
-            <a:r>
-              <a:rPr sz="950" b="0" i="0">
-                <a:solidFill>
-                  <a:srgbClr val="5A6875"/>
-                </a:solidFill>
-                <a:latin typeface="Open Sans"/>
-              </a:rPr>
-              <a:t>wall time × 3.4 GHz (max turbo), as in Assignment 2: can only understate % of peak</a:t>
-            </a:r>
-          </a:p>
-        </p:txBody>
-      </p:sp>
-      <p:sp>
-        <p:nvSpPr>
-          <p:cNvPr id="12" name="assume-3"/>
+              <a:t>c[0][2]</a:t>
+            </a:r>
+          </a:p>
+        </p:txBody>
+      </p:sp>
+      <p:sp>
+        <p:nvSpPr>
+          <p:cNvPr id="7" name="Rectangle 6"/>
           <p:cNvSpPr/>
           <p:nvPr/>
         </p:nvSpPr>
         <p:spPr>
           <a:xfrm>
-            <a:off x="4617720" y="1810512"/>
-            <a:ext cx="4023360" cy="713232"/>
-          </a:xfrm>
-          <a:prstGeom prst="roundRect">
-            <a:avLst>
-              <a:gd name="adj" fmla="val 8000"/>
-            </a:avLst>
+            <a:off x="2980944" y="1325880"/>
+            <a:ext cx="786384" cy="475488"/>
+          </a:xfrm>
+          <a:prstGeom prst="rect">
+            <a:avLst/>
           </a:prstGeom>
           <a:solidFill>
-            <a:srgbClr val="F1F3F5"/>
+            <a:srgbClr val="D7EAF0"/>
           </a:solidFill>
-          <a:ln>
-            <a:noFill/>
+          <a:ln w="15875">
+            <a:solidFill>
+              <a:srgbClr val="0C6A87"/>
+            </a:solidFill>
           </a:ln>
           <a:effectLst/>
         </p:spPr>
@@ -9601,104 +10339,43 @@
           </a:fontRef>
         </p:style>
         <p:txBody>
-          <a:bodyPr rtlCol="0" anchor="ctr"/>
+          <a:bodyPr rtlCol="0" anchor="ctr" lIns="0" rIns="0"/>
           <a:lstStyle/>
           <a:p>
             <a:pPr algn="ctr"/>
-          </a:p>
-        </p:txBody>
-      </p:sp>
-      <p:sp>
-        <p:nvSpPr>
-          <p:cNvPr id="13" name="TextBox 12"/>
-          <p:cNvSpPr txBox="1"/>
-          <p:nvPr/>
-        </p:nvSpPr>
-        <p:spPr>
-          <a:xfrm>
-            <a:off x="4727448" y="1874519"/>
-            <a:ext cx="3749039" cy="228600"/>
-          </a:xfrm>
-          <a:prstGeom prst="rect">
-            <a:avLst/>
-          </a:prstGeom>
-          <a:noFill/>
-        </p:spPr>
-        <p:txBody>
-          <a:bodyPr wrap="square" lIns="0" rIns="0" tIns="0" bIns="0" anchor="t">
-            <a:spAutoFit/>
-          </a:bodyPr>
-          <a:lstStyle/>
-          <a:p>
-            <a:pPr algn="l"/>
-            <a:r>
-              <a:rPr sz="1150" b="1" i="0">
-                <a:solidFill>
-                  <a:srgbClr val="1B2630"/>
-                </a:solidFill>
-                <a:latin typeface="Open Sans"/>
+            <a:r>
+              <a:rPr sz="1100" b="1">
+                <a:solidFill>
+                  <a:srgbClr val="0C6A87"/>
+                </a:solidFill>
+                <a:latin typeface="Courier New"/>
               </a:rPr>
-              <a:t>FLOPs</a:t>
-            </a:r>
-          </a:p>
-        </p:txBody>
-      </p:sp>
-      <p:sp>
-        <p:nvSpPr>
-          <p:cNvPr id="14" name="TextBox 13"/>
-          <p:cNvSpPr txBox="1"/>
-          <p:nvPr/>
-        </p:nvSpPr>
-        <p:spPr>
-          <a:xfrm>
-            <a:off x="4727448" y="2112264"/>
-            <a:ext cx="3794760" cy="411480"/>
-          </a:xfrm>
-          <a:prstGeom prst="rect">
-            <a:avLst/>
-          </a:prstGeom>
-          <a:noFill/>
-        </p:spPr>
-        <p:txBody>
-          <a:bodyPr wrap="square" lIns="0" rIns="0" tIns="0" bIns="0" anchor="t">
-            <a:spAutoFit/>
-          </a:bodyPr>
-          <a:lstStyle/>
-          <a:p>
-            <a:pPr algn="l"/>
-            <a:r>
-              <a:rPr sz="950" b="0" i="0">
-                <a:solidFill>
-                  <a:srgbClr val="5A6875"/>
-                </a:solidFill>
-                <a:latin typeface="Open Sans"/>
-              </a:rPr>
-              <a:t>2 × outputs × C × 9: only the convolution's multiply-adds; bias and SiLU count as zero</a:t>
-            </a:r>
-          </a:p>
-        </p:txBody>
-      </p:sp>
-      <p:sp>
-        <p:nvSpPr>
-          <p:cNvPr id="15" name="assume-4"/>
+              <a:t>c[0][3]</a:t>
+            </a:r>
+          </a:p>
+        </p:txBody>
+      </p:sp>
+      <p:sp>
+        <p:nvSpPr>
+          <p:cNvPr id="8" name="Rectangle 7"/>
           <p:cNvSpPr/>
           <p:nvPr/>
         </p:nvSpPr>
         <p:spPr>
           <a:xfrm>
-            <a:off x="457200" y="2615184"/>
-            <a:ext cx="4023360" cy="713232"/>
-          </a:xfrm>
-          <a:prstGeom prst="roundRect">
-            <a:avLst>
-              <a:gd name="adj" fmla="val 8000"/>
-            </a:avLst>
+            <a:off x="3822191" y="1325880"/>
+            <a:ext cx="786384" cy="475488"/>
+          </a:xfrm>
+          <a:prstGeom prst="rect">
+            <a:avLst/>
           </a:prstGeom>
           <a:solidFill>
-            <a:srgbClr val="F1F3F5"/>
+            <a:srgbClr val="D7EAF0"/>
           </a:solidFill>
-          <a:ln>
-            <a:noFill/>
+          <a:ln w="15875">
+            <a:solidFill>
+              <a:srgbClr val="0C6A87"/>
+            </a:solidFill>
           </a:ln>
           <a:effectLst/>
         </p:spPr>
@@ -9717,104 +10394,43 @@
           </a:fontRef>
         </p:style>
         <p:txBody>
-          <a:bodyPr rtlCol="0" anchor="ctr"/>
+          <a:bodyPr rtlCol="0" anchor="ctr" lIns="0" rIns="0"/>
           <a:lstStyle/>
           <a:p>
             <a:pPr algn="ctr"/>
-          </a:p>
-        </p:txBody>
-      </p:sp>
-      <p:sp>
-        <p:nvSpPr>
-          <p:cNvPr id="16" name="TextBox 15"/>
-          <p:cNvSpPr txBox="1"/>
-          <p:nvPr/>
-        </p:nvSpPr>
-        <p:spPr>
-          <a:xfrm>
-            <a:off x="566928" y="2679192"/>
-            <a:ext cx="3749039" cy="228600"/>
-          </a:xfrm>
-          <a:prstGeom prst="rect">
-            <a:avLst/>
-          </a:prstGeom>
-          <a:noFill/>
-        </p:spPr>
-        <p:txBody>
-          <a:bodyPr wrap="square" lIns="0" rIns="0" tIns="0" bIns="0" anchor="t">
-            <a:spAutoFit/>
-          </a:bodyPr>
-          <a:lstStyle/>
-          <a:p>
-            <a:pPr algn="l"/>
-            <a:r>
-              <a:rPr sz="1150" b="1" i="0">
-                <a:solidFill>
-                  <a:srgbClr val="1B2630"/>
-                </a:solidFill>
-                <a:latin typeface="Open Sans"/>
+            <a:r>
+              <a:rPr sz="1100" b="1">
+                <a:solidFill>
+                  <a:srgbClr val="0C6A87"/>
+                </a:solidFill>
+                <a:latin typeface="Courier New"/>
               </a:rPr>
-              <a:t>Microkernel alone</a:t>
-            </a:r>
-          </a:p>
-        </p:txBody>
-      </p:sp>
-      <p:sp>
-        <p:nvSpPr>
-          <p:cNvPr id="17" name="TextBox 16"/>
-          <p:cNvSpPr txBox="1"/>
-          <p:nvPr/>
-        </p:nvSpPr>
-        <p:spPr>
-          <a:xfrm>
-            <a:off x="566928" y="2916936"/>
-            <a:ext cx="3794760" cy="411480"/>
-          </a:xfrm>
-          <a:prstGeom prst="rect">
-            <a:avLst/>
-          </a:prstGeom>
-          <a:noFill/>
-        </p:spPr>
-        <p:txBody>
-          <a:bodyPr wrap="square" lIns="0" rIns="0" tIns="0" bIns="0" anchor="t">
-            <a:spAutoFit/>
-          </a:bodyPr>
-          <a:lstStyle/>
-          <a:p>
-            <a:pPr algn="l"/>
-            <a:r>
-              <a:rPr sz="950" b="0" i="0">
-                <a:solidFill>
-                  <a:srgbClr val="5A6875"/>
-                </a:solidFill>
-                <a:latin typeface="Open Sans"/>
-              </a:rPr>
-              <a:t>one tile of data reused (stays in L1/L2), 2 s warm-up, best of 3 runs, SiLU off</a:t>
-            </a:r>
-          </a:p>
-        </p:txBody>
-      </p:sp>
-      <p:sp>
-        <p:nvSpPr>
-          <p:cNvPr id="18" name="assume-5"/>
+              <a:t>c[0][4]</a:t>
+            </a:r>
+          </a:p>
+        </p:txBody>
+      </p:sp>
+      <p:sp>
+        <p:nvSpPr>
+          <p:cNvPr id="9" name="Rectangle 8"/>
           <p:cNvSpPr/>
           <p:nvPr/>
         </p:nvSpPr>
         <p:spPr>
           <a:xfrm>
-            <a:off x="4617720" y="2615184"/>
-            <a:ext cx="4023360" cy="713232"/>
-          </a:xfrm>
-          <a:prstGeom prst="roundRect">
-            <a:avLst>
-              <a:gd name="adj" fmla="val 8000"/>
-            </a:avLst>
+            <a:off x="457200" y="1892807"/>
+            <a:ext cx="786384" cy="475488"/>
+          </a:xfrm>
+          <a:prstGeom prst="rect">
+            <a:avLst/>
           </a:prstGeom>
           <a:solidFill>
-            <a:srgbClr val="F1F3F5"/>
+            <a:srgbClr val="D7EAF0"/>
           </a:solidFill>
-          <a:ln>
-            <a:noFill/>
+          <a:ln w="15875">
+            <a:solidFill>
+              <a:srgbClr val="0C6A87"/>
+            </a:solidFill>
           </a:ln>
           <a:effectLst/>
         </p:spPr>
@@ -9833,104 +10449,43 @@
           </a:fontRef>
         </p:style>
         <p:txBody>
-          <a:bodyPr rtlCol="0" anchor="ctr"/>
+          <a:bodyPr rtlCol="0" anchor="ctr" lIns="0" rIns="0"/>
           <a:lstStyle/>
           <a:p>
             <a:pPr algn="ctr"/>
-          </a:p>
-        </p:txBody>
-      </p:sp>
-      <p:sp>
-        <p:nvSpPr>
-          <p:cNvPr id="19" name="TextBox 18"/>
-          <p:cNvSpPr txBox="1"/>
-          <p:nvPr/>
-        </p:nvSpPr>
-        <p:spPr>
-          <a:xfrm>
-            <a:off x="4727448" y="2679192"/>
-            <a:ext cx="3749039" cy="228600"/>
-          </a:xfrm>
-          <a:prstGeom prst="rect">
-            <a:avLst/>
-          </a:prstGeom>
-          <a:noFill/>
-        </p:spPr>
-        <p:txBody>
-          <a:bodyPr wrap="square" lIns="0" rIns="0" tIns="0" bIns="0" anchor="t">
-            <a:spAutoFit/>
-          </a:bodyPr>
-          <a:lstStyle/>
-          <a:p>
-            <a:pPr algn="l"/>
-            <a:r>
-              <a:rPr sz="1150" b="1" i="0">
-                <a:solidFill>
-                  <a:srgbClr val="1B2630"/>
-                </a:solidFill>
-                <a:latin typeface="Open Sans"/>
+            <a:r>
+              <a:rPr sz="1100" b="1">
+                <a:solidFill>
+                  <a:srgbClr val="0C6A87"/>
+                </a:solidFill>
+                <a:latin typeface="Courier New"/>
               </a:rPr>
-              <a:t>Full layers</a:t>
-            </a:r>
-          </a:p>
-        </p:txBody>
-      </p:sp>
-      <p:sp>
-        <p:nvSpPr>
-          <p:cNvPr id="20" name="TextBox 19"/>
-          <p:cNvSpPr txBox="1"/>
-          <p:nvPr/>
-        </p:nvSpPr>
-        <p:spPr>
-          <a:xfrm>
-            <a:off x="4727448" y="2916936"/>
-            <a:ext cx="3794760" cy="411480"/>
-          </a:xfrm>
-          <a:prstGeom prst="rect">
-            <a:avLst/>
-          </a:prstGeom>
-          <a:noFill/>
-        </p:spPr>
-        <p:txBody>
-          <a:bodyPr wrap="square" lIns="0" rIns="0" tIns="0" bIns="0" anchor="t">
-            <a:spAutoFit/>
-          </a:bodyPr>
-          <a:lstStyle/>
-          <a:p>
-            <a:pPr algn="l"/>
-            <a:r>
-              <a:rPr sz="950" b="0" i="0">
-                <a:solidFill>
-                  <a:srgbClr val="5A6875"/>
-                </a:solidFill>
-                <a:latin typeface="Open Sans"/>
-              </a:rPr>
-              <a:t>all 32 real YOLOv8n layers, batch 1, 640 × 640 image, FP32, SiLU on</a:t>
-            </a:r>
-          </a:p>
-        </p:txBody>
-      </p:sp>
-      <p:sp>
-        <p:nvSpPr>
-          <p:cNvPr id="21" name="assume-6"/>
+              <a:t>c[1][0]</a:t>
+            </a:r>
+          </a:p>
+        </p:txBody>
+      </p:sp>
+      <p:sp>
+        <p:nvSpPr>
+          <p:cNvPr id="10" name="Rectangle 9"/>
           <p:cNvSpPr/>
           <p:nvPr/>
         </p:nvSpPr>
         <p:spPr>
           <a:xfrm>
-            <a:off x="457200" y="3419856"/>
-            <a:ext cx="4023360" cy="713232"/>
-          </a:xfrm>
-          <a:prstGeom prst="roundRect">
-            <a:avLst>
-              <a:gd name="adj" fmla="val 8000"/>
-            </a:avLst>
+            <a:off x="1298448" y="1892807"/>
+            <a:ext cx="786384" cy="475488"/>
+          </a:xfrm>
+          <a:prstGeom prst="rect">
+            <a:avLst/>
           </a:prstGeom>
           <a:solidFill>
-            <a:srgbClr val="F1F3F5"/>
+            <a:srgbClr val="D7EAF0"/>
           </a:solidFill>
-          <a:ln>
-            <a:noFill/>
+          <a:ln w="15875">
+            <a:solidFill>
+              <a:srgbClr val="0C6A87"/>
+            </a:solidFill>
           </a:ln>
           <a:effectLst/>
         </p:spPr>
@@ -9949,104 +10504,43 @@
           </a:fontRef>
         </p:style>
         <p:txBody>
-          <a:bodyPr rtlCol="0" anchor="ctr"/>
+          <a:bodyPr rtlCol="0" anchor="ctr" lIns="0" rIns="0"/>
           <a:lstStyle/>
           <a:p>
             <a:pPr algn="ctr"/>
-          </a:p>
-        </p:txBody>
-      </p:sp>
-      <p:sp>
-        <p:nvSpPr>
-          <p:cNvPr id="22" name="TextBox 21"/>
-          <p:cNvSpPr txBox="1"/>
-          <p:nvPr/>
-        </p:nvSpPr>
-        <p:spPr>
-          <a:xfrm>
-            <a:off x="566928" y="3483864"/>
-            <a:ext cx="3749039" cy="228600"/>
-          </a:xfrm>
-          <a:prstGeom prst="rect">
-            <a:avLst/>
-          </a:prstGeom>
-          <a:noFill/>
-        </p:spPr>
-        <p:txBody>
-          <a:bodyPr wrap="square" lIns="0" rIns="0" tIns="0" bIns="0" anchor="t">
-            <a:spAutoFit/>
-          </a:bodyPr>
-          <a:lstStyle/>
-          <a:p>
-            <a:pPr algn="l"/>
-            <a:r>
-              <a:rPr sz="1150" b="1" i="0">
-                <a:solidFill>
-                  <a:srgbClr val="1B2630"/>
-                </a:solidFill>
-                <a:latin typeface="Open Sans"/>
+            <a:r>
+              <a:rPr sz="1100" b="1">
+                <a:solidFill>
+                  <a:srgbClr val="0C6A87"/>
+                </a:solidFill>
+                <a:latin typeface="Courier New"/>
               </a:rPr>
-              <a:t>Correct</a:t>
-            </a:r>
-          </a:p>
-        </p:txBody>
-      </p:sp>
-      <p:sp>
-        <p:nvSpPr>
-          <p:cNvPr id="23" name="TextBox 22"/>
-          <p:cNvSpPr txBox="1"/>
-          <p:nvPr/>
-        </p:nvSpPr>
-        <p:spPr>
-          <a:xfrm>
-            <a:off x="566928" y="3721608"/>
-            <a:ext cx="3794760" cy="411480"/>
-          </a:xfrm>
-          <a:prstGeom prst="rect">
-            <a:avLst/>
-          </a:prstGeom>
-          <a:noFill/>
-        </p:spPr>
-        <p:txBody>
-          <a:bodyPr wrap="square" lIns="0" rIns="0" tIns="0" bIns="0" anchor="t">
-            <a:spAutoFit/>
-          </a:bodyPr>
-          <a:lstStyle/>
-          <a:p>
-            <a:pPr algn="l"/>
-            <a:r>
-              <a:rPr sz="950" b="0" i="0">
-                <a:solidFill>
-                  <a:srgbClr val="5A6875"/>
-                </a:solidFill>
-                <a:latin typeface="Open Sans"/>
-              </a:rPr>
-              <a:t>every result checked: max relative error ≤ 1e-4 vs a scalar reference / OpenCV's real outputs</a:t>
-            </a:r>
-          </a:p>
-        </p:txBody>
-      </p:sp>
-      <p:sp>
-        <p:nvSpPr>
-          <p:cNvPr id="24" name="assume-7"/>
+              <a:t>c[1][1]</a:t>
+            </a:r>
+          </a:p>
+        </p:txBody>
+      </p:sp>
+      <p:sp>
+        <p:nvSpPr>
+          <p:cNvPr id="11" name="Rectangle 10"/>
           <p:cNvSpPr/>
           <p:nvPr/>
         </p:nvSpPr>
         <p:spPr>
           <a:xfrm>
-            <a:off x="4617720" y="3419856"/>
-            <a:ext cx="4023360" cy="713232"/>
-          </a:xfrm>
-          <a:prstGeom prst="roundRect">
-            <a:avLst>
-              <a:gd name="adj" fmla="val 8000"/>
-            </a:avLst>
+            <a:off x="2139696" y="1892807"/>
+            <a:ext cx="786384" cy="475488"/>
+          </a:xfrm>
+          <a:prstGeom prst="rect">
+            <a:avLst/>
           </a:prstGeom>
           <a:solidFill>
-            <a:srgbClr val="F1F3F5"/>
+            <a:srgbClr val="D7EAF0"/>
           </a:solidFill>
-          <a:ln>
-            <a:noFill/>
+          <a:ln w="15875">
+            <a:solidFill>
+              <a:srgbClr val="0C6A87"/>
+            </a:solidFill>
           </a:ln>
           <a:effectLst/>
         </p:spPr>
@@ -10065,23 +10559,475 @@
           </a:fontRef>
         </p:style>
         <p:txBody>
-          <a:bodyPr rtlCol="0" anchor="ctr"/>
+          <a:bodyPr rtlCol="0" anchor="ctr" lIns="0" rIns="0"/>
           <a:lstStyle/>
           <a:p>
             <a:pPr algn="ctr"/>
-          </a:p>
-        </p:txBody>
-      </p:sp>
-      <p:sp>
-        <p:nvSpPr>
-          <p:cNvPr id="25" name="TextBox 24"/>
+            <a:r>
+              <a:rPr sz="1100" b="1">
+                <a:solidFill>
+                  <a:srgbClr val="0C6A87"/>
+                </a:solidFill>
+                <a:latin typeface="Courier New"/>
+              </a:rPr>
+              <a:t>c[1][2]</a:t>
+            </a:r>
+          </a:p>
+        </p:txBody>
+      </p:sp>
+      <p:sp>
+        <p:nvSpPr>
+          <p:cNvPr id="12" name="Rectangle 11"/>
+          <p:cNvSpPr/>
+          <p:nvPr/>
+        </p:nvSpPr>
+        <p:spPr>
+          <a:xfrm>
+            <a:off x="2980944" y="1892807"/>
+            <a:ext cx="786384" cy="475488"/>
+          </a:xfrm>
+          <a:prstGeom prst="rect">
+            <a:avLst/>
+          </a:prstGeom>
+          <a:solidFill>
+            <a:srgbClr val="D7EAF0"/>
+          </a:solidFill>
+          <a:ln w="15875">
+            <a:solidFill>
+              <a:srgbClr val="0C6A87"/>
+            </a:solidFill>
+          </a:ln>
+          <a:effectLst/>
+        </p:spPr>
+        <p:style>
+          <a:lnRef idx="1">
+            <a:schemeClr val="accent1"/>
+          </a:lnRef>
+          <a:fillRef idx="3">
+            <a:schemeClr val="accent1"/>
+          </a:fillRef>
+          <a:effectRef idx="2">
+            <a:schemeClr val="accent1"/>
+          </a:effectRef>
+          <a:fontRef idx="minor">
+            <a:schemeClr val="lt1"/>
+          </a:fontRef>
+        </p:style>
+        <p:txBody>
+          <a:bodyPr rtlCol="0" anchor="ctr" lIns="0" rIns="0"/>
+          <a:lstStyle/>
+          <a:p>
+            <a:pPr algn="ctr"/>
+            <a:r>
+              <a:rPr sz="1100" b="1">
+                <a:solidFill>
+                  <a:srgbClr val="0C6A87"/>
+                </a:solidFill>
+                <a:latin typeface="Courier New"/>
+              </a:rPr>
+              <a:t>c[1][3]</a:t>
+            </a:r>
+          </a:p>
+        </p:txBody>
+      </p:sp>
+      <p:sp>
+        <p:nvSpPr>
+          <p:cNvPr id="13" name="Rectangle 12"/>
+          <p:cNvSpPr/>
+          <p:nvPr/>
+        </p:nvSpPr>
+        <p:spPr>
+          <a:xfrm>
+            <a:off x="3822191" y="1892807"/>
+            <a:ext cx="786384" cy="475488"/>
+          </a:xfrm>
+          <a:prstGeom prst="rect">
+            <a:avLst/>
+          </a:prstGeom>
+          <a:solidFill>
+            <a:srgbClr val="D7EAF0"/>
+          </a:solidFill>
+          <a:ln w="15875">
+            <a:solidFill>
+              <a:srgbClr val="0C6A87"/>
+            </a:solidFill>
+          </a:ln>
+          <a:effectLst/>
+        </p:spPr>
+        <p:style>
+          <a:lnRef idx="1">
+            <a:schemeClr val="accent1"/>
+          </a:lnRef>
+          <a:fillRef idx="3">
+            <a:schemeClr val="accent1"/>
+          </a:fillRef>
+          <a:effectRef idx="2">
+            <a:schemeClr val="accent1"/>
+          </a:effectRef>
+          <a:fontRef idx="minor">
+            <a:schemeClr val="lt1"/>
+          </a:fontRef>
+        </p:style>
+        <p:txBody>
+          <a:bodyPr rtlCol="0" anchor="ctr" lIns="0" rIns="0"/>
+          <a:lstStyle/>
+          <a:p>
+            <a:pPr algn="ctr"/>
+            <a:r>
+              <a:rPr sz="1100" b="1">
+                <a:solidFill>
+                  <a:srgbClr val="0C6A87"/>
+                </a:solidFill>
+                <a:latin typeface="Courier New"/>
+              </a:rPr>
+              <a:t>c[1][4]</a:t>
+            </a:r>
+          </a:p>
+        </p:txBody>
+      </p:sp>
+      <p:sp>
+        <p:nvSpPr>
+          <p:cNvPr id="14" name="Rectangle 13"/>
+          <p:cNvSpPr/>
+          <p:nvPr/>
+        </p:nvSpPr>
+        <p:spPr>
+          <a:xfrm>
+            <a:off x="457200" y="2459736"/>
+            <a:ext cx="649224" cy="475488"/>
+          </a:xfrm>
+          <a:prstGeom prst="rect">
+            <a:avLst/>
+          </a:prstGeom>
+          <a:solidFill>
+            <a:srgbClr val="F5E6CF"/>
+          </a:solidFill>
+          <a:ln w="15875">
+            <a:solidFill>
+              <a:srgbClr val="B7731A"/>
+            </a:solidFill>
+          </a:ln>
+          <a:effectLst/>
+        </p:spPr>
+        <p:style>
+          <a:lnRef idx="1">
+            <a:schemeClr val="accent1"/>
+          </a:lnRef>
+          <a:fillRef idx="3">
+            <a:schemeClr val="accent1"/>
+          </a:fillRef>
+          <a:effectRef idx="2">
+            <a:schemeClr val="accent1"/>
+          </a:effectRef>
+          <a:fontRef idx="minor">
+            <a:schemeClr val="lt1"/>
+          </a:fontRef>
+        </p:style>
+        <p:txBody>
+          <a:bodyPr rtlCol="0" anchor="ctr" lIns="0" rIns="0"/>
+          <a:lstStyle/>
+          <a:p>
+            <a:pPr algn="ctr"/>
+            <a:r>
+              <a:rPr sz="1100" b="1">
+                <a:solidFill>
+                  <a:srgbClr val="B7731A"/>
+                </a:solidFill>
+                <a:latin typeface="Courier New"/>
+              </a:rPr>
+              <a:t>w0</a:t>
+            </a:r>
+          </a:p>
+        </p:txBody>
+      </p:sp>
+      <p:sp>
+        <p:nvSpPr>
+          <p:cNvPr id="15" name="Rectangle 14"/>
+          <p:cNvSpPr/>
+          <p:nvPr/>
+        </p:nvSpPr>
+        <p:spPr>
+          <a:xfrm>
+            <a:off x="1161288" y="2459736"/>
+            <a:ext cx="649224" cy="475488"/>
+          </a:xfrm>
+          <a:prstGeom prst="rect">
+            <a:avLst/>
+          </a:prstGeom>
+          <a:solidFill>
+            <a:srgbClr val="F5E6CF"/>
+          </a:solidFill>
+          <a:ln w="15875">
+            <a:solidFill>
+              <a:srgbClr val="B7731A"/>
+            </a:solidFill>
+          </a:ln>
+          <a:effectLst/>
+        </p:spPr>
+        <p:style>
+          <a:lnRef idx="1">
+            <a:schemeClr val="accent1"/>
+          </a:lnRef>
+          <a:fillRef idx="3">
+            <a:schemeClr val="accent1"/>
+          </a:fillRef>
+          <a:effectRef idx="2">
+            <a:schemeClr val="accent1"/>
+          </a:effectRef>
+          <a:fontRef idx="minor">
+            <a:schemeClr val="lt1"/>
+          </a:fontRef>
+        </p:style>
+        <p:txBody>
+          <a:bodyPr rtlCol="0" anchor="ctr" lIns="0" rIns="0"/>
+          <a:lstStyle/>
+          <a:p>
+            <a:pPr algn="ctr"/>
+            <a:r>
+              <a:rPr sz="1100" b="1">
+                <a:solidFill>
+                  <a:srgbClr val="B7731A"/>
+                </a:solidFill>
+                <a:latin typeface="Courier New"/>
+              </a:rPr>
+              <a:t>w1</a:t>
+            </a:r>
+          </a:p>
+        </p:txBody>
+      </p:sp>
+      <p:sp>
+        <p:nvSpPr>
+          <p:cNvPr id="16" name="Rectangle 15"/>
+          <p:cNvSpPr/>
+          <p:nvPr/>
+        </p:nvSpPr>
+        <p:spPr>
+          <a:xfrm>
+            <a:off x="1865376" y="2459736"/>
+            <a:ext cx="649224" cy="475488"/>
+          </a:xfrm>
+          <a:prstGeom prst="rect">
+            <a:avLst/>
+          </a:prstGeom>
+          <a:solidFill>
+            <a:srgbClr val="E4E0F0"/>
+          </a:solidFill>
+          <a:ln w="15875">
+            <a:solidFill>
+              <a:srgbClr val="5B4B8A"/>
+            </a:solidFill>
+          </a:ln>
+          <a:effectLst/>
+        </p:spPr>
+        <p:style>
+          <a:lnRef idx="1">
+            <a:schemeClr val="accent1"/>
+          </a:lnRef>
+          <a:fillRef idx="3">
+            <a:schemeClr val="accent1"/>
+          </a:fillRef>
+          <a:effectRef idx="2">
+            <a:schemeClr val="accent1"/>
+          </a:effectRef>
+          <a:fontRef idx="minor">
+            <a:schemeClr val="lt1"/>
+          </a:fontRef>
+        </p:style>
+        <p:txBody>
+          <a:bodyPr rtlCol="0" anchor="ctr" lIns="0" rIns="0"/>
+          <a:lstStyle/>
+          <a:p>
+            <a:pPr algn="ctr"/>
+            <a:r>
+              <a:rPr sz="1100" b="1">
+                <a:solidFill>
+                  <a:srgbClr val="5B4B8A"/>
+                </a:solidFill>
+                <a:latin typeface="Courier New"/>
+              </a:rPr>
+              <a:t>x</a:t>
+            </a:r>
+          </a:p>
+        </p:txBody>
+      </p:sp>
+      <p:sp>
+        <p:nvSpPr>
+          <p:cNvPr id="17" name="Rectangle 16"/>
+          <p:cNvSpPr/>
+          <p:nvPr/>
+        </p:nvSpPr>
+        <p:spPr>
+          <a:xfrm>
+            <a:off x="2569464" y="2459736"/>
+            <a:ext cx="649224" cy="475488"/>
+          </a:xfrm>
+          <a:prstGeom prst="rect">
+            <a:avLst/>
+          </a:prstGeom>
+          <a:solidFill>
+            <a:srgbClr val="FFFFFF"/>
+          </a:solidFill>
+          <a:ln w="15875">
+            <a:solidFill>
+              <a:srgbClr val="6B7782"/>
+            </a:solidFill>
+            <a:prstDash val="dash"/>
+          </a:ln>
+          <a:effectLst/>
+        </p:spPr>
+        <p:style>
+          <a:lnRef idx="1">
+            <a:schemeClr val="accent1"/>
+          </a:lnRef>
+          <a:fillRef idx="3">
+            <a:schemeClr val="accent1"/>
+          </a:fillRef>
+          <a:effectRef idx="2">
+            <a:schemeClr val="accent1"/>
+          </a:effectRef>
+          <a:fontRef idx="minor">
+            <a:schemeClr val="lt1"/>
+          </a:fontRef>
+        </p:style>
+        <p:txBody>
+          <a:bodyPr rtlCol="0" anchor="ctr" lIns="0" rIns="0"/>
+          <a:lstStyle/>
+          <a:p>
+            <a:pPr algn="ctr"/>
+            <a:r>
+              <a:rPr sz="1100" b="0">
+                <a:solidFill>
+                  <a:srgbClr val="6B7782"/>
+                </a:solidFill>
+                <a:latin typeface="Courier New"/>
+              </a:rPr>
+              <a:t>free</a:t>
+            </a:r>
+          </a:p>
+        </p:txBody>
+      </p:sp>
+      <p:sp>
+        <p:nvSpPr>
+          <p:cNvPr id="18" name="Rectangle 17"/>
+          <p:cNvSpPr/>
+          <p:nvPr/>
+        </p:nvSpPr>
+        <p:spPr>
+          <a:xfrm>
+            <a:off x="3273552" y="2459736"/>
+            <a:ext cx="649224" cy="475488"/>
+          </a:xfrm>
+          <a:prstGeom prst="rect">
+            <a:avLst/>
+          </a:prstGeom>
+          <a:solidFill>
+            <a:srgbClr val="FFFFFF"/>
+          </a:solidFill>
+          <a:ln w="15875">
+            <a:solidFill>
+              <a:srgbClr val="6B7782"/>
+            </a:solidFill>
+            <a:prstDash val="dash"/>
+          </a:ln>
+          <a:effectLst/>
+        </p:spPr>
+        <p:style>
+          <a:lnRef idx="1">
+            <a:schemeClr val="accent1"/>
+          </a:lnRef>
+          <a:fillRef idx="3">
+            <a:schemeClr val="accent1"/>
+          </a:fillRef>
+          <a:effectRef idx="2">
+            <a:schemeClr val="accent1"/>
+          </a:effectRef>
+          <a:fontRef idx="minor">
+            <a:schemeClr val="lt1"/>
+          </a:fontRef>
+        </p:style>
+        <p:txBody>
+          <a:bodyPr rtlCol="0" anchor="ctr" lIns="0" rIns="0"/>
+          <a:lstStyle/>
+          <a:p>
+            <a:pPr algn="ctr"/>
+            <a:r>
+              <a:rPr sz="1100" b="0">
+                <a:solidFill>
+                  <a:srgbClr val="6B7782"/>
+                </a:solidFill>
+                <a:latin typeface="Courier New"/>
+              </a:rPr>
+              <a:t>free</a:t>
+            </a:r>
+          </a:p>
+        </p:txBody>
+      </p:sp>
+      <p:sp>
+        <p:nvSpPr>
+          <p:cNvPr id="19" name="Rectangle 18"/>
+          <p:cNvSpPr/>
+          <p:nvPr/>
+        </p:nvSpPr>
+        <p:spPr>
+          <a:xfrm>
+            <a:off x="3977639" y="2459736"/>
+            <a:ext cx="649224" cy="475488"/>
+          </a:xfrm>
+          <a:prstGeom prst="rect">
+            <a:avLst/>
+          </a:prstGeom>
+          <a:solidFill>
+            <a:srgbClr val="FFFFFF"/>
+          </a:solidFill>
+          <a:ln w="15875">
+            <a:solidFill>
+              <a:srgbClr val="6B7782"/>
+            </a:solidFill>
+            <a:prstDash val="dash"/>
+          </a:ln>
+          <a:effectLst/>
+        </p:spPr>
+        <p:style>
+          <a:lnRef idx="1">
+            <a:schemeClr val="accent1"/>
+          </a:lnRef>
+          <a:fillRef idx="3">
+            <a:schemeClr val="accent1"/>
+          </a:fillRef>
+          <a:effectRef idx="2">
+            <a:schemeClr val="accent1"/>
+          </a:effectRef>
+          <a:fontRef idx="minor">
+            <a:schemeClr val="lt1"/>
+          </a:fontRef>
+        </p:style>
+        <p:txBody>
+          <a:bodyPr rtlCol="0" anchor="ctr" lIns="0" rIns="0"/>
+          <a:lstStyle/>
+          <a:p>
+            <a:pPr algn="ctr"/>
+            <a:r>
+              <a:rPr sz="1100" b="0">
+                <a:solidFill>
+                  <a:srgbClr val="6B7782"/>
+                </a:solidFill>
+                <a:latin typeface="Courier New"/>
+              </a:rPr>
+              <a:t>free</a:t>
+            </a:r>
+          </a:p>
+        </p:txBody>
+      </p:sp>
+      <p:sp>
+        <p:nvSpPr>
+          <p:cNvPr id="20" name="TextBox 19"/>
           <p:cNvSpPr txBox="1"/>
           <p:nvPr/>
         </p:nvSpPr>
         <p:spPr>
           <a:xfrm>
-            <a:off x="4727448" y="3483864"/>
-            <a:ext cx="3749039" cy="228600"/>
+            <a:off x="457200" y="3154680"/>
+            <a:ext cx="4206240" cy="822960"/>
           </a:xfrm>
           <a:prstGeom prst="rect">
             <a:avLst/>
@@ -10096,27 +11042,132 @@
           <a:p>
             <a:pPr algn="l"/>
             <a:r>
-              <a:rPr sz="1150" b="1" i="0">
-                <a:solidFill>
-                  <a:srgbClr val="1B2630"/>
+              <a:rPr sz="1050" b="1" i="0">
+                <a:solidFill>
+                  <a:srgbClr val="0C6A87"/>
+                </a:solidFill>
+                <a:latin typeface="Courier New"/>
+              </a:rPr>
+              <a:t>c[b][j]</a:t>
+            </a:r>
+            <a:r>
+              <a:rPr sz="1050" b="0" i="0">
+                <a:solidFill>
+                  <a:srgbClr val="5A6875"/>
                 </a:solidFill>
                 <a:latin typeface="Open Sans"/>
               </a:rPr>
-              <a:t>Baseline</a:t>
-            </a:r>
-          </a:p>
-        </p:txBody>
-      </p:sp>
-      <p:sp>
-        <p:nvSpPr>
-          <p:cNvPr id="26" name="TextBox 25"/>
+              <a:t> output block b (8 ch), pixel j: 10 accumulators</a:t>
+            </a:r>
+          </a:p>
+          <a:p>
+            <a:pPr algn="l">
+              <a:spcBef>
+                <a:spcPts val="600"/>
+              </a:spcBef>
+            </a:pPr>
+            <a:r>
+              <a:rPr sz="1050" b="1" i="0">
+                <a:solidFill>
+                  <a:srgbClr val="B7731A"/>
+                </a:solidFill>
+                <a:latin typeface="Courier New"/>
+              </a:rPr>
+              <a:t>w0, w1</a:t>
+            </a:r>
+            <a:r>
+              <a:rPr sz="1050" b="0" i="0">
+                <a:solidFill>
+                  <a:srgbClr val="5A6875"/>
+                </a:solidFill>
+                <a:latin typeface="Open Sans"/>
+              </a:rPr>
+              <a:t> 8 weights for blocks kb, kb+1 (one load each)</a:t>
+            </a:r>
+          </a:p>
+          <a:p>
+            <a:pPr algn="l">
+              <a:spcBef>
+                <a:spcPts val="600"/>
+              </a:spcBef>
+            </a:pPr>
+            <a:r>
+              <a:rPr sz="1050" b="1" i="0">
+                <a:solidFill>
+                  <a:srgbClr val="5B4B8A"/>
+                </a:solidFill>
+                <a:latin typeface="Courier New"/>
+              </a:rPr>
+              <a:t>x</a:t>
+            </a:r>
+            <a:r>
+              <a:rPr sz="1050" b="0" i="0">
+                <a:solidFill>
+                  <a:srgbClr val="5A6875"/>
+                </a:solidFill>
+                <a:latin typeface="Open Sans"/>
+              </a:rPr>
+              <a:t> one input value broadcast to 8 lanes</a:t>
+            </a:r>
+          </a:p>
+        </p:txBody>
+      </p:sp>
+      <p:sp>
+        <p:nvSpPr>
+          <p:cNvPr id="21" name="qa-0"/>
+          <p:cNvSpPr/>
+          <p:nvPr/>
+        </p:nvSpPr>
+        <p:spPr>
+          <a:xfrm>
+            <a:off x="4800600" y="960120"/>
+            <a:ext cx="3886200" cy="1005840"/>
+          </a:xfrm>
+          <a:prstGeom prst="roundRect">
+            <a:avLst>
+              <a:gd name="adj" fmla="val 8000"/>
+            </a:avLst>
+          </a:prstGeom>
+          <a:solidFill>
+            <a:srgbClr val="F1F3F5"/>
+          </a:solidFill>
+          <a:ln>
+            <a:noFill/>
+          </a:ln>
+          <a:effectLst/>
+        </p:spPr>
+        <p:style>
+          <a:lnRef idx="1">
+            <a:schemeClr val="accent1"/>
+          </a:lnRef>
+          <a:fillRef idx="3">
+            <a:schemeClr val="accent1"/>
+          </a:fillRef>
+          <a:effectRef idx="2">
+            <a:schemeClr val="accent1"/>
+          </a:effectRef>
+          <a:fontRef idx="minor">
+            <a:schemeClr val="lt1"/>
+          </a:fontRef>
+        </p:style>
+        <p:txBody>
+          <a:bodyPr rtlCol="0" anchor="ctr"/>
+          <a:lstStyle/>
+          <a:p>
+            <a:pPr algn="ctr"/>
+          </a:p>
+        </p:txBody>
+      </p:sp>
+      <p:sp>
+        <p:nvSpPr>
+          <p:cNvPr id="22" name="TextBox 21"/>
           <p:cNvSpPr txBox="1"/>
           <p:nvPr/>
         </p:nvSpPr>
         <p:spPr>
           <a:xfrm>
-            <a:off x="4727448" y="3721608"/>
-            <a:ext cx="3794760" cy="411480"/>
+            <a:off x="4919472" y="1033272"/>
+            <a:ext cx="3657600" cy="256032"/>
           </a:xfrm>
           <a:prstGeom prst="rect">
             <a:avLst/>
@@ -10131,13 +11182,280 @@
           <a:p>
             <a:pPr algn="l"/>
             <a:r>
-              <a:rPr sz="950" b="0" i="0">
-                <a:solidFill>
-                  <a:srgbClr val="5A6875"/>
+              <a:rPr sz="1250" b="1" i="0">
+                <a:solidFill>
+                  <a:srgbClr val="1B2630"/>
                 </a:solidFill>
                 <a:latin typeface="Open Sans"/>
               </a:rPr>
-              <a:t>OpenCV DNN on the same ONNX model, 1 thread, its own per-layer timer</a:t>
+              <a:t>(a) Size</a:t>
+            </a:r>
+          </a:p>
+        </p:txBody>
+      </p:sp>
+      <p:sp>
+        <p:nvSpPr>
+          <p:cNvPr id="23" name="TextBox 22"/>
+          <p:cNvSpPr txBox="1"/>
+          <p:nvPr/>
+        </p:nvSpPr>
+        <p:spPr>
+          <a:xfrm>
+            <a:off x="4919472" y="1307592"/>
+            <a:ext cx="3657600" cy="640080"/>
+          </a:xfrm>
+          <a:prstGeom prst="rect">
+            <a:avLst/>
+          </a:prstGeom>
+          <a:noFill/>
+        </p:spPr>
+        <p:txBody>
+          <a:bodyPr wrap="square" lIns="0" rIns="0" tIns="0" bIns="0" anchor="t">
+            <a:spAutoFit/>
+          </a:bodyPr>
+          <a:lstStyle/>
+          <a:p>
+            <a:pPr algn="l"/>
+            <a:r>
+              <a:rPr sz="1050" b="0" i="0">
+                <a:solidFill>
+                  <a:srgbClr val="5A6875"/>
+                </a:solidFill>
+                <a:latin typeface="Open Sans"/>
+              </a:rPr>
+              <a:t>80 outputs per call: 5 pixels × 16 output channels (2 blocks of 8).</a:t>
+            </a:r>
+          </a:p>
+        </p:txBody>
+      </p:sp>
+      <p:sp>
+        <p:nvSpPr>
+          <p:cNvPr id="24" name="qa-1"/>
+          <p:cNvSpPr/>
+          <p:nvPr/>
+        </p:nvSpPr>
+        <p:spPr>
+          <a:xfrm>
+            <a:off x="4800600" y="2057400"/>
+            <a:ext cx="3886200" cy="1005840"/>
+          </a:xfrm>
+          <a:prstGeom prst="roundRect">
+            <a:avLst>
+              <a:gd name="adj" fmla="val 8000"/>
+            </a:avLst>
+          </a:prstGeom>
+          <a:solidFill>
+            <a:srgbClr val="F8E5E9"/>
+          </a:solidFill>
+          <a:ln>
+            <a:noFill/>
+          </a:ln>
+          <a:effectLst/>
+        </p:spPr>
+        <p:style>
+          <a:lnRef idx="1">
+            <a:schemeClr val="accent1"/>
+          </a:lnRef>
+          <a:fillRef idx="3">
+            <a:schemeClr val="accent1"/>
+          </a:fillRef>
+          <a:effectRef idx="2">
+            <a:schemeClr val="accent1"/>
+          </a:effectRef>
+          <a:fontRef idx="minor">
+            <a:schemeClr val="lt1"/>
+          </a:fontRef>
+        </p:style>
+        <p:txBody>
+          <a:bodyPr rtlCol="0" anchor="ctr"/>
+          <a:lstStyle/>
+          <a:p>
+            <a:pPr algn="ctr"/>
+          </a:p>
+        </p:txBody>
+      </p:sp>
+      <p:sp>
+        <p:nvSpPr>
+          <p:cNvPr id="25" name="TextBox 24"/>
+          <p:cNvSpPr txBox="1"/>
+          <p:nvPr/>
+        </p:nvSpPr>
+        <p:spPr>
+          <a:xfrm>
+            <a:off x="4919472" y="2130552"/>
+            <a:ext cx="3657600" cy="256032"/>
+          </a:xfrm>
+          <a:prstGeom prst="rect">
+            <a:avLst/>
+          </a:prstGeom>
+          <a:noFill/>
+        </p:spPr>
+        <p:txBody>
+          <a:bodyPr wrap="square" lIns="0" rIns="0" tIns="0" bIns="0" anchor="t">
+            <a:spAutoFit/>
+          </a:bodyPr>
+          <a:lstStyle/>
+          <a:p>
+            <a:pPr algn="l"/>
+            <a:r>
+              <a:rPr sz="1250" b="1" i="0">
+                <a:solidFill>
+                  <a:srgbClr val="BB0027"/>
+                </a:solidFill>
+                <a:latin typeface="Open Sans"/>
+              </a:rPr>
+              <a:t>(b) Registers</a:t>
+            </a:r>
+          </a:p>
+        </p:txBody>
+      </p:sp>
+      <p:sp>
+        <p:nvSpPr>
+          <p:cNvPr id="26" name="TextBox 25"/>
+          <p:cNvSpPr txBox="1"/>
+          <p:nvPr/>
+        </p:nvSpPr>
+        <p:spPr>
+          <a:xfrm>
+            <a:off x="4919472" y="2404872"/>
+            <a:ext cx="3657600" cy="640080"/>
+          </a:xfrm>
+          <a:prstGeom prst="rect">
+            <a:avLst/>
+          </a:prstGeom>
+          <a:noFill/>
+        </p:spPr>
+        <p:txBody>
+          <a:bodyPr wrap="square" lIns="0" rIns="0" tIns="0" bIns="0" anchor="t">
+            <a:spAutoFit/>
+          </a:bodyPr>
+          <a:lstStyle/>
+          <a:p>
+            <a:pPr algn="l"/>
+            <a:r>
+              <a:rPr sz="1050" b="0" i="0">
+                <a:solidFill>
+                  <a:srgbClr val="5A6875"/>
+                </a:solidFill>
+                <a:latin typeface="Open Sans"/>
+              </a:rPr>
+              <a:t>Need 13 of the 16 YMM registers (AVX2, no AVX-512). At least 10 accumulators: FMA latency 5 × 2 FMA units.</a:t>
+            </a:r>
+          </a:p>
+        </p:txBody>
+      </p:sp>
+      <p:sp>
+        <p:nvSpPr>
+          <p:cNvPr id="27" name="qa-2"/>
+          <p:cNvSpPr/>
+          <p:nvPr/>
+        </p:nvSpPr>
+        <p:spPr>
+          <a:xfrm>
+            <a:off x="4800600" y="3154680"/>
+            <a:ext cx="3886200" cy="1005840"/>
+          </a:xfrm>
+          <a:prstGeom prst="roundRect">
+            <a:avLst>
+              <a:gd name="adj" fmla="val 8000"/>
+            </a:avLst>
+          </a:prstGeom>
+          <a:solidFill>
+            <a:srgbClr val="F1F3F5"/>
+          </a:solidFill>
+          <a:ln>
+            <a:noFill/>
+          </a:ln>
+          <a:effectLst/>
+        </p:spPr>
+        <p:style>
+          <a:lnRef idx="1">
+            <a:schemeClr val="accent1"/>
+          </a:lnRef>
+          <a:fillRef idx="3">
+            <a:schemeClr val="accent1"/>
+          </a:fillRef>
+          <a:effectRef idx="2">
+            <a:schemeClr val="accent1"/>
+          </a:effectRef>
+          <a:fontRef idx="minor">
+            <a:schemeClr val="lt1"/>
+          </a:fontRef>
+        </p:style>
+        <p:txBody>
+          <a:bodyPr rtlCol="0" anchor="ctr"/>
+          <a:lstStyle/>
+          <a:p>
+            <a:pPr algn="ctr"/>
+          </a:p>
+        </p:txBody>
+      </p:sp>
+      <p:sp>
+        <p:nvSpPr>
+          <p:cNvPr id="28" name="TextBox 27"/>
+          <p:cNvSpPr txBox="1"/>
+          <p:nvPr/>
+        </p:nvSpPr>
+        <p:spPr>
+          <a:xfrm>
+            <a:off x="4919472" y="3227832"/>
+            <a:ext cx="3657600" cy="256032"/>
+          </a:xfrm>
+          <a:prstGeom prst="rect">
+            <a:avLst/>
+          </a:prstGeom>
+          <a:noFill/>
+        </p:spPr>
+        <p:txBody>
+          <a:bodyPr wrap="square" lIns="0" rIns="0" tIns="0" bIns="0" anchor="t">
+            <a:spAutoFit/>
+          </a:bodyPr>
+          <a:lstStyle/>
+          <a:p>
+            <a:pPr algn="l"/>
+            <a:r>
+              <a:rPr sz="1250" b="1" i="0">
+                <a:solidFill>
+                  <a:srgbClr val="1B2630"/>
+                </a:solidFill>
+                <a:latin typeface="Open Sans"/>
+              </a:rPr>
+              <a:t>(c) Allocation</a:t>
+            </a:r>
+          </a:p>
+        </p:txBody>
+      </p:sp>
+      <p:sp>
+        <p:nvSpPr>
+          <p:cNvPr id="29" name="TextBox 28"/>
+          <p:cNvSpPr txBox="1"/>
+          <p:nvPr/>
+        </p:nvSpPr>
+        <p:spPr>
+          <a:xfrm>
+            <a:off x="4919472" y="3502152"/>
+            <a:ext cx="3657600" cy="640080"/>
+          </a:xfrm>
+          <a:prstGeom prst="rect">
+            <a:avLst/>
+          </a:prstGeom>
+          <a:noFill/>
+        </p:spPr>
+        <p:txBody>
+          <a:bodyPr wrap="square" lIns="0" rIns="0" tIns="0" bIns="0" anchor="t">
+            <a:spAutoFit/>
+          </a:bodyPr>
+          <a:lstStyle/>
+          <a:p>
+            <a:pPr algn="l"/>
+            <a:r>
+              <a:rPr sz="1050" b="0" i="0">
+                <a:solidFill>
+                  <a:srgbClr val="5A6875"/>
+                </a:solidFill>
+                <a:latin typeface="Open Sans"/>
+              </a:rPr>
+              <a:t>Outputs: 10 accumulators, live for the whole C × 9 loop. Inputs: 2 weight + 1 broadcast. Temporaries: none in the loop; 3 free. Pointers and counters live in integer registers.</a:t>
             </a:r>
           </a:p>
         </p:txBody>
@@ -10151,6 +11469,1822 @@
 </file>
 
 <file path=ppt/slides/slide5.xml><?xml version="1.0" encoding="utf-8"?>
+<p:sld xmlns:a="http://schemas.openxmlformats.org/drawingml/2006/main" xmlns:p="http://schemas.openxmlformats.org/presentationml/2006/main" xmlns:r="http://schemas.openxmlformats.org/officeDocument/2006/relationships">
+  <p:cSld>
+    <p:spTree>
+      <p:nvGrpSpPr>
+        <p:cNvPr id="1" name=""/>
+        <p:cNvGrpSpPr/>
+        <p:nvPr/>
+      </p:nvGrpSpPr>
+      <p:grpSpPr/>
+      <p:sp>
+        <p:nvSpPr>
+          <p:cNvPr id="2" name="Title 1"/>
+          <p:cNvSpPr>
+            <a:spLocks noGrp="1"/>
+          </p:cNvSpPr>
+          <p:nvPr>
+            <p:ph type="title"/>
+          </p:nvPr>
+        </p:nvSpPr>
+        <p:spPr/>
+        <p:txBody>
+          <a:bodyPr/>
+          <a:lstStyle/>
+          <a:p>
+            <a:r>
+              <a:t>(d)–(e): register reuse and the code</a:t>
+            </a:r>
+          </a:p>
+        </p:txBody>
+      </p:sp>
+      <p:sp>
+        <p:nvSpPr>
+          <p:cNvPr id="3" name="TextBox 2"/>
+          <p:cNvSpPr txBox="1"/>
+          <p:nvPr/>
+        </p:nvSpPr>
+        <p:spPr>
+          <a:xfrm>
+            <a:off x="457200" y="960120"/>
+            <a:ext cx="3291840" cy="274320"/>
+          </a:xfrm>
+          <a:prstGeom prst="rect">
+            <a:avLst/>
+          </a:prstGeom>
+          <a:noFill/>
+        </p:spPr>
+        <p:txBody>
+          <a:bodyPr wrap="square" lIns="0" rIns="0" tIns="0" bIns="0" anchor="t">
+            <a:spAutoFit/>
+          </a:bodyPr>
+          <a:lstStyle/>
+          <a:p>
+            <a:pPr algn="l"/>
+            <a:r>
+              <a:rPr sz="1300" b="1" i="0">
+                <a:solidFill>
+                  <a:srgbClr val="BB0027"/>
+                </a:solidFill>
+                <a:latin typeface="Open Sans"/>
+              </a:rPr>
+              <a:t>(d) Reuse</a:t>
+            </a:r>
+          </a:p>
+        </p:txBody>
+      </p:sp>
+      <p:sp>
+        <p:nvSpPr>
+          <p:cNvPr id="4" name="reuse-0"/>
+          <p:cNvSpPr/>
+          <p:nvPr/>
+        </p:nvSpPr>
+        <p:spPr>
+          <a:xfrm>
+            <a:off x="457200" y="1280160"/>
+            <a:ext cx="3291840" cy="658368"/>
+          </a:xfrm>
+          <a:prstGeom prst="roundRect">
+            <a:avLst>
+              <a:gd name="adj" fmla="val 8000"/>
+            </a:avLst>
+          </a:prstGeom>
+          <a:solidFill>
+            <a:srgbClr val="F1F3F5"/>
+          </a:solidFill>
+          <a:ln>
+            <a:noFill/>
+          </a:ln>
+          <a:effectLst/>
+        </p:spPr>
+        <p:style>
+          <a:lnRef idx="1">
+            <a:schemeClr val="accent1"/>
+          </a:lnRef>
+          <a:fillRef idx="3">
+            <a:schemeClr val="accent1"/>
+          </a:fillRef>
+          <a:effectRef idx="2">
+            <a:schemeClr val="accent1"/>
+          </a:effectRef>
+          <a:fontRef idx="minor">
+            <a:schemeClr val="lt1"/>
+          </a:fontRef>
+        </p:style>
+        <p:txBody>
+          <a:bodyPr rtlCol="0" anchor="ctr"/>
+          <a:lstStyle/>
+          <a:p>
+            <a:pPr algn="ctr"/>
+          </a:p>
+        </p:txBody>
+      </p:sp>
+      <p:sp>
+        <p:nvSpPr>
+          <p:cNvPr id="5" name="TextBox 4"/>
+          <p:cNvSpPr txBox="1"/>
+          <p:nvPr/>
+        </p:nvSpPr>
+        <p:spPr>
+          <a:xfrm>
+            <a:off x="566928" y="1335024"/>
+            <a:ext cx="3108960" cy="228600"/>
+          </a:xfrm>
+          <a:prstGeom prst="rect">
+            <a:avLst/>
+          </a:prstGeom>
+          <a:noFill/>
+        </p:spPr>
+        <p:txBody>
+          <a:bodyPr wrap="square" lIns="0" rIns="0" tIns="0" bIns="0" anchor="t">
+            <a:spAutoFit/>
+          </a:bodyPr>
+          <a:lstStyle/>
+          <a:p>
+            <a:pPr algn="l"/>
+            <a:r>
+              <a:rPr sz="1150" b="1" i="0">
+                <a:solidFill>
+                  <a:srgbClr val="1B2630"/>
+                </a:solidFill>
+                <a:latin typeface="Open Sans"/>
+              </a:rPr>
+              <a:t>Weight w0, w1</a:t>
+            </a:r>
+          </a:p>
+        </p:txBody>
+      </p:sp>
+      <p:sp>
+        <p:nvSpPr>
+          <p:cNvPr id="6" name="TextBox 5"/>
+          <p:cNvSpPr txBox="1"/>
+          <p:nvPr/>
+        </p:nvSpPr>
+        <p:spPr>
+          <a:xfrm>
+            <a:off x="566928" y="1563624"/>
+            <a:ext cx="3108960" cy="384048"/>
+          </a:xfrm>
+          <a:prstGeom prst="rect">
+            <a:avLst/>
+          </a:prstGeom>
+          <a:noFill/>
+        </p:spPr>
+        <p:txBody>
+          <a:bodyPr wrap="square" lIns="0" rIns="0" tIns="0" bIns="0" anchor="t">
+            <a:spAutoFit/>
+          </a:bodyPr>
+          <a:lstStyle/>
+          <a:p>
+            <a:pPr algn="l"/>
+            <a:r>
+              <a:rPr sz="950" b="0" i="0">
+                <a:solidFill>
+                  <a:srgbClr val="5A6875"/>
+                </a:solidFill>
+                <a:latin typeface="Open Sans"/>
+              </a:rPr>
+              <a:t>1 load → 5 FMAs (one per pixel)</a:t>
+            </a:r>
+          </a:p>
+        </p:txBody>
+      </p:sp>
+      <p:sp>
+        <p:nvSpPr>
+          <p:cNvPr id="7" name="reuse-1"/>
+          <p:cNvSpPr/>
+          <p:nvPr/>
+        </p:nvSpPr>
+        <p:spPr>
+          <a:xfrm>
+            <a:off x="457200" y="2011680"/>
+            <a:ext cx="3291840" cy="658368"/>
+          </a:xfrm>
+          <a:prstGeom prst="roundRect">
+            <a:avLst>
+              <a:gd name="adj" fmla="val 8000"/>
+            </a:avLst>
+          </a:prstGeom>
+          <a:solidFill>
+            <a:srgbClr val="F1F3F5"/>
+          </a:solidFill>
+          <a:ln>
+            <a:noFill/>
+          </a:ln>
+          <a:effectLst/>
+        </p:spPr>
+        <p:style>
+          <a:lnRef idx="1">
+            <a:schemeClr val="accent1"/>
+          </a:lnRef>
+          <a:fillRef idx="3">
+            <a:schemeClr val="accent1"/>
+          </a:fillRef>
+          <a:effectRef idx="2">
+            <a:schemeClr val="accent1"/>
+          </a:effectRef>
+          <a:fontRef idx="minor">
+            <a:schemeClr val="lt1"/>
+          </a:fontRef>
+        </p:style>
+        <p:txBody>
+          <a:bodyPr rtlCol="0" anchor="ctr"/>
+          <a:lstStyle/>
+          <a:p>
+            <a:pPr algn="ctr"/>
+          </a:p>
+        </p:txBody>
+      </p:sp>
+      <p:sp>
+        <p:nvSpPr>
+          <p:cNvPr id="8" name="TextBox 7"/>
+          <p:cNvSpPr txBox="1"/>
+          <p:nvPr/>
+        </p:nvSpPr>
+        <p:spPr>
+          <a:xfrm>
+            <a:off x="566928" y="2066544"/>
+            <a:ext cx="3108960" cy="228600"/>
+          </a:xfrm>
+          <a:prstGeom prst="rect">
+            <a:avLst/>
+          </a:prstGeom>
+          <a:noFill/>
+        </p:spPr>
+        <p:txBody>
+          <a:bodyPr wrap="square" lIns="0" rIns="0" tIns="0" bIns="0" anchor="t">
+            <a:spAutoFit/>
+          </a:bodyPr>
+          <a:lstStyle/>
+          <a:p>
+            <a:pPr algn="l"/>
+            <a:r>
+              <a:rPr sz="1150" b="1" i="0">
+                <a:solidFill>
+                  <a:srgbClr val="1B2630"/>
+                </a:solidFill>
+                <a:latin typeface="Open Sans"/>
+              </a:rPr>
+              <a:t>Input x</a:t>
+            </a:r>
+          </a:p>
+        </p:txBody>
+      </p:sp>
+      <p:sp>
+        <p:nvSpPr>
+          <p:cNvPr id="9" name="TextBox 8"/>
+          <p:cNvSpPr txBox="1"/>
+          <p:nvPr/>
+        </p:nvSpPr>
+        <p:spPr>
+          <a:xfrm>
+            <a:off x="566928" y="2295144"/>
+            <a:ext cx="3108960" cy="384048"/>
+          </a:xfrm>
+          <a:prstGeom prst="rect">
+            <a:avLst/>
+          </a:prstGeom>
+          <a:noFill/>
+        </p:spPr>
+        <p:txBody>
+          <a:bodyPr wrap="square" lIns="0" rIns="0" tIns="0" bIns="0" anchor="t">
+            <a:spAutoFit/>
+          </a:bodyPr>
+          <a:lstStyle/>
+          <a:p>
+            <a:pPr algn="l"/>
+            <a:r>
+              <a:rPr sz="950" b="0" i="0">
+                <a:solidFill>
+                  <a:srgbClr val="5A6875"/>
+                </a:solidFill>
+                <a:latin typeface="Open Sans"/>
+              </a:rPr>
+              <a:t>1 broadcast → 2 FMAs (one per block); the one x register is reused for all 5 pixels</a:t>
+            </a:r>
+          </a:p>
+        </p:txBody>
+      </p:sp>
+      <p:sp>
+        <p:nvSpPr>
+          <p:cNvPr id="10" name="reuse-2"/>
+          <p:cNvSpPr/>
+          <p:nvPr/>
+        </p:nvSpPr>
+        <p:spPr>
+          <a:xfrm>
+            <a:off x="457200" y="2743200"/>
+            <a:ext cx="3291840" cy="658368"/>
+          </a:xfrm>
+          <a:prstGeom prst="roundRect">
+            <a:avLst>
+              <a:gd name="adj" fmla="val 8000"/>
+            </a:avLst>
+          </a:prstGeom>
+          <a:solidFill>
+            <a:srgbClr val="F1F3F5"/>
+          </a:solidFill>
+          <a:ln>
+            <a:noFill/>
+          </a:ln>
+          <a:effectLst/>
+        </p:spPr>
+        <p:style>
+          <a:lnRef idx="1">
+            <a:schemeClr val="accent1"/>
+          </a:lnRef>
+          <a:fillRef idx="3">
+            <a:schemeClr val="accent1"/>
+          </a:fillRef>
+          <a:effectRef idx="2">
+            <a:schemeClr val="accent1"/>
+          </a:effectRef>
+          <a:fontRef idx="minor">
+            <a:schemeClr val="lt1"/>
+          </a:fontRef>
+        </p:style>
+        <p:txBody>
+          <a:bodyPr rtlCol="0" anchor="ctr"/>
+          <a:lstStyle/>
+          <a:p>
+            <a:pPr algn="ctr"/>
+          </a:p>
+        </p:txBody>
+      </p:sp>
+      <p:sp>
+        <p:nvSpPr>
+          <p:cNvPr id="11" name="TextBox 10"/>
+          <p:cNvSpPr txBox="1"/>
+          <p:nvPr/>
+        </p:nvSpPr>
+        <p:spPr>
+          <a:xfrm>
+            <a:off x="566928" y="2798064"/>
+            <a:ext cx="3108960" cy="228600"/>
+          </a:xfrm>
+          <a:prstGeom prst="rect">
+            <a:avLst/>
+          </a:prstGeom>
+          <a:noFill/>
+        </p:spPr>
+        <p:txBody>
+          <a:bodyPr wrap="square" lIns="0" rIns="0" tIns="0" bIns="0" anchor="t">
+            <a:spAutoFit/>
+          </a:bodyPr>
+          <a:lstStyle/>
+          <a:p>
+            <a:pPr algn="l"/>
+            <a:r>
+              <a:rPr sz="1150" b="1" i="0">
+                <a:solidFill>
+                  <a:srgbClr val="1B2630"/>
+                </a:solidFill>
+                <a:latin typeface="Open Sans"/>
+              </a:rPr>
+              <a:t>Accumulator c</a:t>
+            </a:r>
+          </a:p>
+        </p:txBody>
+      </p:sp>
+      <p:sp>
+        <p:nvSpPr>
+          <p:cNvPr id="12" name="TextBox 11"/>
+          <p:cNvSpPr txBox="1"/>
+          <p:nvPr/>
+        </p:nvSpPr>
+        <p:spPr>
+          <a:xfrm>
+            <a:off x="566928" y="3026664"/>
+            <a:ext cx="3108960" cy="384048"/>
+          </a:xfrm>
+          <a:prstGeom prst="rect">
+            <a:avLst/>
+          </a:prstGeom>
+          <a:noFill/>
+        </p:spPr>
+        <p:txBody>
+          <a:bodyPr wrap="square" lIns="0" rIns="0" tIns="0" bIns="0" anchor="t">
+            <a:spAutoFit/>
+          </a:bodyPr>
+          <a:lstStyle/>
+          <a:p>
+            <a:pPr algn="l"/>
+            <a:r>
+              <a:rPr sz="950" b="0" i="0">
+                <a:solidFill>
+                  <a:srgbClr val="5A6875"/>
+                </a:solidFill>
+                <a:latin typeface="Open Sans"/>
+              </a:rPr>
+              <a:t>C × 9 FMAs → 1 store (bias as start value)</a:t>
+            </a:r>
+          </a:p>
+        </p:txBody>
+      </p:sp>
+      <p:sp>
+        <p:nvSpPr>
+          <p:cNvPr id="13" name="reuse-3"/>
+          <p:cNvSpPr/>
+          <p:nvPr/>
+        </p:nvSpPr>
+        <p:spPr>
+          <a:xfrm>
+            <a:off x="457200" y="3474720"/>
+            <a:ext cx="3291840" cy="658368"/>
+          </a:xfrm>
+          <a:prstGeom prst="roundRect">
+            <a:avLst>
+              <a:gd name="adj" fmla="val 8000"/>
+            </a:avLst>
+          </a:prstGeom>
+          <a:solidFill>
+            <a:srgbClr val="F1F3F5"/>
+          </a:solidFill>
+          <a:ln>
+            <a:noFill/>
+          </a:ln>
+          <a:effectLst/>
+        </p:spPr>
+        <p:style>
+          <a:lnRef idx="1">
+            <a:schemeClr val="accent1"/>
+          </a:lnRef>
+          <a:fillRef idx="3">
+            <a:schemeClr val="accent1"/>
+          </a:fillRef>
+          <a:effectRef idx="2">
+            <a:schemeClr val="accent1"/>
+          </a:effectRef>
+          <a:fontRef idx="minor">
+            <a:schemeClr val="lt1"/>
+          </a:fontRef>
+        </p:style>
+        <p:txBody>
+          <a:bodyPr rtlCol="0" anchor="ctr"/>
+          <a:lstStyle/>
+          <a:p>
+            <a:pPr algn="ctr"/>
+          </a:p>
+        </p:txBody>
+      </p:sp>
+      <p:sp>
+        <p:nvSpPr>
+          <p:cNvPr id="14" name="TextBox 13"/>
+          <p:cNvSpPr txBox="1"/>
+          <p:nvPr/>
+        </p:nvSpPr>
+        <p:spPr>
+          <a:xfrm>
+            <a:off x="566928" y="3529584"/>
+            <a:ext cx="3108960" cy="228600"/>
+          </a:xfrm>
+          <a:prstGeom prst="rect">
+            <a:avLst/>
+          </a:prstGeom>
+          <a:noFill/>
+        </p:spPr>
+        <p:txBody>
+          <a:bodyPr wrap="square" lIns="0" rIns="0" tIns="0" bIns="0" anchor="t">
+            <a:spAutoFit/>
+          </a:bodyPr>
+          <a:lstStyle/>
+          <a:p>
+            <a:pPr algn="l"/>
+            <a:r>
+              <a:rPr sz="1150" b="1" i="0">
+                <a:solidFill>
+                  <a:srgbClr val="1B2630"/>
+                </a:solidFill>
+                <a:latin typeface="Open Sans"/>
+              </a:rPr>
+              <a:t>Per step</a:t>
+            </a:r>
+          </a:p>
+        </p:txBody>
+      </p:sp>
+      <p:sp>
+        <p:nvSpPr>
+          <p:cNvPr id="15" name="TextBox 14"/>
+          <p:cNvSpPr txBox="1"/>
+          <p:nvPr/>
+        </p:nvSpPr>
+        <p:spPr>
+          <a:xfrm>
+            <a:off x="566928" y="3758184"/>
+            <a:ext cx="3108960" cy="384048"/>
+          </a:xfrm>
+          <a:prstGeom prst="rect">
+            <a:avLst/>
+          </a:prstGeom>
+          <a:noFill/>
+        </p:spPr>
+        <p:txBody>
+          <a:bodyPr wrap="square" lIns="0" rIns="0" tIns="0" bIns="0" anchor="t">
+            <a:spAutoFit/>
+          </a:bodyPr>
+          <a:lstStyle/>
+          <a:p>
+            <a:pPr algn="l"/>
+            <a:r>
+              <a:rPr sz="950" b="0" i="0">
+                <a:solidFill>
+                  <a:srgbClr val="5A6875"/>
+                </a:solidFill>
+                <a:latin typeface="Open Sans"/>
+              </a:rPr>
+              <a:t>7 loads : 10 FMAs, under the 2 loads/cycle limit</a:t>
+            </a:r>
+          </a:p>
+        </p:txBody>
+      </p:sp>
+      <p:sp>
+        <p:nvSpPr>
+          <p:cNvPr id="16" name="TextBox 15"/>
+          <p:cNvSpPr txBox="1"/>
+          <p:nvPr/>
+        </p:nvSpPr>
+        <p:spPr>
+          <a:xfrm>
+            <a:off x="3977639" y="960120"/>
+            <a:ext cx="4663440" cy="274320"/>
+          </a:xfrm>
+          <a:prstGeom prst="rect">
+            <a:avLst/>
+          </a:prstGeom>
+          <a:noFill/>
+        </p:spPr>
+        <p:txBody>
+          <a:bodyPr wrap="square" lIns="0" rIns="0" tIns="0" bIns="0" anchor="t">
+            <a:spAutoFit/>
+          </a:bodyPr>
+          <a:lstStyle/>
+          <a:p>
+            <a:pPr algn="l"/>
+            <a:r>
+              <a:rPr sz="1300" b="1" i="0">
+                <a:solidFill>
+                  <a:srgbClr val="BB0027"/>
+                </a:solidFill>
+                <a:latin typeface="Open Sans"/>
+              </a:rPr>
+              <a:t>(e) Implementation, AVX2 intrinsics (v2)</a:t>
+            </a:r>
+          </a:p>
+        </p:txBody>
+      </p:sp>
+      <p:sp>
+        <p:nvSpPr>
+          <p:cNvPr id="17" name="code"/>
+          <p:cNvSpPr/>
+          <p:nvPr/>
+        </p:nvSpPr>
+        <p:spPr>
+          <a:xfrm>
+            <a:off x="3977639" y="1280160"/>
+            <a:ext cx="4709160" cy="2331720"/>
+          </a:xfrm>
+          <a:prstGeom prst="roundRect">
+            <a:avLst>
+              <a:gd name="adj" fmla="val 8000"/>
+            </a:avLst>
+          </a:prstGeom>
+          <a:solidFill>
+            <a:srgbClr val="F7F8FA"/>
+          </a:solidFill>
+          <a:ln>
+            <a:noFill/>
+          </a:ln>
+          <a:effectLst/>
+        </p:spPr>
+        <p:style>
+          <a:lnRef idx="1">
+            <a:schemeClr val="accent1"/>
+          </a:lnRef>
+          <a:fillRef idx="3">
+            <a:schemeClr val="accent1"/>
+          </a:fillRef>
+          <a:effectRef idx="2">
+            <a:schemeClr val="accent1"/>
+          </a:effectRef>
+          <a:fontRef idx="minor">
+            <a:schemeClr val="lt1"/>
+          </a:fontRef>
+        </p:style>
+        <p:txBody>
+          <a:bodyPr rtlCol="0" anchor="ctr"/>
+          <a:lstStyle/>
+          <a:p>
+            <a:pPr algn="ctr"/>
+          </a:p>
+        </p:txBody>
+      </p:sp>
+      <p:sp>
+        <p:nvSpPr>
+          <p:cNvPr id="18" name="TextBox 17"/>
+          <p:cNvSpPr txBox="1"/>
+          <p:nvPr/>
+        </p:nvSpPr>
+        <p:spPr>
+          <a:xfrm>
+            <a:off x="4087368" y="1371600"/>
+            <a:ext cx="4526280" cy="2194560"/>
+          </a:xfrm>
+          <a:prstGeom prst="rect">
+            <a:avLst/>
+          </a:prstGeom>
+          <a:noFill/>
+        </p:spPr>
+        <p:txBody>
+          <a:bodyPr wrap="square" lIns="0" rIns="0" tIns="0" bIns="0" anchor="t">
+            <a:spAutoFit/>
+          </a:bodyPr>
+          <a:lstStyle/>
+          <a:p>
+            <a:pPr algn="l"/>
+            <a:r>
+              <a:rPr sz="850" b="0" i="0">
+                <a:solidFill>
+                  <a:srgbClr val="1B2630"/>
+                </a:solidFill>
+                <a:latin typeface="Courier New"/>
+              </a:rPr>
+              <a:t>c[b][j] = _mm256_load_ps(bias + 8*(kb+b));  // b&lt;2, j&lt;5</a:t>
+            </a:r>
+          </a:p>
+          <a:p>
+            <a:pPr algn="l">
+              <a:spcBef>
+                <a:spcPts val="600"/>
+              </a:spcBef>
+            </a:pPr>
+            <a:r>
+              <a:rPr sz="850" b="0" i="0">
+                <a:solidFill>
+                  <a:srgbClr val="1B2630"/>
+                </a:solidFill>
+                <a:latin typeface="Courier New"/>
+              </a:rPr>
+              <a:t>for cb in C/8:  for r in 0..2:  for s in 0..2:</a:t>
+            </a:r>
+          </a:p>
+          <a:p>
+            <a:pPr algn="l">
+              <a:spcBef>
+                <a:spcPts val="600"/>
+              </a:spcBef>
+            </a:pPr>
+            <a:r>
+              <a:rPr sz="850" b="0" i="0">
+                <a:solidFill>
+                  <a:srgbClr val="1B2630"/>
+                </a:solidFill>
+                <a:latin typeface="Courier New"/>
+              </a:rPr>
+              <a:t>  for ci in 0..7:              // unrolled by GCC</a:t>
+            </a:r>
+          </a:p>
+          <a:p>
+            <a:pPr algn="l">
+              <a:spcBef>
+                <a:spcPts val="600"/>
+              </a:spcBef>
+            </a:pPr>
+            <a:r>
+              <a:rPr sz="850" b="0" i="0">
+                <a:solidFill>
+                  <a:srgbClr val="1B2630"/>
+                </a:solidFill>
+                <a:latin typeface="Courier New"/>
+              </a:rPr>
+              <a:t>    w0 = _mm256_load_ps(W[kb  ][cb][r][s][ci]);</a:t>
+            </a:r>
+          </a:p>
+          <a:p>
+            <a:pPr algn="l">
+              <a:spcBef>
+                <a:spcPts val="600"/>
+              </a:spcBef>
+            </a:pPr>
+            <a:r>
+              <a:rPr sz="850" b="0" i="0">
+                <a:solidFill>
+                  <a:srgbClr val="1B2630"/>
+                </a:solidFill>
+                <a:latin typeface="Courier New"/>
+              </a:rPr>
+              <a:t>    w1 = _mm256_load_ps(W[kb+1][cb][r][s][ci]);</a:t>
+            </a:r>
+          </a:p>
+          <a:p>
+            <a:pPr algn="l">
+              <a:spcBef>
+                <a:spcPts val="600"/>
+              </a:spcBef>
+            </a:pPr>
+            <a:r>
+              <a:rPr sz="850" b="0" i="0">
+                <a:solidFill>
+                  <a:srgbClr val="1B2630"/>
+                </a:solidFill>
+                <a:latin typeface="Courier New"/>
+              </a:rPr>
+              <a:t>    for j in 0..4:             // unrolled</a:t>
+            </a:r>
+          </a:p>
+          <a:p>
+            <a:pPr algn="l">
+              <a:spcBef>
+                <a:spcPts val="600"/>
+              </a:spcBef>
+            </a:pPr>
+            <a:r>
+              <a:rPr sz="850" b="0" i="0">
+                <a:solidFill>
+                  <a:srgbClr val="1B2630"/>
+                </a:solidFill>
+                <a:latin typeface="Courier New"/>
+              </a:rPr>
+              <a:t>      x = _mm256_broadcast_ss(&amp;In[cb][oh+r][ow+j+s][ci]);</a:t>
+            </a:r>
+          </a:p>
+          <a:p>
+            <a:pPr algn="l">
+              <a:spcBef>
+                <a:spcPts val="600"/>
+              </a:spcBef>
+            </a:pPr>
+            <a:r>
+              <a:rPr sz="850" b="0" i="0">
+                <a:solidFill>
+                  <a:srgbClr val="1B2630"/>
+                </a:solidFill>
+                <a:latin typeface="Courier New"/>
+              </a:rPr>
+              <a:t>      c[0][j] = _mm256_fmadd_ps(x, w0, c[0][j]);</a:t>
+            </a:r>
+          </a:p>
+          <a:p>
+            <a:pPr algn="l">
+              <a:spcBef>
+                <a:spcPts val="600"/>
+              </a:spcBef>
+            </a:pPr>
+            <a:r>
+              <a:rPr sz="850" b="0" i="0">
+                <a:solidFill>
+                  <a:srgbClr val="1B2630"/>
+                </a:solidFill>
+                <a:latin typeface="Courier New"/>
+              </a:rPr>
+              <a:t>      c[1][j] = _mm256_fmadd_ps(x, w1, c[1][j]);</a:t>
+            </a:r>
+          </a:p>
+          <a:p>
+            <a:pPr algn="l">
+              <a:spcBef>
+                <a:spcPts val="600"/>
+              </a:spcBef>
+            </a:pPr>
+            <a:r>
+              <a:rPr sz="850" b="0" i="0">
+                <a:solidFill>
+                  <a:srgbClr val="1B2630"/>
+                </a:solidFill>
+                <a:latin typeface="Courier New"/>
+              </a:rPr>
+              <a:t>c[b][j] = epilogue_ps(c[b][j], fuse_silu);   // SiLU</a:t>
+            </a:r>
+          </a:p>
+          <a:p>
+            <a:pPr algn="l">
+              <a:spcBef>
+                <a:spcPts val="600"/>
+              </a:spcBef>
+            </a:pPr>
+            <a:r>
+              <a:rPr sz="850" b="0" i="0">
+                <a:solidFill>
+                  <a:srgbClr val="1B2630"/>
+                </a:solidFill>
+                <a:latin typeface="Courier New"/>
+              </a:rPr>
+              <a:t>_mm256_store_ps(&amp;Out[kb+b][oh+1][ow+j+1][0], c[b][j]);</a:t>
+            </a:r>
+          </a:p>
+        </p:txBody>
+      </p:sp>
+      <p:sp>
+        <p:nvSpPr>
+          <p:cNvPr id="19" name="TextBox 18"/>
+          <p:cNvSpPr txBox="1"/>
+          <p:nvPr/>
+        </p:nvSpPr>
+        <p:spPr>
+          <a:xfrm>
+            <a:off x="3977639" y="3685032"/>
+            <a:ext cx="4709160" cy="502920"/>
+          </a:xfrm>
+          <a:prstGeom prst="rect">
+            <a:avLst/>
+          </a:prstGeom>
+          <a:noFill/>
+        </p:spPr>
+        <p:txBody>
+          <a:bodyPr wrap="square" lIns="0" rIns="0" tIns="0" bIns="0" anchor="t">
+            <a:spAutoFit/>
+          </a:bodyPr>
+          <a:lstStyle/>
+          <a:p>
+            <a:pPr algn="l"/>
+            <a:r>
+              <a:rPr sz="950" b="0" i="0">
+                <a:solidFill>
+                  <a:srgbClr val="5A6875"/>
+                </a:solidFill>
+                <a:latin typeface="Open Sans"/>
+              </a:rPr>
+              <a:t>Weights packed [K/8][C/8][3][3][8 ic][8 oc]; activations NCHW8c with a 1-pixel zero halo, so no edge branches. Outer loops: output-channel pairs kb, rows oh, pixel groups ow of 5.</a:t>
+            </a:r>
+          </a:p>
+        </p:txBody>
+      </p:sp>
+    </p:spTree>
+  </p:cSld>
+  <p:clrMapOvr>
+    <a:masterClrMapping/>
+  </p:clrMapOvr>
+</p:sld>
+</file>
+
+<file path=ppt/slides/slide6.xml><?xml version="1.0" encoding="utf-8"?>
+<p:sld xmlns:a="http://schemas.openxmlformats.org/drawingml/2006/main" xmlns:p="http://schemas.openxmlformats.org/presentationml/2006/main" xmlns:r="http://schemas.openxmlformats.org/officeDocument/2006/relationships">
+  <p:cSld>
+    <p:spTree>
+      <p:nvGrpSpPr>
+        <p:cNvPr id="1" name=""/>
+        <p:cNvGrpSpPr/>
+        <p:nvPr/>
+      </p:nvGrpSpPr>
+      <p:grpSpPr/>
+      <p:sp>
+        <p:nvSpPr>
+          <p:cNvPr id="2" name="Title 1"/>
+          <p:cNvSpPr>
+            <a:spLocks noGrp="1"/>
+          </p:cNvSpPr>
+          <p:nvPr>
+            <p:ph type="title"/>
+          </p:nvPr>
+        </p:nvSpPr>
+        <p:spPr/>
+        <p:txBody>
+          <a:bodyPr/>
+          <a:lstStyle/>
+          <a:p>
+            <a:r>
+              <a:t>How the numbers are measured</a:t>
+            </a:r>
+          </a:p>
+        </p:txBody>
+      </p:sp>
+      <p:sp>
+        <p:nvSpPr>
+          <p:cNvPr id="3" name="assume-0"/>
+          <p:cNvSpPr/>
+          <p:nvPr/>
+        </p:nvSpPr>
+        <p:spPr>
+          <a:xfrm>
+            <a:off x="457200" y="1005840"/>
+            <a:ext cx="4023360" cy="713232"/>
+          </a:xfrm>
+          <a:prstGeom prst="roundRect">
+            <a:avLst>
+              <a:gd name="adj" fmla="val 8000"/>
+            </a:avLst>
+          </a:prstGeom>
+          <a:solidFill>
+            <a:srgbClr val="F1F3F5"/>
+          </a:solidFill>
+          <a:ln>
+            <a:noFill/>
+          </a:ln>
+          <a:effectLst/>
+        </p:spPr>
+        <p:style>
+          <a:lnRef idx="1">
+            <a:schemeClr val="accent1"/>
+          </a:lnRef>
+          <a:fillRef idx="3">
+            <a:schemeClr val="accent1"/>
+          </a:fillRef>
+          <a:effectRef idx="2">
+            <a:schemeClr val="accent1"/>
+          </a:effectRef>
+          <a:fontRef idx="minor">
+            <a:schemeClr val="lt1"/>
+          </a:fontRef>
+        </p:style>
+        <p:txBody>
+          <a:bodyPr rtlCol="0" anchor="ctr"/>
+          <a:lstStyle/>
+          <a:p>
+            <a:pPr algn="ctr"/>
+          </a:p>
+        </p:txBody>
+      </p:sp>
+      <p:sp>
+        <p:nvSpPr>
+          <p:cNvPr id="4" name="TextBox 3"/>
+          <p:cNvSpPr txBox="1"/>
+          <p:nvPr/>
+        </p:nvSpPr>
+        <p:spPr>
+          <a:xfrm>
+            <a:off x="566928" y="1069848"/>
+            <a:ext cx="3749039" cy="228600"/>
+          </a:xfrm>
+          <a:prstGeom prst="rect">
+            <a:avLst/>
+          </a:prstGeom>
+          <a:noFill/>
+        </p:spPr>
+        <p:txBody>
+          <a:bodyPr wrap="square" lIns="0" rIns="0" tIns="0" bIns="0" anchor="t">
+            <a:spAutoFit/>
+          </a:bodyPr>
+          <a:lstStyle/>
+          <a:p>
+            <a:pPr algn="l"/>
+            <a:r>
+              <a:rPr sz="1150" b="1" i="0">
+                <a:solidFill>
+                  <a:srgbClr val="1B2630"/>
+                </a:solidFill>
+                <a:latin typeface="Open Sans"/>
+              </a:rPr>
+              <a:t>Machine and code</a:t>
+            </a:r>
+          </a:p>
+        </p:txBody>
+      </p:sp>
+      <p:sp>
+        <p:nvSpPr>
+          <p:cNvPr id="5" name="TextBox 4"/>
+          <p:cNvSpPr txBox="1"/>
+          <p:nvPr/>
+        </p:nvSpPr>
+        <p:spPr>
+          <a:xfrm>
+            <a:off x="566928" y="1307592"/>
+            <a:ext cx="3794760" cy="411480"/>
+          </a:xfrm>
+          <a:prstGeom prst="rect">
+            <a:avLst/>
+          </a:prstGeom>
+          <a:noFill/>
+        </p:spPr>
+        <p:txBody>
+          <a:bodyPr wrap="square" lIns="0" rIns="0" tIns="0" bIns="0" anchor="t">
+            <a:spAutoFit/>
+          </a:bodyPr>
+          <a:lstStyle/>
+          <a:p>
+            <a:pPr algn="l"/>
+            <a:r>
+              <a:rPr sz="950" b="0" i="0">
+                <a:solidFill>
+                  <a:srgbClr val="5A6875"/>
+                </a:solidFill>
+                <a:latin typeface="Open Sans"/>
+              </a:rPr>
+              <a:t>ece028, Xeon E5-2640 v4, 1 core (taskset); C++ with AVX2 intrinsics only, GCC 8.5 -O3</a:t>
+            </a:r>
+          </a:p>
+        </p:txBody>
+      </p:sp>
+      <p:sp>
+        <p:nvSpPr>
+          <p:cNvPr id="6" name="assume-1"/>
+          <p:cNvSpPr/>
+          <p:nvPr/>
+        </p:nvSpPr>
+        <p:spPr>
+          <a:xfrm>
+            <a:off x="4617720" y="1005840"/>
+            <a:ext cx="4023360" cy="713232"/>
+          </a:xfrm>
+          <a:prstGeom prst="roundRect">
+            <a:avLst>
+              <a:gd name="adj" fmla="val 8000"/>
+            </a:avLst>
+          </a:prstGeom>
+          <a:solidFill>
+            <a:srgbClr val="F1F3F5"/>
+          </a:solidFill>
+          <a:ln>
+            <a:noFill/>
+          </a:ln>
+          <a:effectLst/>
+        </p:spPr>
+        <p:style>
+          <a:lnRef idx="1">
+            <a:schemeClr val="accent1"/>
+          </a:lnRef>
+          <a:fillRef idx="3">
+            <a:schemeClr val="accent1"/>
+          </a:fillRef>
+          <a:effectRef idx="2">
+            <a:schemeClr val="accent1"/>
+          </a:effectRef>
+          <a:fontRef idx="minor">
+            <a:schemeClr val="lt1"/>
+          </a:fontRef>
+        </p:style>
+        <p:txBody>
+          <a:bodyPr rtlCol="0" anchor="ctr"/>
+          <a:lstStyle/>
+          <a:p>
+            <a:pPr algn="ctr"/>
+          </a:p>
+        </p:txBody>
+      </p:sp>
+      <p:sp>
+        <p:nvSpPr>
+          <p:cNvPr id="7" name="TextBox 6"/>
+          <p:cNvSpPr txBox="1"/>
+          <p:nvPr/>
+        </p:nvSpPr>
+        <p:spPr>
+          <a:xfrm>
+            <a:off x="4727448" y="1069848"/>
+            <a:ext cx="3749039" cy="228600"/>
+          </a:xfrm>
+          <a:prstGeom prst="rect">
+            <a:avLst/>
+          </a:prstGeom>
+          <a:noFill/>
+        </p:spPr>
+        <p:txBody>
+          <a:bodyPr wrap="square" lIns="0" rIns="0" tIns="0" bIns="0" anchor="t">
+            <a:spAutoFit/>
+          </a:bodyPr>
+          <a:lstStyle/>
+          <a:p>
+            <a:pPr algn="l"/>
+            <a:r>
+              <a:rPr sz="1150" b="1" i="0">
+                <a:solidFill>
+                  <a:srgbClr val="1B2630"/>
+                </a:solidFill>
+                <a:latin typeface="Open Sans"/>
+              </a:rPr>
+              <a:t>Peak</a:t>
+            </a:r>
+          </a:p>
+        </p:txBody>
+      </p:sp>
+      <p:sp>
+        <p:nvSpPr>
+          <p:cNvPr id="8" name="TextBox 7"/>
+          <p:cNvSpPr txBox="1"/>
+          <p:nvPr/>
+        </p:nvSpPr>
+        <p:spPr>
+          <a:xfrm>
+            <a:off x="4727448" y="1307592"/>
+            <a:ext cx="3794760" cy="411480"/>
+          </a:xfrm>
+          <a:prstGeom prst="rect">
+            <a:avLst/>
+          </a:prstGeom>
+          <a:noFill/>
+        </p:spPr>
+        <p:txBody>
+          <a:bodyPr wrap="square" lIns="0" rIns="0" tIns="0" bIns="0" anchor="t">
+            <a:spAutoFit/>
+          </a:bodyPr>
+          <a:lstStyle/>
+          <a:p>
+            <a:pPr algn="l"/>
+            <a:r>
+              <a:rPr sz="950" b="0" i="0">
+                <a:solidFill>
+                  <a:srgbClr val="5A6875"/>
+                </a:solidFill>
+                <a:latin typeface="Open Sans"/>
+              </a:rPr>
+              <a:t>2 FMA units × 8 FP32 lanes × 2 FLOPs = 32 FLOPs/cycle per core (AVX2, no AVX-512)</a:t>
+            </a:r>
+          </a:p>
+        </p:txBody>
+      </p:sp>
+      <p:sp>
+        <p:nvSpPr>
+          <p:cNvPr id="9" name="assume-2"/>
+          <p:cNvSpPr/>
+          <p:nvPr/>
+        </p:nvSpPr>
+        <p:spPr>
+          <a:xfrm>
+            <a:off x="457200" y="1810512"/>
+            <a:ext cx="4023360" cy="713232"/>
+          </a:xfrm>
+          <a:prstGeom prst="roundRect">
+            <a:avLst>
+              <a:gd name="adj" fmla="val 8000"/>
+            </a:avLst>
+          </a:prstGeom>
+          <a:solidFill>
+            <a:srgbClr val="F1F3F5"/>
+          </a:solidFill>
+          <a:ln>
+            <a:noFill/>
+          </a:ln>
+          <a:effectLst/>
+        </p:spPr>
+        <p:style>
+          <a:lnRef idx="1">
+            <a:schemeClr val="accent1"/>
+          </a:lnRef>
+          <a:fillRef idx="3">
+            <a:schemeClr val="accent1"/>
+          </a:fillRef>
+          <a:effectRef idx="2">
+            <a:schemeClr val="accent1"/>
+          </a:effectRef>
+          <a:fontRef idx="minor">
+            <a:schemeClr val="lt1"/>
+          </a:fontRef>
+        </p:style>
+        <p:txBody>
+          <a:bodyPr rtlCol="0" anchor="ctr"/>
+          <a:lstStyle/>
+          <a:p>
+            <a:pPr algn="ctr"/>
+          </a:p>
+        </p:txBody>
+      </p:sp>
+      <p:sp>
+        <p:nvSpPr>
+          <p:cNvPr id="10" name="TextBox 9"/>
+          <p:cNvSpPr txBox="1"/>
+          <p:nvPr/>
+        </p:nvSpPr>
+        <p:spPr>
+          <a:xfrm>
+            <a:off x="566928" y="1874519"/>
+            <a:ext cx="3749039" cy="228600"/>
+          </a:xfrm>
+          <a:prstGeom prst="rect">
+            <a:avLst/>
+          </a:prstGeom>
+          <a:noFill/>
+        </p:spPr>
+        <p:txBody>
+          <a:bodyPr wrap="square" lIns="0" rIns="0" tIns="0" bIns="0" anchor="t">
+            <a:spAutoFit/>
+          </a:bodyPr>
+          <a:lstStyle/>
+          <a:p>
+            <a:pPr algn="l"/>
+            <a:r>
+              <a:rPr sz="1150" b="1" i="0">
+                <a:solidFill>
+                  <a:srgbClr val="BB0027"/>
+                </a:solidFill>
+                <a:latin typeface="Open Sans"/>
+              </a:rPr>
+              <a:t>Cycles</a:t>
+            </a:r>
+          </a:p>
+        </p:txBody>
+      </p:sp>
+      <p:sp>
+        <p:nvSpPr>
+          <p:cNvPr id="11" name="TextBox 10"/>
+          <p:cNvSpPr txBox="1"/>
+          <p:nvPr/>
+        </p:nvSpPr>
+        <p:spPr>
+          <a:xfrm>
+            <a:off x="566928" y="2112264"/>
+            <a:ext cx="3794760" cy="411480"/>
+          </a:xfrm>
+          <a:prstGeom prst="rect">
+            <a:avLst/>
+          </a:prstGeom>
+          <a:noFill/>
+        </p:spPr>
+        <p:txBody>
+          <a:bodyPr wrap="square" lIns="0" rIns="0" tIns="0" bIns="0" anchor="t">
+            <a:spAutoFit/>
+          </a:bodyPr>
+          <a:lstStyle/>
+          <a:p>
+            <a:pPr algn="l"/>
+            <a:r>
+              <a:rPr sz="950" b="0" i="0">
+                <a:solidFill>
+                  <a:srgbClr val="5A6875"/>
+                </a:solidFill>
+                <a:latin typeface="Open Sans"/>
+              </a:rPr>
+              <a:t>wall time × 3.4 GHz (max turbo), as in Assignment 2: can only understate % of peak</a:t>
+            </a:r>
+          </a:p>
+        </p:txBody>
+      </p:sp>
+      <p:sp>
+        <p:nvSpPr>
+          <p:cNvPr id="12" name="assume-3"/>
+          <p:cNvSpPr/>
+          <p:nvPr/>
+        </p:nvSpPr>
+        <p:spPr>
+          <a:xfrm>
+            <a:off x="4617720" y="1810512"/>
+            <a:ext cx="4023360" cy="713232"/>
+          </a:xfrm>
+          <a:prstGeom prst="roundRect">
+            <a:avLst>
+              <a:gd name="adj" fmla="val 8000"/>
+            </a:avLst>
+          </a:prstGeom>
+          <a:solidFill>
+            <a:srgbClr val="F1F3F5"/>
+          </a:solidFill>
+          <a:ln>
+            <a:noFill/>
+          </a:ln>
+          <a:effectLst/>
+        </p:spPr>
+        <p:style>
+          <a:lnRef idx="1">
+            <a:schemeClr val="accent1"/>
+          </a:lnRef>
+          <a:fillRef idx="3">
+            <a:schemeClr val="accent1"/>
+          </a:fillRef>
+          <a:effectRef idx="2">
+            <a:schemeClr val="accent1"/>
+          </a:effectRef>
+          <a:fontRef idx="minor">
+            <a:schemeClr val="lt1"/>
+          </a:fontRef>
+        </p:style>
+        <p:txBody>
+          <a:bodyPr rtlCol="0" anchor="ctr"/>
+          <a:lstStyle/>
+          <a:p>
+            <a:pPr algn="ctr"/>
+          </a:p>
+        </p:txBody>
+      </p:sp>
+      <p:sp>
+        <p:nvSpPr>
+          <p:cNvPr id="13" name="TextBox 12"/>
+          <p:cNvSpPr txBox="1"/>
+          <p:nvPr/>
+        </p:nvSpPr>
+        <p:spPr>
+          <a:xfrm>
+            <a:off x="4727448" y="1874519"/>
+            <a:ext cx="3749039" cy="228600"/>
+          </a:xfrm>
+          <a:prstGeom prst="rect">
+            <a:avLst/>
+          </a:prstGeom>
+          <a:noFill/>
+        </p:spPr>
+        <p:txBody>
+          <a:bodyPr wrap="square" lIns="0" rIns="0" tIns="0" bIns="0" anchor="t">
+            <a:spAutoFit/>
+          </a:bodyPr>
+          <a:lstStyle/>
+          <a:p>
+            <a:pPr algn="l"/>
+            <a:r>
+              <a:rPr sz="1150" b="1" i="0">
+                <a:solidFill>
+                  <a:srgbClr val="1B2630"/>
+                </a:solidFill>
+                <a:latin typeface="Open Sans"/>
+              </a:rPr>
+              <a:t>FLOPs</a:t>
+            </a:r>
+          </a:p>
+        </p:txBody>
+      </p:sp>
+      <p:sp>
+        <p:nvSpPr>
+          <p:cNvPr id="14" name="TextBox 13"/>
+          <p:cNvSpPr txBox="1"/>
+          <p:nvPr/>
+        </p:nvSpPr>
+        <p:spPr>
+          <a:xfrm>
+            <a:off x="4727448" y="2112264"/>
+            <a:ext cx="3794760" cy="411480"/>
+          </a:xfrm>
+          <a:prstGeom prst="rect">
+            <a:avLst/>
+          </a:prstGeom>
+          <a:noFill/>
+        </p:spPr>
+        <p:txBody>
+          <a:bodyPr wrap="square" lIns="0" rIns="0" tIns="0" bIns="0" anchor="t">
+            <a:spAutoFit/>
+          </a:bodyPr>
+          <a:lstStyle/>
+          <a:p>
+            <a:pPr algn="l"/>
+            <a:r>
+              <a:rPr sz="950" b="0" i="0">
+                <a:solidFill>
+                  <a:srgbClr val="5A6875"/>
+                </a:solidFill>
+                <a:latin typeface="Open Sans"/>
+              </a:rPr>
+              <a:t>2 × outputs × C × 9: only the convolution's multiply-adds; bias and SiLU count as zero</a:t>
+            </a:r>
+          </a:p>
+        </p:txBody>
+      </p:sp>
+      <p:sp>
+        <p:nvSpPr>
+          <p:cNvPr id="15" name="assume-4"/>
+          <p:cNvSpPr/>
+          <p:nvPr/>
+        </p:nvSpPr>
+        <p:spPr>
+          <a:xfrm>
+            <a:off x="457200" y="2615184"/>
+            <a:ext cx="4023360" cy="713232"/>
+          </a:xfrm>
+          <a:prstGeom prst="roundRect">
+            <a:avLst>
+              <a:gd name="adj" fmla="val 8000"/>
+            </a:avLst>
+          </a:prstGeom>
+          <a:solidFill>
+            <a:srgbClr val="F1F3F5"/>
+          </a:solidFill>
+          <a:ln>
+            <a:noFill/>
+          </a:ln>
+          <a:effectLst/>
+        </p:spPr>
+        <p:style>
+          <a:lnRef idx="1">
+            <a:schemeClr val="accent1"/>
+          </a:lnRef>
+          <a:fillRef idx="3">
+            <a:schemeClr val="accent1"/>
+          </a:fillRef>
+          <a:effectRef idx="2">
+            <a:schemeClr val="accent1"/>
+          </a:effectRef>
+          <a:fontRef idx="minor">
+            <a:schemeClr val="lt1"/>
+          </a:fontRef>
+        </p:style>
+        <p:txBody>
+          <a:bodyPr rtlCol="0" anchor="ctr"/>
+          <a:lstStyle/>
+          <a:p>
+            <a:pPr algn="ctr"/>
+          </a:p>
+        </p:txBody>
+      </p:sp>
+      <p:sp>
+        <p:nvSpPr>
+          <p:cNvPr id="16" name="TextBox 15"/>
+          <p:cNvSpPr txBox="1"/>
+          <p:nvPr/>
+        </p:nvSpPr>
+        <p:spPr>
+          <a:xfrm>
+            <a:off x="566928" y="2679192"/>
+            <a:ext cx="3749039" cy="228600"/>
+          </a:xfrm>
+          <a:prstGeom prst="rect">
+            <a:avLst/>
+          </a:prstGeom>
+          <a:noFill/>
+        </p:spPr>
+        <p:txBody>
+          <a:bodyPr wrap="square" lIns="0" rIns="0" tIns="0" bIns="0" anchor="t">
+            <a:spAutoFit/>
+          </a:bodyPr>
+          <a:lstStyle/>
+          <a:p>
+            <a:pPr algn="l"/>
+            <a:r>
+              <a:rPr sz="1150" b="1" i="0">
+                <a:solidFill>
+                  <a:srgbClr val="1B2630"/>
+                </a:solidFill>
+                <a:latin typeface="Open Sans"/>
+              </a:rPr>
+              <a:t>Microkernel alone</a:t>
+            </a:r>
+          </a:p>
+        </p:txBody>
+      </p:sp>
+      <p:sp>
+        <p:nvSpPr>
+          <p:cNvPr id="17" name="TextBox 16"/>
+          <p:cNvSpPr txBox="1"/>
+          <p:nvPr/>
+        </p:nvSpPr>
+        <p:spPr>
+          <a:xfrm>
+            <a:off x="566928" y="2916936"/>
+            <a:ext cx="3794760" cy="411480"/>
+          </a:xfrm>
+          <a:prstGeom prst="rect">
+            <a:avLst/>
+          </a:prstGeom>
+          <a:noFill/>
+        </p:spPr>
+        <p:txBody>
+          <a:bodyPr wrap="square" lIns="0" rIns="0" tIns="0" bIns="0" anchor="t">
+            <a:spAutoFit/>
+          </a:bodyPr>
+          <a:lstStyle/>
+          <a:p>
+            <a:pPr algn="l"/>
+            <a:r>
+              <a:rPr sz="950" b="0" i="0">
+                <a:solidFill>
+                  <a:srgbClr val="5A6875"/>
+                </a:solidFill>
+                <a:latin typeface="Open Sans"/>
+              </a:rPr>
+              <a:t>one tile of data reused (stays in L1/L2), 2 s warm-up, best of 3 runs, SiLU off</a:t>
+            </a:r>
+          </a:p>
+        </p:txBody>
+      </p:sp>
+      <p:sp>
+        <p:nvSpPr>
+          <p:cNvPr id="18" name="assume-5"/>
+          <p:cNvSpPr/>
+          <p:nvPr/>
+        </p:nvSpPr>
+        <p:spPr>
+          <a:xfrm>
+            <a:off x="4617720" y="2615184"/>
+            <a:ext cx="4023360" cy="713232"/>
+          </a:xfrm>
+          <a:prstGeom prst="roundRect">
+            <a:avLst>
+              <a:gd name="adj" fmla="val 8000"/>
+            </a:avLst>
+          </a:prstGeom>
+          <a:solidFill>
+            <a:srgbClr val="F1F3F5"/>
+          </a:solidFill>
+          <a:ln>
+            <a:noFill/>
+          </a:ln>
+          <a:effectLst/>
+        </p:spPr>
+        <p:style>
+          <a:lnRef idx="1">
+            <a:schemeClr val="accent1"/>
+          </a:lnRef>
+          <a:fillRef idx="3">
+            <a:schemeClr val="accent1"/>
+          </a:fillRef>
+          <a:effectRef idx="2">
+            <a:schemeClr val="accent1"/>
+          </a:effectRef>
+          <a:fontRef idx="minor">
+            <a:schemeClr val="lt1"/>
+          </a:fontRef>
+        </p:style>
+        <p:txBody>
+          <a:bodyPr rtlCol="0" anchor="ctr"/>
+          <a:lstStyle/>
+          <a:p>
+            <a:pPr algn="ctr"/>
+          </a:p>
+        </p:txBody>
+      </p:sp>
+      <p:sp>
+        <p:nvSpPr>
+          <p:cNvPr id="19" name="TextBox 18"/>
+          <p:cNvSpPr txBox="1"/>
+          <p:nvPr/>
+        </p:nvSpPr>
+        <p:spPr>
+          <a:xfrm>
+            <a:off x="4727448" y="2679192"/>
+            <a:ext cx="3749039" cy="228600"/>
+          </a:xfrm>
+          <a:prstGeom prst="rect">
+            <a:avLst/>
+          </a:prstGeom>
+          <a:noFill/>
+        </p:spPr>
+        <p:txBody>
+          <a:bodyPr wrap="square" lIns="0" rIns="0" tIns="0" bIns="0" anchor="t">
+            <a:spAutoFit/>
+          </a:bodyPr>
+          <a:lstStyle/>
+          <a:p>
+            <a:pPr algn="l"/>
+            <a:r>
+              <a:rPr sz="1150" b="1" i="0">
+                <a:solidFill>
+                  <a:srgbClr val="1B2630"/>
+                </a:solidFill>
+                <a:latin typeface="Open Sans"/>
+              </a:rPr>
+              <a:t>Full layers</a:t>
+            </a:r>
+          </a:p>
+        </p:txBody>
+      </p:sp>
+      <p:sp>
+        <p:nvSpPr>
+          <p:cNvPr id="20" name="TextBox 19"/>
+          <p:cNvSpPr txBox="1"/>
+          <p:nvPr/>
+        </p:nvSpPr>
+        <p:spPr>
+          <a:xfrm>
+            <a:off x="4727448" y="2916936"/>
+            <a:ext cx="3794760" cy="411480"/>
+          </a:xfrm>
+          <a:prstGeom prst="rect">
+            <a:avLst/>
+          </a:prstGeom>
+          <a:noFill/>
+        </p:spPr>
+        <p:txBody>
+          <a:bodyPr wrap="square" lIns="0" rIns="0" tIns="0" bIns="0" anchor="t">
+            <a:spAutoFit/>
+          </a:bodyPr>
+          <a:lstStyle/>
+          <a:p>
+            <a:pPr algn="l"/>
+            <a:r>
+              <a:rPr sz="950" b="0" i="0">
+                <a:solidFill>
+                  <a:srgbClr val="5A6875"/>
+                </a:solidFill>
+                <a:latin typeface="Open Sans"/>
+              </a:rPr>
+              <a:t>all 32 real YOLOv8n layers, batch 1, 640 × 640 image, FP32, SiLU on</a:t>
+            </a:r>
+          </a:p>
+        </p:txBody>
+      </p:sp>
+      <p:sp>
+        <p:nvSpPr>
+          <p:cNvPr id="21" name="assume-6"/>
+          <p:cNvSpPr/>
+          <p:nvPr/>
+        </p:nvSpPr>
+        <p:spPr>
+          <a:xfrm>
+            <a:off x="457200" y="3419856"/>
+            <a:ext cx="4023360" cy="713232"/>
+          </a:xfrm>
+          <a:prstGeom prst="roundRect">
+            <a:avLst>
+              <a:gd name="adj" fmla="val 8000"/>
+            </a:avLst>
+          </a:prstGeom>
+          <a:solidFill>
+            <a:srgbClr val="F1F3F5"/>
+          </a:solidFill>
+          <a:ln>
+            <a:noFill/>
+          </a:ln>
+          <a:effectLst/>
+        </p:spPr>
+        <p:style>
+          <a:lnRef idx="1">
+            <a:schemeClr val="accent1"/>
+          </a:lnRef>
+          <a:fillRef idx="3">
+            <a:schemeClr val="accent1"/>
+          </a:fillRef>
+          <a:effectRef idx="2">
+            <a:schemeClr val="accent1"/>
+          </a:effectRef>
+          <a:fontRef idx="minor">
+            <a:schemeClr val="lt1"/>
+          </a:fontRef>
+        </p:style>
+        <p:txBody>
+          <a:bodyPr rtlCol="0" anchor="ctr"/>
+          <a:lstStyle/>
+          <a:p>
+            <a:pPr algn="ctr"/>
+          </a:p>
+        </p:txBody>
+      </p:sp>
+      <p:sp>
+        <p:nvSpPr>
+          <p:cNvPr id="22" name="TextBox 21"/>
+          <p:cNvSpPr txBox="1"/>
+          <p:nvPr/>
+        </p:nvSpPr>
+        <p:spPr>
+          <a:xfrm>
+            <a:off x="566928" y="3483864"/>
+            <a:ext cx="3749039" cy="228600"/>
+          </a:xfrm>
+          <a:prstGeom prst="rect">
+            <a:avLst/>
+          </a:prstGeom>
+          <a:noFill/>
+        </p:spPr>
+        <p:txBody>
+          <a:bodyPr wrap="square" lIns="0" rIns="0" tIns="0" bIns="0" anchor="t">
+            <a:spAutoFit/>
+          </a:bodyPr>
+          <a:lstStyle/>
+          <a:p>
+            <a:pPr algn="l"/>
+            <a:r>
+              <a:rPr sz="1150" b="1" i="0">
+                <a:solidFill>
+                  <a:srgbClr val="1B2630"/>
+                </a:solidFill>
+                <a:latin typeface="Open Sans"/>
+              </a:rPr>
+              <a:t>Correct</a:t>
+            </a:r>
+          </a:p>
+        </p:txBody>
+      </p:sp>
+      <p:sp>
+        <p:nvSpPr>
+          <p:cNvPr id="23" name="TextBox 22"/>
+          <p:cNvSpPr txBox="1"/>
+          <p:nvPr/>
+        </p:nvSpPr>
+        <p:spPr>
+          <a:xfrm>
+            <a:off x="566928" y="3721608"/>
+            <a:ext cx="3794760" cy="411480"/>
+          </a:xfrm>
+          <a:prstGeom prst="rect">
+            <a:avLst/>
+          </a:prstGeom>
+          <a:noFill/>
+        </p:spPr>
+        <p:txBody>
+          <a:bodyPr wrap="square" lIns="0" rIns="0" tIns="0" bIns="0" anchor="t">
+            <a:spAutoFit/>
+          </a:bodyPr>
+          <a:lstStyle/>
+          <a:p>
+            <a:pPr algn="l"/>
+            <a:r>
+              <a:rPr sz="950" b="0" i="0">
+                <a:solidFill>
+                  <a:srgbClr val="5A6875"/>
+                </a:solidFill>
+                <a:latin typeface="Open Sans"/>
+              </a:rPr>
+              <a:t>every result checked: max relative error ≤ 1e-4 vs a scalar reference / OpenCV's real outputs</a:t>
+            </a:r>
+          </a:p>
+        </p:txBody>
+      </p:sp>
+      <p:sp>
+        <p:nvSpPr>
+          <p:cNvPr id="24" name="assume-7"/>
+          <p:cNvSpPr/>
+          <p:nvPr/>
+        </p:nvSpPr>
+        <p:spPr>
+          <a:xfrm>
+            <a:off x="4617720" y="3419856"/>
+            <a:ext cx="4023360" cy="713232"/>
+          </a:xfrm>
+          <a:prstGeom prst="roundRect">
+            <a:avLst>
+              <a:gd name="adj" fmla="val 8000"/>
+            </a:avLst>
+          </a:prstGeom>
+          <a:solidFill>
+            <a:srgbClr val="F1F3F5"/>
+          </a:solidFill>
+          <a:ln>
+            <a:noFill/>
+          </a:ln>
+          <a:effectLst/>
+        </p:spPr>
+        <p:style>
+          <a:lnRef idx="1">
+            <a:schemeClr val="accent1"/>
+          </a:lnRef>
+          <a:fillRef idx="3">
+            <a:schemeClr val="accent1"/>
+          </a:fillRef>
+          <a:effectRef idx="2">
+            <a:schemeClr val="accent1"/>
+          </a:effectRef>
+          <a:fontRef idx="minor">
+            <a:schemeClr val="lt1"/>
+          </a:fontRef>
+        </p:style>
+        <p:txBody>
+          <a:bodyPr rtlCol="0" anchor="ctr"/>
+          <a:lstStyle/>
+          <a:p>
+            <a:pPr algn="ctr"/>
+          </a:p>
+        </p:txBody>
+      </p:sp>
+      <p:sp>
+        <p:nvSpPr>
+          <p:cNvPr id="25" name="TextBox 24"/>
+          <p:cNvSpPr txBox="1"/>
+          <p:nvPr/>
+        </p:nvSpPr>
+        <p:spPr>
+          <a:xfrm>
+            <a:off x="4727448" y="3483864"/>
+            <a:ext cx="3749039" cy="228600"/>
+          </a:xfrm>
+          <a:prstGeom prst="rect">
+            <a:avLst/>
+          </a:prstGeom>
+          <a:noFill/>
+        </p:spPr>
+        <p:txBody>
+          <a:bodyPr wrap="square" lIns="0" rIns="0" tIns="0" bIns="0" anchor="t">
+            <a:spAutoFit/>
+          </a:bodyPr>
+          <a:lstStyle/>
+          <a:p>
+            <a:pPr algn="l"/>
+            <a:r>
+              <a:rPr sz="1150" b="1" i="0">
+                <a:solidFill>
+                  <a:srgbClr val="1B2630"/>
+                </a:solidFill>
+                <a:latin typeface="Open Sans"/>
+              </a:rPr>
+              <a:t>Baseline</a:t>
+            </a:r>
+          </a:p>
+        </p:txBody>
+      </p:sp>
+      <p:sp>
+        <p:nvSpPr>
+          <p:cNvPr id="26" name="TextBox 25"/>
+          <p:cNvSpPr txBox="1"/>
+          <p:nvPr/>
+        </p:nvSpPr>
+        <p:spPr>
+          <a:xfrm>
+            <a:off x="4727448" y="3721608"/>
+            <a:ext cx="3794760" cy="411480"/>
+          </a:xfrm>
+          <a:prstGeom prst="rect">
+            <a:avLst/>
+          </a:prstGeom>
+          <a:noFill/>
+        </p:spPr>
+        <p:txBody>
+          <a:bodyPr wrap="square" lIns="0" rIns="0" tIns="0" bIns="0" anchor="t">
+            <a:spAutoFit/>
+          </a:bodyPr>
+          <a:lstStyle/>
+          <a:p>
+            <a:pPr algn="l"/>
+            <a:r>
+              <a:rPr sz="950" b="0" i="0">
+                <a:solidFill>
+                  <a:srgbClr val="5A6875"/>
+                </a:solidFill>
+                <a:latin typeface="Open Sans"/>
+              </a:rPr>
+              <a:t>OpenCV DNN on the same ONNX model, 1 thread, its own per-layer timer</a:t>
+            </a:r>
+          </a:p>
+        </p:txBody>
+      </p:sp>
+    </p:spTree>
+  </p:cSld>
+  <p:clrMapOvr>
+    <a:masterClrMapping/>
+  </p:clrMapOvr>
+</p:sld>
+</file>
+
+<file path=ppt/slides/slide7.xml><?xml version="1.0" encoding="utf-8"?>
 <p:sld xmlns:a="http://schemas.openxmlformats.org/drawingml/2006/main" xmlns:p="http://schemas.openxmlformats.org/presentationml/2006/main" xmlns:r="http://schemas.openxmlformats.org/officeDocument/2006/relationships">
   <p:cSld>
     <p:spTree>
@@ -10803,7 +13937,7 @@
 </p:sld>
 </file>
 
-<file path=ppt/slides/slide6.xml><?xml version="1.0" encoding="utf-8"?>
+<file path=ppt/slides/slide8.xml><?xml version="1.0" encoding="utf-8"?>
 <p:sld xmlns:a="http://schemas.openxmlformats.org/drawingml/2006/main" xmlns:p="http://schemas.openxmlformats.org/presentationml/2006/main" xmlns:r="http://schemas.openxmlformats.org/officeDocument/2006/relationships">
   <p:cSld>
     <p:spTree>
@@ -10829,14 +13963,14 @@
           <a:lstStyle/>
           <a:p>
             <a:r>
-              <a:t>Same math, 50% to 95%: tile and register allocation</a:t>
+              <a:t>Same math, 50% to 86%: the tile and GCC's registers</a:t>
             </a:r>
           </a:p>
         </p:txBody>
       </p:sp>
       <p:pic>
         <p:nvPicPr>
-          <p:cNvPr id="3" name="Picture 2" descr="ukr_design_space.png"/>
+          <p:cNvPr id="3" name="Picture 2" descr="ukr_design_space_intrinsics.png"/>
           <p:cNvPicPr>
             <a:picLocks noChangeAspect="1"/>
           </p:cNvPicPr>
@@ -10875,7 +14009,7 @@
             </a:avLst>
           </a:prstGeom>
           <a:solidFill>
-            <a:srgbClr val="F1F3F5"/>
+            <a:srgbClr val="F8E5E9"/>
           </a:solidFill>
           <a:ln>
             <a:noFill/>
@@ -10930,11 +14064,11 @@
             <a:r>
               <a:rPr sz="1200" b="1" i="0">
                 <a:solidFill>
-                  <a:srgbClr val="1B2630"/>
+                  <a:srgbClr val="BB0027"/>
                 </a:solidFill>
                 <a:latin typeface="Open Sans"/>
               </a:rPr>
-              <a:t>Intrinsics</a:t>
+              <a:t>Best: 2×5</a:t>
             </a:r>
           </a:p>
         </p:txBody>
@@ -10969,7 +14103,7 @@
                 </a:solidFill>
                 <a:latin typeface="Open Sans"/>
               </a:rPr>
-              <a:t>GCC: clean at 13 regs, copies at 15, spills at 16</a:t>
+              <a:t>13 registers, 85% alone, 77% in all 32 layers</a:t>
             </a:r>
           </a:p>
         </p:txBody>
@@ -10991,7 +14125,7 @@
             </a:avLst>
           </a:prstGeom>
           <a:solidFill>
-            <a:srgbClr val="F8E5E9"/>
+            <a:srgbClr val="F1F3F5"/>
           </a:solidFill>
           <a:ln>
             <a:noFill/>
@@ -11046,11 +14180,11 @@
             <a:r>
               <a:rPr sz="1200" b="1" i="0">
                 <a:solidFill>
-                  <a:srgbClr val="BB0027"/>
+                  <a:srgbClr val="1B2630"/>
                 </a:solidFill>
                 <a:latin typeface="Open Sans"/>
               </a:rPr>
-              <a:t>Inline asm</a:t>
+              <a:t>GCC's registers</a:t>
             </a:r>
           </a:p>
         </p:txBody>
@@ -11085,7 +14219,7 @@
                 </a:solidFill>
                 <a:latin typeface="Open Sans"/>
               </a:rPr>
-              <a:t>hand-written CPU instructions, we pick every register: 2×6 at 95% alone, 84% in layers</a:t>
+              <a:t>clean at 13, 11 copies per tap at 15 (2×6), spills at 16 (4×3: 49%)</a:t>
             </a:r>
           </a:p>
         </p:txBody>
@@ -11201,624 +14335,7 @@
                 </a:solidFill>
                 <a:latin typeface="Open Sans"/>
               </a:rPr>
-              <a:t>lost: uop cache, spills</a:t>
-            </a:r>
-          </a:p>
-        </p:txBody>
-      </p:sp>
-    </p:spTree>
-  </p:cSld>
-  <p:clrMapOvr>
-    <a:masterClrMapping/>
-  </p:clrMapOvr>
-</p:sld>
-</file>
-
-<file path=ppt/slides/slide7.xml><?xml version="1.0" encoding="utf-8"?>
-<p:sld xmlns:a="http://schemas.openxmlformats.org/drawingml/2006/main" xmlns:p="http://schemas.openxmlformats.org/presentationml/2006/main" xmlns:r="http://schemas.openxmlformats.org/officeDocument/2006/relationships">
-  <p:cSld>
-    <p:spTree>
-      <p:nvGrpSpPr>
-        <p:cNvPr id="1" name=""/>
-        <p:cNvGrpSpPr/>
-        <p:nvPr/>
-      </p:nvGrpSpPr>
-      <p:grpSpPr/>
-      <p:sp>
-        <p:nvSpPr>
-          <p:cNvPr id="2" name="Title 1"/>
-          <p:cNvSpPr>
-            <a:spLocks noGrp="1"/>
-          </p:cNvSpPr>
-          <p:nvPr>
-            <p:ph type="title"/>
-          </p:nvPr>
-        </p:nvSpPr>
-        <p:spPr/>
-        <p:txBody>
-          <a:bodyPr/>
-          <a:lstStyle/>
-          <a:p>
-            <a:r>
-              <a:t>Benchmarked like Assignment 2: FLOPs/cycle vs k</a:t>
-            </a:r>
-          </a:p>
-        </p:txBody>
-      </p:sp>
-      <p:pic>
-        <p:nvPicPr>
-          <p:cNvPr id="3" name="Picture 2" descr="ukr_sweep_nosilu_34.png"/>
-          <p:cNvPicPr>
-            <a:picLocks noChangeAspect="1"/>
-          </p:cNvPicPr>
-          <p:nvPr/>
-        </p:nvPicPr>
-        <p:blipFill>
-          <a:blip r:embed="rId3"/>
-          <a:stretch>
-            <a:fillRect/>
-          </a:stretch>
-        </p:blipFill>
-        <p:spPr>
-          <a:xfrm>
-            <a:off x="457200" y="960120"/>
-            <a:ext cx="5486400" cy="2926080"/>
-          </a:xfrm>
-          <a:prstGeom prst="rect">
-            <a:avLst/>
-          </a:prstGeom>
-        </p:spPr>
-      </p:pic>
-      <p:sp>
-        <p:nvSpPr>
-          <p:cNvPr id="4" name="TextBox 3"/>
-          <p:cNvSpPr txBox="1"/>
-          <p:nvPr/>
-        </p:nvSpPr>
-        <p:spPr>
-          <a:xfrm>
-            <a:off x="457200" y="3931920"/>
-            <a:ext cx="5486400" cy="274320"/>
-          </a:xfrm>
-          <a:prstGeom prst="rect">
-            <a:avLst/>
-          </a:prstGeom>
-          <a:noFill/>
-        </p:spPr>
-        <p:txBody>
-          <a:bodyPr wrap="square" lIns="0" rIns="0" tIns="0" bIns="0" anchor="t">
-            <a:spAutoFit/>
-          </a:bodyPr>
-          <a:lstStyle/>
-          <a:p>
-            <a:pPr algn="l"/>
-            <a:r>
-              <a:rPr sz="1000" b="0" i="0">
-                <a:solidFill>
-                  <a:srgbClr val="5A6875"/>
-                </a:solidFill>
-                <a:latin typeface="Open Sans"/>
-              </a:rPr>
-              <a:t>SiLU off, cycles = time × 3.4 GHz, as in A2. 3 runs, every point checked (576 pass).</a:t>
-            </a:r>
-          </a:p>
-        </p:txBody>
-      </p:sp>
-      <p:sp>
-        <p:nvSpPr>
-          <p:cNvPr id="5" name="TextBox 4"/>
-          <p:cNvSpPr txBox="1"/>
-          <p:nvPr/>
-        </p:nvSpPr>
-        <p:spPr>
-          <a:xfrm>
-            <a:off x="6172200" y="960120"/>
-            <a:ext cx="2514600" cy="548640"/>
-          </a:xfrm>
-          <a:prstGeom prst="rect">
-            <a:avLst/>
-          </a:prstGeom>
-          <a:noFill/>
-        </p:spPr>
-        <p:txBody>
-          <a:bodyPr wrap="square" lIns="0" rIns="0" tIns="0" bIns="0" anchor="t">
-            <a:spAutoFit/>
-          </a:bodyPr>
-          <a:lstStyle/>
-          <a:p>
-            <a:pPr algn="l"/>
-            <a:r>
-              <a:rPr sz="3000" b="1" i="0">
-                <a:solidFill>
-                  <a:srgbClr val="BB0027"/>
-                </a:solidFill>
-                <a:latin typeface="Open Sans"/>
-              </a:rPr>
-              <a:t>94–97%</a:t>
-            </a:r>
-          </a:p>
-        </p:txBody>
-      </p:sp>
-      <p:sp>
-        <p:nvSpPr>
-          <p:cNvPr id="6" name="TextBox 5"/>
-          <p:cNvSpPr txBox="1"/>
-          <p:nvPr/>
-        </p:nvSpPr>
-        <p:spPr>
-          <a:xfrm>
-            <a:off x="6172200" y="1527048"/>
-            <a:ext cx="2514600" cy="548640"/>
-          </a:xfrm>
-          <a:prstGeom prst="rect">
-            <a:avLst/>
-          </a:prstGeom>
-          <a:noFill/>
-        </p:spPr>
-        <p:txBody>
-          <a:bodyPr wrap="square" lIns="0" rIns="0" tIns="0" bIns="0" anchor="t">
-            <a:spAutoFit/>
-          </a:bodyPr>
-          <a:lstStyle/>
-          <a:p>
-            <a:pPr algn="l"/>
-            <a:r>
-              <a:rPr sz="1200" b="0" i="0">
-                <a:solidFill>
-                  <a:srgbClr val="5A6875"/>
-                </a:solidFill>
-                <a:latin typeface="Open Sans"/>
-              </a:rPr>
-              <a:t>2×6 asm: 30–31 FLOPs/cycle, ~102 GFLOP/s on one core</a:t>
-            </a:r>
-          </a:p>
-        </p:txBody>
-      </p:sp>
-      <p:sp>
-        <p:nvSpPr>
-          <p:cNvPr id="7" name="TextBox 6"/>
-          <p:cNvSpPr txBox="1"/>
-          <p:nvPr/>
-        </p:nvSpPr>
-        <p:spPr>
-          <a:xfrm>
-            <a:off x="6172200" y="2011680"/>
-            <a:ext cx="2514600" cy="548640"/>
-          </a:xfrm>
-          <a:prstGeom prst="rect">
-            <a:avLst/>
-          </a:prstGeom>
-          <a:noFill/>
-        </p:spPr>
-        <p:txBody>
-          <a:bodyPr wrap="square" lIns="0" rIns="0" tIns="0" bIns="0" anchor="t">
-            <a:spAutoFit/>
-          </a:bodyPr>
-          <a:lstStyle/>
-          <a:p>
-            <a:pPr algn="l"/>
-            <a:r>
-              <a:rPr sz="3000" b="1" i="0">
-                <a:solidFill>
-                  <a:srgbClr val="6B7782"/>
-                </a:solidFill>
-                <a:latin typeface="Open Sans"/>
-              </a:rPr>
-              <a:t>83–89%</a:t>
-            </a:r>
-          </a:p>
-        </p:txBody>
-      </p:sp>
-      <p:sp>
-        <p:nvSpPr>
-          <p:cNvPr id="8" name="TextBox 7"/>
-          <p:cNvSpPr txBox="1"/>
-          <p:nvPr/>
-        </p:nvSpPr>
-        <p:spPr>
-          <a:xfrm>
-            <a:off x="6172200" y="2578608"/>
-            <a:ext cx="2514600" cy="548640"/>
-          </a:xfrm>
-          <a:prstGeom prst="rect">
-            <a:avLst/>
-          </a:prstGeom>
-          <a:noFill/>
-        </p:spPr>
-        <p:txBody>
-          <a:bodyPr wrap="square" lIns="0" rIns="0" tIns="0" bIns="0" anchor="t">
-            <a:spAutoFit/>
-          </a:bodyPr>
-          <a:lstStyle/>
-          <a:p>
-            <a:pPr algn="l"/>
-            <a:r>
-              <a:rPr sz="1200" b="0" i="0">
-                <a:solidFill>
-                  <a:srgbClr val="5A6875"/>
-                </a:solidFill>
-                <a:latin typeface="Open Sans"/>
-              </a:rPr>
-              <a:t>2×5 intrinsics (v2's tile)</a:t>
-            </a:r>
-          </a:p>
-        </p:txBody>
-      </p:sp>
-      <p:sp>
-        <p:nvSpPr>
-          <p:cNvPr id="9" name="TextBox 8"/>
-          <p:cNvSpPr txBox="1"/>
-          <p:nvPr/>
-        </p:nvSpPr>
-        <p:spPr>
-          <a:xfrm>
-            <a:off x="6172200" y="3063240"/>
-            <a:ext cx="2514600" cy="548640"/>
-          </a:xfrm>
-          <a:prstGeom prst="rect">
-            <a:avLst/>
-          </a:prstGeom>
-          <a:noFill/>
-        </p:spPr>
-        <p:txBody>
-          <a:bodyPr wrap="square" lIns="0" rIns="0" tIns="0" bIns="0" anchor="t">
-            <a:spAutoFit/>
-          </a:bodyPr>
-          <a:lstStyle/>
-          <a:p>
-            <a:pPr algn="l"/>
-            <a:r>
-              <a:rPr sz="3000" b="1" i="0">
-                <a:solidFill>
-                  <a:srgbClr val="B7731A"/>
-                </a:solidFill>
-                <a:latin typeface="Open Sans"/>
-              </a:rPr>
-              <a:t>k ≈ 500</a:t>
-            </a:r>
-          </a:p>
-        </p:txBody>
-      </p:sp>
-      <p:sp>
-        <p:nvSpPr>
-          <p:cNvPr id="10" name="TextBox 9"/>
-          <p:cNvSpPr txBox="1"/>
-          <p:nvPr/>
-        </p:nvSpPr>
-        <p:spPr>
-          <a:xfrm>
-            <a:off x="6172200" y="3630168"/>
-            <a:ext cx="2514600" cy="548640"/>
-          </a:xfrm>
-          <a:prstGeom prst="rect">
-            <a:avLst/>
-          </a:prstGeom>
-          <a:noFill/>
-        </p:spPr>
-        <p:txBody>
-          <a:bodyPr wrap="square" lIns="0" rIns="0" tIns="0" bIns="0" anchor="t">
-            <a:spAutoFit/>
-          </a:bodyPr>
-          <a:lstStyle/>
-          <a:p>
-            <a:pPr algn="l"/>
-            <a:r>
-              <a:rPr sz="1200" b="0" i="0">
-                <a:solidFill>
-                  <a:srgbClr val="5A6875"/>
-                </a:solidFill>
-                <a:latin typeface="Open Sans"/>
-              </a:rPr>
-              <a:t>L1 dip: 2×5 weights pass 32 KB, like k ≈ 315 in A2</a:t>
-            </a:r>
-          </a:p>
-        </p:txBody>
-      </p:sp>
-    </p:spTree>
-  </p:cSld>
-  <p:clrMapOvr>
-    <a:masterClrMapping/>
-  </p:clrMapOvr>
-</p:sld>
-</file>
-
-<file path=ppt/slides/slide8.xml><?xml version="1.0" encoding="utf-8"?>
-<p:sld xmlns:a="http://schemas.openxmlformats.org/drawingml/2006/main" xmlns:p="http://schemas.openxmlformats.org/presentationml/2006/main" xmlns:r="http://schemas.openxmlformats.org/officeDocument/2006/relationships">
-  <p:cSld>
-    <p:spTree>
-      <p:nvGrpSpPr>
-        <p:cNvPr id="1" name=""/>
-        <p:cNvGrpSpPr/>
-        <p:nvPr/>
-      </p:nvGrpSpPr>
-      <p:grpSpPr/>
-      <p:sp>
-        <p:nvSpPr>
-          <p:cNvPr id="2" name="Title 1"/>
-          <p:cNvSpPr>
-            <a:spLocks noGrp="1"/>
-          </p:cNvSpPr>
-          <p:nvPr>
-            <p:ph type="title"/>
-          </p:nvPr>
-        </p:nvSpPr>
-        <p:spPr/>
-        <p:txBody>
-          <a:bodyPr/>
-          <a:lstStyle/>
-          <a:p>
-            <a:r>
-              <a:t>Fastest alone is not fastest in the layer</a:t>
-            </a:r>
-          </a:p>
-        </p:txBody>
-      </p:sp>
-      <p:graphicFrame>
-        <p:nvGraphicFramePr>
-          <p:cNvPr id="3" name="Chart 2"/>
-          <p:cNvGraphicFramePr>
-            <a:graphicFrameLocks noGrp="1"/>
-          </p:cNvGraphicFramePr>
-          <p:nvPr/>
-        </p:nvGraphicFramePr>
-        <p:xfrm>
-          <a:off x="457200" y="1005840"/>
-          <a:ext cx="4023360" cy="3200400"/>
-        </p:xfrm>
-        <a:graphic>
-          <a:graphicData uri="http://schemas.openxmlformats.org/drawingml/2006/chart">
-            <c:chart xmlns:c="http://schemas.openxmlformats.org/drawingml/2006/chart" r:id="rId3"/>
-          </a:graphicData>
-        </a:graphic>
-      </p:graphicFrame>
-      <p:sp>
-        <p:nvSpPr>
-          <p:cNvPr id="4" name="TextBox 3"/>
-          <p:cNvSpPr txBox="1"/>
-          <p:nvPr/>
-        </p:nvSpPr>
-        <p:spPr>
-          <a:xfrm>
-            <a:off x="4754880" y="1005840"/>
-            <a:ext cx="3931920" cy="274320"/>
-          </a:xfrm>
-          <a:prstGeom prst="rect">
-            <a:avLst/>
-          </a:prstGeom>
-          <a:noFill/>
-        </p:spPr>
-        <p:txBody>
-          <a:bodyPr wrap="square" lIns="0" rIns="0" tIns="0" bIns="0" anchor="t">
-            <a:spAutoFit/>
-          </a:bodyPr>
-          <a:lstStyle/>
-          <a:p>
-            <a:pPr algn="l"/>
-            <a:r>
-              <a:rPr sz="1200" b="1" i="0">
-                <a:solidFill>
-                  <a:srgbClr val="1B2630"/>
-                </a:solidFill>
-                <a:latin typeface="Open Sans"/>
-              </a:rPr>
-              <a:t>What the compiler did when inlined:</a:t>
-            </a:r>
-          </a:p>
-        </p:txBody>
-      </p:sp>
-      <p:sp>
-        <p:nvSpPr>
-          <p:cNvPr id="5" name="spill-code"/>
-          <p:cNvSpPr/>
-          <p:nvPr/>
-        </p:nvSpPr>
-        <p:spPr>
-          <a:xfrm>
-            <a:off x="4754880" y="1325880"/>
-            <a:ext cx="3931920" cy="868680"/>
-          </a:xfrm>
-          <a:prstGeom prst="roundRect">
-            <a:avLst>
-              <a:gd name="adj" fmla="val 8000"/>
-            </a:avLst>
-          </a:prstGeom>
-          <a:solidFill>
-            <a:srgbClr val="F1F3F5"/>
-          </a:solidFill>
-          <a:ln>
-            <a:noFill/>
-          </a:ln>
-          <a:effectLst/>
-        </p:spPr>
-        <p:style>
-          <a:lnRef idx="1">
-            <a:schemeClr val="accent1"/>
-          </a:lnRef>
-          <a:fillRef idx="3">
-            <a:schemeClr val="accent1"/>
-          </a:fillRef>
-          <a:effectRef idx="2">
-            <a:schemeClr val="accent1"/>
-          </a:effectRef>
-          <a:fontRef idx="minor">
-            <a:schemeClr val="lt1"/>
-          </a:fontRef>
-        </p:style>
-        <p:txBody>
-          <a:bodyPr rtlCol="0" anchor="ctr"/>
-          <a:lstStyle/>
-          <a:p>
-            <a:pPr algn="ctr"/>
-          </a:p>
-        </p:txBody>
-      </p:sp>
-      <p:sp>
-        <p:nvSpPr>
-          <p:cNvPr id="6" name="TextBox 5"/>
-          <p:cNvSpPr txBox="1"/>
-          <p:nvPr/>
-        </p:nvSpPr>
-        <p:spPr>
-          <a:xfrm>
-            <a:off x="4864608" y="1389888"/>
-            <a:ext cx="3749039" cy="749808"/>
-          </a:xfrm>
-          <a:prstGeom prst="rect">
-            <a:avLst/>
-          </a:prstGeom>
-          <a:noFill/>
-        </p:spPr>
-        <p:txBody>
-          <a:bodyPr wrap="square" lIns="0" rIns="0" tIns="0" bIns="0" anchor="ctr">
-            <a:spAutoFit/>
-          </a:bodyPr>
-          <a:lstStyle/>
-          <a:p>
-            <a:pPr algn="l"/>
-            <a:r>
-              <a:rPr sz="1050" b="0" i="0">
-                <a:solidFill>
-                  <a:srgbClr val="1B2630"/>
-                </a:solidFill>
-                <a:latin typeface="Courier New"/>
-              </a:rPr>
-              <a:t>vmovaps 168(%rsp), %ymm1   # load sum back</a:t>
-            </a:r>
-          </a:p>
-          <a:p>
-            <a:pPr algn="l">
-              <a:spcBef>
-                <a:spcPts val="600"/>
-              </a:spcBef>
-            </a:pPr>
-            <a:r>
-              <a:rPr sz="1050" b="0" i="0">
-                <a:solidFill>
-                  <a:srgbClr val="1B2630"/>
-                </a:solidFill>
-                <a:latin typeface="Courier New"/>
-              </a:rPr>
-              <a:t>  ...kernel: 80 FMAs...</a:t>
-            </a:r>
-          </a:p>
-          <a:p>
-            <a:pPr algn="l">
-              <a:spcBef>
-                <a:spcPts val="600"/>
-              </a:spcBef>
-            </a:pPr>
-            <a:r>
-              <a:rPr sz="1050" b="0" i="0">
-                <a:solidFill>
-                  <a:srgbClr val="1B2630"/>
-                </a:solidFill>
-                <a:latin typeface="Courier New"/>
-              </a:rPr>
-              <a:t>vmovaps %ymm1, 168(%rsp)   # park sum again</a:t>
-            </a:r>
-          </a:p>
-        </p:txBody>
-      </p:sp>
-      <p:sp>
-        <p:nvSpPr>
-          <p:cNvPr id="7" name="TextBox 6"/>
-          <p:cNvSpPr txBox="1"/>
-          <p:nvPr/>
-        </p:nvSpPr>
-        <p:spPr>
-          <a:xfrm>
-            <a:off x="4754880" y="2331720"/>
-            <a:ext cx="3931920" cy="914400"/>
-          </a:xfrm>
-          <a:prstGeom prst="rect">
-            <a:avLst/>
-          </a:prstGeom>
-          <a:noFill/>
-        </p:spPr>
-        <p:txBody>
-          <a:bodyPr wrap="square" lIns="0" rIns="0" tIns="0" bIns="0" anchor="t">
-            <a:spAutoFit/>
-          </a:bodyPr>
-          <a:lstStyle/>
-          <a:p>
-            <a:pPr algn="l"/>
-            <a:r>
-              <a:rPr sz="1150" b="1" i="0">
-                <a:solidFill>
-                  <a:srgbClr val="1B2630"/>
-                </a:solidFill>
-                <a:latin typeface="Open Sans"/>
-              </a:rPr>
-              <a:t>Problem: </a:t>
-            </a:r>
-            <a:r>
-              <a:rPr sz="1150" b="0" i="0">
-                <a:solidFill>
-                  <a:srgbClr val="5A6875"/>
-                </a:solidFill>
-                <a:latin typeface="Open Sans"/>
-              </a:rPr>
-              <a:t>3 of the 10 sums live in memory, so each step waits on a store and a load.</a:t>
-            </a:r>
-          </a:p>
-          <a:p>
-            <a:pPr algn="l">
-              <a:spcBef>
-                <a:spcPts val="600"/>
-              </a:spcBef>
-            </a:pPr>
-            <a:r>
-              <a:rPr sz="1150" b="1" i="0">
-                <a:solidFill>
-                  <a:srgbClr val="1B2630"/>
-                </a:solidFill>
-                <a:latin typeface="Open Sans"/>
-              </a:rPr>
-              <a:t>Fix: </a:t>
-            </a:r>
-            <a:r>
-              <a:rPr sz="1150" b="0" i="0">
-                <a:solidFill>
-                  <a:srgbClr val="5A6875"/>
-                </a:solidFill>
-                <a:latin typeface="Open Sans"/>
-              </a:rPr>
-              <a:t>call the kernel as a function, as the benchmark does; all 10 stay in registers.</a:t>
-            </a:r>
-          </a:p>
-        </p:txBody>
-      </p:sp>
-      <p:sp>
-        <p:nvSpPr>
-          <p:cNvPr id="8" name="TextBox 7"/>
-          <p:cNvSpPr txBox="1"/>
-          <p:nvPr/>
-        </p:nvSpPr>
-        <p:spPr>
-          <a:xfrm>
-            <a:off x="4754880" y="3429000"/>
-            <a:ext cx="3931920" cy="731520"/>
-          </a:xfrm>
-          <a:prstGeom prst="rect">
-            <a:avLst/>
-          </a:prstGeom>
-          <a:noFill/>
-        </p:spPr>
-        <p:txBody>
-          <a:bodyPr wrap="square" lIns="0" rIns="0" tIns="0" bIns="0" anchor="t">
-            <a:spAutoFit/>
-          </a:bodyPr>
-          <a:lstStyle/>
-          <a:p>
-            <a:pPr algn="l"/>
-            <a:r>
-              <a:rPr sz="1400" b="1" i="1">
-                <a:solidFill>
-                  <a:srgbClr val="BB0027"/>
-                </a:solidFill>
-                <a:latin typeface="Open Sans"/>
-              </a:rPr>
-              <a:t>The kernel is only fast if its registers stay its own.</a:t>
+              <a:t>lost: uop cache overflow, spills</a:t>
             </a:r>
           </a:p>
         </p:txBody>
@@ -11857,29 +14374,35 @@
           <a:lstStyle/>
           <a:p>
             <a:r>
-              <a:t>1.36× faster than OpenCV on all 32 layers</a:t>
-            </a:r>
-          </a:p>
-        </p:txBody>
-      </p:sp>
-      <p:graphicFrame>
-        <p:nvGraphicFramePr>
-          <p:cNvPr id="3" name="Chart 2"/>
-          <p:cNvGraphicFramePr>
-            <a:graphicFrameLocks noGrp="1"/>
-          </p:cNvGraphicFramePr>
-          <p:nvPr/>
-        </p:nvGraphicFramePr>
-        <p:xfrm>
-          <a:off x="457200" y="1005840"/>
-          <a:ext cx="5120640" cy="3108960"/>
-        </p:xfrm>
-        <a:graphic>
-          <a:graphicData uri="http://schemas.openxmlformats.org/drawingml/2006/chart">
-            <c:chart xmlns:c="http://schemas.openxmlformats.org/drawingml/2006/chart" r:id="rId3"/>
-          </a:graphicData>
-        </a:graphic>
-      </p:graphicFrame>
+              <a:t>Benchmarked like Assignment 2: FLOPs/cycle vs k</a:t>
+            </a:r>
+          </a:p>
+        </p:txBody>
+      </p:sp>
+      <p:pic>
+        <p:nvPicPr>
+          <p:cNvPr id="3" name="Picture 2" descr="ukr_sweep_nosilu_34_intrinsics.png"/>
+          <p:cNvPicPr>
+            <a:picLocks noChangeAspect="1"/>
+          </p:cNvPicPr>
+          <p:nvPr/>
+        </p:nvPicPr>
+        <p:blipFill>
+          <a:blip r:embed="rId3"/>
+          <a:stretch>
+            <a:fillRect/>
+          </a:stretch>
+        </p:blipFill>
+        <p:spPr>
+          <a:xfrm>
+            <a:off x="457200" y="960120"/>
+            <a:ext cx="5486400" cy="2926080"/>
+          </a:xfrm>
+          <a:prstGeom prst="rect">
+            <a:avLst/>
+          </a:prstGeom>
+        </p:spPr>
+      </p:pic>
       <p:sp>
         <p:nvSpPr>
           <p:cNvPr id="4" name="TextBox 3"/>
@@ -11888,8 +14411,8 @@
         </p:nvSpPr>
         <p:spPr>
           <a:xfrm>
-            <a:off x="5943600" y="1005840"/>
-            <a:ext cx="2743200" cy="548640"/>
+            <a:off x="457200" y="3931920"/>
+            <a:ext cx="5486400" cy="274320"/>
           </a:xfrm>
           <a:prstGeom prst="rect">
             <a:avLst/>
@@ -11904,13 +14427,13 @@
           <a:p>
             <a:pPr algn="l"/>
             <a:r>
-              <a:rPr sz="3000" b="1" i="0">
-                <a:solidFill>
-                  <a:srgbClr val="BB0027"/>
+              <a:rPr sz="1000" b="0" i="0">
+                <a:solidFill>
+                  <a:srgbClr val="5A6875"/>
                 </a:solidFill>
                 <a:latin typeface="Open Sans"/>
               </a:rPr>
-              <a:t>1.36×</a:t>
+              <a:t>SiLU off, cycles = time × 3.4 GHz, as in A2. 3 runs, every point checked (576 pass).</a:t>
             </a:r>
           </a:p>
         </p:txBody>
@@ -11923,8 +14446,8 @@
         </p:nvSpPr>
         <p:spPr>
           <a:xfrm>
-            <a:off x="5943600" y="1572768"/>
-            <a:ext cx="2743200" cy="548640"/>
+            <a:off x="6172200" y="960120"/>
+            <a:ext cx="2514600" cy="548640"/>
           </a:xfrm>
           <a:prstGeom prst="rect">
             <a:avLst/>
@@ -11939,13 +14462,13 @@
           <a:p>
             <a:pPr algn="l"/>
             <a:r>
-              <a:rPr sz="1200" b="0" i="0">
-                <a:solidFill>
-                  <a:srgbClr val="5A6875"/>
+              <a:rPr sz="3000" b="1" i="0">
+                <a:solidFill>
+                  <a:srgbClr val="BB0027"/>
                 </a:solidFill>
                 <a:latin typeface="Open Sans"/>
               </a:rPr>
-              <a:t>v10 vs OpenCV DNN (84% of peak vs 62%)</a:t>
+              <a:t>83–89%</a:t>
             </a:r>
           </a:p>
         </p:txBody>
@@ -11958,8 +14481,8 @@
         </p:nvSpPr>
         <p:spPr>
           <a:xfrm>
-            <a:off x="5943600" y="2057400"/>
-            <a:ext cx="2743200" cy="548640"/>
+            <a:off x="6172200" y="1527048"/>
+            <a:ext cx="2514600" cy="548640"/>
           </a:xfrm>
           <a:prstGeom prst="rect">
             <a:avLst/>
@@ -11974,13 +14497,13 @@
           <a:p>
             <a:pPr algn="l"/>
             <a:r>
-              <a:rPr sz="3000" b="1" i="0">
-                <a:solidFill>
-                  <a:srgbClr val="6B7782"/>
+              <a:rPr sz="1200" b="0" i="0">
+                <a:solidFill>
+                  <a:srgbClr val="5A6875"/>
                 </a:solidFill>
                 <a:latin typeface="Open Sans"/>
               </a:rPr>
-              <a:t>1.24×</a:t>
+              <a:t>2×5 (v2's tile): 27–28.5 FLOPs/cycle, ~93 GFLOP/s on one core</a:t>
             </a:r>
           </a:p>
         </p:txBody>
@@ -11993,8 +14516,8 @@
         </p:nvSpPr>
         <p:spPr>
           <a:xfrm>
-            <a:off x="5943600" y="2624328"/>
-            <a:ext cx="2743200" cy="548640"/>
+            <a:off x="6172200" y="2011680"/>
+            <a:ext cx="2514600" cy="548640"/>
           </a:xfrm>
           <a:prstGeom prst="rect">
             <a:avLst/>
@@ -12009,13 +14532,13 @@
           <a:p>
             <a:pPr algn="l"/>
             <a:r>
-              <a:rPr sz="1200" b="0" i="0">
-                <a:solidFill>
-                  <a:srgbClr val="5A6875"/>
+              <a:rPr sz="3000" b="1" i="0">
+                <a:solidFill>
+                  <a:srgbClr val="6B7782"/>
                 </a:solidFill>
                 <a:latin typeface="Open Sans"/>
               </a:rPr>
-              <a:t>v2, the first working kernel, vs OpenCV</a:t>
+              <a:t>80–83%</a:t>
             </a:r>
           </a:p>
         </p:txBody>
@@ -12028,8 +14551,8 @@
         </p:nvSpPr>
         <p:spPr>
           <a:xfrm>
-            <a:off x="5943600" y="3154680"/>
-            <a:ext cx="2743200" cy="1005840"/>
+            <a:off x="6172200" y="2578608"/>
+            <a:ext cx="2514600" cy="548640"/>
           </a:xfrm>
           <a:prstGeom prst="rect">
             <a:avLst/>
@@ -12044,13 +14567,83 @@
           <a:p>
             <a:pPr algn="l"/>
             <a:r>
-              <a:rPr sz="1150" b="0" i="1">
+              <a:rPr sz="1200" b="0" i="0">
                 <a:solidFill>
                   <a:srgbClr val="5A6875"/>
                 </a:solidFill>
                 <a:latin typeface="Open Sans"/>
               </a:rPr>
-              <a:t>Next: cache blocking for C ≥ 128 (where 4×3 collapses), then threads on 20 cores.</a:t>
+              <a:t>2×6: GCC adds register copies at 15 live registers</a:t>
+            </a:r>
+          </a:p>
+        </p:txBody>
+      </p:sp>
+      <p:sp>
+        <p:nvSpPr>
+          <p:cNvPr id="9" name="TextBox 8"/>
+          <p:cNvSpPr txBox="1"/>
+          <p:nvPr/>
+        </p:nvSpPr>
+        <p:spPr>
+          <a:xfrm>
+            <a:off x="6172200" y="3063240"/>
+            <a:ext cx="2514600" cy="548640"/>
+          </a:xfrm>
+          <a:prstGeom prst="rect">
+            <a:avLst/>
+          </a:prstGeom>
+          <a:noFill/>
+        </p:spPr>
+        <p:txBody>
+          <a:bodyPr wrap="square" lIns="0" rIns="0" tIns="0" bIns="0" anchor="t">
+            <a:spAutoFit/>
+          </a:bodyPr>
+          <a:lstStyle/>
+          <a:p>
+            <a:pPr algn="l"/>
+            <a:r>
+              <a:rPr sz="3000" b="1" i="0">
+                <a:solidFill>
+                  <a:srgbClr val="B7731A"/>
+                </a:solidFill>
+                <a:latin typeface="Open Sans"/>
+              </a:rPr>
+              <a:t>k ≈ 500</a:t>
+            </a:r>
+          </a:p>
+        </p:txBody>
+      </p:sp>
+      <p:sp>
+        <p:nvSpPr>
+          <p:cNvPr id="10" name="TextBox 9"/>
+          <p:cNvSpPr txBox="1"/>
+          <p:nvPr/>
+        </p:nvSpPr>
+        <p:spPr>
+          <a:xfrm>
+            <a:off x="6172200" y="3630168"/>
+            <a:ext cx="2514600" cy="548640"/>
+          </a:xfrm>
+          <a:prstGeom prst="rect">
+            <a:avLst/>
+          </a:prstGeom>
+          <a:noFill/>
+        </p:spPr>
+        <p:txBody>
+          <a:bodyPr wrap="square" lIns="0" rIns="0" tIns="0" bIns="0" anchor="t">
+            <a:spAutoFit/>
+          </a:bodyPr>
+          <a:lstStyle/>
+          <a:p>
+            <a:pPr algn="l"/>
+            <a:r>
+              <a:rPr sz="1200" b="0" i="0">
+                <a:solidFill>
+                  <a:srgbClr val="5A6875"/>
+                </a:solidFill>
+                <a:latin typeface="Open Sans"/>
+              </a:rPr>
+              <a:t>L1 dip: 2×5 weights pass 32 KB, like k ≈ 315 in A2</a:t>
             </a:r>
           </a:p>
         </p:txBody>

--- a/docs/milestone/om/slides/om_mid_presentation_cmu.pptx
+++ b/docs/milestone/om/slides/om_mid_presentation_cmu.pptx
@@ -541,7 +541,7 @@
                 </a:solidFill>
                 <a:latin typeface="Open Sans"/>
               </a:rPr>
-              <a:t>% of peak: alone (C = 64) vs in layers</a:t>
+              <a:t>% of peak: alone (C = 64) vs all 32 layers</a:t>
             </a:r>
           </a:p>
         </c:rich>
@@ -579,10 +579,10 @@
               <c:strCache>
                 <c:ptCount val="2"/>
                 <c:pt idx="0">
-                  <c:v>1×10 (10 acc)</c:v>
+                  <c:v>2×5 (v2)</c:v>
                 </c:pt>
                 <c:pt idx="1">
-                  <c:v>2×5 (10 acc)</c:v>
+                  <c:v>2×6 (v4)</c:v>
                 </c:pt>
               </c:strCache>
             </c:strRef>
@@ -594,10 +594,10 @@
                 <c:formatCode>General</c:formatCode>
                 <c:ptCount val="2"/>
                 <c:pt idx="0">
-                  <c:v>85.8</c:v>
+                  <c:v>85.3</c:v>
                 </c:pt>
                 <c:pt idx="1">
-                  <c:v>85.3</c:v>
+                  <c:v>81.2</c:v>
                 </c:pt>
               </c:numCache>
             </c:numRef>
@@ -628,10 +628,10 @@
               <c:strCache>
                 <c:ptCount val="2"/>
                 <c:pt idx="0">
-                  <c:v>1×10 (10 acc)</c:v>
+                  <c:v>2×5 (v2)</c:v>
                 </c:pt>
                 <c:pt idx="1">
-                  <c:v>2×5 (10 acc)</c:v>
+                  <c:v>2×6 (v4)</c:v>
                 </c:pt>
               </c:strCache>
             </c:strRef>
@@ -643,10 +643,10 @@
                 <c:formatCode>General</c:formatCode>
                 <c:ptCount val="2"/>
                 <c:pt idx="0">
-                  <c:v>67.0</c:v>
+                  <c:v>76.8</c:v>
                 </c:pt>
                 <c:pt idx="1">
-                  <c:v>76.8</c:v>
+                  <c:v>75.3</c:v>
                 </c:pt>
               </c:numCache>
             </c:numRef>
@@ -2282,7 +2282,7 @@
           <a:lstStyle/>
           <a:p>
             <a:r>
-              <a:t>Two tiles with the same 10 accumulators: 1x10, one block of 8 channels times 10 pixels, and 2x5. Alone they tie: 85.8 and 85.3 percent. Inside real layers 2x5 wins by 10 points: 76.8 against 67.0. Alone, everything sits in L1, so 1x10's 11 loads per 10 FMAs still fit through the 2 load ports. In a layer the inputs and weights stream from L2, and because each 1x10 call covers only 8 output channels, the layer reads every input row twice as often as with 2x5. So loads become the limit. 2x5 needs only 7 loads per 10 FMAs, so it has room to spare. Lesson: pick the tile in the real layer, not only alone.</a:t>
+              <a:t>The natural next step after 2x5 was 2x6: 12 accumulators instead of 10, two chains of slack beyond the minimum, still under 16 registers. On paper it should be at least as fast. Measured, it loses both alone and in the layers: 81.2 against 85.3 percent alone at C = 64, and 75.3 against 76.8 in all 32 layers. The reason is in GCC's generated code: at 15 live registers it inserts 11 register-to-register copies per tap, against 2 for 2x5. Those copies take issue slots the FMAs need, so the extra accumulators buy nothing. With intrinsics the compiler, not us, assigns registers, so the tile that leaves GCC room, 2x5 with 13 registers, is the one we keep. In the layers the gap shrinks to 1.5 points because both kernels then also wait on data from L2.</a:t>
             </a:r>
           </a:p>
         </p:txBody>
@@ -7653,7 +7653,7 @@
           <a:lstStyle/>
           <a:p>
             <a:r>
-              <a:t>Tied alone, 10 points apart in the layers</a:t>
+              <a:t>12 accumulators lost to 10: GCC's register copies</a:t>
             </a:r>
           </a:p>
         </p:txBody>
@@ -7686,7 +7686,7 @@
         </p:nvGraphicFramePr>
         <p:xfrm>
           <a:off x="4754880" y="1051560"/>
-          <a:ext cx="3931920" cy="1371600"/>
+          <a:ext cx="3931920" cy="1645920"/>
         </p:xfrm>
         <a:graphic>
           <a:graphicData uri="http://schemas.openxmlformats.org/drawingml/2006/table">
@@ -7695,38 +7695,16 @@
                 <a:tableStyleId>{5C22544A-7EE6-4342-B048-85BDC9FD1C3A}</a:tableStyleId>
               </a:tblPr>
               <a:tblGrid>
-                <a:gridCol w="2103120"/>
-                <a:gridCol w="914400"/>
-                <a:gridCol w="914400"/>
+                <a:gridCol w="2286000"/>
+                <a:gridCol w="822960"/>
+                <a:gridCol w="822960"/>
               </a:tblGrid>
-              <a:tr h="342900">
+              <a:tr h="329184">
                 <a:tc>
                   <a:txBody>
                     <a:bodyPr/>
                     <a:lstStyle/>
                     <a:p/>
-                  </a:txBody>
-                  <a:tcPr>
-                    <a:solidFill>
-                      <a:srgbClr val="F1F3F5"/>
-                    </a:solidFill>
-                  </a:tcPr>
-                </a:tc>
-                <a:tc>
-                  <a:txBody>
-                    <a:bodyPr/>
-                    <a:lstStyle/>
-                    <a:p>
-                      <a:r>
-                        <a:rPr sz="1100" b="1">
-                          <a:solidFill>
-                            <a:srgbClr val="1B2630"/>
-                          </a:solidFill>
-                          <a:latin typeface="Open Sans"/>
-                        </a:rPr>
-                        <a:t>1×10</a:t>
-                      </a:r>
-                    </a:p>
                   </a:txBody>
                   <a:tcPr>
                     <a:solidFill>
@@ -7756,8 +7734,30 @@
                     </a:solidFill>
                   </a:tcPr>
                 </a:tc>
+                <a:tc>
+                  <a:txBody>
+                    <a:bodyPr/>
+                    <a:lstStyle/>
+                    <a:p>
+                      <a:r>
+                        <a:rPr sz="1100" b="1">
+                          <a:solidFill>
+                            <a:srgbClr val="1B2630"/>
+                          </a:solidFill>
+                          <a:latin typeface="Open Sans"/>
+                        </a:rPr>
+                        <a:t>2×6</a:t>
+                      </a:r>
+                    </a:p>
+                  </a:txBody>
+                  <a:tcPr>
+                    <a:solidFill>
+                      <a:srgbClr val="F1F3F5"/>
+                    </a:solidFill>
+                  </a:tcPr>
+                </a:tc>
               </a:tr>
-              <a:tr h="342900">
+              <a:tr h="329184">
                 <a:tc>
                   <a:txBody>
                     <a:bodyPr/>
@@ -7770,7 +7770,7 @@
                           </a:solidFill>
                           <a:latin typeface="Open Sans"/>
                         </a:rPr>
-                        <a:t>Loads per 10 FMAs</a:t>
+                        <a:t>Accumulators</a:t>
                       </a:r>
                     </a:p>
                   </a:txBody>
@@ -7792,7 +7792,7 @@
                           </a:solidFill>
                           <a:latin typeface="Open Sans"/>
                         </a:rPr>
-                        <a:t>11</a:t>
+                        <a:t>10</a:t>
                       </a:r>
                     </a:p>
                   </a:txBody>
@@ -7814,7 +7814,7 @@
                           </a:solidFill>
                           <a:latin typeface="Open Sans"/>
                         </a:rPr>
-                        <a:t>7</a:t>
+                        <a:t>12</a:t>
                       </a:r>
                     </a:p>
                   </a:txBody>
@@ -7825,7 +7825,7 @@
                   </a:tcPr>
                 </a:tc>
               </a:tr>
-              <a:tr h="342900">
+              <a:tr h="329184">
                 <a:tc>
                   <a:txBody>
                     <a:bodyPr/>
@@ -7838,7 +7838,7 @@
                           </a:solidFill>
                           <a:latin typeface="Open Sans"/>
                         </a:rPr>
-                        <a:t>Output channels per call</a:t>
+                        <a:t>Registers used (of 16)</a:t>
                       </a:r>
                     </a:p>
                   </a:txBody>
@@ -7860,7 +7860,7 @@
                           </a:solidFill>
                           <a:latin typeface="Open Sans"/>
                         </a:rPr>
-                        <a:t>8</a:t>
+                        <a:t>13</a:t>
                       </a:r>
                     </a:p>
                   </a:txBody>
@@ -7882,7 +7882,7 @@
                           </a:solidFill>
                           <a:latin typeface="Open Sans"/>
                         </a:rPr>
-                        <a:t>16</a:t>
+                        <a:t>15</a:t>
                       </a:r>
                     </a:p>
                   </a:txBody>
@@ -7893,7 +7893,7 @@
                   </a:tcPr>
                 </a:tc>
               </a:tr>
-              <a:tr h="342900">
+              <a:tr h="329184">
                 <a:tc>
                   <a:txBody>
                     <a:bodyPr/>
@@ -7906,7 +7906,75 @@
                           </a:solidFill>
                           <a:latin typeface="Open Sans"/>
                         </a:rPr>
-                        <a:t>Times each input row is read</a:t>
+                        <a:t>Register copies per tap (GCC)</a:t>
+                      </a:r>
+                    </a:p>
+                  </a:txBody>
+                  <a:tcPr>
+                    <a:solidFill>
+                      <a:srgbClr val="F8E5E9"/>
+                    </a:solidFill>
+                  </a:tcPr>
+                </a:tc>
+                <a:tc>
+                  <a:txBody>
+                    <a:bodyPr/>
+                    <a:lstStyle/>
+                    <a:p>
+                      <a:r>
+                        <a:rPr sz="1100" b="0">
+                          <a:solidFill>
+                            <a:srgbClr val="1B2630"/>
+                          </a:solidFill>
+                          <a:latin typeface="Open Sans"/>
+                        </a:rPr>
+                        <a:t>2</a:t>
+                      </a:r>
+                    </a:p>
+                  </a:txBody>
+                  <a:tcPr>
+                    <a:solidFill>
+                      <a:srgbClr val="F8E5E9"/>
+                    </a:solidFill>
+                  </a:tcPr>
+                </a:tc>
+                <a:tc>
+                  <a:txBody>
+                    <a:bodyPr/>
+                    <a:lstStyle/>
+                    <a:p>
+                      <a:r>
+                        <a:rPr sz="1100" b="0">
+                          <a:solidFill>
+                            <a:srgbClr val="1B2630"/>
+                          </a:solidFill>
+                          <a:latin typeface="Open Sans"/>
+                        </a:rPr>
+                        <a:t>11</a:t>
+                      </a:r>
+                    </a:p>
+                  </a:txBody>
+                  <a:tcPr>
+                    <a:solidFill>
+                      <a:srgbClr val="F8E5E9"/>
+                    </a:solidFill>
+                  </a:tcPr>
+                </a:tc>
+              </a:tr>
+              <a:tr h="329184">
+                <a:tc>
+                  <a:txBody>
+                    <a:bodyPr/>
+                    <a:lstStyle/>
+                    <a:p>
+                      <a:r>
+                        <a:rPr sz="1100" b="0">
+                          <a:solidFill>
+                            <a:srgbClr val="1B2630"/>
+                          </a:solidFill>
+                          <a:latin typeface="Open Sans"/>
+                        </a:rPr>
+                        <a:t>Spills</a:t>
                       </a:r>
                     </a:p>
                   </a:txBody>
@@ -7928,7 +7996,7 @@
                           </a:solidFill>
                           <a:latin typeface="Open Sans"/>
                         </a:rPr>
-                        <a:t>2×</a:t>
+                        <a:t>0</a:t>
                       </a:r>
                     </a:p>
                   </a:txBody>
@@ -7950,7 +8018,7 @@
                           </a:solidFill>
                           <a:latin typeface="Open Sans"/>
                         </a:rPr>
-                        <a:t>1×</a:t>
+                        <a:t>0</a:t>
                       </a:r>
                     </a:p>
                   </a:txBody>
@@ -7973,8 +8041,8 @@
         </p:nvSpPr>
         <p:spPr>
           <a:xfrm>
-            <a:off x="4754880" y="2606040"/>
-            <a:ext cx="3931920" cy="822960"/>
+            <a:off x="4754880" y="2834640"/>
+            <a:ext cx="3931920" cy="731520"/>
           </a:xfrm>
           <a:prstGeom prst="rect">
             <a:avLst/>
@@ -7995,7 +8063,7 @@
                 </a:solidFill>
                 <a:latin typeface="Open Sans"/>
               </a:rPr>
-              <a:t>Alone: </a:t>
+              <a:t>Expected: </a:t>
             </a:r>
             <a:r>
               <a:rPr sz="1150" b="0" i="0">
@@ -8004,7 +8072,7 @@
                 </a:solidFill>
                 <a:latin typeface="Open Sans"/>
               </a:rPr>
-              <a:t>all data in L1, so 1×10's extra loads still fit.</a:t>
+              <a:t>12 chains ≥ 10 chains, so 2×6 at least as fast.</a:t>
             </a:r>
           </a:p>
           <a:p>
@@ -8020,7 +8088,7 @@
                 </a:solidFill>
                 <a:latin typeface="Open Sans"/>
               </a:rPr>
-              <a:t>In a layer: </a:t>
+              <a:t>Measured: </a:t>
             </a:r>
             <a:r>
               <a:rPr sz="1150" b="0" i="0">
@@ -8029,7 +8097,7 @@
                 </a:solidFill>
                 <a:latin typeface="Open Sans"/>
               </a:rPr>
-              <a:t>data streams from L2 and 1×10 reads inputs twice as often, so loads become the limit.</a:t>
+              <a:t>GCC's extra copies take issue slots from the FMAs; 2×6 loses alone and in layers.</a:t>
             </a:r>
           </a:p>
         </p:txBody>
@@ -8042,8 +8110,8 @@
         </p:nvSpPr>
         <p:spPr>
           <a:xfrm>
-            <a:off x="4754880" y="3611880"/>
-            <a:ext cx="3931920" cy="548640"/>
+            <a:off x="4754880" y="3703320"/>
+            <a:ext cx="3931920" cy="457200"/>
           </a:xfrm>
           <a:prstGeom prst="rect">
             <a:avLst/>
@@ -8058,48 +8126,13 @@
           <a:p>
             <a:pPr algn="l"/>
             <a:r>
-              <a:rPr sz="1400" b="1" i="1">
+              <a:rPr sz="1300" b="1" i="1">
                 <a:solidFill>
                   <a:srgbClr val="BB0027"/>
                 </a:solidFill>
                 <a:latin typeface="Open Sans"/>
               </a:rPr>
-              <a:t>Pick the tile in the real layer, not only alone.</a:t>
-            </a:r>
-          </a:p>
-        </p:txBody>
-      </p:sp>
-      <p:sp>
-        <p:nvSpPr>
-          <p:cNvPr id="7" name="TextBox 6"/>
-          <p:cNvSpPr txBox="1"/>
-          <p:nvPr/>
-        </p:nvSpPr>
-        <p:spPr>
-          <a:xfrm>
-            <a:off x="4754880" y="4114800"/>
-            <a:ext cx="3931920" cy="182880"/>
-          </a:xfrm>
-          <a:prstGeom prst="rect">
-            <a:avLst/>
-          </a:prstGeom>
-          <a:noFill/>
-        </p:spPr>
-        <p:txBody>
-          <a:bodyPr wrap="square" lIns="0" rIns="0" tIns="0" bIns="0" anchor="t">
-            <a:spAutoFit/>
-          </a:bodyPr>
-          <a:lstStyle/>
-          <a:p>
-            <a:pPr algn="l"/>
-            <a:r>
-              <a:rPr sz="900" b="0" i="0">
-                <a:solidFill>
-                  <a:srgbClr val="5A6875"/>
-                </a:solidFill>
-                <a:latin typeface="Open Sans"/>
-              </a:rPr>
-              <a:t>1×10 in layers: 4-layer tile sweep (C = 16–128).</a:t>
+              <a:t>With intrinsics, pick the tile that leaves the compiler room.</a:t>
             </a:r>
           </a:p>
         </p:txBody>

--- a/docs/milestone/om/slides/om_mid_presentation_cmu.pptx
+++ b/docs/milestone/om/slides/om_mid_presentation_cmu.pptx
@@ -2772,7 +2772,7 @@
           <a:lstStyle/>
           <a:p>
             <a:r>
-              <a:t>These are the assumptions behind every number in the talk. The important one: cycles are wall time times 3.4 GHz, the CPU's maximum turbo, exactly the Assignment 2 convention. The core can never run faster than that, so the percentages can only understate.</a:t>
+              <a:t>These are the assumptions behind every number in the talk. The important one: we count rdtsc ticks, which run at the fixed 2.4 GHz base clock, and scale them by 3.4 over 2.4, the ratio of max turbo to base, exactly the Assignment 2 convention. The core can never run faster than that, so the percentages can only understate.</a:t>
             </a:r>
           </a:p>
         </p:txBody>
@@ -12724,7 +12724,7 @@
                 </a:solidFill>
                 <a:latin typeface="Open Sans"/>
               </a:rPr>
-              <a:t>wall time × 3.4 GHz (max turbo), as in Assignment 2: can only understate % of peak</a:t>
+              <a:t>rdtsc ticks (fixed 2.4 GHz base) × 3.4 / 2.4 = cycles at max turbo, as in A2: can only understate</a:t>
             </a:r>
           </a:p>
         </p:txBody>

--- a/docs/milestone/om/slides/om_mid_presentation_cmu.pptx
+++ b/docs/milestone/om/slides/om_mid_presentation_cmu.pptx
@@ -20,6 +20,8 @@
     <p:sldId id="265" r:id="rId27"/>
     <p:sldId id="266" r:id="rId28"/>
     <p:sldId id="267" r:id="rId29"/>
+    <p:sldId id="268" r:id="rId30"/>
+    <p:sldId id="269" r:id="rId31"/>
   </p:sldIdLst>
   <p:sldSz cy="5143500" cx="9144000"/>
   <p:notesSz cx="6858000" cy="9144000"/>
@@ -2282,7 +2284,7 @@
           <a:lstStyle/>
           <a:p>
             <a:r>
-              <a:t>The natural next step after 2x5 was 2x6: 12 accumulators instead of 10, two chains of slack beyond the minimum, still under 16 registers. On paper it should be at least as fast. Measured, it loses both alone and in the layers: 81.2 against 85.3 percent alone at C = 64, and 75.3 against 76.8 in all 32 layers. The reason is in GCC's generated code: at 15 live registers it inserts 11 register-to-register copies per tap, against 2 for 2x5. Those copies take issue slots the FMAs need, so the extra accumulators buy nothing. With intrinsics the compiler, not us, assigns registers, so the tile that leaves GCC room, 2x5 with 13 registers, is the one we keep. In the layers the gap shrinks to 1.5 points because both kernels then also wait on data from L2.</a:t>
+              <a:t>Every kernel I built, all intrinsics, same arithmetic, same layout. Filled dots: the microkernel alone; hollow: all 32 layers. 2x5 is the best in the layers: 85% alone, 77% in all 32 layers. Bigger tiles lose because of how GCC allocates registers: at 15 live registers (2x6) it adds 11 register copies per tap, found by reading GCC's generated assembly; at 16 (4x3) it spills accumulators to memory and drops to 49%. Unrolling and software pipelining made it worse: full unrolling overflowed the uop cache and partial unrolling made GCC spill.</a:t>
             </a:r>
           </a:p>
         </p:txBody>
@@ -2352,7 +2354,7 @@
           <a:lstStyle/>
           <a:p>
             <a:r>
-              <a:t>Total time for all 32 stride-1 layers, one core, same model and image. OpenCV DNN takes 86.4 milliseconds. Our kernel, v2, the 2x5 tile written with intrinsics, takes 69.5: 1.24 times faster, at 77 percent of peak against OpenCV's 62. Next: cache blocking for the layers with 128 or more input channels, and threading across 20 cores.</a:t>
+              <a:t>This is the Assignment 2 figure for my kernel: FLOPs per cycle against the reduction length k. Cycles are time times 3.4 GHz, the max turbo, exactly as in Assignment 2, so this can only understate. 2x5 holds 27 to 28.5 FLOPs per cycle, 83 to 89 percent of peak; 2x6 sits about 3 points lower, 80 to 83, because of GCC's register copies. The dip near k = 500 is the 2x5 weights leaving L1, like k = 315 in A2. Cross-checked: the hardware FP-instruction counter matches our FLOP count exactly.</a:t>
             </a:r>
           </a:p>
         </p:txBody>
@@ -2422,6 +2424,146 @@
           <a:lstStyle/>
           <a:p>
             <a:r>
+              <a:t>The natural next step after 2x5 was 2x6: 12 accumulators instead of 10, two chains of slack beyond the minimum, still under 16 registers. On paper it should be at least as fast. Measured, it loses both alone and in the layers: 81.2 against 85.3 percent alone at C = 64, and 75.3 against 76.8 in all 32 layers. The reason is in GCC's generated code: at 15 live registers it inserts 11 register-to-register copies per tap, against 2 for 2x5. Those copies take issue slots the FMAs need, so the extra accumulators buy nothing. With intrinsics the compiler, not us, assigns registers, so the tile that leaves GCC room, 2x5 with 13 registers, is the one we keep. In the layers the gap shrinks to 1.5 points because both kernels then also wait on data from L2.</a:t>
+            </a:r>
+          </a:p>
+        </p:txBody>
+      </p:sp>
+      <p:sp>
+        <p:nvSpPr>
+          <p:cNvPr id="4" name="Slide Number Placeholder 3"/>
+          <p:cNvSpPr>
+            <a:spLocks noGrp="1"/>
+          </p:cNvSpPr>
+          <p:nvPr>
+            <p:ph type="sldNum" idx="12"/>
+          </p:nvPr>
+        </p:nvSpPr>
+        <p:spPr/>
+      </p:sp>
+    </p:spTree>
+  </p:cSld>
+  <p:clrMapOvr>
+    <a:masterClrMapping/>
+  </p:clrMapOvr>
+</p:notes>
+</file>
+
+<file path=ppt/notesSlides/notesSlide13.xml><?xml version="1.0" encoding="utf-8"?>
+<p:notes xmlns:a="http://schemas.openxmlformats.org/drawingml/2006/main" xmlns:p="http://schemas.openxmlformats.org/presentationml/2006/main" xmlns:r="http://schemas.openxmlformats.org/officeDocument/2006/relationships">
+  <p:cSld>
+    <p:spTree>
+      <p:nvGrpSpPr>
+        <p:cNvPr id="1" name=""/>
+        <p:cNvGrpSpPr/>
+        <p:nvPr/>
+      </p:nvGrpSpPr>
+      <p:grpSpPr>
+        <a:xfrm>
+          <a:off x="0" y="0"/>
+          <a:ext cx="0" cy="0"/>
+          <a:chOff x="0" y="0"/>
+          <a:chExt cx="0" cy="0"/>
+        </a:xfrm>
+      </p:grpSpPr>
+      <p:sp>
+        <p:nvSpPr>
+          <p:cNvPr id="2" name="Slide Image Placeholder 1"/>
+          <p:cNvSpPr>
+            <a:spLocks noGrp="1"/>
+          </p:cNvSpPr>
+          <p:nvPr>
+            <p:ph type="sldImg" idx="3"/>
+          </p:nvPr>
+        </p:nvSpPr>
+        <p:spPr/>
+      </p:sp>
+      <p:sp>
+        <p:nvSpPr>
+          <p:cNvPr id="3" name="Notes Placeholder 2"/>
+          <p:cNvSpPr>
+            <a:spLocks noGrp="1"/>
+          </p:cNvSpPr>
+          <p:nvPr>
+            <p:ph type="body" idx="1"/>
+          </p:nvPr>
+        </p:nvSpPr>
+        <p:spPr/>
+        <p:txBody>
+          <a:bodyPr/>
+          <a:lstStyle/>
+          <a:p>
+            <a:r>
+              <a:t>Total time for all 32 stride-1 layers, one core, same model and image. OpenCV DNN takes 86.4 milliseconds. Our kernel, v2, the 2x5 tile written with intrinsics, takes 69.5: 1.24 times faster, at 77 percent of peak against OpenCV's 62. Next: cache blocking for the layers with 128 or more input channels, and threading across 20 cores.</a:t>
+            </a:r>
+          </a:p>
+        </p:txBody>
+      </p:sp>
+      <p:sp>
+        <p:nvSpPr>
+          <p:cNvPr id="4" name="Slide Number Placeholder 3"/>
+          <p:cNvSpPr>
+            <a:spLocks noGrp="1"/>
+          </p:cNvSpPr>
+          <p:nvPr>
+            <p:ph type="sldNum" idx="12"/>
+          </p:nvPr>
+        </p:nvSpPr>
+        <p:spPr/>
+      </p:sp>
+    </p:spTree>
+  </p:cSld>
+  <p:clrMapOvr>
+    <a:masterClrMapping/>
+  </p:clrMapOvr>
+</p:notes>
+</file>
+
+<file path=ppt/notesSlides/notesSlide14.xml><?xml version="1.0" encoding="utf-8"?>
+<p:notes xmlns:a="http://schemas.openxmlformats.org/drawingml/2006/main" xmlns:p="http://schemas.openxmlformats.org/presentationml/2006/main" xmlns:r="http://schemas.openxmlformats.org/officeDocument/2006/relationships">
+  <p:cSld>
+    <p:spTree>
+      <p:nvGrpSpPr>
+        <p:cNvPr id="1" name=""/>
+        <p:cNvGrpSpPr/>
+        <p:nvPr/>
+      </p:nvGrpSpPr>
+      <p:grpSpPr>
+        <a:xfrm>
+          <a:off x="0" y="0"/>
+          <a:ext cx="0" cy="0"/>
+          <a:chOff x="0" y="0"/>
+          <a:chExt cx="0" cy="0"/>
+        </a:xfrm>
+      </p:grpSpPr>
+      <p:sp>
+        <p:nvSpPr>
+          <p:cNvPr id="2" name="Slide Image Placeholder 1"/>
+          <p:cNvSpPr>
+            <a:spLocks noGrp="1"/>
+          </p:cNvSpPr>
+          <p:nvPr>
+            <p:ph type="sldImg" idx="3"/>
+          </p:nvPr>
+        </p:nvSpPr>
+        <p:spPr/>
+      </p:sp>
+      <p:sp>
+        <p:nvSpPr>
+          <p:cNvPr id="3" name="Notes Placeholder 2"/>
+          <p:cNvSpPr>
+            <a:spLocks noGrp="1"/>
+          </p:cNvSpPr>
+          <p:nvPr>
+            <p:ph type="body" idx="1"/>
+          </p:nvPr>
+        </p:nvSpPr>
+        <p:spPr/>
+        <p:txBody>
+          <a:bodyPr/>
+          <a:lstStyle/>
+          <a:p>
+            <a:r>
               <a:t>With the fused SiLU on, the curves sit about 4 to 5 points lower: SiLU costs a fixed 160 to 290 cycles per call, a big share at small k and almost nothing from C = 128 up.</a:t>
             </a:r>
           </a:p>
@@ -2772,7 +2914,7 @@
           <a:lstStyle/>
           <a:p>
             <a:r>
-              <a:t>These are the assumptions behind every number in the talk. The important one: we count rdtsc ticks, which run at the fixed 2.4 GHz base clock, and scale them by 3.4 over 2.4, the ratio of max turbo to base, exactly the Assignment 2 convention. The core can never run faster than that, so the percentages can only understate.</a:t>
+              <a:t>ONNX stores activations as NCHW: all of channel 0, then all of channel 1. The 8 channels of one pixel are then H times W floats apart, so filling one register with them takes 8 separate loads. We store NCHW8c: channels in blocks of 8, and inside a block the 8 channels of a pixel sit next to each other, 32 bytes, one aligned load into one YMM register. Around every plane we store a 1-pixel border of zeros, the halo, which is the convolution's padding written out. A 3 by 3 window at the image edge then just reads zeros, so there is no if-statement for edges. A kernel writes only the interior, so the next layer can read its output directly. Weights are packed once, offline, like the BatchNorm folding: for one input channel and one tap, the weights of 8 output channels are 8 contiguous floats, one aligned load, in the order the loop reads them.</a:t>
             </a:r>
           </a:p>
         </p:txBody>
@@ -2842,7 +2984,7 @@
           <a:lstStyle/>
           <a:p>
             <a:r>
-              <a:t>Step 1: every output is an independent dot product; the only chain is the reduction. Step 2: 5-cycle latency times 2 FMAs per cycle means 10 independent accumulators, 80 outputs in flight. The chart: 1 accumulator is 10%, each adds about 10 points. Step 3: 2x5 gives 10 accumulators in 13 registers, 7 loads per 10 FMAs, and 5 divides 160, 80, 40 and 20. Step 4: benchmark the kernel alone exactly like Assignment 2.</a:t>
+              <a:t>Why we chose it. First, vectors: every register the kernel needs, a weight vector or an output, is one aligned load or store; NCHW would need 8 loads per register. Second, no branches: because the padding is stored, every microkernel call runs the same code, also at the image edge. The cost is memory: 2.5 percent at 160 by 160, 21 percent at 20 by 20. Third, one layout for all three kernels, stride 1, stride 2 and 1 by 1, so layers chain with no conversion; we convert only at the network input and output, outside the timing. C2f's Split becomes a pointer offset and Concat is the producer writing into its slice. Fourth, the cache: the weights one 2x5 tile reads are 576 times C bytes. Up to C = 32 they fit in L1, up to C = 256 in L2, and they are reused across the whole output plane. Only the two C = 256 head layers, where weights plus the 400 KB input exceed L2, lose noticeably; input-channel blocking is the next step.</a:t>
             </a:r>
           </a:p>
         </p:txBody>
@@ -2912,7 +3054,7 @@
           <a:lstStyle/>
           <a:p>
             <a:r>
-              <a:t>Every kernel I built, all intrinsics, same arithmetic, same layout. Filled dots: the microkernel alone; hollow: all 32 layers. 2x5 is the best in the layers: 85% alone, 77% in all 32 layers. Bigger tiles lose because of how GCC allocates registers: at 15 live registers (2x6) it adds 11 register copies per tap, found by reading GCC's generated assembly; at 16 (4x3) it spills accumulators to memory and drops to 49%. Unrolling and software pipelining made it worse: full unrolling overflowed the uop cache and partial unrolling made GCC spill.</a:t>
+              <a:t>These are the assumptions behind every number in the talk. The important one: we count rdtsc ticks, which run at the fixed 2.4 GHz base clock, and scale them by 3.4 over 2.4, the ratio of max turbo to base, exactly the Assignment 2 convention. The core can never run faster than that, so the percentages can only understate.</a:t>
             </a:r>
           </a:p>
         </p:txBody>
@@ -2982,7 +3124,7 @@
           <a:lstStyle/>
           <a:p>
             <a:r>
-              <a:t>This is the Assignment 2 figure for my kernel: FLOPs per cycle against the reduction length k. Cycles are time times 3.4 GHz, the max turbo, exactly as in Assignment 2, so this can only understate. 2x5 holds 27 to 28.5 FLOPs per cycle, 83 to 89 percent of peak; 2x6 sits about 3 points lower, 80 to 83, because of GCC's register copies. The dip near k = 500 is the 2x5 weights leaving L1, like k = 315 in A2. Cross-checked: the hardware FP-instruction counter matches our FLOP count exactly.</a:t>
+              <a:t>Step 1: every output is an independent dot product; the only chain is the reduction. Step 2: 5-cycle latency times 2 FMAs per cycle means 10 independent accumulators, 80 outputs in flight. The chart: 1 accumulator is 10%, each adds about 10 points. Step 3: 2x5 gives 10 accumulators in 13 registers, 7 loads per 10 FMAs, and 5 divides 160, 80, 40 and 20. Step 4: benchmark the kernel alone exactly like Assignment 2.</a:t>
             </a:r>
           </a:p>
         </p:txBody>
@@ -7653,6 +7795,725 @@
           <a:lstStyle/>
           <a:p>
             <a:r>
+              <a:t>Same math, 50% to 86%: the tile and GCC's registers</a:t>
+            </a:r>
+          </a:p>
+        </p:txBody>
+      </p:sp>
+      <p:pic>
+        <p:nvPicPr>
+          <p:cNvPr id="3" name="Picture 2" descr="ukr_design_space_intrinsics.png"/>
+          <p:cNvPicPr>
+            <a:picLocks noChangeAspect="1"/>
+          </p:cNvPicPr>
+          <p:nvPr/>
+        </p:nvPicPr>
+        <p:blipFill>
+          <a:blip r:embed="rId3"/>
+          <a:stretch>
+            <a:fillRect/>
+          </a:stretch>
+        </p:blipFill>
+        <p:spPr>
+          <a:xfrm>
+            <a:off x="457200" y="1005840"/>
+            <a:ext cx="5883088" cy="3200400"/>
+          </a:xfrm>
+          <a:prstGeom prst="rect">
+            <a:avLst/>
+          </a:prstGeom>
+        </p:spPr>
+      </p:pic>
+      <p:sp>
+        <p:nvSpPr>
+          <p:cNvPr id="4" name="ds-card-0"/>
+          <p:cNvSpPr/>
+          <p:nvPr/>
+        </p:nvSpPr>
+        <p:spPr>
+          <a:xfrm>
+            <a:off x="6446520" y="1005840"/>
+            <a:ext cx="2240280" cy="960120"/>
+          </a:xfrm>
+          <a:prstGeom prst="roundRect">
+            <a:avLst>
+              <a:gd name="adj" fmla="val 8000"/>
+            </a:avLst>
+          </a:prstGeom>
+          <a:solidFill>
+            <a:srgbClr val="F8E5E9"/>
+          </a:solidFill>
+          <a:ln>
+            <a:noFill/>
+          </a:ln>
+          <a:effectLst/>
+        </p:spPr>
+        <p:style>
+          <a:lnRef idx="1">
+            <a:schemeClr val="accent1"/>
+          </a:lnRef>
+          <a:fillRef idx="3">
+            <a:schemeClr val="accent1"/>
+          </a:fillRef>
+          <a:effectRef idx="2">
+            <a:schemeClr val="accent1"/>
+          </a:effectRef>
+          <a:fontRef idx="minor">
+            <a:schemeClr val="lt1"/>
+          </a:fontRef>
+        </p:style>
+        <p:txBody>
+          <a:bodyPr rtlCol="0" anchor="ctr"/>
+          <a:lstStyle/>
+          <a:p>
+            <a:pPr algn="ctr"/>
+          </a:p>
+        </p:txBody>
+      </p:sp>
+      <p:sp>
+        <p:nvSpPr>
+          <p:cNvPr id="5" name="TextBox 4"/>
+          <p:cNvSpPr txBox="1"/>
+          <p:nvPr/>
+        </p:nvSpPr>
+        <p:spPr>
+          <a:xfrm>
+            <a:off x="6556248" y="1078992"/>
+            <a:ext cx="2011680" cy="256032"/>
+          </a:xfrm>
+          <a:prstGeom prst="rect">
+            <a:avLst/>
+          </a:prstGeom>
+          <a:noFill/>
+        </p:spPr>
+        <p:txBody>
+          <a:bodyPr wrap="square" lIns="0" rIns="0" tIns="0" bIns="0" anchor="t">
+            <a:spAutoFit/>
+          </a:bodyPr>
+          <a:lstStyle/>
+          <a:p>
+            <a:pPr algn="l"/>
+            <a:r>
+              <a:rPr sz="1200" b="1" i="0">
+                <a:solidFill>
+                  <a:srgbClr val="BB0027"/>
+                </a:solidFill>
+                <a:latin typeface="Open Sans"/>
+              </a:rPr>
+              <a:t>Best: 2×5</a:t>
+            </a:r>
+          </a:p>
+        </p:txBody>
+      </p:sp>
+      <p:sp>
+        <p:nvSpPr>
+          <p:cNvPr id="6" name="TextBox 5"/>
+          <p:cNvSpPr txBox="1"/>
+          <p:nvPr/>
+        </p:nvSpPr>
+        <p:spPr>
+          <a:xfrm>
+            <a:off x="6556248" y="1353312"/>
+            <a:ext cx="2011680" cy="594360"/>
+          </a:xfrm>
+          <a:prstGeom prst="rect">
+            <a:avLst/>
+          </a:prstGeom>
+          <a:noFill/>
+        </p:spPr>
+        <p:txBody>
+          <a:bodyPr wrap="square" lIns="0" rIns="0" tIns="0" bIns="0" anchor="t">
+            <a:spAutoFit/>
+          </a:bodyPr>
+          <a:lstStyle/>
+          <a:p>
+            <a:pPr algn="l"/>
+            <a:r>
+              <a:rPr sz="1000" b="0" i="0">
+                <a:solidFill>
+                  <a:srgbClr val="5A6875"/>
+                </a:solidFill>
+                <a:latin typeface="Open Sans"/>
+              </a:rPr>
+              <a:t>13 registers, 85% alone, 77% in all 32 layers</a:t>
+            </a:r>
+          </a:p>
+        </p:txBody>
+      </p:sp>
+      <p:sp>
+        <p:nvSpPr>
+          <p:cNvPr id="7" name="ds-card-1"/>
+          <p:cNvSpPr/>
+          <p:nvPr/>
+        </p:nvSpPr>
+        <p:spPr>
+          <a:xfrm>
+            <a:off x="6446520" y="2084832"/>
+            <a:ext cx="2240280" cy="960120"/>
+          </a:xfrm>
+          <a:prstGeom prst="roundRect">
+            <a:avLst>
+              <a:gd name="adj" fmla="val 8000"/>
+            </a:avLst>
+          </a:prstGeom>
+          <a:solidFill>
+            <a:srgbClr val="F1F3F5"/>
+          </a:solidFill>
+          <a:ln>
+            <a:noFill/>
+          </a:ln>
+          <a:effectLst/>
+        </p:spPr>
+        <p:style>
+          <a:lnRef idx="1">
+            <a:schemeClr val="accent1"/>
+          </a:lnRef>
+          <a:fillRef idx="3">
+            <a:schemeClr val="accent1"/>
+          </a:fillRef>
+          <a:effectRef idx="2">
+            <a:schemeClr val="accent1"/>
+          </a:effectRef>
+          <a:fontRef idx="minor">
+            <a:schemeClr val="lt1"/>
+          </a:fontRef>
+        </p:style>
+        <p:txBody>
+          <a:bodyPr rtlCol="0" anchor="ctr"/>
+          <a:lstStyle/>
+          <a:p>
+            <a:pPr algn="ctr"/>
+          </a:p>
+        </p:txBody>
+      </p:sp>
+      <p:sp>
+        <p:nvSpPr>
+          <p:cNvPr id="8" name="TextBox 7"/>
+          <p:cNvSpPr txBox="1"/>
+          <p:nvPr/>
+        </p:nvSpPr>
+        <p:spPr>
+          <a:xfrm>
+            <a:off x="6556248" y="2157984"/>
+            <a:ext cx="2011680" cy="256032"/>
+          </a:xfrm>
+          <a:prstGeom prst="rect">
+            <a:avLst/>
+          </a:prstGeom>
+          <a:noFill/>
+        </p:spPr>
+        <p:txBody>
+          <a:bodyPr wrap="square" lIns="0" rIns="0" tIns="0" bIns="0" anchor="t">
+            <a:spAutoFit/>
+          </a:bodyPr>
+          <a:lstStyle/>
+          <a:p>
+            <a:pPr algn="l"/>
+            <a:r>
+              <a:rPr sz="1200" b="1" i="0">
+                <a:solidFill>
+                  <a:srgbClr val="1B2630"/>
+                </a:solidFill>
+                <a:latin typeface="Open Sans"/>
+              </a:rPr>
+              <a:t>GCC's registers</a:t>
+            </a:r>
+          </a:p>
+        </p:txBody>
+      </p:sp>
+      <p:sp>
+        <p:nvSpPr>
+          <p:cNvPr id="9" name="TextBox 8"/>
+          <p:cNvSpPr txBox="1"/>
+          <p:nvPr/>
+        </p:nvSpPr>
+        <p:spPr>
+          <a:xfrm>
+            <a:off x="6556248" y="2432304"/>
+            <a:ext cx="2011680" cy="594360"/>
+          </a:xfrm>
+          <a:prstGeom prst="rect">
+            <a:avLst/>
+          </a:prstGeom>
+          <a:noFill/>
+        </p:spPr>
+        <p:txBody>
+          <a:bodyPr wrap="square" lIns="0" rIns="0" tIns="0" bIns="0" anchor="t">
+            <a:spAutoFit/>
+          </a:bodyPr>
+          <a:lstStyle/>
+          <a:p>
+            <a:pPr algn="l"/>
+            <a:r>
+              <a:rPr sz="1000" b="0" i="0">
+                <a:solidFill>
+                  <a:srgbClr val="5A6875"/>
+                </a:solidFill>
+                <a:latin typeface="Open Sans"/>
+              </a:rPr>
+              <a:t>clean at 13, 11 copies per tap at 15 (2×6), spills at 16 (4×3: 49%)</a:t>
+            </a:r>
+          </a:p>
+        </p:txBody>
+      </p:sp>
+      <p:sp>
+        <p:nvSpPr>
+          <p:cNvPr id="10" name="ds-card-2"/>
+          <p:cNvSpPr/>
+          <p:nvPr/>
+        </p:nvSpPr>
+        <p:spPr>
+          <a:xfrm>
+            <a:off x="6446520" y="3163824"/>
+            <a:ext cx="2240280" cy="960120"/>
+          </a:xfrm>
+          <a:prstGeom prst="roundRect">
+            <a:avLst>
+              <a:gd name="adj" fmla="val 8000"/>
+            </a:avLst>
+          </a:prstGeom>
+          <a:solidFill>
+            <a:srgbClr val="F1F3F5"/>
+          </a:solidFill>
+          <a:ln>
+            <a:noFill/>
+          </a:ln>
+          <a:effectLst/>
+        </p:spPr>
+        <p:style>
+          <a:lnRef idx="1">
+            <a:schemeClr val="accent1"/>
+          </a:lnRef>
+          <a:fillRef idx="3">
+            <a:schemeClr val="accent1"/>
+          </a:fillRef>
+          <a:effectRef idx="2">
+            <a:schemeClr val="accent1"/>
+          </a:effectRef>
+          <a:fontRef idx="minor">
+            <a:schemeClr val="lt1"/>
+          </a:fontRef>
+        </p:style>
+        <p:txBody>
+          <a:bodyPr rtlCol="0" anchor="ctr"/>
+          <a:lstStyle/>
+          <a:p>
+            <a:pPr algn="ctr"/>
+          </a:p>
+        </p:txBody>
+      </p:sp>
+      <p:sp>
+        <p:nvSpPr>
+          <p:cNvPr id="11" name="TextBox 10"/>
+          <p:cNvSpPr txBox="1"/>
+          <p:nvPr/>
+        </p:nvSpPr>
+        <p:spPr>
+          <a:xfrm>
+            <a:off x="6556248" y="3236976"/>
+            <a:ext cx="2011680" cy="256032"/>
+          </a:xfrm>
+          <a:prstGeom prst="rect">
+            <a:avLst/>
+          </a:prstGeom>
+          <a:noFill/>
+        </p:spPr>
+        <p:txBody>
+          <a:bodyPr wrap="square" lIns="0" rIns="0" tIns="0" bIns="0" anchor="t">
+            <a:spAutoFit/>
+          </a:bodyPr>
+          <a:lstStyle/>
+          <a:p>
+            <a:pPr algn="l"/>
+            <a:r>
+              <a:rPr sz="1200" b="1" i="0">
+                <a:solidFill>
+                  <a:srgbClr val="1B2630"/>
+                </a:solidFill>
+                <a:latin typeface="Open Sans"/>
+              </a:rPr>
+              <a:t>Unroll, pipeline</a:t>
+            </a:r>
+          </a:p>
+        </p:txBody>
+      </p:sp>
+      <p:sp>
+        <p:nvSpPr>
+          <p:cNvPr id="12" name="TextBox 11"/>
+          <p:cNvSpPr txBox="1"/>
+          <p:nvPr/>
+        </p:nvSpPr>
+        <p:spPr>
+          <a:xfrm>
+            <a:off x="6556248" y="3511296"/>
+            <a:ext cx="2011680" cy="594360"/>
+          </a:xfrm>
+          <a:prstGeom prst="rect">
+            <a:avLst/>
+          </a:prstGeom>
+          <a:noFill/>
+        </p:spPr>
+        <p:txBody>
+          <a:bodyPr wrap="square" lIns="0" rIns="0" tIns="0" bIns="0" anchor="t">
+            <a:spAutoFit/>
+          </a:bodyPr>
+          <a:lstStyle/>
+          <a:p>
+            <a:pPr algn="l"/>
+            <a:r>
+              <a:rPr sz="1000" b="0" i="0">
+                <a:solidFill>
+                  <a:srgbClr val="5A6875"/>
+                </a:solidFill>
+                <a:latin typeface="Open Sans"/>
+              </a:rPr>
+              <a:t>lost: uop cache overflow, spills</a:t>
+            </a:r>
+          </a:p>
+        </p:txBody>
+      </p:sp>
+    </p:spTree>
+  </p:cSld>
+  <p:clrMapOvr>
+    <a:masterClrMapping/>
+  </p:clrMapOvr>
+</p:sld>
+</file>
+
+<file path=ppt/slides/slide11.xml><?xml version="1.0" encoding="utf-8"?>
+<p:sld xmlns:a="http://schemas.openxmlformats.org/drawingml/2006/main" xmlns:p="http://schemas.openxmlformats.org/presentationml/2006/main" xmlns:r="http://schemas.openxmlformats.org/officeDocument/2006/relationships">
+  <p:cSld>
+    <p:spTree>
+      <p:nvGrpSpPr>
+        <p:cNvPr id="1" name=""/>
+        <p:cNvGrpSpPr/>
+        <p:nvPr/>
+      </p:nvGrpSpPr>
+      <p:grpSpPr/>
+      <p:sp>
+        <p:nvSpPr>
+          <p:cNvPr id="2" name="Title 1"/>
+          <p:cNvSpPr>
+            <a:spLocks noGrp="1"/>
+          </p:cNvSpPr>
+          <p:nvPr>
+            <p:ph type="title"/>
+          </p:nvPr>
+        </p:nvSpPr>
+        <p:spPr/>
+        <p:txBody>
+          <a:bodyPr/>
+          <a:lstStyle/>
+          <a:p>
+            <a:r>
+              <a:t>Benchmarked like Assignment 2: FLOPs/cycle vs k</a:t>
+            </a:r>
+          </a:p>
+        </p:txBody>
+      </p:sp>
+      <p:pic>
+        <p:nvPicPr>
+          <p:cNvPr id="3" name="Picture 2" descr="ukr_sweep_nosilu_34_intrinsics.png"/>
+          <p:cNvPicPr>
+            <a:picLocks noChangeAspect="1"/>
+          </p:cNvPicPr>
+          <p:nvPr/>
+        </p:nvPicPr>
+        <p:blipFill>
+          <a:blip r:embed="rId3"/>
+          <a:stretch>
+            <a:fillRect/>
+          </a:stretch>
+        </p:blipFill>
+        <p:spPr>
+          <a:xfrm>
+            <a:off x="457200" y="960120"/>
+            <a:ext cx="5486400" cy="2926080"/>
+          </a:xfrm>
+          <a:prstGeom prst="rect">
+            <a:avLst/>
+          </a:prstGeom>
+        </p:spPr>
+      </p:pic>
+      <p:sp>
+        <p:nvSpPr>
+          <p:cNvPr id="4" name="TextBox 3"/>
+          <p:cNvSpPr txBox="1"/>
+          <p:nvPr/>
+        </p:nvSpPr>
+        <p:spPr>
+          <a:xfrm>
+            <a:off x="457200" y="3931920"/>
+            <a:ext cx="5486400" cy="274320"/>
+          </a:xfrm>
+          <a:prstGeom prst="rect">
+            <a:avLst/>
+          </a:prstGeom>
+          <a:noFill/>
+        </p:spPr>
+        <p:txBody>
+          <a:bodyPr wrap="square" lIns="0" rIns="0" tIns="0" bIns="0" anchor="t">
+            <a:spAutoFit/>
+          </a:bodyPr>
+          <a:lstStyle/>
+          <a:p>
+            <a:pPr algn="l"/>
+            <a:r>
+              <a:rPr sz="1000" b="0" i="0">
+                <a:solidFill>
+                  <a:srgbClr val="5A6875"/>
+                </a:solidFill>
+                <a:latin typeface="Open Sans"/>
+              </a:rPr>
+              <a:t>SiLU off, cycles = time × 3.4 GHz, as in A2. 3 runs, every point checked (576 pass).</a:t>
+            </a:r>
+          </a:p>
+        </p:txBody>
+      </p:sp>
+      <p:sp>
+        <p:nvSpPr>
+          <p:cNvPr id="5" name="TextBox 4"/>
+          <p:cNvSpPr txBox="1"/>
+          <p:nvPr/>
+        </p:nvSpPr>
+        <p:spPr>
+          <a:xfrm>
+            <a:off x="6172200" y="960120"/>
+            <a:ext cx="2514600" cy="548640"/>
+          </a:xfrm>
+          <a:prstGeom prst="rect">
+            <a:avLst/>
+          </a:prstGeom>
+          <a:noFill/>
+        </p:spPr>
+        <p:txBody>
+          <a:bodyPr wrap="square" lIns="0" rIns="0" tIns="0" bIns="0" anchor="t">
+            <a:spAutoFit/>
+          </a:bodyPr>
+          <a:lstStyle/>
+          <a:p>
+            <a:pPr algn="l"/>
+            <a:r>
+              <a:rPr sz="3000" b="1" i="0">
+                <a:solidFill>
+                  <a:srgbClr val="BB0027"/>
+                </a:solidFill>
+                <a:latin typeface="Open Sans"/>
+              </a:rPr>
+              <a:t>83–89%</a:t>
+            </a:r>
+          </a:p>
+        </p:txBody>
+      </p:sp>
+      <p:sp>
+        <p:nvSpPr>
+          <p:cNvPr id="6" name="TextBox 5"/>
+          <p:cNvSpPr txBox="1"/>
+          <p:nvPr/>
+        </p:nvSpPr>
+        <p:spPr>
+          <a:xfrm>
+            <a:off x="6172200" y="1527048"/>
+            <a:ext cx="2514600" cy="548640"/>
+          </a:xfrm>
+          <a:prstGeom prst="rect">
+            <a:avLst/>
+          </a:prstGeom>
+          <a:noFill/>
+        </p:spPr>
+        <p:txBody>
+          <a:bodyPr wrap="square" lIns="0" rIns="0" tIns="0" bIns="0" anchor="t">
+            <a:spAutoFit/>
+          </a:bodyPr>
+          <a:lstStyle/>
+          <a:p>
+            <a:pPr algn="l"/>
+            <a:r>
+              <a:rPr sz="1200" b="0" i="0">
+                <a:solidFill>
+                  <a:srgbClr val="5A6875"/>
+                </a:solidFill>
+                <a:latin typeface="Open Sans"/>
+              </a:rPr>
+              <a:t>2×5 (v2's tile): 27–28.5 FLOPs/cycle, ~93 GFLOP/s on one core</a:t>
+            </a:r>
+          </a:p>
+        </p:txBody>
+      </p:sp>
+      <p:sp>
+        <p:nvSpPr>
+          <p:cNvPr id="7" name="TextBox 6"/>
+          <p:cNvSpPr txBox="1"/>
+          <p:nvPr/>
+        </p:nvSpPr>
+        <p:spPr>
+          <a:xfrm>
+            <a:off x="6172200" y="2011680"/>
+            <a:ext cx="2514600" cy="548640"/>
+          </a:xfrm>
+          <a:prstGeom prst="rect">
+            <a:avLst/>
+          </a:prstGeom>
+          <a:noFill/>
+        </p:spPr>
+        <p:txBody>
+          <a:bodyPr wrap="square" lIns="0" rIns="0" tIns="0" bIns="0" anchor="t">
+            <a:spAutoFit/>
+          </a:bodyPr>
+          <a:lstStyle/>
+          <a:p>
+            <a:pPr algn="l"/>
+            <a:r>
+              <a:rPr sz="3000" b="1" i="0">
+                <a:solidFill>
+                  <a:srgbClr val="6B7782"/>
+                </a:solidFill>
+                <a:latin typeface="Open Sans"/>
+              </a:rPr>
+              <a:t>80–83%</a:t>
+            </a:r>
+          </a:p>
+        </p:txBody>
+      </p:sp>
+      <p:sp>
+        <p:nvSpPr>
+          <p:cNvPr id="8" name="TextBox 7"/>
+          <p:cNvSpPr txBox="1"/>
+          <p:nvPr/>
+        </p:nvSpPr>
+        <p:spPr>
+          <a:xfrm>
+            <a:off x="6172200" y="2578608"/>
+            <a:ext cx="2514600" cy="548640"/>
+          </a:xfrm>
+          <a:prstGeom prst="rect">
+            <a:avLst/>
+          </a:prstGeom>
+          <a:noFill/>
+        </p:spPr>
+        <p:txBody>
+          <a:bodyPr wrap="square" lIns="0" rIns="0" tIns="0" bIns="0" anchor="t">
+            <a:spAutoFit/>
+          </a:bodyPr>
+          <a:lstStyle/>
+          <a:p>
+            <a:pPr algn="l"/>
+            <a:r>
+              <a:rPr sz="1200" b="0" i="0">
+                <a:solidFill>
+                  <a:srgbClr val="5A6875"/>
+                </a:solidFill>
+                <a:latin typeface="Open Sans"/>
+              </a:rPr>
+              <a:t>2×6: GCC adds register copies at 15 live registers</a:t>
+            </a:r>
+          </a:p>
+        </p:txBody>
+      </p:sp>
+      <p:sp>
+        <p:nvSpPr>
+          <p:cNvPr id="9" name="TextBox 8"/>
+          <p:cNvSpPr txBox="1"/>
+          <p:nvPr/>
+        </p:nvSpPr>
+        <p:spPr>
+          <a:xfrm>
+            <a:off x="6172200" y="3063240"/>
+            <a:ext cx="2514600" cy="548640"/>
+          </a:xfrm>
+          <a:prstGeom prst="rect">
+            <a:avLst/>
+          </a:prstGeom>
+          <a:noFill/>
+        </p:spPr>
+        <p:txBody>
+          <a:bodyPr wrap="square" lIns="0" rIns="0" tIns="0" bIns="0" anchor="t">
+            <a:spAutoFit/>
+          </a:bodyPr>
+          <a:lstStyle/>
+          <a:p>
+            <a:pPr algn="l"/>
+            <a:r>
+              <a:rPr sz="3000" b="1" i="0">
+                <a:solidFill>
+                  <a:srgbClr val="B7731A"/>
+                </a:solidFill>
+                <a:latin typeface="Open Sans"/>
+              </a:rPr>
+              <a:t>k ≈ 500</a:t>
+            </a:r>
+          </a:p>
+        </p:txBody>
+      </p:sp>
+      <p:sp>
+        <p:nvSpPr>
+          <p:cNvPr id="10" name="TextBox 9"/>
+          <p:cNvSpPr txBox="1"/>
+          <p:nvPr/>
+        </p:nvSpPr>
+        <p:spPr>
+          <a:xfrm>
+            <a:off x="6172200" y="3630168"/>
+            <a:ext cx="2514600" cy="548640"/>
+          </a:xfrm>
+          <a:prstGeom prst="rect">
+            <a:avLst/>
+          </a:prstGeom>
+          <a:noFill/>
+        </p:spPr>
+        <p:txBody>
+          <a:bodyPr wrap="square" lIns="0" rIns="0" tIns="0" bIns="0" anchor="t">
+            <a:spAutoFit/>
+          </a:bodyPr>
+          <a:lstStyle/>
+          <a:p>
+            <a:pPr algn="l"/>
+            <a:r>
+              <a:rPr sz="1200" b="0" i="0">
+                <a:solidFill>
+                  <a:srgbClr val="5A6875"/>
+                </a:solidFill>
+                <a:latin typeface="Open Sans"/>
+              </a:rPr>
+              <a:t>L1 dip: 2×5 weights pass 32 KB, like k ≈ 315 in A2</a:t>
+            </a:r>
+          </a:p>
+        </p:txBody>
+      </p:sp>
+    </p:spTree>
+  </p:cSld>
+  <p:clrMapOvr>
+    <a:masterClrMapping/>
+  </p:clrMapOvr>
+</p:sld>
+</file>
+
+<file path=ppt/slides/slide12.xml><?xml version="1.0" encoding="utf-8"?>
+<p:sld xmlns:a="http://schemas.openxmlformats.org/drawingml/2006/main" xmlns:p="http://schemas.openxmlformats.org/presentationml/2006/main" xmlns:r="http://schemas.openxmlformats.org/officeDocument/2006/relationships">
+  <p:cSld>
+    <p:spTree>
+      <p:nvGrpSpPr>
+        <p:cNvPr id="1" name=""/>
+        <p:cNvGrpSpPr/>
+        <p:nvPr/>
+      </p:nvGrpSpPr>
+      <p:grpSpPr/>
+      <p:sp>
+        <p:nvSpPr>
+          <p:cNvPr id="2" name="Title 1"/>
+          <p:cNvSpPr>
+            <a:spLocks noGrp="1"/>
+          </p:cNvSpPr>
+          <p:nvPr>
+            <p:ph type="title"/>
+          </p:nvPr>
+        </p:nvSpPr>
+        <p:spPr/>
+        <p:txBody>
+          <a:bodyPr/>
+          <a:lstStyle/>
+          <a:p>
+            <a:r>
               <a:t>12 accumulators lost to 10: GCC's register copies</a:t>
             </a:r>
           </a:p>
@@ -8145,7 +9006,7 @@
 </p:sld>
 </file>
 
-<file path=ppt/slides/slide11.xml><?xml version="1.0" encoding="utf-8"?>
+<file path=ppt/slides/slide13.xml><?xml version="1.0" encoding="utf-8"?>
 <p:sld xmlns:a="http://schemas.openxmlformats.org/drawingml/2006/main" xmlns:p="http://schemas.openxmlformats.org/presentationml/2006/main" xmlns:r="http://schemas.openxmlformats.org/officeDocument/2006/relationships">
   <p:cSld>
     <p:spTree>
@@ -8377,7 +9238,7 @@
 </p:sld>
 </file>
 
-<file path=ppt/slides/slide12.xml><?xml version="1.0" encoding="utf-8"?>
+<file path=ppt/slides/slide14.xml><?xml version="1.0" encoding="utf-8"?>
 <p:sld xmlns:a="http://schemas.openxmlformats.org/drawingml/2006/main" xmlns:p="http://schemas.openxmlformats.org/presentationml/2006/main" xmlns:r="http://schemas.openxmlformats.org/officeDocument/2006/relationships">
   <p:cSld>
     <p:spTree>
@@ -12376,21 +13237,1983 @@
           <a:lstStyle/>
           <a:p>
             <a:r>
-              <a:t>How the numbers are measured</a:t>
-            </a:r>
-          </a:p>
-        </p:txBody>
-      </p:sp>
-      <p:sp>
-        <p:nvSpPr>
-          <p:cNvPr id="3" name="assume-0"/>
+              <a:t>Memory layout: NCHW8c with a zero halo</a:t>
+            </a:r>
+          </a:p>
+        </p:txBody>
+      </p:sp>
+      <p:sp>
+        <p:nvSpPr>
+          <p:cNvPr id="3" name="TextBox 2"/>
+          <p:cNvSpPr txBox="1"/>
+          <p:nvPr/>
+        </p:nvSpPr>
+        <p:spPr>
+          <a:xfrm>
+            <a:off x="457200" y="960120"/>
+            <a:ext cx="5120640" cy="274320"/>
+          </a:xfrm>
+          <a:prstGeom prst="rect">
+            <a:avLst/>
+          </a:prstGeom>
+          <a:noFill/>
+        </p:spPr>
+        <p:txBody>
+          <a:bodyPr wrap="square" lIns="0" rIns="0" tIns="0" bIns="0" anchor="t">
+            <a:spAutoFit/>
+          </a:bodyPr>
+          <a:lstStyle/>
+          <a:p>
+            <a:pPr algn="l"/>
+            <a:r>
+              <a:rPr sz="1150" b="1" i="0">
+                <a:solidFill>
+                  <a:srgbClr val="1B2630"/>
+                </a:solidFill>
+                <a:latin typeface="Open Sans"/>
+              </a:rPr>
+              <a:t>ONNX NCHW: </a:t>
+            </a:r>
+            <a:r>
+              <a:rPr sz="1150" b="0" i="0">
+                <a:solidFill>
+                  <a:srgbClr val="5A6875"/>
+                </a:solidFill>
+                <a:latin typeface="Open Sans"/>
+              </a:rPr>
+              <a:t>channel planes one after another</a:t>
+            </a:r>
+          </a:p>
+        </p:txBody>
+      </p:sp>
+      <p:sp>
+        <p:nvSpPr>
+          <p:cNvPr id="4" name="Rectangle 3"/>
           <p:cNvSpPr/>
           <p:nvPr/>
         </p:nvSpPr>
         <p:spPr>
           <a:xfrm>
-            <a:off x="457200" y="1005840"/>
-            <a:ext cx="4023360" cy="713232"/>
+            <a:off x="457200" y="1280160"/>
+            <a:ext cx="283464" cy="329184"/>
+          </a:xfrm>
+          <a:prstGeom prst="rect">
+            <a:avLst/>
+          </a:prstGeom>
+          <a:solidFill>
+            <a:srgbClr val="D7EAF0"/>
+          </a:solidFill>
+          <a:ln w="9525">
+            <a:solidFill>
+              <a:srgbClr val="0C6A87"/>
+            </a:solidFill>
+          </a:ln>
+          <a:effectLst/>
+        </p:spPr>
+        <p:style>
+          <a:lnRef idx="1">
+            <a:schemeClr val="accent1"/>
+          </a:lnRef>
+          <a:fillRef idx="3">
+            <a:schemeClr val="accent1"/>
+          </a:fillRef>
+          <a:effectRef idx="2">
+            <a:schemeClr val="accent1"/>
+          </a:effectRef>
+          <a:fontRef idx="minor">
+            <a:schemeClr val="lt1"/>
+          </a:fontRef>
+        </p:style>
+        <p:txBody>
+          <a:bodyPr rtlCol="0" anchor="ctr" lIns="0" rIns="0" tIns="0" bIns="0"/>
+          <a:lstStyle/>
+          <a:p>
+            <a:pPr algn="ctr"/>
+            <a:r>
+              <a:rPr sz="700" b="1">
+                <a:solidFill>
+                  <a:srgbClr val="0C6A87"/>
+                </a:solidFill>
+                <a:latin typeface="Open Sans"/>
+              </a:rPr>
+              <a:t>c0p0</a:t>
+            </a:r>
+          </a:p>
+        </p:txBody>
+      </p:sp>
+      <p:sp>
+        <p:nvSpPr>
+          <p:cNvPr id="5" name="Rectangle 4"/>
+          <p:cNvSpPr/>
+          <p:nvPr/>
+        </p:nvSpPr>
+        <p:spPr>
+          <a:xfrm>
+            <a:off x="758952" y="1280160"/>
+            <a:ext cx="283464" cy="329184"/>
+          </a:xfrm>
+          <a:prstGeom prst="rect">
+            <a:avLst/>
+          </a:prstGeom>
+          <a:solidFill>
+            <a:srgbClr val="FFFFFF"/>
+          </a:solidFill>
+          <a:ln w="9525">
+            <a:solidFill>
+              <a:srgbClr val="0C6A87"/>
+            </a:solidFill>
+          </a:ln>
+          <a:effectLst/>
+        </p:spPr>
+        <p:style>
+          <a:lnRef idx="1">
+            <a:schemeClr val="accent1"/>
+          </a:lnRef>
+          <a:fillRef idx="3">
+            <a:schemeClr val="accent1"/>
+          </a:fillRef>
+          <a:effectRef idx="2">
+            <a:schemeClr val="accent1"/>
+          </a:effectRef>
+          <a:fontRef idx="minor">
+            <a:schemeClr val="lt1"/>
+          </a:fontRef>
+        </p:style>
+        <p:txBody>
+          <a:bodyPr rtlCol="0" anchor="ctr" lIns="0" rIns="0" tIns="0" bIns="0"/>
+          <a:lstStyle/>
+          <a:p>
+            <a:pPr algn="ctr"/>
+            <a:r>
+              <a:rPr sz="700" b="0">
+                <a:solidFill>
+                  <a:srgbClr val="0C6A87"/>
+                </a:solidFill>
+                <a:latin typeface="Open Sans"/>
+              </a:rPr>
+              <a:t>c0p1</a:t>
+            </a:r>
+          </a:p>
+        </p:txBody>
+      </p:sp>
+      <p:sp>
+        <p:nvSpPr>
+          <p:cNvPr id="6" name="Rectangle 5"/>
+          <p:cNvSpPr/>
+          <p:nvPr/>
+        </p:nvSpPr>
+        <p:spPr>
+          <a:xfrm>
+            <a:off x="1060704" y="1280160"/>
+            <a:ext cx="283464" cy="329184"/>
+          </a:xfrm>
+          <a:prstGeom prst="rect">
+            <a:avLst/>
+          </a:prstGeom>
+          <a:solidFill>
+            <a:srgbClr val="FFFFFF"/>
+          </a:solidFill>
+          <a:ln w="9525">
+            <a:solidFill>
+              <a:srgbClr val="0C6A87"/>
+            </a:solidFill>
+          </a:ln>
+          <a:effectLst/>
+        </p:spPr>
+        <p:style>
+          <a:lnRef idx="1">
+            <a:schemeClr val="accent1"/>
+          </a:lnRef>
+          <a:fillRef idx="3">
+            <a:schemeClr val="accent1"/>
+          </a:fillRef>
+          <a:effectRef idx="2">
+            <a:schemeClr val="accent1"/>
+          </a:effectRef>
+          <a:fontRef idx="minor">
+            <a:schemeClr val="lt1"/>
+          </a:fontRef>
+        </p:style>
+        <p:txBody>
+          <a:bodyPr rtlCol="0" anchor="ctr" lIns="0" rIns="0" tIns="0" bIns="0"/>
+          <a:lstStyle/>
+          <a:p>
+            <a:pPr algn="ctr"/>
+            <a:r>
+              <a:rPr sz="700" b="0">
+                <a:solidFill>
+                  <a:srgbClr val="0C6A87"/>
+                </a:solidFill>
+                <a:latin typeface="Open Sans"/>
+              </a:rPr>
+              <a:t>c0p2</a:t>
+            </a:r>
+          </a:p>
+        </p:txBody>
+      </p:sp>
+      <p:sp>
+        <p:nvSpPr>
+          <p:cNvPr id="7" name="Rectangle 6"/>
+          <p:cNvSpPr/>
+          <p:nvPr/>
+        </p:nvSpPr>
+        <p:spPr>
+          <a:xfrm>
+            <a:off x="1362456" y="1280160"/>
+            <a:ext cx="283464" cy="329184"/>
+          </a:xfrm>
+          <a:prstGeom prst="rect">
+            <a:avLst/>
+          </a:prstGeom>
+          <a:solidFill>
+            <a:srgbClr val="FFFFFF"/>
+          </a:solidFill>
+          <a:ln w="9525">
+            <a:solidFill>
+              <a:srgbClr val="0C6A87"/>
+            </a:solidFill>
+          </a:ln>
+          <a:effectLst/>
+        </p:spPr>
+        <p:style>
+          <a:lnRef idx="1">
+            <a:schemeClr val="accent1"/>
+          </a:lnRef>
+          <a:fillRef idx="3">
+            <a:schemeClr val="accent1"/>
+          </a:fillRef>
+          <a:effectRef idx="2">
+            <a:schemeClr val="accent1"/>
+          </a:effectRef>
+          <a:fontRef idx="minor">
+            <a:schemeClr val="lt1"/>
+          </a:fontRef>
+        </p:style>
+        <p:txBody>
+          <a:bodyPr rtlCol="0" anchor="ctr" lIns="0" rIns="0" tIns="0" bIns="0"/>
+          <a:lstStyle/>
+          <a:p>
+            <a:pPr algn="ctr"/>
+            <a:r>
+              <a:rPr sz="700" b="0">
+                <a:solidFill>
+                  <a:srgbClr val="0C6A87"/>
+                </a:solidFill>
+                <a:latin typeface="Open Sans"/>
+              </a:rPr>
+              <a:t>c0p3</a:t>
+            </a:r>
+          </a:p>
+        </p:txBody>
+      </p:sp>
+      <p:sp>
+        <p:nvSpPr>
+          <p:cNvPr id="8" name="Rectangle 7"/>
+          <p:cNvSpPr/>
+          <p:nvPr/>
+        </p:nvSpPr>
+        <p:spPr>
+          <a:xfrm>
+            <a:off x="1664208" y="1280160"/>
+            <a:ext cx="283464" cy="329184"/>
+          </a:xfrm>
+          <a:prstGeom prst="rect">
+            <a:avLst/>
+          </a:prstGeom>
+          <a:solidFill>
+            <a:srgbClr val="F5E6CF"/>
+          </a:solidFill>
+          <a:ln w="9525">
+            <a:solidFill>
+              <a:srgbClr val="B7731A"/>
+            </a:solidFill>
+          </a:ln>
+          <a:effectLst/>
+        </p:spPr>
+        <p:style>
+          <a:lnRef idx="1">
+            <a:schemeClr val="accent1"/>
+          </a:lnRef>
+          <a:fillRef idx="3">
+            <a:schemeClr val="accent1"/>
+          </a:fillRef>
+          <a:effectRef idx="2">
+            <a:schemeClr val="accent1"/>
+          </a:effectRef>
+          <a:fontRef idx="minor">
+            <a:schemeClr val="lt1"/>
+          </a:fontRef>
+        </p:style>
+        <p:txBody>
+          <a:bodyPr rtlCol="0" anchor="ctr" lIns="0" rIns="0" tIns="0" bIns="0"/>
+          <a:lstStyle/>
+          <a:p>
+            <a:pPr algn="ctr"/>
+            <a:r>
+              <a:rPr sz="700" b="1">
+                <a:solidFill>
+                  <a:srgbClr val="B7731A"/>
+                </a:solidFill>
+                <a:latin typeface="Open Sans"/>
+              </a:rPr>
+              <a:t>c1p0</a:t>
+            </a:r>
+          </a:p>
+        </p:txBody>
+      </p:sp>
+      <p:sp>
+        <p:nvSpPr>
+          <p:cNvPr id="9" name="Rectangle 8"/>
+          <p:cNvSpPr/>
+          <p:nvPr/>
+        </p:nvSpPr>
+        <p:spPr>
+          <a:xfrm>
+            <a:off x="1965960" y="1280160"/>
+            <a:ext cx="283464" cy="329184"/>
+          </a:xfrm>
+          <a:prstGeom prst="rect">
+            <a:avLst/>
+          </a:prstGeom>
+          <a:solidFill>
+            <a:srgbClr val="FFFFFF"/>
+          </a:solidFill>
+          <a:ln w="9525">
+            <a:solidFill>
+              <a:srgbClr val="B7731A"/>
+            </a:solidFill>
+          </a:ln>
+          <a:effectLst/>
+        </p:spPr>
+        <p:style>
+          <a:lnRef idx="1">
+            <a:schemeClr val="accent1"/>
+          </a:lnRef>
+          <a:fillRef idx="3">
+            <a:schemeClr val="accent1"/>
+          </a:fillRef>
+          <a:effectRef idx="2">
+            <a:schemeClr val="accent1"/>
+          </a:effectRef>
+          <a:fontRef idx="minor">
+            <a:schemeClr val="lt1"/>
+          </a:fontRef>
+        </p:style>
+        <p:txBody>
+          <a:bodyPr rtlCol="0" anchor="ctr" lIns="0" rIns="0" tIns="0" bIns="0"/>
+          <a:lstStyle/>
+          <a:p>
+            <a:pPr algn="ctr"/>
+            <a:r>
+              <a:rPr sz="700" b="0">
+                <a:solidFill>
+                  <a:srgbClr val="B7731A"/>
+                </a:solidFill>
+                <a:latin typeface="Open Sans"/>
+              </a:rPr>
+              <a:t>c1p1</a:t>
+            </a:r>
+          </a:p>
+        </p:txBody>
+      </p:sp>
+      <p:sp>
+        <p:nvSpPr>
+          <p:cNvPr id="10" name="Rectangle 9"/>
+          <p:cNvSpPr/>
+          <p:nvPr/>
+        </p:nvSpPr>
+        <p:spPr>
+          <a:xfrm>
+            <a:off x="2267712" y="1280160"/>
+            <a:ext cx="283464" cy="329184"/>
+          </a:xfrm>
+          <a:prstGeom prst="rect">
+            <a:avLst/>
+          </a:prstGeom>
+          <a:solidFill>
+            <a:srgbClr val="FFFFFF"/>
+          </a:solidFill>
+          <a:ln w="9525">
+            <a:solidFill>
+              <a:srgbClr val="B7731A"/>
+            </a:solidFill>
+          </a:ln>
+          <a:effectLst/>
+        </p:spPr>
+        <p:style>
+          <a:lnRef idx="1">
+            <a:schemeClr val="accent1"/>
+          </a:lnRef>
+          <a:fillRef idx="3">
+            <a:schemeClr val="accent1"/>
+          </a:fillRef>
+          <a:effectRef idx="2">
+            <a:schemeClr val="accent1"/>
+          </a:effectRef>
+          <a:fontRef idx="minor">
+            <a:schemeClr val="lt1"/>
+          </a:fontRef>
+        </p:style>
+        <p:txBody>
+          <a:bodyPr rtlCol="0" anchor="ctr" lIns="0" rIns="0" tIns="0" bIns="0"/>
+          <a:lstStyle/>
+          <a:p>
+            <a:pPr algn="ctr"/>
+            <a:r>
+              <a:rPr sz="700" b="0">
+                <a:solidFill>
+                  <a:srgbClr val="B7731A"/>
+                </a:solidFill>
+                <a:latin typeface="Open Sans"/>
+              </a:rPr>
+              <a:t>c1p2</a:t>
+            </a:r>
+          </a:p>
+        </p:txBody>
+      </p:sp>
+      <p:sp>
+        <p:nvSpPr>
+          <p:cNvPr id="11" name="Rectangle 10"/>
+          <p:cNvSpPr/>
+          <p:nvPr/>
+        </p:nvSpPr>
+        <p:spPr>
+          <a:xfrm>
+            <a:off x="2569464" y="1280160"/>
+            <a:ext cx="283464" cy="329184"/>
+          </a:xfrm>
+          <a:prstGeom prst="rect">
+            <a:avLst/>
+          </a:prstGeom>
+          <a:solidFill>
+            <a:srgbClr val="FFFFFF"/>
+          </a:solidFill>
+          <a:ln w="9525">
+            <a:solidFill>
+              <a:srgbClr val="B7731A"/>
+            </a:solidFill>
+          </a:ln>
+          <a:effectLst/>
+        </p:spPr>
+        <p:style>
+          <a:lnRef idx="1">
+            <a:schemeClr val="accent1"/>
+          </a:lnRef>
+          <a:fillRef idx="3">
+            <a:schemeClr val="accent1"/>
+          </a:fillRef>
+          <a:effectRef idx="2">
+            <a:schemeClr val="accent1"/>
+          </a:effectRef>
+          <a:fontRef idx="minor">
+            <a:schemeClr val="lt1"/>
+          </a:fontRef>
+        </p:style>
+        <p:txBody>
+          <a:bodyPr rtlCol="0" anchor="ctr" lIns="0" rIns="0" tIns="0" bIns="0"/>
+          <a:lstStyle/>
+          <a:p>
+            <a:pPr algn="ctr"/>
+            <a:r>
+              <a:rPr sz="700" b="0">
+                <a:solidFill>
+                  <a:srgbClr val="B7731A"/>
+                </a:solidFill>
+                <a:latin typeface="Open Sans"/>
+              </a:rPr>
+              <a:t>c1p3</a:t>
+            </a:r>
+          </a:p>
+        </p:txBody>
+      </p:sp>
+      <p:sp>
+        <p:nvSpPr>
+          <p:cNvPr id="12" name="Rectangle 11"/>
+          <p:cNvSpPr/>
+          <p:nvPr/>
+        </p:nvSpPr>
+        <p:spPr>
+          <a:xfrm>
+            <a:off x="2871216" y="1280160"/>
+            <a:ext cx="283464" cy="329184"/>
+          </a:xfrm>
+          <a:prstGeom prst="rect">
+            <a:avLst/>
+          </a:prstGeom>
+          <a:solidFill>
+            <a:srgbClr val="E4E0F0"/>
+          </a:solidFill>
+          <a:ln w="9525">
+            <a:solidFill>
+              <a:srgbClr val="5B4B8A"/>
+            </a:solidFill>
+          </a:ln>
+          <a:effectLst/>
+        </p:spPr>
+        <p:style>
+          <a:lnRef idx="1">
+            <a:schemeClr val="accent1"/>
+          </a:lnRef>
+          <a:fillRef idx="3">
+            <a:schemeClr val="accent1"/>
+          </a:fillRef>
+          <a:effectRef idx="2">
+            <a:schemeClr val="accent1"/>
+          </a:effectRef>
+          <a:fontRef idx="minor">
+            <a:schemeClr val="lt1"/>
+          </a:fontRef>
+        </p:style>
+        <p:txBody>
+          <a:bodyPr rtlCol="0" anchor="ctr" lIns="0" rIns="0" tIns="0" bIns="0"/>
+          <a:lstStyle/>
+          <a:p>
+            <a:pPr algn="ctr"/>
+            <a:r>
+              <a:rPr sz="700" b="1">
+                <a:solidFill>
+                  <a:srgbClr val="5B4B8A"/>
+                </a:solidFill>
+                <a:latin typeface="Open Sans"/>
+              </a:rPr>
+              <a:t>c2p0</a:t>
+            </a:r>
+          </a:p>
+        </p:txBody>
+      </p:sp>
+      <p:sp>
+        <p:nvSpPr>
+          <p:cNvPr id="13" name="Rectangle 12"/>
+          <p:cNvSpPr/>
+          <p:nvPr/>
+        </p:nvSpPr>
+        <p:spPr>
+          <a:xfrm>
+            <a:off x="3172968" y="1280160"/>
+            <a:ext cx="283464" cy="329184"/>
+          </a:xfrm>
+          <a:prstGeom prst="rect">
+            <a:avLst/>
+          </a:prstGeom>
+          <a:solidFill>
+            <a:srgbClr val="FFFFFF"/>
+          </a:solidFill>
+          <a:ln w="9525">
+            <a:solidFill>
+              <a:srgbClr val="5B4B8A"/>
+            </a:solidFill>
+          </a:ln>
+          <a:effectLst/>
+        </p:spPr>
+        <p:style>
+          <a:lnRef idx="1">
+            <a:schemeClr val="accent1"/>
+          </a:lnRef>
+          <a:fillRef idx="3">
+            <a:schemeClr val="accent1"/>
+          </a:fillRef>
+          <a:effectRef idx="2">
+            <a:schemeClr val="accent1"/>
+          </a:effectRef>
+          <a:fontRef idx="minor">
+            <a:schemeClr val="lt1"/>
+          </a:fontRef>
+        </p:style>
+        <p:txBody>
+          <a:bodyPr rtlCol="0" anchor="ctr" lIns="0" rIns="0" tIns="0" bIns="0"/>
+          <a:lstStyle/>
+          <a:p>
+            <a:pPr algn="ctr"/>
+            <a:r>
+              <a:rPr sz="700" b="0">
+                <a:solidFill>
+                  <a:srgbClr val="5B4B8A"/>
+                </a:solidFill>
+                <a:latin typeface="Open Sans"/>
+              </a:rPr>
+              <a:t>c2p1</a:t>
+            </a:r>
+          </a:p>
+        </p:txBody>
+      </p:sp>
+      <p:sp>
+        <p:nvSpPr>
+          <p:cNvPr id="14" name="Rectangle 13"/>
+          <p:cNvSpPr/>
+          <p:nvPr/>
+        </p:nvSpPr>
+        <p:spPr>
+          <a:xfrm>
+            <a:off x="3474720" y="1280160"/>
+            <a:ext cx="283464" cy="329184"/>
+          </a:xfrm>
+          <a:prstGeom prst="rect">
+            <a:avLst/>
+          </a:prstGeom>
+          <a:solidFill>
+            <a:srgbClr val="FFFFFF"/>
+          </a:solidFill>
+          <a:ln w="9525">
+            <a:solidFill>
+              <a:srgbClr val="5B4B8A"/>
+            </a:solidFill>
+          </a:ln>
+          <a:effectLst/>
+        </p:spPr>
+        <p:style>
+          <a:lnRef idx="1">
+            <a:schemeClr val="accent1"/>
+          </a:lnRef>
+          <a:fillRef idx="3">
+            <a:schemeClr val="accent1"/>
+          </a:fillRef>
+          <a:effectRef idx="2">
+            <a:schemeClr val="accent1"/>
+          </a:effectRef>
+          <a:fontRef idx="minor">
+            <a:schemeClr val="lt1"/>
+          </a:fontRef>
+        </p:style>
+        <p:txBody>
+          <a:bodyPr rtlCol="0" anchor="ctr" lIns="0" rIns="0" tIns="0" bIns="0"/>
+          <a:lstStyle/>
+          <a:p>
+            <a:pPr algn="ctr"/>
+            <a:r>
+              <a:rPr sz="700" b="0">
+                <a:solidFill>
+                  <a:srgbClr val="5B4B8A"/>
+                </a:solidFill>
+                <a:latin typeface="Open Sans"/>
+              </a:rPr>
+              <a:t>c2p2</a:t>
+            </a:r>
+          </a:p>
+        </p:txBody>
+      </p:sp>
+      <p:sp>
+        <p:nvSpPr>
+          <p:cNvPr id="15" name="Rectangle 14"/>
+          <p:cNvSpPr/>
+          <p:nvPr/>
+        </p:nvSpPr>
+        <p:spPr>
+          <a:xfrm>
+            <a:off x="3776472" y="1280160"/>
+            <a:ext cx="283464" cy="329184"/>
+          </a:xfrm>
+          <a:prstGeom prst="rect">
+            <a:avLst/>
+          </a:prstGeom>
+          <a:solidFill>
+            <a:srgbClr val="FFFFFF"/>
+          </a:solidFill>
+          <a:ln w="9525">
+            <a:solidFill>
+              <a:srgbClr val="5B4B8A"/>
+            </a:solidFill>
+          </a:ln>
+          <a:effectLst/>
+        </p:spPr>
+        <p:style>
+          <a:lnRef idx="1">
+            <a:schemeClr val="accent1"/>
+          </a:lnRef>
+          <a:fillRef idx="3">
+            <a:schemeClr val="accent1"/>
+          </a:fillRef>
+          <a:effectRef idx="2">
+            <a:schemeClr val="accent1"/>
+          </a:effectRef>
+          <a:fontRef idx="minor">
+            <a:schemeClr val="lt1"/>
+          </a:fontRef>
+        </p:style>
+        <p:txBody>
+          <a:bodyPr rtlCol="0" anchor="ctr" lIns="0" rIns="0" tIns="0" bIns="0"/>
+          <a:lstStyle/>
+          <a:p>
+            <a:pPr algn="ctr"/>
+            <a:r>
+              <a:rPr sz="700" b="0">
+                <a:solidFill>
+                  <a:srgbClr val="5B4B8A"/>
+                </a:solidFill>
+                <a:latin typeface="Open Sans"/>
+              </a:rPr>
+              <a:t>c2p3</a:t>
+            </a:r>
+          </a:p>
+        </p:txBody>
+      </p:sp>
+      <p:sp>
+        <p:nvSpPr>
+          <p:cNvPr id="16" name="Rectangle 15"/>
+          <p:cNvSpPr/>
+          <p:nvPr/>
+        </p:nvSpPr>
+        <p:spPr>
+          <a:xfrm>
+            <a:off x="4078224" y="1280160"/>
+            <a:ext cx="283464" cy="329184"/>
+          </a:xfrm>
+          <a:prstGeom prst="rect">
+            <a:avLst/>
+          </a:prstGeom>
+          <a:solidFill>
+            <a:srgbClr val="DFEEDC"/>
+          </a:solidFill>
+          <a:ln w="9525">
+            <a:solidFill>
+              <a:srgbClr val="3D7A3A"/>
+            </a:solidFill>
+          </a:ln>
+          <a:effectLst/>
+        </p:spPr>
+        <p:style>
+          <a:lnRef idx="1">
+            <a:schemeClr val="accent1"/>
+          </a:lnRef>
+          <a:fillRef idx="3">
+            <a:schemeClr val="accent1"/>
+          </a:fillRef>
+          <a:effectRef idx="2">
+            <a:schemeClr val="accent1"/>
+          </a:effectRef>
+          <a:fontRef idx="minor">
+            <a:schemeClr val="lt1"/>
+          </a:fontRef>
+        </p:style>
+        <p:txBody>
+          <a:bodyPr rtlCol="0" anchor="ctr" lIns="0" rIns="0" tIns="0" bIns="0"/>
+          <a:lstStyle/>
+          <a:p>
+            <a:pPr algn="ctr"/>
+            <a:r>
+              <a:rPr sz="700" b="1">
+                <a:solidFill>
+                  <a:srgbClr val="3D7A3A"/>
+                </a:solidFill>
+                <a:latin typeface="Open Sans"/>
+              </a:rPr>
+              <a:t>c3p0</a:t>
+            </a:r>
+          </a:p>
+        </p:txBody>
+      </p:sp>
+      <p:sp>
+        <p:nvSpPr>
+          <p:cNvPr id="17" name="Rectangle 16"/>
+          <p:cNvSpPr/>
+          <p:nvPr/>
+        </p:nvSpPr>
+        <p:spPr>
+          <a:xfrm>
+            <a:off x="4379976" y="1280160"/>
+            <a:ext cx="283464" cy="329184"/>
+          </a:xfrm>
+          <a:prstGeom prst="rect">
+            <a:avLst/>
+          </a:prstGeom>
+          <a:solidFill>
+            <a:srgbClr val="FFFFFF"/>
+          </a:solidFill>
+          <a:ln w="9525">
+            <a:solidFill>
+              <a:srgbClr val="3D7A3A"/>
+            </a:solidFill>
+          </a:ln>
+          <a:effectLst/>
+        </p:spPr>
+        <p:style>
+          <a:lnRef idx="1">
+            <a:schemeClr val="accent1"/>
+          </a:lnRef>
+          <a:fillRef idx="3">
+            <a:schemeClr val="accent1"/>
+          </a:fillRef>
+          <a:effectRef idx="2">
+            <a:schemeClr val="accent1"/>
+          </a:effectRef>
+          <a:fontRef idx="minor">
+            <a:schemeClr val="lt1"/>
+          </a:fontRef>
+        </p:style>
+        <p:txBody>
+          <a:bodyPr rtlCol="0" anchor="ctr" lIns="0" rIns="0" tIns="0" bIns="0"/>
+          <a:lstStyle/>
+          <a:p>
+            <a:pPr algn="ctr"/>
+            <a:r>
+              <a:rPr sz="700" b="0">
+                <a:solidFill>
+                  <a:srgbClr val="3D7A3A"/>
+                </a:solidFill>
+                <a:latin typeface="Open Sans"/>
+              </a:rPr>
+              <a:t>c3p1</a:t>
+            </a:r>
+          </a:p>
+        </p:txBody>
+      </p:sp>
+      <p:sp>
+        <p:nvSpPr>
+          <p:cNvPr id="18" name="Rectangle 17"/>
+          <p:cNvSpPr/>
+          <p:nvPr/>
+        </p:nvSpPr>
+        <p:spPr>
+          <a:xfrm>
+            <a:off x="4681728" y="1280160"/>
+            <a:ext cx="283464" cy="329184"/>
+          </a:xfrm>
+          <a:prstGeom prst="rect">
+            <a:avLst/>
+          </a:prstGeom>
+          <a:solidFill>
+            <a:srgbClr val="FFFFFF"/>
+          </a:solidFill>
+          <a:ln w="9525">
+            <a:solidFill>
+              <a:srgbClr val="3D7A3A"/>
+            </a:solidFill>
+          </a:ln>
+          <a:effectLst/>
+        </p:spPr>
+        <p:style>
+          <a:lnRef idx="1">
+            <a:schemeClr val="accent1"/>
+          </a:lnRef>
+          <a:fillRef idx="3">
+            <a:schemeClr val="accent1"/>
+          </a:fillRef>
+          <a:effectRef idx="2">
+            <a:schemeClr val="accent1"/>
+          </a:effectRef>
+          <a:fontRef idx="minor">
+            <a:schemeClr val="lt1"/>
+          </a:fontRef>
+        </p:style>
+        <p:txBody>
+          <a:bodyPr rtlCol="0" anchor="ctr" lIns="0" rIns="0" tIns="0" bIns="0"/>
+          <a:lstStyle/>
+          <a:p>
+            <a:pPr algn="ctr"/>
+            <a:r>
+              <a:rPr sz="700" b="0">
+                <a:solidFill>
+                  <a:srgbClr val="3D7A3A"/>
+                </a:solidFill>
+                <a:latin typeface="Open Sans"/>
+              </a:rPr>
+              <a:t>c3p2</a:t>
+            </a:r>
+          </a:p>
+        </p:txBody>
+      </p:sp>
+      <p:sp>
+        <p:nvSpPr>
+          <p:cNvPr id="19" name="Rectangle 18"/>
+          <p:cNvSpPr/>
+          <p:nvPr/>
+        </p:nvSpPr>
+        <p:spPr>
+          <a:xfrm>
+            <a:off x="4983480" y="1280160"/>
+            <a:ext cx="283464" cy="329184"/>
+          </a:xfrm>
+          <a:prstGeom prst="rect">
+            <a:avLst/>
+          </a:prstGeom>
+          <a:solidFill>
+            <a:srgbClr val="FFFFFF"/>
+          </a:solidFill>
+          <a:ln w="9525">
+            <a:solidFill>
+              <a:srgbClr val="3D7A3A"/>
+            </a:solidFill>
+          </a:ln>
+          <a:effectLst/>
+        </p:spPr>
+        <p:style>
+          <a:lnRef idx="1">
+            <a:schemeClr val="accent1"/>
+          </a:lnRef>
+          <a:fillRef idx="3">
+            <a:schemeClr val="accent1"/>
+          </a:fillRef>
+          <a:effectRef idx="2">
+            <a:schemeClr val="accent1"/>
+          </a:effectRef>
+          <a:fontRef idx="minor">
+            <a:schemeClr val="lt1"/>
+          </a:fontRef>
+        </p:style>
+        <p:txBody>
+          <a:bodyPr rtlCol="0" anchor="ctr" lIns="0" rIns="0" tIns="0" bIns="0"/>
+          <a:lstStyle/>
+          <a:p>
+            <a:pPr algn="ctr"/>
+            <a:r>
+              <a:rPr sz="700" b="0">
+                <a:solidFill>
+                  <a:srgbClr val="3D7A3A"/>
+                </a:solidFill>
+                <a:latin typeface="Open Sans"/>
+              </a:rPr>
+              <a:t>c3p3</a:t>
+            </a:r>
+          </a:p>
+        </p:txBody>
+      </p:sp>
+      <p:sp>
+        <p:nvSpPr>
+          <p:cNvPr id="20" name="TextBox 19"/>
+          <p:cNvSpPr txBox="1"/>
+          <p:nvPr/>
+        </p:nvSpPr>
+        <p:spPr>
+          <a:xfrm>
+            <a:off x="457200" y="1645920"/>
+            <a:ext cx="5120640" cy="274320"/>
+          </a:xfrm>
+          <a:prstGeom prst="rect">
+            <a:avLst/>
+          </a:prstGeom>
+          <a:noFill/>
+        </p:spPr>
+        <p:txBody>
+          <a:bodyPr wrap="square" lIns="0" rIns="0" tIns="0" bIns="0" anchor="t">
+            <a:spAutoFit/>
+          </a:bodyPr>
+          <a:lstStyle/>
+          <a:p>
+            <a:pPr algn="l"/>
+            <a:r>
+              <a:rPr sz="1000" b="0" i="0">
+                <a:solidFill>
+                  <a:srgbClr val="BB0027"/>
+                </a:solidFill>
+                <a:latin typeface="Open Sans"/>
+              </a:rPr>
+              <a:t>pixel p0's channels are H×W floats apart: 8 loads to fill one register</a:t>
+            </a:r>
+          </a:p>
+        </p:txBody>
+      </p:sp>
+      <p:sp>
+        <p:nvSpPr>
+          <p:cNvPr id="21" name="TextBox 20"/>
+          <p:cNvSpPr txBox="1"/>
+          <p:nvPr/>
+        </p:nvSpPr>
+        <p:spPr>
+          <a:xfrm>
+            <a:off x="457200" y="2011680"/>
+            <a:ext cx="5120640" cy="274320"/>
+          </a:xfrm>
+          <a:prstGeom prst="rect">
+            <a:avLst/>
+          </a:prstGeom>
+          <a:noFill/>
+        </p:spPr>
+        <p:txBody>
+          <a:bodyPr wrap="square" lIns="0" rIns="0" tIns="0" bIns="0" anchor="t">
+            <a:spAutoFit/>
+          </a:bodyPr>
+          <a:lstStyle/>
+          <a:p>
+            <a:pPr algn="l"/>
+            <a:r>
+              <a:rPr sz="1150" b="1" i="0">
+                <a:solidFill>
+                  <a:srgbClr val="1B2630"/>
+                </a:solidFill>
+                <a:latin typeface="Open Sans"/>
+              </a:rPr>
+              <a:t>NCHW8c: </a:t>
+            </a:r>
+            <a:r>
+              <a:rPr sz="1150" b="0" i="0">
+                <a:solidFill>
+                  <a:srgbClr val="5A6875"/>
+                </a:solidFill>
+                <a:latin typeface="Open Sans"/>
+              </a:rPr>
+              <a:t>[N][C/8][H+2][W+2][8], 8 channels of a pixel together</a:t>
+            </a:r>
+          </a:p>
+        </p:txBody>
+      </p:sp>
+      <p:sp>
+        <p:nvSpPr>
+          <p:cNvPr id="22" name="Rectangle 21"/>
+          <p:cNvSpPr/>
+          <p:nvPr/>
+        </p:nvSpPr>
+        <p:spPr>
+          <a:xfrm>
+            <a:off x="457200" y="2331720"/>
+            <a:ext cx="283464" cy="329184"/>
+          </a:xfrm>
+          <a:prstGeom prst="rect">
+            <a:avLst/>
+          </a:prstGeom>
+          <a:solidFill>
+            <a:srgbClr val="D7EAF0"/>
+          </a:solidFill>
+          <a:ln w="9525">
+            <a:solidFill>
+              <a:srgbClr val="0C6A87"/>
+            </a:solidFill>
+          </a:ln>
+          <a:effectLst/>
+        </p:spPr>
+        <p:style>
+          <a:lnRef idx="1">
+            <a:schemeClr val="accent1"/>
+          </a:lnRef>
+          <a:fillRef idx="3">
+            <a:schemeClr val="accent1"/>
+          </a:fillRef>
+          <a:effectRef idx="2">
+            <a:schemeClr val="accent1"/>
+          </a:effectRef>
+          <a:fontRef idx="minor">
+            <a:schemeClr val="lt1"/>
+          </a:fontRef>
+        </p:style>
+        <p:txBody>
+          <a:bodyPr rtlCol="0" anchor="ctr" lIns="0" rIns="0" tIns="0" bIns="0"/>
+          <a:lstStyle/>
+          <a:p>
+            <a:pPr algn="ctr"/>
+            <a:r>
+              <a:rPr sz="700" b="1">
+                <a:solidFill>
+                  <a:srgbClr val="0C6A87"/>
+                </a:solidFill>
+                <a:latin typeface="Open Sans"/>
+              </a:rPr>
+              <a:t>p0c0</a:t>
+            </a:r>
+          </a:p>
+        </p:txBody>
+      </p:sp>
+      <p:sp>
+        <p:nvSpPr>
+          <p:cNvPr id="23" name="Rectangle 22"/>
+          <p:cNvSpPr/>
+          <p:nvPr/>
+        </p:nvSpPr>
+        <p:spPr>
+          <a:xfrm>
+            <a:off x="758952" y="2331720"/>
+            <a:ext cx="283464" cy="329184"/>
+          </a:xfrm>
+          <a:prstGeom prst="rect">
+            <a:avLst/>
+          </a:prstGeom>
+          <a:solidFill>
+            <a:srgbClr val="F5E6CF"/>
+          </a:solidFill>
+          <a:ln w="9525">
+            <a:solidFill>
+              <a:srgbClr val="B7731A"/>
+            </a:solidFill>
+          </a:ln>
+          <a:effectLst/>
+        </p:spPr>
+        <p:style>
+          <a:lnRef idx="1">
+            <a:schemeClr val="accent1"/>
+          </a:lnRef>
+          <a:fillRef idx="3">
+            <a:schemeClr val="accent1"/>
+          </a:fillRef>
+          <a:effectRef idx="2">
+            <a:schemeClr val="accent1"/>
+          </a:effectRef>
+          <a:fontRef idx="minor">
+            <a:schemeClr val="lt1"/>
+          </a:fontRef>
+        </p:style>
+        <p:txBody>
+          <a:bodyPr rtlCol="0" anchor="ctr" lIns="0" rIns="0" tIns="0" bIns="0"/>
+          <a:lstStyle/>
+          <a:p>
+            <a:pPr algn="ctr"/>
+            <a:r>
+              <a:rPr sz="700" b="1">
+                <a:solidFill>
+                  <a:srgbClr val="B7731A"/>
+                </a:solidFill>
+                <a:latin typeface="Open Sans"/>
+              </a:rPr>
+              <a:t>p0c1</a:t>
+            </a:r>
+          </a:p>
+        </p:txBody>
+      </p:sp>
+      <p:sp>
+        <p:nvSpPr>
+          <p:cNvPr id="24" name="Rectangle 23"/>
+          <p:cNvSpPr/>
+          <p:nvPr/>
+        </p:nvSpPr>
+        <p:spPr>
+          <a:xfrm>
+            <a:off x="1060704" y="2331720"/>
+            <a:ext cx="283464" cy="329184"/>
+          </a:xfrm>
+          <a:prstGeom prst="rect">
+            <a:avLst/>
+          </a:prstGeom>
+          <a:solidFill>
+            <a:srgbClr val="E4E0F0"/>
+          </a:solidFill>
+          <a:ln w="9525">
+            <a:solidFill>
+              <a:srgbClr val="5B4B8A"/>
+            </a:solidFill>
+          </a:ln>
+          <a:effectLst/>
+        </p:spPr>
+        <p:style>
+          <a:lnRef idx="1">
+            <a:schemeClr val="accent1"/>
+          </a:lnRef>
+          <a:fillRef idx="3">
+            <a:schemeClr val="accent1"/>
+          </a:fillRef>
+          <a:effectRef idx="2">
+            <a:schemeClr val="accent1"/>
+          </a:effectRef>
+          <a:fontRef idx="minor">
+            <a:schemeClr val="lt1"/>
+          </a:fontRef>
+        </p:style>
+        <p:txBody>
+          <a:bodyPr rtlCol="0" anchor="ctr" lIns="0" rIns="0" tIns="0" bIns="0"/>
+          <a:lstStyle/>
+          <a:p>
+            <a:pPr algn="ctr"/>
+            <a:r>
+              <a:rPr sz="700" b="1">
+                <a:solidFill>
+                  <a:srgbClr val="5B4B8A"/>
+                </a:solidFill>
+                <a:latin typeface="Open Sans"/>
+              </a:rPr>
+              <a:t>p0c2</a:t>
+            </a:r>
+          </a:p>
+        </p:txBody>
+      </p:sp>
+      <p:sp>
+        <p:nvSpPr>
+          <p:cNvPr id="25" name="Rectangle 24"/>
+          <p:cNvSpPr/>
+          <p:nvPr/>
+        </p:nvSpPr>
+        <p:spPr>
+          <a:xfrm>
+            <a:off x="1362456" y="2331720"/>
+            <a:ext cx="283464" cy="329184"/>
+          </a:xfrm>
+          <a:prstGeom prst="rect">
+            <a:avLst/>
+          </a:prstGeom>
+          <a:solidFill>
+            <a:srgbClr val="DFEEDC"/>
+          </a:solidFill>
+          <a:ln w="9525">
+            <a:solidFill>
+              <a:srgbClr val="3D7A3A"/>
+            </a:solidFill>
+          </a:ln>
+          <a:effectLst/>
+        </p:spPr>
+        <p:style>
+          <a:lnRef idx="1">
+            <a:schemeClr val="accent1"/>
+          </a:lnRef>
+          <a:fillRef idx="3">
+            <a:schemeClr val="accent1"/>
+          </a:fillRef>
+          <a:effectRef idx="2">
+            <a:schemeClr val="accent1"/>
+          </a:effectRef>
+          <a:fontRef idx="minor">
+            <a:schemeClr val="lt1"/>
+          </a:fontRef>
+        </p:style>
+        <p:txBody>
+          <a:bodyPr rtlCol="0" anchor="ctr" lIns="0" rIns="0" tIns="0" bIns="0"/>
+          <a:lstStyle/>
+          <a:p>
+            <a:pPr algn="ctr"/>
+            <a:r>
+              <a:rPr sz="700" b="1">
+                <a:solidFill>
+                  <a:srgbClr val="3D7A3A"/>
+                </a:solidFill>
+                <a:latin typeface="Open Sans"/>
+              </a:rPr>
+              <a:t>p0c3</a:t>
+            </a:r>
+          </a:p>
+        </p:txBody>
+      </p:sp>
+      <p:sp>
+        <p:nvSpPr>
+          <p:cNvPr id="26" name="Rectangle 25"/>
+          <p:cNvSpPr/>
+          <p:nvPr/>
+        </p:nvSpPr>
+        <p:spPr>
+          <a:xfrm>
+            <a:off x="1664208" y="2331720"/>
+            <a:ext cx="283464" cy="329184"/>
+          </a:xfrm>
+          <a:prstGeom prst="rect">
+            <a:avLst/>
+          </a:prstGeom>
+          <a:solidFill>
+            <a:srgbClr val="D7EAF0"/>
+          </a:solidFill>
+          <a:ln w="9525">
+            <a:solidFill>
+              <a:srgbClr val="0C6A87"/>
+            </a:solidFill>
+          </a:ln>
+          <a:effectLst/>
+        </p:spPr>
+        <p:style>
+          <a:lnRef idx="1">
+            <a:schemeClr val="accent1"/>
+          </a:lnRef>
+          <a:fillRef idx="3">
+            <a:schemeClr val="accent1"/>
+          </a:fillRef>
+          <a:effectRef idx="2">
+            <a:schemeClr val="accent1"/>
+          </a:effectRef>
+          <a:fontRef idx="minor">
+            <a:schemeClr val="lt1"/>
+          </a:fontRef>
+        </p:style>
+        <p:txBody>
+          <a:bodyPr rtlCol="0" anchor="ctr" lIns="0" rIns="0" tIns="0" bIns="0"/>
+          <a:lstStyle/>
+          <a:p>
+            <a:pPr algn="ctr"/>
+            <a:r>
+              <a:rPr sz="700" b="1">
+                <a:solidFill>
+                  <a:srgbClr val="0C6A87"/>
+                </a:solidFill>
+                <a:latin typeface="Open Sans"/>
+              </a:rPr>
+              <a:t>p0c4</a:t>
+            </a:r>
+          </a:p>
+        </p:txBody>
+      </p:sp>
+      <p:sp>
+        <p:nvSpPr>
+          <p:cNvPr id="27" name="Rectangle 26"/>
+          <p:cNvSpPr/>
+          <p:nvPr/>
+        </p:nvSpPr>
+        <p:spPr>
+          <a:xfrm>
+            <a:off x="1965960" y="2331720"/>
+            <a:ext cx="283464" cy="329184"/>
+          </a:xfrm>
+          <a:prstGeom prst="rect">
+            <a:avLst/>
+          </a:prstGeom>
+          <a:solidFill>
+            <a:srgbClr val="F5E6CF"/>
+          </a:solidFill>
+          <a:ln w="9525">
+            <a:solidFill>
+              <a:srgbClr val="B7731A"/>
+            </a:solidFill>
+          </a:ln>
+          <a:effectLst/>
+        </p:spPr>
+        <p:style>
+          <a:lnRef idx="1">
+            <a:schemeClr val="accent1"/>
+          </a:lnRef>
+          <a:fillRef idx="3">
+            <a:schemeClr val="accent1"/>
+          </a:fillRef>
+          <a:effectRef idx="2">
+            <a:schemeClr val="accent1"/>
+          </a:effectRef>
+          <a:fontRef idx="minor">
+            <a:schemeClr val="lt1"/>
+          </a:fontRef>
+        </p:style>
+        <p:txBody>
+          <a:bodyPr rtlCol="0" anchor="ctr" lIns="0" rIns="0" tIns="0" bIns="0"/>
+          <a:lstStyle/>
+          <a:p>
+            <a:pPr algn="ctr"/>
+            <a:r>
+              <a:rPr sz="700" b="1">
+                <a:solidFill>
+                  <a:srgbClr val="B7731A"/>
+                </a:solidFill>
+                <a:latin typeface="Open Sans"/>
+              </a:rPr>
+              <a:t>p0c5</a:t>
+            </a:r>
+          </a:p>
+        </p:txBody>
+      </p:sp>
+      <p:sp>
+        <p:nvSpPr>
+          <p:cNvPr id="28" name="Rectangle 27"/>
+          <p:cNvSpPr/>
+          <p:nvPr/>
+        </p:nvSpPr>
+        <p:spPr>
+          <a:xfrm>
+            <a:off x="2267712" y="2331720"/>
+            <a:ext cx="283464" cy="329184"/>
+          </a:xfrm>
+          <a:prstGeom prst="rect">
+            <a:avLst/>
+          </a:prstGeom>
+          <a:solidFill>
+            <a:srgbClr val="E4E0F0"/>
+          </a:solidFill>
+          <a:ln w="9525">
+            <a:solidFill>
+              <a:srgbClr val="5B4B8A"/>
+            </a:solidFill>
+          </a:ln>
+          <a:effectLst/>
+        </p:spPr>
+        <p:style>
+          <a:lnRef idx="1">
+            <a:schemeClr val="accent1"/>
+          </a:lnRef>
+          <a:fillRef idx="3">
+            <a:schemeClr val="accent1"/>
+          </a:fillRef>
+          <a:effectRef idx="2">
+            <a:schemeClr val="accent1"/>
+          </a:effectRef>
+          <a:fontRef idx="minor">
+            <a:schemeClr val="lt1"/>
+          </a:fontRef>
+        </p:style>
+        <p:txBody>
+          <a:bodyPr rtlCol="0" anchor="ctr" lIns="0" rIns="0" tIns="0" bIns="0"/>
+          <a:lstStyle/>
+          <a:p>
+            <a:pPr algn="ctr"/>
+            <a:r>
+              <a:rPr sz="700" b="1">
+                <a:solidFill>
+                  <a:srgbClr val="5B4B8A"/>
+                </a:solidFill>
+                <a:latin typeface="Open Sans"/>
+              </a:rPr>
+              <a:t>p0c6</a:t>
+            </a:r>
+          </a:p>
+        </p:txBody>
+      </p:sp>
+      <p:sp>
+        <p:nvSpPr>
+          <p:cNvPr id="29" name="Rectangle 28"/>
+          <p:cNvSpPr/>
+          <p:nvPr/>
+        </p:nvSpPr>
+        <p:spPr>
+          <a:xfrm>
+            <a:off x="2569464" y="2331720"/>
+            <a:ext cx="283464" cy="329184"/>
+          </a:xfrm>
+          <a:prstGeom prst="rect">
+            <a:avLst/>
+          </a:prstGeom>
+          <a:solidFill>
+            <a:srgbClr val="DFEEDC"/>
+          </a:solidFill>
+          <a:ln w="9525">
+            <a:solidFill>
+              <a:srgbClr val="3D7A3A"/>
+            </a:solidFill>
+          </a:ln>
+          <a:effectLst/>
+        </p:spPr>
+        <p:style>
+          <a:lnRef idx="1">
+            <a:schemeClr val="accent1"/>
+          </a:lnRef>
+          <a:fillRef idx="3">
+            <a:schemeClr val="accent1"/>
+          </a:fillRef>
+          <a:effectRef idx="2">
+            <a:schemeClr val="accent1"/>
+          </a:effectRef>
+          <a:fontRef idx="minor">
+            <a:schemeClr val="lt1"/>
+          </a:fontRef>
+        </p:style>
+        <p:txBody>
+          <a:bodyPr rtlCol="0" anchor="ctr" lIns="0" rIns="0" tIns="0" bIns="0"/>
+          <a:lstStyle/>
+          <a:p>
+            <a:pPr algn="ctr"/>
+            <a:r>
+              <a:rPr sz="700" b="1">
+                <a:solidFill>
+                  <a:srgbClr val="3D7A3A"/>
+                </a:solidFill>
+                <a:latin typeface="Open Sans"/>
+              </a:rPr>
+              <a:t>p0c7</a:t>
+            </a:r>
+          </a:p>
+        </p:txBody>
+      </p:sp>
+      <p:sp>
+        <p:nvSpPr>
+          <p:cNvPr id="30" name="Rectangle 29"/>
+          <p:cNvSpPr/>
+          <p:nvPr/>
+        </p:nvSpPr>
+        <p:spPr>
+          <a:xfrm>
+            <a:off x="2871216" y="2331720"/>
+            <a:ext cx="283464" cy="329184"/>
+          </a:xfrm>
+          <a:prstGeom prst="rect">
+            <a:avLst/>
+          </a:prstGeom>
+          <a:solidFill>
+            <a:srgbClr val="FFFFFF"/>
+          </a:solidFill>
+          <a:ln w="9525">
+            <a:solidFill>
+              <a:srgbClr val="0C6A87"/>
+            </a:solidFill>
+          </a:ln>
+          <a:effectLst/>
+        </p:spPr>
+        <p:style>
+          <a:lnRef idx="1">
+            <a:schemeClr val="accent1"/>
+          </a:lnRef>
+          <a:fillRef idx="3">
+            <a:schemeClr val="accent1"/>
+          </a:fillRef>
+          <a:effectRef idx="2">
+            <a:schemeClr val="accent1"/>
+          </a:effectRef>
+          <a:fontRef idx="minor">
+            <a:schemeClr val="lt1"/>
+          </a:fontRef>
+        </p:style>
+        <p:txBody>
+          <a:bodyPr rtlCol="0" anchor="ctr" lIns="0" rIns="0" tIns="0" bIns="0"/>
+          <a:lstStyle/>
+          <a:p>
+            <a:pPr algn="ctr"/>
+            <a:r>
+              <a:rPr sz="700" b="0">
+                <a:solidFill>
+                  <a:srgbClr val="0C6A87"/>
+                </a:solidFill>
+                <a:latin typeface="Open Sans"/>
+              </a:rPr>
+              <a:t>p1c0</a:t>
+            </a:r>
+          </a:p>
+        </p:txBody>
+      </p:sp>
+      <p:sp>
+        <p:nvSpPr>
+          <p:cNvPr id="31" name="Rectangle 30"/>
+          <p:cNvSpPr/>
+          <p:nvPr/>
+        </p:nvSpPr>
+        <p:spPr>
+          <a:xfrm>
+            <a:off x="3172968" y="2331720"/>
+            <a:ext cx="283464" cy="329184"/>
+          </a:xfrm>
+          <a:prstGeom prst="rect">
+            <a:avLst/>
+          </a:prstGeom>
+          <a:solidFill>
+            <a:srgbClr val="FFFFFF"/>
+          </a:solidFill>
+          <a:ln w="9525">
+            <a:solidFill>
+              <a:srgbClr val="B7731A"/>
+            </a:solidFill>
+          </a:ln>
+          <a:effectLst/>
+        </p:spPr>
+        <p:style>
+          <a:lnRef idx="1">
+            <a:schemeClr val="accent1"/>
+          </a:lnRef>
+          <a:fillRef idx="3">
+            <a:schemeClr val="accent1"/>
+          </a:fillRef>
+          <a:effectRef idx="2">
+            <a:schemeClr val="accent1"/>
+          </a:effectRef>
+          <a:fontRef idx="minor">
+            <a:schemeClr val="lt1"/>
+          </a:fontRef>
+        </p:style>
+        <p:txBody>
+          <a:bodyPr rtlCol="0" anchor="ctr" lIns="0" rIns="0" tIns="0" bIns="0"/>
+          <a:lstStyle/>
+          <a:p>
+            <a:pPr algn="ctr"/>
+            <a:r>
+              <a:rPr sz="700" b="0">
+                <a:solidFill>
+                  <a:srgbClr val="B7731A"/>
+                </a:solidFill>
+                <a:latin typeface="Open Sans"/>
+              </a:rPr>
+              <a:t>p1c1</a:t>
+            </a:r>
+          </a:p>
+        </p:txBody>
+      </p:sp>
+      <p:sp>
+        <p:nvSpPr>
+          <p:cNvPr id="32" name="Rectangle 31"/>
+          <p:cNvSpPr/>
+          <p:nvPr/>
+        </p:nvSpPr>
+        <p:spPr>
+          <a:xfrm>
+            <a:off x="3474720" y="2331720"/>
+            <a:ext cx="283464" cy="329184"/>
+          </a:xfrm>
+          <a:prstGeom prst="rect">
+            <a:avLst/>
+          </a:prstGeom>
+          <a:solidFill>
+            <a:srgbClr val="FFFFFF"/>
+          </a:solidFill>
+          <a:ln w="9525">
+            <a:solidFill>
+              <a:srgbClr val="5B4B8A"/>
+            </a:solidFill>
+          </a:ln>
+          <a:effectLst/>
+        </p:spPr>
+        <p:style>
+          <a:lnRef idx="1">
+            <a:schemeClr val="accent1"/>
+          </a:lnRef>
+          <a:fillRef idx="3">
+            <a:schemeClr val="accent1"/>
+          </a:fillRef>
+          <a:effectRef idx="2">
+            <a:schemeClr val="accent1"/>
+          </a:effectRef>
+          <a:fontRef idx="minor">
+            <a:schemeClr val="lt1"/>
+          </a:fontRef>
+        </p:style>
+        <p:txBody>
+          <a:bodyPr rtlCol="0" anchor="ctr" lIns="0" rIns="0" tIns="0" bIns="0"/>
+          <a:lstStyle/>
+          <a:p>
+            <a:pPr algn="ctr"/>
+            <a:r>
+              <a:rPr sz="700" b="0">
+                <a:solidFill>
+                  <a:srgbClr val="5B4B8A"/>
+                </a:solidFill>
+                <a:latin typeface="Open Sans"/>
+              </a:rPr>
+              <a:t>p1c2</a:t>
+            </a:r>
+          </a:p>
+        </p:txBody>
+      </p:sp>
+      <p:sp>
+        <p:nvSpPr>
+          <p:cNvPr id="33" name="Rectangle 32"/>
+          <p:cNvSpPr/>
+          <p:nvPr/>
+        </p:nvSpPr>
+        <p:spPr>
+          <a:xfrm>
+            <a:off x="3776472" y="2331720"/>
+            <a:ext cx="283464" cy="329184"/>
+          </a:xfrm>
+          <a:prstGeom prst="rect">
+            <a:avLst/>
+          </a:prstGeom>
+          <a:solidFill>
+            <a:srgbClr val="FFFFFF"/>
+          </a:solidFill>
+          <a:ln w="9525">
+            <a:solidFill>
+              <a:srgbClr val="3D7A3A"/>
+            </a:solidFill>
+          </a:ln>
+          <a:effectLst/>
+        </p:spPr>
+        <p:style>
+          <a:lnRef idx="1">
+            <a:schemeClr val="accent1"/>
+          </a:lnRef>
+          <a:fillRef idx="3">
+            <a:schemeClr val="accent1"/>
+          </a:fillRef>
+          <a:effectRef idx="2">
+            <a:schemeClr val="accent1"/>
+          </a:effectRef>
+          <a:fontRef idx="minor">
+            <a:schemeClr val="lt1"/>
+          </a:fontRef>
+        </p:style>
+        <p:txBody>
+          <a:bodyPr rtlCol="0" anchor="ctr" lIns="0" rIns="0" tIns="0" bIns="0"/>
+          <a:lstStyle/>
+          <a:p>
+            <a:pPr algn="ctr"/>
+            <a:r>
+              <a:rPr sz="700" b="0">
+                <a:solidFill>
+                  <a:srgbClr val="3D7A3A"/>
+                </a:solidFill>
+                <a:latin typeface="Open Sans"/>
+              </a:rPr>
+              <a:t>p1c3</a:t>
+            </a:r>
+          </a:p>
+        </p:txBody>
+      </p:sp>
+      <p:sp>
+        <p:nvSpPr>
+          <p:cNvPr id="34" name="Rectangle 33"/>
+          <p:cNvSpPr/>
+          <p:nvPr/>
+        </p:nvSpPr>
+        <p:spPr>
+          <a:xfrm>
+            <a:off x="4078224" y="2331720"/>
+            <a:ext cx="283464" cy="329184"/>
+          </a:xfrm>
+          <a:prstGeom prst="rect">
+            <a:avLst/>
+          </a:prstGeom>
+          <a:solidFill>
+            <a:srgbClr val="FFFFFF"/>
+          </a:solidFill>
+          <a:ln w="9525">
+            <a:solidFill>
+              <a:srgbClr val="0C6A87"/>
+            </a:solidFill>
+          </a:ln>
+          <a:effectLst/>
+        </p:spPr>
+        <p:style>
+          <a:lnRef idx="1">
+            <a:schemeClr val="accent1"/>
+          </a:lnRef>
+          <a:fillRef idx="3">
+            <a:schemeClr val="accent1"/>
+          </a:fillRef>
+          <a:effectRef idx="2">
+            <a:schemeClr val="accent1"/>
+          </a:effectRef>
+          <a:fontRef idx="minor">
+            <a:schemeClr val="lt1"/>
+          </a:fontRef>
+        </p:style>
+        <p:txBody>
+          <a:bodyPr rtlCol="0" anchor="ctr" lIns="0" rIns="0" tIns="0" bIns="0"/>
+          <a:lstStyle/>
+          <a:p>
+            <a:pPr algn="ctr"/>
+            <a:r>
+              <a:rPr sz="700" b="0">
+                <a:solidFill>
+                  <a:srgbClr val="0C6A87"/>
+                </a:solidFill>
+                <a:latin typeface="Open Sans"/>
+              </a:rPr>
+              <a:t>p1c4</a:t>
+            </a:r>
+          </a:p>
+        </p:txBody>
+      </p:sp>
+      <p:sp>
+        <p:nvSpPr>
+          <p:cNvPr id="35" name="Rectangle 34"/>
+          <p:cNvSpPr/>
+          <p:nvPr/>
+        </p:nvSpPr>
+        <p:spPr>
+          <a:xfrm>
+            <a:off x="4379976" y="2331720"/>
+            <a:ext cx="283464" cy="329184"/>
+          </a:xfrm>
+          <a:prstGeom prst="rect">
+            <a:avLst/>
+          </a:prstGeom>
+          <a:solidFill>
+            <a:srgbClr val="FFFFFF"/>
+          </a:solidFill>
+          <a:ln w="9525">
+            <a:solidFill>
+              <a:srgbClr val="B7731A"/>
+            </a:solidFill>
+          </a:ln>
+          <a:effectLst/>
+        </p:spPr>
+        <p:style>
+          <a:lnRef idx="1">
+            <a:schemeClr val="accent1"/>
+          </a:lnRef>
+          <a:fillRef idx="3">
+            <a:schemeClr val="accent1"/>
+          </a:fillRef>
+          <a:effectRef idx="2">
+            <a:schemeClr val="accent1"/>
+          </a:effectRef>
+          <a:fontRef idx="minor">
+            <a:schemeClr val="lt1"/>
+          </a:fontRef>
+        </p:style>
+        <p:txBody>
+          <a:bodyPr rtlCol="0" anchor="ctr" lIns="0" rIns="0" tIns="0" bIns="0"/>
+          <a:lstStyle/>
+          <a:p>
+            <a:pPr algn="ctr"/>
+            <a:r>
+              <a:rPr sz="700" b="0">
+                <a:solidFill>
+                  <a:srgbClr val="B7731A"/>
+                </a:solidFill>
+                <a:latin typeface="Open Sans"/>
+              </a:rPr>
+              <a:t>p1c5</a:t>
+            </a:r>
+          </a:p>
+        </p:txBody>
+      </p:sp>
+      <p:sp>
+        <p:nvSpPr>
+          <p:cNvPr id="36" name="Rectangle 35"/>
+          <p:cNvSpPr/>
+          <p:nvPr/>
+        </p:nvSpPr>
+        <p:spPr>
+          <a:xfrm>
+            <a:off x="4681728" y="2331720"/>
+            <a:ext cx="283464" cy="329184"/>
+          </a:xfrm>
+          <a:prstGeom prst="rect">
+            <a:avLst/>
+          </a:prstGeom>
+          <a:solidFill>
+            <a:srgbClr val="FFFFFF"/>
+          </a:solidFill>
+          <a:ln w="9525">
+            <a:solidFill>
+              <a:srgbClr val="5B4B8A"/>
+            </a:solidFill>
+          </a:ln>
+          <a:effectLst/>
+        </p:spPr>
+        <p:style>
+          <a:lnRef idx="1">
+            <a:schemeClr val="accent1"/>
+          </a:lnRef>
+          <a:fillRef idx="3">
+            <a:schemeClr val="accent1"/>
+          </a:fillRef>
+          <a:effectRef idx="2">
+            <a:schemeClr val="accent1"/>
+          </a:effectRef>
+          <a:fontRef idx="minor">
+            <a:schemeClr val="lt1"/>
+          </a:fontRef>
+        </p:style>
+        <p:txBody>
+          <a:bodyPr rtlCol="0" anchor="ctr" lIns="0" rIns="0" tIns="0" bIns="0"/>
+          <a:lstStyle/>
+          <a:p>
+            <a:pPr algn="ctr"/>
+            <a:r>
+              <a:rPr sz="700" b="0">
+                <a:solidFill>
+                  <a:srgbClr val="5B4B8A"/>
+                </a:solidFill>
+                <a:latin typeface="Open Sans"/>
+              </a:rPr>
+              <a:t>p1c6</a:t>
+            </a:r>
+          </a:p>
+        </p:txBody>
+      </p:sp>
+      <p:sp>
+        <p:nvSpPr>
+          <p:cNvPr id="37" name="Rectangle 36"/>
+          <p:cNvSpPr/>
+          <p:nvPr/>
+        </p:nvSpPr>
+        <p:spPr>
+          <a:xfrm>
+            <a:off x="4983480" y="2331720"/>
+            <a:ext cx="283464" cy="329184"/>
+          </a:xfrm>
+          <a:prstGeom prst="rect">
+            <a:avLst/>
+          </a:prstGeom>
+          <a:solidFill>
+            <a:srgbClr val="FFFFFF"/>
+          </a:solidFill>
+          <a:ln w="9525">
+            <a:solidFill>
+              <a:srgbClr val="3D7A3A"/>
+            </a:solidFill>
+          </a:ln>
+          <a:effectLst/>
+        </p:spPr>
+        <p:style>
+          <a:lnRef idx="1">
+            <a:schemeClr val="accent1"/>
+          </a:lnRef>
+          <a:fillRef idx="3">
+            <a:schemeClr val="accent1"/>
+          </a:fillRef>
+          <a:effectRef idx="2">
+            <a:schemeClr val="accent1"/>
+          </a:effectRef>
+          <a:fontRef idx="minor">
+            <a:schemeClr val="lt1"/>
+          </a:fontRef>
+        </p:style>
+        <p:txBody>
+          <a:bodyPr rtlCol="0" anchor="ctr" lIns="0" rIns="0" tIns="0" bIns="0"/>
+          <a:lstStyle/>
+          <a:p>
+            <a:pPr algn="ctr"/>
+            <a:r>
+              <a:rPr sz="700" b="0">
+                <a:solidFill>
+                  <a:srgbClr val="3D7A3A"/>
+                </a:solidFill>
+                <a:latin typeface="Open Sans"/>
+              </a:rPr>
+              <a:t>p1c7</a:t>
+            </a:r>
+          </a:p>
+        </p:txBody>
+      </p:sp>
+      <p:sp>
+        <p:nvSpPr>
+          <p:cNvPr id="38" name="Rectangle 37"/>
+          <p:cNvSpPr/>
+          <p:nvPr/>
+        </p:nvSpPr>
+        <p:spPr>
+          <a:xfrm>
+            <a:off x="438912" y="2304288"/>
+            <a:ext cx="2414016" cy="384048"/>
+          </a:xfrm>
+          <a:prstGeom prst="rect">
+            <a:avLst/>
+          </a:prstGeom>
+          <a:noFill/>
+          <a:ln w="25400">
+            <a:solidFill>
+              <a:srgbClr val="BB0027"/>
+            </a:solidFill>
+          </a:ln>
+          <a:effectLst/>
+        </p:spPr>
+        <p:style>
+          <a:lnRef idx="1">
+            <a:schemeClr val="accent1"/>
+          </a:lnRef>
+          <a:fillRef idx="3">
+            <a:schemeClr val="accent1"/>
+          </a:fillRef>
+          <a:effectRef idx="2">
+            <a:schemeClr val="accent1"/>
+          </a:effectRef>
+          <a:fontRef idx="minor">
+            <a:schemeClr val="lt1"/>
+          </a:fontRef>
+        </p:style>
+        <p:txBody>
+          <a:bodyPr rtlCol="0" anchor="ctr"/>
+          <a:lstStyle/>
+          <a:p>
+            <a:pPr algn="ctr"/>
+          </a:p>
+        </p:txBody>
+      </p:sp>
+      <p:sp>
+        <p:nvSpPr>
+          <p:cNvPr id="39" name="TextBox 38"/>
+          <p:cNvSpPr txBox="1"/>
+          <p:nvPr/>
+        </p:nvSpPr>
+        <p:spPr>
+          <a:xfrm>
+            <a:off x="457200" y="2697480"/>
+            <a:ext cx="5120640" cy="274320"/>
+          </a:xfrm>
+          <a:prstGeom prst="rect">
+            <a:avLst/>
+          </a:prstGeom>
+          <a:noFill/>
+        </p:spPr>
+        <p:txBody>
+          <a:bodyPr wrap="square" lIns="0" rIns="0" tIns="0" bIns="0" anchor="t">
+            <a:spAutoFit/>
+          </a:bodyPr>
+          <a:lstStyle/>
+          <a:p>
+            <a:pPr algn="l"/>
+            <a:r>
+              <a:rPr sz="1000" b="0" i="0">
+                <a:solidFill>
+                  <a:srgbClr val="BB0027"/>
+                </a:solidFill>
+                <a:latin typeface="Open Sans"/>
+              </a:rPr>
+              <a:t>8 contiguous floats = 32 bytes = one _mm256_load_ps = one YMM register</a:t>
+            </a:r>
+          </a:p>
+        </p:txBody>
+      </p:sp>
+      <p:sp>
+        <p:nvSpPr>
+          <p:cNvPr id="40" name="w-card"/>
+          <p:cNvSpPr/>
+          <p:nvPr/>
+        </p:nvSpPr>
+        <p:spPr>
+          <a:xfrm>
+            <a:off x="457200" y="3108960"/>
+            <a:ext cx="4846320" cy="1051560"/>
           </a:xfrm>
           <a:prstGeom prst="roundRect">
             <a:avLst>
@@ -12429,14 +15252,14 @@
       </p:sp>
       <p:sp>
         <p:nvSpPr>
-          <p:cNvPr id="4" name="TextBox 3"/>
+          <p:cNvPr id="41" name="TextBox 40"/>
           <p:cNvSpPr txBox="1"/>
           <p:nvPr/>
         </p:nvSpPr>
         <p:spPr>
           <a:xfrm>
-            <a:off x="566928" y="1069848"/>
-            <a:ext cx="3749039" cy="228600"/>
+            <a:off x="566928" y="3172968"/>
+            <a:ext cx="4663440" cy="256032"/>
           </a:xfrm>
           <a:prstGeom prst="rect">
             <a:avLst/>
@@ -12457,21 +15280,21 @@
                 </a:solidFill>
                 <a:latin typeface="Open Sans"/>
               </a:rPr>
-              <a:t>Machine and code</a:t>
-            </a:r>
-          </a:p>
-        </p:txBody>
-      </p:sp>
-      <p:sp>
-        <p:nvSpPr>
-          <p:cNvPr id="5" name="TextBox 4"/>
+              <a:t>Weights, packed once offline: [K/8][C/8][3][3][8 in][8 out]</a:t>
+            </a:r>
+          </a:p>
+        </p:txBody>
+      </p:sp>
+      <p:sp>
+        <p:nvSpPr>
+          <p:cNvPr id="42" name="TextBox 41"/>
           <p:cNvSpPr txBox="1"/>
           <p:nvPr/>
         </p:nvSpPr>
         <p:spPr>
           <a:xfrm>
-            <a:off x="566928" y="1307592"/>
-            <a:ext cx="3794760" cy="411480"/>
+            <a:off x="566928" y="3447288"/>
+            <a:ext cx="4663440" cy="685800"/>
           </a:xfrm>
           <a:prstGeom prst="rect">
             <a:avLst/>
@@ -12492,32 +15315,76 @@
                 </a:solidFill>
                 <a:latin typeface="Open Sans"/>
               </a:rPr>
-              <a:t>ece028, Xeon E5-2640 v4, 1 core (taskset); C++ with AVX2 intrinsics only, GCC 8.5 -O3</a:t>
-            </a:r>
-          </a:p>
-        </p:txBody>
-      </p:sp>
-      <p:sp>
-        <p:nvSpPr>
-          <p:cNvPr id="6" name="assume-1"/>
+              <a:t>For one input channel and one tap, the 8 output-channel weights are contiguous: one aligned load is w0 or w1. The loop walks the array front to back. BatchNorm is already folded into weights and bias.</a:t>
+            </a:r>
+          </a:p>
+        </p:txBody>
+      </p:sp>
+      <p:sp>
+        <p:nvSpPr>
+          <p:cNvPr id="43" name="TextBox 42"/>
+          <p:cNvSpPr txBox="1"/>
+          <p:nvPr/>
+        </p:nvSpPr>
+        <p:spPr>
+          <a:xfrm>
+            <a:off x="5623560" y="960120"/>
+            <a:ext cx="3108960" cy="274320"/>
+          </a:xfrm>
+          <a:prstGeom prst="rect">
+            <a:avLst/>
+          </a:prstGeom>
+          <a:noFill/>
+        </p:spPr>
+        <p:txBody>
+          <a:bodyPr wrap="square" lIns="0" rIns="0" tIns="0" bIns="0" anchor="t">
+            <a:spAutoFit/>
+          </a:bodyPr>
+          <a:lstStyle/>
+          <a:p>
+            <a:pPr algn="l"/>
+            <a:r>
+              <a:rPr sz="1150" b="1" i="0">
+                <a:solidFill>
+                  <a:srgbClr val="1B2630"/>
+                </a:solidFill>
+                <a:latin typeface="Open Sans"/>
+              </a:rPr>
+              <a:t>Zero halo: </a:t>
+            </a:r>
+            <a:r>
+              <a:rPr sz="1150" b="0" i="0">
+                <a:solidFill>
+                  <a:srgbClr val="5A6875"/>
+                </a:solidFill>
+                <a:latin typeface="Open Sans"/>
+              </a:rPr>
+              <a:t>padding stored</a:t>
+            </a:r>
+          </a:p>
+        </p:txBody>
+      </p:sp>
+      <p:sp>
+        <p:nvSpPr>
+          <p:cNvPr id="44" name="Rectangle 43"/>
           <p:cNvSpPr/>
           <p:nvPr/>
         </p:nvSpPr>
         <p:spPr>
           <a:xfrm>
-            <a:off x="4617720" y="1005840"/>
-            <a:ext cx="4023360" cy="713232"/>
-          </a:xfrm>
-          <a:prstGeom prst="roundRect">
-            <a:avLst>
-              <a:gd name="adj" fmla="val 8000"/>
-            </a:avLst>
+            <a:off x="5715000" y="1280160"/>
+            <a:ext cx="301751" cy="301751"/>
+          </a:xfrm>
+          <a:prstGeom prst="rect">
+            <a:avLst/>
           </a:prstGeom>
           <a:solidFill>
-            <a:srgbClr val="F1F3F5"/>
+            <a:srgbClr val="E6EBEE"/>
           </a:solidFill>
-          <a:ln>
-            <a:noFill/>
+          <a:ln w="25400">
+            <a:solidFill>
+              <a:srgbClr val="B7731A"/>
+            </a:solidFill>
           </a:ln>
           <a:effectLst/>
         </p:spPr>
@@ -12536,104 +15403,43 @@
           </a:fontRef>
         </p:style>
         <p:txBody>
-          <a:bodyPr rtlCol="0" anchor="ctr"/>
+          <a:bodyPr rtlCol="0" anchor="ctr" lIns="0" rIns="0" tIns="0" bIns="0"/>
           <a:lstStyle/>
           <a:p>
             <a:pPr algn="ctr"/>
-          </a:p>
-        </p:txBody>
-      </p:sp>
-      <p:sp>
-        <p:nvSpPr>
-          <p:cNvPr id="7" name="TextBox 6"/>
-          <p:cNvSpPr txBox="1"/>
-          <p:nvPr/>
-        </p:nvSpPr>
-        <p:spPr>
-          <a:xfrm>
-            <a:off x="4727448" y="1069848"/>
-            <a:ext cx="3749039" cy="228600"/>
-          </a:xfrm>
-          <a:prstGeom prst="rect">
-            <a:avLst/>
-          </a:prstGeom>
-          <a:noFill/>
-        </p:spPr>
-        <p:txBody>
-          <a:bodyPr wrap="square" lIns="0" rIns="0" tIns="0" bIns="0" anchor="t">
-            <a:spAutoFit/>
-          </a:bodyPr>
-          <a:lstStyle/>
-          <a:p>
-            <a:pPr algn="l"/>
-            <a:r>
-              <a:rPr sz="1150" b="1" i="0">
-                <a:solidFill>
-                  <a:srgbClr val="1B2630"/>
-                </a:solidFill>
-                <a:latin typeface="Open Sans"/>
-              </a:rPr>
-              <a:t>Peak</a:t>
-            </a:r>
-          </a:p>
-        </p:txBody>
-      </p:sp>
-      <p:sp>
-        <p:nvSpPr>
-          <p:cNvPr id="8" name="TextBox 7"/>
-          <p:cNvSpPr txBox="1"/>
-          <p:nvPr/>
-        </p:nvSpPr>
-        <p:spPr>
-          <a:xfrm>
-            <a:off x="4727448" y="1307592"/>
-            <a:ext cx="3794760" cy="411480"/>
-          </a:xfrm>
-          <a:prstGeom prst="rect">
-            <a:avLst/>
-          </a:prstGeom>
-          <a:noFill/>
-        </p:spPr>
-        <p:txBody>
-          <a:bodyPr wrap="square" lIns="0" rIns="0" tIns="0" bIns="0" anchor="t">
-            <a:spAutoFit/>
-          </a:bodyPr>
-          <a:lstStyle/>
-          <a:p>
-            <a:pPr algn="l"/>
-            <a:r>
-              <a:rPr sz="950" b="0" i="0">
-                <a:solidFill>
-                  <a:srgbClr val="5A6875"/>
-                </a:solidFill>
-                <a:latin typeface="Open Sans"/>
-              </a:rPr>
-              <a:t>2 FMA units × 8 FP32 lanes × 2 FLOPs = 32 FLOPs/cycle per core (AVX2, no AVX-512)</a:t>
-            </a:r>
-          </a:p>
-        </p:txBody>
-      </p:sp>
-      <p:sp>
-        <p:nvSpPr>
-          <p:cNvPr id="9" name="assume-2"/>
+            <a:r>
+              <a:rPr sz="800" b="0">
+                <a:solidFill>
+                  <a:srgbClr val="B7731A"/>
+                </a:solidFill>
+                <a:latin typeface="Open Sans"/>
+              </a:rPr>
+              <a:t>0</a:t>
+            </a:r>
+          </a:p>
+        </p:txBody>
+      </p:sp>
+      <p:sp>
+        <p:nvSpPr>
+          <p:cNvPr id="45" name="Rectangle 44"/>
           <p:cNvSpPr/>
           <p:nvPr/>
         </p:nvSpPr>
         <p:spPr>
           <a:xfrm>
-            <a:off x="457200" y="1810512"/>
-            <a:ext cx="4023360" cy="713232"/>
-          </a:xfrm>
-          <a:prstGeom prst="roundRect">
-            <a:avLst>
-              <a:gd name="adj" fmla="val 8000"/>
-            </a:avLst>
+            <a:off x="6044184" y="1280160"/>
+            <a:ext cx="301751" cy="301751"/>
+          </a:xfrm>
+          <a:prstGeom prst="rect">
+            <a:avLst/>
           </a:prstGeom>
           <a:solidFill>
-            <a:srgbClr val="F1F3F5"/>
+            <a:srgbClr val="E6EBEE"/>
           </a:solidFill>
-          <a:ln>
-            <a:noFill/>
+          <a:ln w="25400">
+            <a:solidFill>
+              <a:srgbClr val="B7731A"/>
+            </a:solidFill>
           </a:ln>
           <a:effectLst/>
         </p:spPr>
@@ -12652,104 +15458,43 @@
           </a:fontRef>
         </p:style>
         <p:txBody>
-          <a:bodyPr rtlCol="0" anchor="ctr"/>
+          <a:bodyPr rtlCol="0" anchor="ctr" lIns="0" rIns="0" tIns="0" bIns="0"/>
           <a:lstStyle/>
           <a:p>
             <a:pPr algn="ctr"/>
-          </a:p>
-        </p:txBody>
-      </p:sp>
-      <p:sp>
-        <p:nvSpPr>
-          <p:cNvPr id="10" name="TextBox 9"/>
-          <p:cNvSpPr txBox="1"/>
-          <p:nvPr/>
-        </p:nvSpPr>
-        <p:spPr>
-          <a:xfrm>
-            <a:off x="566928" y="1874519"/>
-            <a:ext cx="3749039" cy="228600"/>
-          </a:xfrm>
-          <a:prstGeom prst="rect">
-            <a:avLst/>
-          </a:prstGeom>
-          <a:noFill/>
-        </p:spPr>
-        <p:txBody>
-          <a:bodyPr wrap="square" lIns="0" rIns="0" tIns="0" bIns="0" anchor="t">
-            <a:spAutoFit/>
-          </a:bodyPr>
-          <a:lstStyle/>
-          <a:p>
-            <a:pPr algn="l"/>
-            <a:r>
-              <a:rPr sz="1150" b="1" i="0">
-                <a:solidFill>
-                  <a:srgbClr val="BB0027"/>
-                </a:solidFill>
-                <a:latin typeface="Open Sans"/>
-              </a:rPr>
-              <a:t>Cycles</a:t>
-            </a:r>
-          </a:p>
-        </p:txBody>
-      </p:sp>
-      <p:sp>
-        <p:nvSpPr>
-          <p:cNvPr id="11" name="TextBox 10"/>
-          <p:cNvSpPr txBox="1"/>
-          <p:nvPr/>
-        </p:nvSpPr>
-        <p:spPr>
-          <a:xfrm>
-            <a:off x="566928" y="2112264"/>
-            <a:ext cx="3794760" cy="411480"/>
-          </a:xfrm>
-          <a:prstGeom prst="rect">
-            <a:avLst/>
-          </a:prstGeom>
-          <a:noFill/>
-        </p:spPr>
-        <p:txBody>
-          <a:bodyPr wrap="square" lIns="0" rIns="0" tIns="0" bIns="0" anchor="t">
-            <a:spAutoFit/>
-          </a:bodyPr>
-          <a:lstStyle/>
-          <a:p>
-            <a:pPr algn="l"/>
-            <a:r>
-              <a:rPr sz="950" b="0" i="0">
-                <a:solidFill>
-                  <a:srgbClr val="5A6875"/>
-                </a:solidFill>
-                <a:latin typeface="Open Sans"/>
-              </a:rPr>
-              <a:t>rdtsc ticks (fixed 2.4 GHz base) × 3.4 / 2.4 = cycles at max turbo, as in A2: can only understate</a:t>
-            </a:r>
-          </a:p>
-        </p:txBody>
-      </p:sp>
-      <p:sp>
-        <p:nvSpPr>
-          <p:cNvPr id="12" name="assume-3"/>
+            <a:r>
+              <a:rPr sz="800" b="0">
+                <a:solidFill>
+                  <a:srgbClr val="B7731A"/>
+                </a:solidFill>
+                <a:latin typeface="Open Sans"/>
+              </a:rPr>
+              <a:t>0</a:t>
+            </a:r>
+          </a:p>
+        </p:txBody>
+      </p:sp>
+      <p:sp>
+        <p:nvSpPr>
+          <p:cNvPr id="46" name="Rectangle 45"/>
           <p:cNvSpPr/>
           <p:nvPr/>
         </p:nvSpPr>
         <p:spPr>
           <a:xfrm>
-            <a:off x="4617720" y="1810512"/>
-            <a:ext cx="4023360" cy="713232"/>
-          </a:xfrm>
-          <a:prstGeom prst="roundRect">
-            <a:avLst>
-              <a:gd name="adj" fmla="val 8000"/>
-            </a:avLst>
+            <a:off x="6373368" y="1280160"/>
+            <a:ext cx="301751" cy="301751"/>
+          </a:xfrm>
+          <a:prstGeom prst="rect">
+            <a:avLst/>
           </a:prstGeom>
           <a:solidFill>
-            <a:srgbClr val="F1F3F5"/>
+            <a:srgbClr val="E6EBEE"/>
           </a:solidFill>
-          <a:ln>
-            <a:noFill/>
+          <a:ln w="25400">
+            <a:solidFill>
+              <a:srgbClr val="B7731A"/>
+            </a:solidFill>
           </a:ln>
           <a:effectLst/>
         </p:spPr>
@@ -12768,104 +15513,43 @@
           </a:fontRef>
         </p:style>
         <p:txBody>
-          <a:bodyPr rtlCol="0" anchor="ctr"/>
+          <a:bodyPr rtlCol="0" anchor="ctr" lIns="0" rIns="0" tIns="0" bIns="0"/>
           <a:lstStyle/>
           <a:p>
             <a:pPr algn="ctr"/>
-          </a:p>
-        </p:txBody>
-      </p:sp>
-      <p:sp>
-        <p:nvSpPr>
-          <p:cNvPr id="13" name="TextBox 12"/>
-          <p:cNvSpPr txBox="1"/>
-          <p:nvPr/>
-        </p:nvSpPr>
-        <p:spPr>
-          <a:xfrm>
-            <a:off x="4727448" y="1874519"/>
-            <a:ext cx="3749039" cy="228600"/>
-          </a:xfrm>
-          <a:prstGeom prst="rect">
-            <a:avLst/>
-          </a:prstGeom>
-          <a:noFill/>
-        </p:spPr>
-        <p:txBody>
-          <a:bodyPr wrap="square" lIns="0" rIns="0" tIns="0" bIns="0" anchor="t">
-            <a:spAutoFit/>
-          </a:bodyPr>
-          <a:lstStyle/>
-          <a:p>
-            <a:pPr algn="l"/>
-            <a:r>
-              <a:rPr sz="1150" b="1" i="0">
-                <a:solidFill>
-                  <a:srgbClr val="1B2630"/>
-                </a:solidFill>
-                <a:latin typeface="Open Sans"/>
-              </a:rPr>
-              <a:t>FLOPs</a:t>
-            </a:r>
-          </a:p>
-        </p:txBody>
-      </p:sp>
-      <p:sp>
-        <p:nvSpPr>
-          <p:cNvPr id="14" name="TextBox 13"/>
-          <p:cNvSpPr txBox="1"/>
-          <p:nvPr/>
-        </p:nvSpPr>
-        <p:spPr>
-          <a:xfrm>
-            <a:off x="4727448" y="2112264"/>
-            <a:ext cx="3794760" cy="411480"/>
-          </a:xfrm>
-          <a:prstGeom prst="rect">
-            <a:avLst/>
-          </a:prstGeom>
-          <a:noFill/>
-        </p:spPr>
-        <p:txBody>
-          <a:bodyPr wrap="square" lIns="0" rIns="0" tIns="0" bIns="0" anchor="t">
-            <a:spAutoFit/>
-          </a:bodyPr>
-          <a:lstStyle/>
-          <a:p>
-            <a:pPr algn="l"/>
-            <a:r>
-              <a:rPr sz="950" b="0" i="0">
-                <a:solidFill>
-                  <a:srgbClr val="5A6875"/>
-                </a:solidFill>
-                <a:latin typeface="Open Sans"/>
-              </a:rPr>
-              <a:t>2 × outputs × C × 9: only the convolution's multiply-adds; bias and SiLU count as zero</a:t>
-            </a:r>
-          </a:p>
-        </p:txBody>
-      </p:sp>
-      <p:sp>
-        <p:nvSpPr>
-          <p:cNvPr id="15" name="assume-4"/>
+            <a:r>
+              <a:rPr sz="800" b="0">
+                <a:solidFill>
+                  <a:srgbClr val="B7731A"/>
+                </a:solidFill>
+                <a:latin typeface="Open Sans"/>
+              </a:rPr>
+              <a:t>0</a:t>
+            </a:r>
+          </a:p>
+        </p:txBody>
+      </p:sp>
+      <p:sp>
+        <p:nvSpPr>
+          <p:cNvPr id="47" name="Rectangle 46"/>
           <p:cNvSpPr/>
           <p:nvPr/>
         </p:nvSpPr>
         <p:spPr>
           <a:xfrm>
-            <a:off x="457200" y="2615184"/>
-            <a:ext cx="4023360" cy="713232"/>
-          </a:xfrm>
-          <a:prstGeom prst="roundRect">
-            <a:avLst>
-              <a:gd name="adj" fmla="val 8000"/>
-            </a:avLst>
+            <a:off x="6702552" y="1280160"/>
+            <a:ext cx="301751" cy="301751"/>
+          </a:xfrm>
+          <a:prstGeom prst="rect">
+            <a:avLst/>
           </a:prstGeom>
           <a:solidFill>
-            <a:srgbClr val="F1F3F5"/>
+            <a:srgbClr val="E6EBEE"/>
           </a:solidFill>
-          <a:ln>
-            <a:noFill/>
+          <a:ln w="9525">
+            <a:solidFill>
+              <a:srgbClr val="6B7782"/>
+            </a:solidFill>
           </a:ln>
           <a:effectLst/>
         </p:spPr>
@@ -12884,104 +15568,43 @@
           </a:fontRef>
         </p:style>
         <p:txBody>
-          <a:bodyPr rtlCol="0" anchor="ctr"/>
+          <a:bodyPr rtlCol="0" anchor="ctr" lIns="0" rIns="0" tIns="0" bIns="0"/>
           <a:lstStyle/>
           <a:p>
             <a:pPr algn="ctr"/>
-          </a:p>
-        </p:txBody>
-      </p:sp>
-      <p:sp>
-        <p:nvSpPr>
-          <p:cNvPr id="16" name="TextBox 15"/>
-          <p:cNvSpPr txBox="1"/>
-          <p:nvPr/>
-        </p:nvSpPr>
-        <p:spPr>
-          <a:xfrm>
-            <a:off x="566928" y="2679192"/>
-            <a:ext cx="3749039" cy="228600"/>
-          </a:xfrm>
-          <a:prstGeom prst="rect">
-            <a:avLst/>
-          </a:prstGeom>
-          <a:noFill/>
-        </p:spPr>
-        <p:txBody>
-          <a:bodyPr wrap="square" lIns="0" rIns="0" tIns="0" bIns="0" anchor="t">
-            <a:spAutoFit/>
-          </a:bodyPr>
-          <a:lstStyle/>
-          <a:p>
-            <a:pPr algn="l"/>
-            <a:r>
-              <a:rPr sz="1150" b="1" i="0">
-                <a:solidFill>
-                  <a:srgbClr val="1B2630"/>
-                </a:solidFill>
-                <a:latin typeface="Open Sans"/>
-              </a:rPr>
-              <a:t>Microkernel alone</a:t>
-            </a:r>
-          </a:p>
-        </p:txBody>
-      </p:sp>
-      <p:sp>
-        <p:nvSpPr>
-          <p:cNvPr id="17" name="TextBox 16"/>
-          <p:cNvSpPr txBox="1"/>
-          <p:nvPr/>
-        </p:nvSpPr>
-        <p:spPr>
-          <a:xfrm>
-            <a:off x="566928" y="2916936"/>
-            <a:ext cx="3794760" cy="411480"/>
-          </a:xfrm>
-          <a:prstGeom prst="rect">
-            <a:avLst/>
-          </a:prstGeom>
-          <a:noFill/>
-        </p:spPr>
-        <p:txBody>
-          <a:bodyPr wrap="square" lIns="0" rIns="0" tIns="0" bIns="0" anchor="t">
-            <a:spAutoFit/>
-          </a:bodyPr>
-          <a:lstStyle/>
-          <a:p>
-            <a:pPr algn="l"/>
-            <a:r>
-              <a:rPr sz="950" b="0" i="0">
-                <a:solidFill>
-                  <a:srgbClr val="5A6875"/>
-                </a:solidFill>
-                <a:latin typeface="Open Sans"/>
-              </a:rPr>
-              <a:t>one tile of data reused (stays in L1/L2), 2 s warm-up, best of 3 runs, SiLU off</a:t>
-            </a:r>
-          </a:p>
-        </p:txBody>
-      </p:sp>
-      <p:sp>
-        <p:nvSpPr>
-          <p:cNvPr id="18" name="assume-5"/>
+            <a:r>
+              <a:rPr sz="800" b="0">
+                <a:solidFill>
+                  <a:srgbClr val="6B7782"/>
+                </a:solidFill>
+                <a:latin typeface="Open Sans"/>
+              </a:rPr>
+              <a:t>0</a:t>
+            </a:r>
+          </a:p>
+        </p:txBody>
+      </p:sp>
+      <p:sp>
+        <p:nvSpPr>
+          <p:cNvPr id="48" name="Rectangle 47"/>
           <p:cNvSpPr/>
           <p:nvPr/>
         </p:nvSpPr>
         <p:spPr>
           <a:xfrm>
-            <a:off x="4617720" y="2615184"/>
-            <a:ext cx="4023360" cy="713232"/>
-          </a:xfrm>
-          <a:prstGeom prst="roundRect">
-            <a:avLst>
-              <a:gd name="adj" fmla="val 8000"/>
-            </a:avLst>
+            <a:off x="7031736" y="1280160"/>
+            <a:ext cx="301751" cy="301751"/>
+          </a:xfrm>
+          <a:prstGeom prst="rect">
+            <a:avLst/>
           </a:prstGeom>
           <a:solidFill>
-            <a:srgbClr val="F1F3F5"/>
+            <a:srgbClr val="E6EBEE"/>
           </a:solidFill>
-          <a:ln>
-            <a:noFill/>
+          <a:ln w="9525">
+            <a:solidFill>
+              <a:srgbClr val="6B7782"/>
+            </a:solidFill>
           </a:ln>
           <a:effectLst/>
         </p:spPr>
@@ -13000,104 +15623,43 @@
           </a:fontRef>
         </p:style>
         <p:txBody>
-          <a:bodyPr rtlCol="0" anchor="ctr"/>
+          <a:bodyPr rtlCol="0" anchor="ctr" lIns="0" rIns="0" tIns="0" bIns="0"/>
           <a:lstStyle/>
           <a:p>
             <a:pPr algn="ctr"/>
-          </a:p>
-        </p:txBody>
-      </p:sp>
-      <p:sp>
-        <p:nvSpPr>
-          <p:cNvPr id="19" name="TextBox 18"/>
-          <p:cNvSpPr txBox="1"/>
-          <p:nvPr/>
-        </p:nvSpPr>
-        <p:spPr>
-          <a:xfrm>
-            <a:off x="4727448" y="2679192"/>
-            <a:ext cx="3749039" cy="228600"/>
-          </a:xfrm>
-          <a:prstGeom prst="rect">
-            <a:avLst/>
-          </a:prstGeom>
-          <a:noFill/>
-        </p:spPr>
-        <p:txBody>
-          <a:bodyPr wrap="square" lIns="0" rIns="0" tIns="0" bIns="0" anchor="t">
-            <a:spAutoFit/>
-          </a:bodyPr>
-          <a:lstStyle/>
-          <a:p>
-            <a:pPr algn="l"/>
-            <a:r>
-              <a:rPr sz="1150" b="1" i="0">
-                <a:solidFill>
-                  <a:srgbClr val="1B2630"/>
-                </a:solidFill>
-                <a:latin typeface="Open Sans"/>
-              </a:rPr>
-              <a:t>Full layers</a:t>
-            </a:r>
-          </a:p>
-        </p:txBody>
-      </p:sp>
-      <p:sp>
-        <p:nvSpPr>
-          <p:cNvPr id="20" name="TextBox 19"/>
-          <p:cNvSpPr txBox="1"/>
-          <p:nvPr/>
-        </p:nvSpPr>
-        <p:spPr>
-          <a:xfrm>
-            <a:off x="4727448" y="2916936"/>
-            <a:ext cx="3794760" cy="411480"/>
-          </a:xfrm>
-          <a:prstGeom prst="rect">
-            <a:avLst/>
-          </a:prstGeom>
-          <a:noFill/>
-        </p:spPr>
-        <p:txBody>
-          <a:bodyPr wrap="square" lIns="0" rIns="0" tIns="0" bIns="0" anchor="t">
-            <a:spAutoFit/>
-          </a:bodyPr>
-          <a:lstStyle/>
-          <a:p>
-            <a:pPr algn="l"/>
-            <a:r>
-              <a:rPr sz="950" b="0" i="0">
-                <a:solidFill>
-                  <a:srgbClr val="5A6875"/>
-                </a:solidFill>
-                <a:latin typeface="Open Sans"/>
-              </a:rPr>
-              <a:t>all 32 real YOLOv8n layers, batch 1, 640 × 640 image, FP32, SiLU on</a:t>
-            </a:r>
-          </a:p>
-        </p:txBody>
-      </p:sp>
-      <p:sp>
-        <p:nvSpPr>
-          <p:cNvPr id="21" name="assume-6"/>
+            <a:r>
+              <a:rPr sz="800" b="0">
+                <a:solidFill>
+                  <a:srgbClr val="6B7782"/>
+                </a:solidFill>
+                <a:latin typeface="Open Sans"/>
+              </a:rPr>
+              <a:t>0</a:t>
+            </a:r>
+          </a:p>
+        </p:txBody>
+      </p:sp>
+      <p:sp>
+        <p:nvSpPr>
+          <p:cNvPr id="49" name="Rectangle 48"/>
           <p:cNvSpPr/>
           <p:nvPr/>
         </p:nvSpPr>
         <p:spPr>
           <a:xfrm>
-            <a:off x="457200" y="3419856"/>
-            <a:ext cx="4023360" cy="713232"/>
-          </a:xfrm>
-          <a:prstGeom prst="roundRect">
-            <a:avLst>
-              <a:gd name="adj" fmla="val 8000"/>
-            </a:avLst>
+            <a:off x="7360920" y="1280160"/>
+            <a:ext cx="301751" cy="301751"/>
+          </a:xfrm>
+          <a:prstGeom prst="rect">
+            <a:avLst/>
           </a:prstGeom>
           <a:solidFill>
-            <a:srgbClr val="F1F3F5"/>
+            <a:srgbClr val="E6EBEE"/>
           </a:solidFill>
-          <a:ln>
-            <a:noFill/>
+          <a:ln w="9525">
+            <a:solidFill>
+              <a:srgbClr val="6B7782"/>
+            </a:solidFill>
           </a:ln>
           <a:effectLst/>
         </p:spPr>
@@ -13116,104 +15678,43 @@
           </a:fontRef>
         </p:style>
         <p:txBody>
-          <a:bodyPr rtlCol="0" anchor="ctr"/>
+          <a:bodyPr rtlCol="0" anchor="ctr" lIns="0" rIns="0" tIns="0" bIns="0"/>
           <a:lstStyle/>
           <a:p>
             <a:pPr algn="ctr"/>
-          </a:p>
-        </p:txBody>
-      </p:sp>
-      <p:sp>
-        <p:nvSpPr>
-          <p:cNvPr id="22" name="TextBox 21"/>
-          <p:cNvSpPr txBox="1"/>
-          <p:nvPr/>
-        </p:nvSpPr>
-        <p:spPr>
-          <a:xfrm>
-            <a:off x="566928" y="3483864"/>
-            <a:ext cx="3749039" cy="228600"/>
-          </a:xfrm>
-          <a:prstGeom prst="rect">
-            <a:avLst/>
-          </a:prstGeom>
-          <a:noFill/>
-        </p:spPr>
-        <p:txBody>
-          <a:bodyPr wrap="square" lIns="0" rIns="0" tIns="0" bIns="0" anchor="t">
-            <a:spAutoFit/>
-          </a:bodyPr>
-          <a:lstStyle/>
-          <a:p>
-            <a:pPr algn="l"/>
-            <a:r>
-              <a:rPr sz="1150" b="1" i="0">
-                <a:solidFill>
-                  <a:srgbClr val="1B2630"/>
-                </a:solidFill>
-                <a:latin typeface="Open Sans"/>
-              </a:rPr>
-              <a:t>Correct</a:t>
-            </a:r>
-          </a:p>
-        </p:txBody>
-      </p:sp>
-      <p:sp>
-        <p:nvSpPr>
-          <p:cNvPr id="23" name="TextBox 22"/>
-          <p:cNvSpPr txBox="1"/>
-          <p:nvPr/>
-        </p:nvSpPr>
-        <p:spPr>
-          <a:xfrm>
-            <a:off x="566928" y="3721608"/>
-            <a:ext cx="3794760" cy="411480"/>
-          </a:xfrm>
-          <a:prstGeom prst="rect">
-            <a:avLst/>
-          </a:prstGeom>
-          <a:noFill/>
-        </p:spPr>
-        <p:txBody>
-          <a:bodyPr wrap="square" lIns="0" rIns="0" tIns="0" bIns="0" anchor="t">
-            <a:spAutoFit/>
-          </a:bodyPr>
-          <a:lstStyle/>
-          <a:p>
-            <a:pPr algn="l"/>
-            <a:r>
-              <a:rPr sz="950" b="0" i="0">
-                <a:solidFill>
-                  <a:srgbClr val="5A6875"/>
-                </a:solidFill>
-                <a:latin typeface="Open Sans"/>
-              </a:rPr>
-              <a:t>every result checked: max relative error ≤ 1e-4 vs a scalar reference / OpenCV's real outputs</a:t>
-            </a:r>
-          </a:p>
-        </p:txBody>
-      </p:sp>
-      <p:sp>
-        <p:nvSpPr>
-          <p:cNvPr id="24" name="assume-7"/>
+            <a:r>
+              <a:rPr sz="800" b="0">
+                <a:solidFill>
+                  <a:srgbClr val="6B7782"/>
+                </a:solidFill>
+                <a:latin typeface="Open Sans"/>
+              </a:rPr>
+              <a:t>0</a:t>
+            </a:r>
+          </a:p>
+        </p:txBody>
+      </p:sp>
+      <p:sp>
+        <p:nvSpPr>
+          <p:cNvPr id="50" name="Rectangle 49"/>
           <p:cNvSpPr/>
           <p:nvPr/>
         </p:nvSpPr>
         <p:spPr>
           <a:xfrm>
-            <a:off x="4617720" y="3419856"/>
-            <a:ext cx="4023360" cy="713232"/>
-          </a:xfrm>
-          <a:prstGeom prst="roundRect">
-            <a:avLst>
-              <a:gd name="adj" fmla="val 8000"/>
-            </a:avLst>
+            <a:off x="7690104" y="1280160"/>
+            <a:ext cx="301751" cy="301751"/>
+          </a:xfrm>
+          <a:prstGeom prst="rect">
+            <a:avLst/>
           </a:prstGeom>
           <a:solidFill>
-            <a:srgbClr val="F1F3F5"/>
+            <a:srgbClr val="E6EBEE"/>
           </a:solidFill>
-          <a:ln>
-            <a:noFill/>
+          <a:ln w="9525">
+            <a:solidFill>
+              <a:srgbClr val="6B7782"/>
+            </a:solidFill>
           </a:ln>
           <a:effectLst/>
         </p:spPr>
@@ -13232,23 +15733,2287 @@
           </a:fontRef>
         </p:style>
         <p:txBody>
-          <a:bodyPr rtlCol="0" anchor="ctr"/>
+          <a:bodyPr rtlCol="0" anchor="ctr" lIns="0" rIns="0" tIns="0" bIns="0"/>
           <a:lstStyle/>
           <a:p>
             <a:pPr algn="ctr"/>
-          </a:p>
-        </p:txBody>
-      </p:sp>
-      <p:sp>
-        <p:nvSpPr>
-          <p:cNvPr id="25" name="TextBox 24"/>
+            <a:r>
+              <a:rPr sz="800" b="0">
+                <a:solidFill>
+                  <a:srgbClr val="6B7782"/>
+                </a:solidFill>
+                <a:latin typeface="Open Sans"/>
+              </a:rPr>
+              <a:t>0</a:t>
+            </a:r>
+          </a:p>
+        </p:txBody>
+      </p:sp>
+      <p:sp>
+        <p:nvSpPr>
+          <p:cNvPr id="51" name="Rectangle 50"/>
+          <p:cNvSpPr/>
+          <p:nvPr/>
+        </p:nvSpPr>
+        <p:spPr>
+          <a:xfrm>
+            <a:off x="8019288" y="1280160"/>
+            <a:ext cx="301751" cy="301751"/>
+          </a:xfrm>
+          <a:prstGeom prst="rect">
+            <a:avLst/>
+          </a:prstGeom>
+          <a:solidFill>
+            <a:srgbClr val="E6EBEE"/>
+          </a:solidFill>
+          <a:ln w="9525">
+            <a:solidFill>
+              <a:srgbClr val="6B7782"/>
+            </a:solidFill>
+          </a:ln>
+          <a:effectLst/>
+        </p:spPr>
+        <p:style>
+          <a:lnRef idx="1">
+            <a:schemeClr val="accent1"/>
+          </a:lnRef>
+          <a:fillRef idx="3">
+            <a:schemeClr val="accent1"/>
+          </a:fillRef>
+          <a:effectRef idx="2">
+            <a:schemeClr val="accent1"/>
+          </a:effectRef>
+          <a:fontRef idx="minor">
+            <a:schemeClr val="lt1"/>
+          </a:fontRef>
+        </p:style>
+        <p:txBody>
+          <a:bodyPr rtlCol="0" anchor="ctr" lIns="0" rIns="0" tIns="0" bIns="0"/>
+          <a:lstStyle/>
+          <a:p>
+            <a:pPr algn="ctr"/>
+            <a:r>
+              <a:rPr sz="800" b="0">
+                <a:solidFill>
+                  <a:srgbClr val="6B7782"/>
+                </a:solidFill>
+                <a:latin typeface="Open Sans"/>
+              </a:rPr>
+              <a:t>0</a:t>
+            </a:r>
+          </a:p>
+        </p:txBody>
+      </p:sp>
+      <p:sp>
+        <p:nvSpPr>
+          <p:cNvPr id="52" name="Rectangle 51"/>
+          <p:cNvSpPr/>
+          <p:nvPr/>
+        </p:nvSpPr>
+        <p:spPr>
+          <a:xfrm>
+            <a:off x="5715000" y="1609343"/>
+            <a:ext cx="301751" cy="301751"/>
+          </a:xfrm>
+          <a:prstGeom prst="rect">
+            <a:avLst/>
+          </a:prstGeom>
+          <a:solidFill>
+            <a:srgbClr val="E6EBEE"/>
+          </a:solidFill>
+          <a:ln w="25400">
+            <a:solidFill>
+              <a:srgbClr val="B7731A"/>
+            </a:solidFill>
+          </a:ln>
+          <a:effectLst/>
+        </p:spPr>
+        <p:style>
+          <a:lnRef idx="1">
+            <a:schemeClr val="accent1"/>
+          </a:lnRef>
+          <a:fillRef idx="3">
+            <a:schemeClr val="accent1"/>
+          </a:fillRef>
+          <a:effectRef idx="2">
+            <a:schemeClr val="accent1"/>
+          </a:effectRef>
+          <a:fontRef idx="minor">
+            <a:schemeClr val="lt1"/>
+          </a:fontRef>
+        </p:style>
+        <p:txBody>
+          <a:bodyPr rtlCol="0" anchor="ctr" lIns="0" rIns="0" tIns="0" bIns="0"/>
+          <a:lstStyle/>
+          <a:p>
+            <a:pPr algn="ctr"/>
+            <a:r>
+              <a:rPr sz="800" b="0">
+                <a:solidFill>
+                  <a:srgbClr val="B7731A"/>
+                </a:solidFill>
+                <a:latin typeface="Open Sans"/>
+              </a:rPr>
+              <a:t>0</a:t>
+            </a:r>
+          </a:p>
+        </p:txBody>
+      </p:sp>
+      <p:sp>
+        <p:nvSpPr>
+          <p:cNvPr id="53" name="Rectangle 52"/>
+          <p:cNvSpPr/>
+          <p:nvPr/>
+        </p:nvSpPr>
+        <p:spPr>
+          <a:xfrm>
+            <a:off x="6044184" y="1609343"/>
+            <a:ext cx="301751" cy="301751"/>
+          </a:xfrm>
+          <a:prstGeom prst="rect">
+            <a:avLst/>
+          </a:prstGeom>
+          <a:solidFill>
+            <a:srgbClr val="D7EAF0"/>
+          </a:solidFill>
+          <a:ln w="25400">
+            <a:solidFill>
+              <a:srgbClr val="B7731A"/>
+            </a:solidFill>
+          </a:ln>
+          <a:effectLst/>
+        </p:spPr>
+        <p:style>
+          <a:lnRef idx="1">
+            <a:schemeClr val="accent1"/>
+          </a:lnRef>
+          <a:fillRef idx="3">
+            <a:schemeClr val="accent1"/>
+          </a:fillRef>
+          <a:effectRef idx="2">
+            <a:schemeClr val="accent1"/>
+          </a:effectRef>
+          <a:fontRef idx="minor">
+            <a:schemeClr val="lt1"/>
+          </a:fontRef>
+        </p:style>
+        <p:txBody>
+          <a:bodyPr rtlCol="0" anchor="ctr" lIns="0" rIns="0" tIns="0" bIns="0"/>
+          <a:lstStyle/>
+          <a:p>
+            <a:pPr algn="ctr"/>
+            <a:r>
+              <a:rPr sz="800" b="0">
+                <a:solidFill>
+                  <a:srgbClr val="B7731A"/>
+                </a:solidFill>
+                <a:latin typeface="Open Sans"/>
+              </a:rPr>
+              <a:t/>
+            </a:r>
+          </a:p>
+        </p:txBody>
+      </p:sp>
+      <p:sp>
+        <p:nvSpPr>
+          <p:cNvPr id="54" name="Rectangle 53"/>
+          <p:cNvSpPr/>
+          <p:nvPr/>
+        </p:nvSpPr>
+        <p:spPr>
+          <a:xfrm>
+            <a:off x="6373368" y="1609343"/>
+            <a:ext cx="301751" cy="301751"/>
+          </a:xfrm>
+          <a:prstGeom prst="rect">
+            <a:avLst/>
+          </a:prstGeom>
+          <a:solidFill>
+            <a:srgbClr val="D7EAF0"/>
+          </a:solidFill>
+          <a:ln w="25400">
+            <a:solidFill>
+              <a:srgbClr val="B7731A"/>
+            </a:solidFill>
+          </a:ln>
+          <a:effectLst/>
+        </p:spPr>
+        <p:style>
+          <a:lnRef idx="1">
+            <a:schemeClr val="accent1"/>
+          </a:lnRef>
+          <a:fillRef idx="3">
+            <a:schemeClr val="accent1"/>
+          </a:fillRef>
+          <a:effectRef idx="2">
+            <a:schemeClr val="accent1"/>
+          </a:effectRef>
+          <a:fontRef idx="minor">
+            <a:schemeClr val="lt1"/>
+          </a:fontRef>
+        </p:style>
+        <p:txBody>
+          <a:bodyPr rtlCol="0" anchor="ctr" lIns="0" rIns="0" tIns="0" bIns="0"/>
+          <a:lstStyle/>
+          <a:p>
+            <a:pPr algn="ctr"/>
+            <a:r>
+              <a:rPr sz="800" b="0">
+                <a:solidFill>
+                  <a:srgbClr val="B7731A"/>
+                </a:solidFill>
+                <a:latin typeface="Open Sans"/>
+              </a:rPr>
+              <a:t/>
+            </a:r>
+          </a:p>
+        </p:txBody>
+      </p:sp>
+      <p:sp>
+        <p:nvSpPr>
+          <p:cNvPr id="55" name="Rectangle 54"/>
+          <p:cNvSpPr/>
+          <p:nvPr/>
+        </p:nvSpPr>
+        <p:spPr>
+          <a:xfrm>
+            <a:off x="6702552" y="1609343"/>
+            <a:ext cx="301751" cy="301751"/>
+          </a:xfrm>
+          <a:prstGeom prst="rect">
+            <a:avLst/>
+          </a:prstGeom>
+          <a:solidFill>
+            <a:srgbClr val="D7EAF0"/>
+          </a:solidFill>
+          <a:ln w="9525">
+            <a:solidFill>
+              <a:srgbClr val="0C6A87"/>
+            </a:solidFill>
+          </a:ln>
+          <a:effectLst/>
+        </p:spPr>
+        <p:style>
+          <a:lnRef idx="1">
+            <a:schemeClr val="accent1"/>
+          </a:lnRef>
+          <a:fillRef idx="3">
+            <a:schemeClr val="accent1"/>
+          </a:fillRef>
+          <a:effectRef idx="2">
+            <a:schemeClr val="accent1"/>
+          </a:effectRef>
+          <a:fontRef idx="minor">
+            <a:schemeClr val="lt1"/>
+          </a:fontRef>
+        </p:style>
+        <p:txBody>
+          <a:bodyPr rtlCol="0" anchor="ctr" lIns="0" rIns="0" tIns="0" bIns="0"/>
+          <a:lstStyle/>
+          <a:p>
+            <a:pPr algn="ctr"/>
+            <a:r>
+              <a:rPr sz="800" b="0">
+                <a:solidFill>
+                  <a:srgbClr val="0C6A87"/>
+                </a:solidFill>
+                <a:latin typeface="Open Sans"/>
+              </a:rPr>
+              <a:t/>
+            </a:r>
+          </a:p>
+        </p:txBody>
+      </p:sp>
+      <p:sp>
+        <p:nvSpPr>
+          <p:cNvPr id="56" name="Rectangle 55"/>
+          <p:cNvSpPr/>
+          <p:nvPr/>
+        </p:nvSpPr>
+        <p:spPr>
+          <a:xfrm>
+            <a:off x="7031736" y="1609343"/>
+            <a:ext cx="301751" cy="301751"/>
+          </a:xfrm>
+          <a:prstGeom prst="rect">
+            <a:avLst/>
+          </a:prstGeom>
+          <a:solidFill>
+            <a:srgbClr val="D7EAF0"/>
+          </a:solidFill>
+          <a:ln w="9525">
+            <a:solidFill>
+              <a:srgbClr val="0C6A87"/>
+            </a:solidFill>
+          </a:ln>
+          <a:effectLst/>
+        </p:spPr>
+        <p:style>
+          <a:lnRef idx="1">
+            <a:schemeClr val="accent1"/>
+          </a:lnRef>
+          <a:fillRef idx="3">
+            <a:schemeClr val="accent1"/>
+          </a:fillRef>
+          <a:effectRef idx="2">
+            <a:schemeClr val="accent1"/>
+          </a:effectRef>
+          <a:fontRef idx="minor">
+            <a:schemeClr val="lt1"/>
+          </a:fontRef>
+        </p:style>
+        <p:txBody>
+          <a:bodyPr rtlCol="0" anchor="ctr" lIns="0" rIns="0" tIns="0" bIns="0"/>
+          <a:lstStyle/>
+          <a:p>
+            <a:pPr algn="ctr"/>
+            <a:r>
+              <a:rPr sz="800" b="0">
+                <a:solidFill>
+                  <a:srgbClr val="0C6A87"/>
+                </a:solidFill>
+                <a:latin typeface="Open Sans"/>
+              </a:rPr>
+              <a:t/>
+            </a:r>
+          </a:p>
+        </p:txBody>
+      </p:sp>
+      <p:sp>
+        <p:nvSpPr>
+          <p:cNvPr id="57" name="Rectangle 56"/>
+          <p:cNvSpPr/>
+          <p:nvPr/>
+        </p:nvSpPr>
+        <p:spPr>
+          <a:xfrm>
+            <a:off x="7360920" y="1609343"/>
+            <a:ext cx="301751" cy="301751"/>
+          </a:xfrm>
+          <a:prstGeom prst="rect">
+            <a:avLst/>
+          </a:prstGeom>
+          <a:solidFill>
+            <a:srgbClr val="D7EAF0"/>
+          </a:solidFill>
+          <a:ln w="9525">
+            <a:solidFill>
+              <a:srgbClr val="0C6A87"/>
+            </a:solidFill>
+          </a:ln>
+          <a:effectLst/>
+        </p:spPr>
+        <p:style>
+          <a:lnRef idx="1">
+            <a:schemeClr val="accent1"/>
+          </a:lnRef>
+          <a:fillRef idx="3">
+            <a:schemeClr val="accent1"/>
+          </a:fillRef>
+          <a:effectRef idx="2">
+            <a:schemeClr val="accent1"/>
+          </a:effectRef>
+          <a:fontRef idx="minor">
+            <a:schemeClr val="lt1"/>
+          </a:fontRef>
+        </p:style>
+        <p:txBody>
+          <a:bodyPr rtlCol="0" anchor="ctr" lIns="0" rIns="0" tIns="0" bIns="0"/>
+          <a:lstStyle/>
+          <a:p>
+            <a:pPr algn="ctr"/>
+            <a:r>
+              <a:rPr sz="800" b="0">
+                <a:solidFill>
+                  <a:srgbClr val="0C6A87"/>
+                </a:solidFill>
+                <a:latin typeface="Open Sans"/>
+              </a:rPr>
+              <a:t/>
+            </a:r>
+          </a:p>
+        </p:txBody>
+      </p:sp>
+      <p:sp>
+        <p:nvSpPr>
+          <p:cNvPr id="58" name="Rectangle 57"/>
+          <p:cNvSpPr/>
+          <p:nvPr/>
+        </p:nvSpPr>
+        <p:spPr>
+          <a:xfrm>
+            <a:off x="7690104" y="1609343"/>
+            <a:ext cx="301751" cy="301751"/>
+          </a:xfrm>
+          <a:prstGeom prst="rect">
+            <a:avLst/>
+          </a:prstGeom>
+          <a:solidFill>
+            <a:srgbClr val="D7EAF0"/>
+          </a:solidFill>
+          <a:ln w="9525">
+            <a:solidFill>
+              <a:srgbClr val="0C6A87"/>
+            </a:solidFill>
+          </a:ln>
+          <a:effectLst/>
+        </p:spPr>
+        <p:style>
+          <a:lnRef idx="1">
+            <a:schemeClr val="accent1"/>
+          </a:lnRef>
+          <a:fillRef idx="3">
+            <a:schemeClr val="accent1"/>
+          </a:fillRef>
+          <a:effectRef idx="2">
+            <a:schemeClr val="accent1"/>
+          </a:effectRef>
+          <a:fontRef idx="minor">
+            <a:schemeClr val="lt1"/>
+          </a:fontRef>
+        </p:style>
+        <p:txBody>
+          <a:bodyPr rtlCol="0" anchor="ctr" lIns="0" rIns="0" tIns="0" bIns="0"/>
+          <a:lstStyle/>
+          <a:p>
+            <a:pPr algn="ctr"/>
+            <a:r>
+              <a:rPr sz="800" b="0">
+                <a:solidFill>
+                  <a:srgbClr val="0C6A87"/>
+                </a:solidFill>
+                <a:latin typeface="Open Sans"/>
+              </a:rPr>
+              <a:t/>
+            </a:r>
+          </a:p>
+        </p:txBody>
+      </p:sp>
+      <p:sp>
+        <p:nvSpPr>
+          <p:cNvPr id="59" name="Rectangle 58"/>
+          <p:cNvSpPr/>
+          <p:nvPr/>
+        </p:nvSpPr>
+        <p:spPr>
+          <a:xfrm>
+            <a:off x="8019288" y="1609343"/>
+            <a:ext cx="301751" cy="301751"/>
+          </a:xfrm>
+          <a:prstGeom prst="rect">
+            <a:avLst/>
+          </a:prstGeom>
+          <a:solidFill>
+            <a:srgbClr val="E6EBEE"/>
+          </a:solidFill>
+          <a:ln w="9525">
+            <a:solidFill>
+              <a:srgbClr val="6B7782"/>
+            </a:solidFill>
+          </a:ln>
+          <a:effectLst/>
+        </p:spPr>
+        <p:style>
+          <a:lnRef idx="1">
+            <a:schemeClr val="accent1"/>
+          </a:lnRef>
+          <a:fillRef idx="3">
+            <a:schemeClr val="accent1"/>
+          </a:fillRef>
+          <a:effectRef idx="2">
+            <a:schemeClr val="accent1"/>
+          </a:effectRef>
+          <a:fontRef idx="minor">
+            <a:schemeClr val="lt1"/>
+          </a:fontRef>
+        </p:style>
+        <p:txBody>
+          <a:bodyPr rtlCol="0" anchor="ctr" lIns="0" rIns="0" tIns="0" bIns="0"/>
+          <a:lstStyle/>
+          <a:p>
+            <a:pPr algn="ctr"/>
+            <a:r>
+              <a:rPr sz="800" b="0">
+                <a:solidFill>
+                  <a:srgbClr val="6B7782"/>
+                </a:solidFill>
+                <a:latin typeface="Open Sans"/>
+              </a:rPr>
+              <a:t>0</a:t>
+            </a:r>
+          </a:p>
+        </p:txBody>
+      </p:sp>
+      <p:sp>
+        <p:nvSpPr>
+          <p:cNvPr id="60" name="Rectangle 59"/>
+          <p:cNvSpPr/>
+          <p:nvPr/>
+        </p:nvSpPr>
+        <p:spPr>
+          <a:xfrm>
+            <a:off x="5715000" y="1938528"/>
+            <a:ext cx="301751" cy="301751"/>
+          </a:xfrm>
+          <a:prstGeom prst="rect">
+            <a:avLst/>
+          </a:prstGeom>
+          <a:solidFill>
+            <a:srgbClr val="E6EBEE"/>
+          </a:solidFill>
+          <a:ln w="25400">
+            <a:solidFill>
+              <a:srgbClr val="B7731A"/>
+            </a:solidFill>
+          </a:ln>
+          <a:effectLst/>
+        </p:spPr>
+        <p:style>
+          <a:lnRef idx="1">
+            <a:schemeClr val="accent1"/>
+          </a:lnRef>
+          <a:fillRef idx="3">
+            <a:schemeClr val="accent1"/>
+          </a:fillRef>
+          <a:effectRef idx="2">
+            <a:schemeClr val="accent1"/>
+          </a:effectRef>
+          <a:fontRef idx="minor">
+            <a:schemeClr val="lt1"/>
+          </a:fontRef>
+        </p:style>
+        <p:txBody>
+          <a:bodyPr rtlCol="0" anchor="ctr" lIns="0" rIns="0" tIns="0" bIns="0"/>
+          <a:lstStyle/>
+          <a:p>
+            <a:pPr algn="ctr"/>
+            <a:r>
+              <a:rPr sz="800" b="0">
+                <a:solidFill>
+                  <a:srgbClr val="B7731A"/>
+                </a:solidFill>
+                <a:latin typeface="Open Sans"/>
+              </a:rPr>
+              <a:t>0</a:t>
+            </a:r>
+          </a:p>
+        </p:txBody>
+      </p:sp>
+      <p:sp>
+        <p:nvSpPr>
+          <p:cNvPr id="61" name="Rectangle 60"/>
+          <p:cNvSpPr/>
+          <p:nvPr/>
+        </p:nvSpPr>
+        <p:spPr>
+          <a:xfrm>
+            <a:off x="6044184" y="1938528"/>
+            <a:ext cx="301751" cy="301751"/>
+          </a:xfrm>
+          <a:prstGeom prst="rect">
+            <a:avLst/>
+          </a:prstGeom>
+          <a:solidFill>
+            <a:srgbClr val="D7EAF0"/>
+          </a:solidFill>
+          <a:ln w="25400">
+            <a:solidFill>
+              <a:srgbClr val="B7731A"/>
+            </a:solidFill>
+          </a:ln>
+          <a:effectLst/>
+        </p:spPr>
+        <p:style>
+          <a:lnRef idx="1">
+            <a:schemeClr val="accent1"/>
+          </a:lnRef>
+          <a:fillRef idx="3">
+            <a:schemeClr val="accent1"/>
+          </a:fillRef>
+          <a:effectRef idx="2">
+            <a:schemeClr val="accent1"/>
+          </a:effectRef>
+          <a:fontRef idx="minor">
+            <a:schemeClr val="lt1"/>
+          </a:fontRef>
+        </p:style>
+        <p:txBody>
+          <a:bodyPr rtlCol="0" anchor="ctr" lIns="0" rIns="0" tIns="0" bIns="0"/>
+          <a:lstStyle/>
+          <a:p>
+            <a:pPr algn="ctr"/>
+            <a:r>
+              <a:rPr sz="800" b="0">
+                <a:solidFill>
+                  <a:srgbClr val="B7731A"/>
+                </a:solidFill>
+                <a:latin typeface="Open Sans"/>
+              </a:rPr>
+              <a:t/>
+            </a:r>
+          </a:p>
+        </p:txBody>
+      </p:sp>
+      <p:sp>
+        <p:nvSpPr>
+          <p:cNvPr id="62" name="Rectangle 61"/>
+          <p:cNvSpPr/>
+          <p:nvPr/>
+        </p:nvSpPr>
+        <p:spPr>
+          <a:xfrm>
+            <a:off x="6373368" y="1938528"/>
+            <a:ext cx="301751" cy="301751"/>
+          </a:xfrm>
+          <a:prstGeom prst="rect">
+            <a:avLst/>
+          </a:prstGeom>
+          <a:solidFill>
+            <a:srgbClr val="D7EAF0"/>
+          </a:solidFill>
+          <a:ln w="25400">
+            <a:solidFill>
+              <a:srgbClr val="B7731A"/>
+            </a:solidFill>
+          </a:ln>
+          <a:effectLst/>
+        </p:spPr>
+        <p:style>
+          <a:lnRef idx="1">
+            <a:schemeClr val="accent1"/>
+          </a:lnRef>
+          <a:fillRef idx="3">
+            <a:schemeClr val="accent1"/>
+          </a:fillRef>
+          <a:effectRef idx="2">
+            <a:schemeClr val="accent1"/>
+          </a:effectRef>
+          <a:fontRef idx="minor">
+            <a:schemeClr val="lt1"/>
+          </a:fontRef>
+        </p:style>
+        <p:txBody>
+          <a:bodyPr rtlCol="0" anchor="ctr" lIns="0" rIns="0" tIns="0" bIns="0"/>
+          <a:lstStyle/>
+          <a:p>
+            <a:pPr algn="ctr"/>
+            <a:r>
+              <a:rPr sz="800" b="0">
+                <a:solidFill>
+                  <a:srgbClr val="B7731A"/>
+                </a:solidFill>
+                <a:latin typeface="Open Sans"/>
+              </a:rPr>
+              <a:t/>
+            </a:r>
+          </a:p>
+        </p:txBody>
+      </p:sp>
+      <p:sp>
+        <p:nvSpPr>
+          <p:cNvPr id="63" name="Rectangle 62"/>
+          <p:cNvSpPr/>
+          <p:nvPr/>
+        </p:nvSpPr>
+        <p:spPr>
+          <a:xfrm>
+            <a:off x="6702552" y="1938528"/>
+            <a:ext cx="301751" cy="301751"/>
+          </a:xfrm>
+          <a:prstGeom prst="rect">
+            <a:avLst/>
+          </a:prstGeom>
+          <a:solidFill>
+            <a:srgbClr val="D7EAF0"/>
+          </a:solidFill>
+          <a:ln w="9525">
+            <a:solidFill>
+              <a:srgbClr val="0C6A87"/>
+            </a:solidFill>
+          </a:ln>
+          <a:effectLst/>
+        </p:spPr>
+        <p:style>
+          <a:lnRef idx="1">
+            <a:schemeClr val="accent1"/>
+          </a:lnRef>
+          <a:fillRef idx="3">
+            <a:schemeClr val="accent1"/>
+          </a:fillRef>
+          <a:effectRef idx="2">
+            <a:schemeClr val="accent1"/>
+          </a:effectRef>
+          <a:fontRef idx="minor">
+            <a:schemeClr val="lt1"/>
+          </a:fontRef>
+        </p:style>
+        <p:txBody>
+          <a:bodyPr rtlCol="0" anchor="ctr" lIns="0" rIns="0" tIns="0" bIns="0"/>
+          <a:lstStyle/>
+          <a:p>
+            <a:pPr algn="ctr"/>
+            <a:r>
+              <a:rPr sz="800" b="0">
+                <a:solidFill>
+                  <a:srgbClr val="0C6A87"/>
+                </a:solidFill>
+                <a:latin typeface="Open Sans"/>
+              </a:rPr>
+              <a:t/>
+            </a:r>
+          </a:p>
+        </p:txBody>
+      </p:sp>
+      <p:sp>
+        <p:nvSpPr>
+          <p:cNvPr id="64" name="Rectangle 63"/>
+          <p:cNvSpPr/>
+          <p:nvPr/>
+        </p:nvSpPr>
+        <p:spPr>
+          <a:xfrm>
+            <a:off x="7031736" y="1938528"/>
+            <a:ext cx="301751" cy="301751"/>
+          </a:xfrm>
+          <a:prstGeom prst="rect">
+            <a:avLst/>
+          </a:prstGeom>
+          <a:solidFill>
+            <a:srgbClr val="D7EAF0"/>
+          </a:solidFill>
+          <a:ln w="9525">
+            <a:solidFill>
+              <a:srgbClr val="0C6A87"/>
+            </a:solidFill>
+          </a:ln>
+          <a:effectLst/>
+        </p:spPr>
+        <p:style>
+          <a:lnRef idx="1">
+            <a:schemeClr val="accent1"/>
+          </a:lnRef>
+          <a:fillRef idx="3">
+            <a:schemeClr val="accent1"/>
+          </a:fillRef>
+          <a:effectRef idx="2">
+            <a:schemeClr val="accent1"/>
+          </a:effectRef>
+          <a:fontRef idx="minor">
+            <a:schemeClr val="lt1"/>
+          </a:fontRef>
+        </p:style>
+        <p:txBody>
+          <a:bodyPr rtlCol="0" anchor="ctr" lIns="0" rIns="0" tIns="0" bIns="0"/>
+          <a:lstStyle/>
+          <a:p>
+            <a:pPr algn="ctr"/>
+            <a:r>
+              <a:rPr sz="800" b="0">
+                <a:solidFill>
+                  <a:srgbClr val="0C6A87"/>
+                </a:solidFill>
+                <a:latin typeface="Open Sans"/>
+              </a:rPr>
+              <a:t/>
+            </a:r>
+          </a:p>
+        </p:txBody>
+      </p:sp>
+      <p:sp>
+        <p:nvSpPr>
+          <p:cNvPr id="65" name="Rectangle 64"/>
+          <p:cNvSpPr/>
+          <p:nvPr/>
+        </p:nvSpPr>
+        <p:spPr>
+          <a:xfrm>
+            <a:off x="7360920" y="1938528"/>
+            <a:ext cx="301751" cy="301751"/>
+          </a:xfrm>
+          <a:prstGeom prst="rect">
+            <a:avLst/>
+          </a:prstGeom>
+          <a:solidFill>
+            <a:srgbClr val="D7EAF0"/>
+          </a:solidFill>
+          <a:ln w="9525">
+            <a:solidFill>
+              <a:srgbClr val="0C6A87"/>
+            </a:solidFill>
+          </a:ln>
+          <a:effectLst/>
+        </p:spPr>
+        <p:style>
+          <a:lnRef idx="1">
+            <a:schemeClr val="accent1"/>
+          </a:lnRef>
+          <a:fillRef idx="3">
+            <a:schemeClr val="accent1"/>
+          </a:fillRef>
+          <a:effectRef idx="2">
+            <a:schemeClr val="accent1"/>
+          </a:effectRef>
+          <a:fontRef idx="minor">
+            <a:schemeClr val="lt1"/>
+          </a:fontRef>
+        </p:style>
+        <p:txBody>
+          <a:bodyPr rtlCol="0" anchor="ctr" lIns="0" rIns="0" tIns="0" bIns="0"/>
+          <a:lstStyle/>
+          <a:p>
+            <a:pPr algn="ctr"/>
+            <a:r>
+              <a:rPr sz="800" b="0">
+                <a:solidFill>
+                  <a:srgbClr val="0C6A87"/>
+                </a:solidFill>
+                <a:latin typeface="Open Sans"/>
+              </a:rPr>
+              <a:t/>
+            </a:r>
+          </a:p>
+        </p:txBody>
+      </p:sp>
+      <p:sp>
+        <p:nvSpPr>
+          <p:cNvPr id="66" name="Rectangle 65"/>
+          <p:cNvSpPr/>
+          <p:nvPr/>
+        </p:nvSpPr>
+        <p:spPr>
+          <a:xfrm>
+            <a:off x="7690104" y="1938528"/>
+            <a:ext cx="301751" cy="301751"/>
+          </a:xfrm>
+          <a:prstGeom prst="rect">
+            <a:avLst/>
+          </a:prstGeom>
+          <a:solidFill>
+            <a:srgbClr val="D7EAF0"/>
+          </a:solidFill>
+          <a:ln w="9525">
+            <a:solidFill>
+              <a:srgbClr val="0C6A87"/>
+            </a:solidFill>
+          </a:ln>
+          <a:effectLst/>
+        </p:spPr>
+        <p:style>
+          <a:lnRef idx="1">
+            <a:schemeClr val="accent1"/>
+          </a:lnRef>
+          <a:fillRef idx="3">
+            <a:schemeClr val="accent1"/>
+          </a:fillRef>
+          <a:effectRef idx="2">
+            <a:schemeClr val="accent1"/>
+          </a:effectRef>
+          <a:fontRef idx="minor">
+            <a:schemeClr val="lt1"/>
+          </a:fontRef>
+        </p:style>
+        <p:txBody>
+          <a:bodyPr rtlCol="0" anchor="ctr" lIns="0" rIns="0" tIns="0" bIns="0"/>
+          <a:lstStyle/>
+          <a:p>
+            <a:pPr algn="ctr"/>
+            <a:r>
+              <a:rPr sz="800" b="0">
+                <a:solidFill>
+                  <a:srgbClr val="0C6A87"/>
+                </a:solidFill>
+                <a:latin typeface="Open Sans"/>
+              </a:rPr>
+              <a:t/>
+            </a:r>
+          </a:p>
+        </p:txBody>
+      </p:sp>
+      <p:sp>
+        <p:nvSpPr>
+          <p:cNvPr id="67" name="Rectangle 66"/>
+          <p:cNvSpPr/>
+          <p:nvPr/>
+        </p:nvSpPr>
+        <p:spPr>
+          <a:xfrm>
+            <a:off x="8019288" y="1938528"/>
+            <a:ext cx="301751" cy="301751"/>
+          </a:xfrm>
+          <a:prstGeom prst="rect">
+            <a:avLst/>
+          </a:prstGeom>
+          <a:solidFill>
+            <a:srgbClr val="E6EBEE"/>
+          </a:solidFill>
+          <a:ln w="9525">
+            <a:solidFill>
+              <a:srgbClr val="6B7782"/>
+            </a:solidFill>
+          </a:ln>
+          <a:effectLst/>
+        </p:spPr>
+        <p:style>
+          <a:lnRef idx="1">
+            <a:schemeClr val="accent1"/>
+          </a:lnRef>
+          <a:fillRef idx="3">
+            <a:schemeClr val="accent1"/>
+          </a:fillRef>
+          <a:effectRef idx="2">
+            <a:schemeClr val="accent1"/>
+          </a:effectRef>
+          <a:fontRef idx="minor">
+            <a:schemeClr val="lt1"/>
+          </a:fontRef>
+        </p:style>
+        <p:txBody>
+          <a:bodyPr rtlCol="0" anchor="ctr" lIns="0" rIns="0" tIns="0" bIns="0"/>
+          <a:lstStyle/>
+          <a:p>
+            <a:pPr algn="ctr"/>
+            <a:r>
+              <a:rPr sz="800" b="0">
+                <a:solidFill>
+                  <a:srgbClr val="6B7782"/>
+                </a:solidFill>
+                <a:latin typeface="Open Sans"/>
+              </a:rPr>
+              <a:t>0</a:t>
+            </a:r>
+          </a:p>
+        </p:txBody>
+      </p:sp>
+      <p:sp>
+        <p:nvSpPr>
+          <p:cNvPr id="68" name="Rectangle 67"/>
+          <p:cNvSpPr/>
+          <p:nvPr/>
+        </p:nvSpPr>
+        <p:spPr>
+          <a:xfrm>
+            <a:off x="5715000" y="2267712"/>
+            <a:ext cx="301751" cy="301751"/>
+          </a:xfrm>
+          <a:prstGeom prst="rect">
+            <a:avLst/>
+          </a:prstGeom>
+          <a:solidFill>
+            <a:srgbClr val="E6EBEE"/>
+          </a:solidFill>
+          <a:ln w="9525">
+            <a:solidFill>
+              <a:srgbClr val="6B7782"/>
+            </a:solidFill>
+          </a:ln>
+          <a:effectLst/>
+        </p:spPr>
+        <p:style>
+          <a:lnRef idx="1">
+            <a:schemeClr val="accent1"/>
+          </a:lnRef>
+          <a:fillRef idx="3">
+            <a:schemeClr val="accent1"/>
+          </a:fillRef>
+          <a:effectRef idx="2">
+            <a:schemeClr val="accent1"/>
+          </a:effectRef>
+          <a:fontRef idx="minor">
+            <a:schemeClr val="lt1"/>
+          </a:fontRef>
+        </p:style>
+        <p:txBody>
+          <a:bodyPr rtlCol="0" anchor="ctr" lIns="0" rIns="0" tIns="0" bIns="0"/>
+          <a:lstStyle/>
+          <a:p>
+            <a:pPr algn="ctr"/>
+            <a:r>
+              <a:rPr sz="800" b="0">
+                <a:solidFill>
+                  <a:srgbClr val="6B7782"/>
+                </a:solidFill>
+                <a:latin typeface="Open Sans"/>
+              </a:rPr>
+              <a:t>0</a:t>
+            </a:r>
+          </a:p>
+        </p:txBody>
+      </p:sp>
+      <p:sp>
+        <p:nvSpPr>
+          <p:cNvPr id="69" name="Rectangle 68"/>
+          <p:cNvSpPr/>
+          <p:nvPr/>
+        </p:nvSpPr>
+        <p:spPr>
+          <a:xfrm>
+            <a:off x="6044184" y="2267712"/>
+            <a:ext cx="301751" cy="301751"/>
+          </a:xfrm>
+          <a:prstGeom prst="rect">
+            <a:avLst/>
+          </a:prstGeom>
+          <a:solidFill>
+            <a:srgbClr val="D7EAF0"/>
+          </a:solidFill>
+          <a:ln w="9525">
+            <a:solidFill>
+              <a:srgbClr val="0C6A87"/>
+            </a:solidFill>
+          </a:ln>
+          <a:effectLst/>
+        </p:spPr>
+        <p:style>
+          <a:lnRef idx="1">
+            <a:schemeClr val="accent1"/>
+          </a:lnRef>
+          <a:fillRef idx="3">
+            <a:schemeClr val="accent1"/>
+          </a:fillRef>
+          <a:effectRef idx="2">
+            <a:schemeClr val="accent1"/>
+          </a:effectRef>
+          <a:fontRef idx="minor">
+            <a:schemeClr val="lt1"/>
+          </a:fontRef>
+        </p:style>
+        <p:txBody>
+          <a:bodyPr rtlCol="0" anchor="ctr" lIns="0" rIns="0" tIns="0" bIns="0"/>
+          <a:lstStyle/>
+          <a:p>
+            <a:pPr algn="ctr"/>
+            <a:r>
+              <a:rPr sz="800" b="0">
+                <a:solidFill>
+                  <a:srgbClr val="0C6A87"/>
+                </a:solidFill>
+                <a:latin typeface="Open Sans"/>
+              </a:rPr>
+              <a:t/>
+            </a:r>
+          </a:p>
+        </p:txBody>
+      </p:sp>
+      <p:sp>
+        <p:nvSpPr>
+          <p:cNvPr id="70" name="Rectangle 69"/>
+          <p:cNvSpPr/>
+          <p:nvPr/>
+        </p:nvSpPr>
+        <p:spPr>
+          <a:xfrm>
+            <a:off x="6373368" y="2267712"/>
+            <a:ext cx="301751" cy="301751"/>
+          </a:xfrm>
+          <a:prstGeom prst="rect">
+            <a:avLst/>
+          </a:prstGeom>
+          <a:solidFill>
+            <a:srgbClr val="D7EAF0"/>
+          </a:solidFill>
+          <a:ln w="9525">
+            <a:solidFill>
+              <a:srgbClr val="0C6A87"/>
+            </a:solidFill>
+          </a:ln>
+          <a:effectLst/>
+        </p:spPr>
+        <p:style>
+          <a:lnRef idx="1">
+            <a:schemeClr val="accent1"/>
+          </a:lnRef>
+          <a:fillRef idx="3">
+            <a:schemeClr val="accent1"/>
+          </a:fillRef>
+          <a:effectRef idx="2">
+            <a:schemeClr val="accent1"/>
+          </a:effectRef>
+          <a:fontRef idx="minor">
+            <a:schemeClr val="lt1"/>
+          </a:fontRef>
+        </p:style>
+        <p:txBody>
+          <a:bodyPr rtlCol="0" anchor="ctr" lIns="0" rIns="0" tIns="0" bIns="0"/>
+          <a:lstStyle/>
+          <a:p>
+            <a:pPr algn="ctr"/>
+            <a:r>
+              <a:rPr sz="800" b="0">
+                <a:solidFill>
+                  <a:srgbClr val="0C6A87"/>
+                </a:solidFill>
+                <a:latin typeface="Open Sans"/>
+              </a:rPr>
+              <a:t/>
+            </a:r>
+          </a:p>
+        </p:txBody>
+      </p:sp>
+      <p:sp>
+        <p:nvSpPr>
+          <p:cNvPr id="71" name="Rectangle 70"/>
+          <p:cNvSpPr/>
+          <p:nvPr/>
+        </p:nvSpPr>
+        <p:spPr>
+          <a:xfrm>
+            <a:off x="6702552" y="2267712"/>
+            <a:ext cx="301751" cy="301751"/>
+          </a:xfrm>
+          <a:prstGeom prst="rect">
+            <a:avLst/>
+          </a:prstGeom>
+          <a:solidFill>
+            <a:srgbClr val="D7EAF0"/>
+          </a:solidFill>
+          <a:ln w="9525">
+            <a:solidFill>
+              <a:srgbClr val="0C6A87"/>
+            </a:solidFill>
+          </a:ln>
+          <a:effectLst/>
+        </p:spPr>
+        <p:style>
+          <a:lnRef idx="1">
+            <a:schemeClr val="accent1"/>
+          </a:lnRef>
+          <a:fillRef idx="3">
+            <a:schemeClr val="accent1"/>
+          </a:fillRef>
+          <a:effectRef idx="2">
+            <a:schemeClr val="accent1"/>
+          </a:effectRef>
+          <a:fontRef idx="minor">
+            <a:schemeClr val="lt1"/>
+          </a:fontRef>
+        </p:style>
+        <p:txBody>
+          <a:bodyPr rtlCol="0" anchor="ctr" lIns="0" rIns="0" tIns="0" bIns="0"/>
+          <a:lstStyle/>
+          <a:p>
+            <a:pPr algn="ctr"/>
+            <a:r>
+              <a:rPr sz="800" b="0">
+                <a:solidFill>
+                  <a:srgbClr val="0C6A87"/>
+                </a:solidFill>
+                <a:latin typeface="Open Sans"/>
+              </a:rPr>
+              <a:t/>
+            </a:r>
+          </a:p>
+        </p:txBody>
+      </p:sp>
+      <p:sp>
+        <p:nvSpPr>
+          <p:cNvPr id="72" name="Rectangle 71"/>
+          <p:cNvSpPr/>
+          <p:nvPr/>
+        </p:nvSpPr>
+        <p:spPr>
+          <a:xfrm>
+            <a:off x="7031736" y="2267712"/>
+            <a:ext cx="301751" cy="301751"/>
+          </a:xfrm>
+          <a:prstGeom prst="rect">
+            <a:avLst/>
+          </a:prstGeom>
+          <a:solidFill>
+            <a:srgbClr val="D7EAF0"/>
+          </a:solidFill>
+          <a:ln w="9525">
+            <a:solidFill>
+              <a:srgbClr val="0C6A87"/>
+            </a:solidFill>
+          </a:ln>
+          <a:effectLst/>
+        </p:spPr>
+        <p:style>
+          <a:lnRef idx="1">
+            <a:schemeClr val="accent1"/>
+          </a:lnRef>
+          <a:fillRef idx="3">
+            <a:schemeClr val="accent1"/>
+          </a:fillRef>
+          <a:effectRef idx="2">
+            <a:schemeClr val="accent1"/>
+          </a:effectRef>
+          <a:fontRef idx="minor">
+            <a:schemeClr val="lt1"/>
+          </a:fontRef>
+        </p:style>
+        <p:txBody>
+          <a:bodyPr rtlCol="0" anchor="ctr" lIns="0" rIns="0" tIns="0" bIns="0"/>
+          <a:lstStyle/>
+          <a:p>
+            <a:pPr algn="ctr"/>
+            <a:r>
+              <a:rPr sz="800" b="0">
+                <a:solidFill>
+                  <a:srgbClr val="0C6A87"/>
+                </a:solidFill>
+                <a:latin typeface="Open Sans"/>
+              </a:rPr>
+              <a:t/>
+            </a:r>
+          </a:p>
+        </p:txBody>
+      </p:sp>
+      <p:sp>
+        <p:nvSpPr>
+          <p:cNvPr id="73" name="Rectangle 72"/>
+          <p:cNvSpPr/>
+          <p:nvPr/>
+        </p:nvSpPr>
+        <p:spPr>
+          <a:xfrm>
+            <a:off x="7360920" y="2267712"/>
+            <a:ext cx="301751" cy="301751"/>
+          </a:xfrm>
+          <a:prstGeom prst="rect">
+            <a:avLst/>
+          </a:prstGeom>
+          <a:solidFill>
+            <a:srgbClr val="D7EAF0"/>
+          </a:solidFill>
+          <a:ln w="9525">
+            <a:solidFill>
+              <a:srgbClr val="0C6A87"/>
+            </a:solidFill>
+          </a:ln>
+          <a:effectLst/>
+        </p:spPr>
+        <p:style>
+          <a:lnRef idx="1">
+            <a:schemeClr val="accent1"/>
+          </a:lnRef>
+          <a:fillRef idx="3">
+            <a:schemeClr val="accent1"/>
+          </a:fillRef>
+          <a:effectRef idx="2">
+            <a:schemeClr val="accent1"/>
+          </a:effectRef>
+          <a:fontRef idx="minor">
+            <a:schemeClr val="lt1"/>
+          </a:fontRef>
+        </p:style>
+        <p:txBody>
+          <a:bodyPr rtlCol="0" anchor="ctr" lIns="0" rIns="0" tIns="0" bIns="0"/>
+          <a:lstStyle/>
+          <a:p>
+            <a:pPr algn="ctr"/>
+            <a:r>
+              <a:rPr sz="800" b="0">
+                <a:solidFill>
+                  <a:srgbClr val="0C6A87"/>
+                </a:solidFill>
+                <a:latin typeface="Open Sans"/>
+              </a:rPr>
+              <a:t/>
+            </a:r>
+          </a:p>
+        </p:txBody>
+      </p:sp>
+      <p:sp>
+        <p:nvSpPr>
+          <p:cNvPr id="74" name="Rectangle 73"/>
+          <p:cNvSpPr/>
+          <p:nvPr/>
+        </p:nvSpPr>
+        <p:spPr>
+          <a:xfrm>
+            <a:off x="7690104" y="2267712"/>
+            <a:ext cx="301751" cy="301751"/>
+          </a:xfrm>
+          <a:prstGeom prst="rect">
+            <a:avLst/>
+          </a:prstGeom>
+          <a:solidFill>
+            <a:srgbClr val="D7EAF0"/>
+          </a:solidFill>
+          <a:ln w="9525">
+            <a:solidFill>
+              <a:srgbClr val="0C6A87"/>
+            </a:solidFill>
+          </a:ln>
+          <a:effectLst/>
+        </p:spPr>
+        <p:style>
+          <a:lnRef idx="1">
+            <a:schemeClr val="accent1"/>
+          </a:lnRef>
+          <a:fillRef idx="3">
+            <a:schemeClr val="accent1"/>
+          </a:fillRef>
+          <a:effectRef idx="2">
+            <a:schemeClr val="accent1"/>
+          </a:effectRef>
+          <a:fontRef idx="minor">
+            <a:schemeClr val="lt1"/>
+          </a:fontRef>
+        </p:style>
+        <p:txBody>
+          <a:bodyPr rtlCol="0" anchor="ctr" lIns="0" rIns="0" tIns="0" bIns="0"/>
+          <a:lstStyle/>
+          <a:p>
+            <a:pPr algn="ctr"/>
+            <a:r>
+              <a:rPr sz="800" b="0">
+                <a:solidFill>
+                  <a:srgbClr val="0C6A87"/>
+                </a:solidFill>
+                <a:latin typeface="Open Sans"/>
+              </a:rPr>
+              <a:t/>
+            </a:r>
+          </a:p>
+        </p:txBody>
+      </p:sp>
+      <p:sp>
+        <p:nvSpPr>
+          <p:cNvPr id="75" name="Rectangle 74"/>
+          <p:cNvSpPr/>
+          <p:nvPr/>
+        </p:nvSpPr>
+        <p:spPr>
+          <a:xfrm>
+            <a:off x="8019288" y="2267712"/>
+            <a:ext cx="301751" cy="301751"/>
+          </a:xfrm>
+          <a:prstGeom prst="rect">
+            <a:avLst/>
+          </a:prstGeom>
+          <a:solidFill>
+            <a:srgbClr val="E6EBEE"/>
+          </a:solidFill>
+          <a:ln w="9525">
+            <a:solidFill>
+              <a:srgbClr val="6B7782"/>
+            </a:solidFill>
+          </a:ln>
+          <a:effectLst/>
+        </p:spPr>
+        <p:style>
+          <a:lnRef idx="1">
+            <a:schemeClr val="accent1"/>
+          </a:lnRef>
+          <a:fillRef idx="3">
+            <a:schemeClr val="accent1"/>
+          </a:fillRef>
+          <a:effectRef idx="2">
+            <a:schemeClr val="accent1"/>
+          </a:effectRef>
+          <a:fontRef idx="minor">
+            <a:schemeClr val="lt1"/>
+          </a:fontRef>
+        </p:style>
+        <p:txBody>
+          <a:bodyPr rtlCol="0" anchor="ctr" lIns="0" rIns="0" tIns="0" bIns="0"/>
+          <a:lstStyle/>
+          <a:p>
+            <a:pPr algn="ctr"/>
+            <a:r>
+              <a:rPr sz="800" b="0">
+                <a:solidFill>
+                  <a:srgbClr val="6B7782"/>
+                </a:solidFill>
+                <a:latin typeface="Open Sans"/>
+              </a:rPr>
+              <a:t>0</a:t>
+            </a:r>
+          </a:p>
+        </p:txBody>
+      </p:sp>
+      <p:sp>
+        <p:nvSpPr>
+          <p:cNvPr id="76" name="Rectangle 75"/>
+          <p:cNvSpPr/>
+          <p:nvPr/>
+        </p:nvSpPr>
+        <p:spPr>
+          <a:xfrm>
+            <a:off x="5715000" y="2596896"/>
+            <a:ext cx="301751" cy="301751"/>
+          </a:xfrm>
+          <a:prstGeom prst="rect">
+            <a:avLst/>
+          </a:prstGeom>
+          <a:solidFill>
+            <a:srgbClr val="E6EBEE"/>
+          </a:solidFill>
+          <a:ln w="9525">
+            <a:solidFill>
+              <a:srgbClr val="6B7782"/>
+            </a:solidFill>
+          </a:ln>
+          <a:effectLst/>
+        </p:spPr>
+        <p:style>
+          <a:lnRef idx="1">
+            <a:schemeClr val="accent1"/>
+          </a:lnRef>
+          <a:fillRef idx="3">
+            <a:schemeClr val="accent1"/>
+          </a:fillRef>
+          <a:effectRef idx="2">
+            <a:schemeClr val="accent1"/>
+          </a:effectRef>
+          <a:fontRef idx="minor">
+            <a:schemeClr val="lt1"/>
+          </a:fontRef>
+        </p:style>
+        <p:txBody>
+          <a:bodyPr rtlCol="0" anchor="ctr" lIns="0" rIns="0" tIns="0" bIns="0"/>
+          <a:lstStyle/>
+          <a:p>
+            <a:pPr algn="ctr"/>
+            <a:r>
+              <a:rPr sz="800" b="0">
+                <a:solidFill>
+                  <a:srgbClr val="6B7782"/>
+                </a:solidFill>
+                <a:latin typeface="Open Sans"/>
+              </a:rPr>
+              <a:t>0</a:t>
+            </a:r>
+          </a:p>
+        </p:txBody>
+      </p:sp>
+      <p:sp>
+        <p:nvSpPr>
+          <p:cNvPr id="77" name="Rectangle 76"/>
+          <p:cNvSpPr/>
+          <p:nvPr/>
+        </p:nvSpPr>
+        <p:spPr>
+          <a:xfrm>
+            <a:off x="6044184" y="2596896"/>
+            <a:ext cx="301751" cy="301751"/>
+          </a:xfrm>
+          <a:prstGeom prst="rect">
+            <a:avLst/>
+          </a:prstGeom>
+          <a:solidFill>
+            <a:srgbClr val="D7EAF0"/>
+          </a:solidFill>
+          <a:ln w="9525">
+            <a:solidFill>
+              <a:srgbClr val="0C6A87"/>
+            </a:solidFill>
+          </a:ln>
+          <a:effectLst/>
+        </p:spPr>
+        <p:style>
+          <a:lnRef idx="1">
+            <a:schemeClr val="accent1"/>
+          </a:lnRef>
+          <a:fillRef idx="3">
+            <a:schemeClr val="accent1"/>
+          </a:fillRef>
+          <a:effectRef idx="2">
+            <a:schemeClr val="accent1"/>
+          </a:effectRef>
+          <a:fontRef idx="minor">
+            <a:schemeClr val="lt1"/>
+          </a:fontRef>
+        </p:style>
+        <p:txBody>
+          <a:bodyPr rtlCol="0" anchor="ctr" lIns="0" rIns="0" tIns="0" bIns="0"/>
+          <a:lstStyle/>
+          <a:p>
+            <a:pPr algn="ctr"/>
+            <a:r>
+              <a:rPr sz="800" b="0">
+                <a:solidFill>
+                  <a:srgbClr val="0C6A87"/>
+                </a:solidFill>
+                <a:latin typeface="Open Sans"/>
+              </a:rPr>
+              <a:t/>
+            </a:r>
+          </a:p>
+        </p:txBody>
+      </p:sp>
+      <p:sp>
+        <p:nvSpPr>
+          <p:cNvPr id="78" name="Rectangle 77"/>
+          <p:cNvSpPr/>
+          <p:nvPr/>
+        </p:nvSpPr>
+        <p:spPr>
+          <a:xfrm>
+            <a:off x="6373368" y="2596896"/>
+            <a:ext cx="301751" cy="301751"/>
+          </a:xfrm>
+          <a:prstGeom prst="rect">
+            <a:avLst/>
+          </a:prstGeom>
+          <a:solidFill>
+            <a:srgbClr val="D7EAF0"/>
+          </a:solidFill>
+          <a:ln w="9525">
+            <a:solidFill>
+              <a:srgbClr val="0C6A87"/>
+            </a:solidFill>
+          </a:ln>
+          <a:effectLst/>
+        </p:spPr>
+        <p:style>
+          <a:lnRef idx="1">
+            <a:schemeClr val="accent1"/>
+          </a:lnRef>
+          <a:fillRef idx="3">
+            <a:schemeClr val="accent1"/>
+          </a:fillRef>
+          <a:effectRef idx="2">
+            <a:schemeClr val="accent1"/>
+          </a:effectRef>
+          <a:fontRef idx="minor">
+            <a:schemeClr val="lt1"/>
+          </a:fontRef>
+        </p:style>
+        <p:txBody>
+          <a:bodyPr rtlCol="0" anchor="ctr" lIns="0" rIns="0" tIns="0" bIns="0"/>
+          <a:lstStyle/>
+          <a:p>
+            <a:pPr algn="ctr"/>
+            <a:r>
+              <a:rPr sz="800" b="0">
+                <a:solidFill>
+                  <a:srgbClr val="0C6A87"/>
+                </a:solidFill>
+                <a:latin typeface="Open Sans"/>
+              </a:rPr>
+              <a:t/>
+            </a:r>
+          </a:p>
+        </p:txBody>
+      </p:sp>
+      <p:sp>
+        <p:nvSpPr>
+          <p:cNvPr id="79" name="Rectangle 78"/>
+          <p:cNvSpPr/>
+          <p:nvPr/>
+        </p:nvSpPr>
+        <p:spPr>
+          <a:xfrm>
+            <a:off x="6702552" y="2596896"/>
+            <a:ext cx="301751" cy="301751"/>
+          </a:xfrm>
+          <a:prstGeom prst="rect">
+            <a:avLst/>
+          </a:prstGeom>
+          <a:solidFill>
+            <a:srgbClr val="D7EAF0"/>
+          </a:solidFill>
+          <a:ln w="9525">
+            <a:solidFill>
+              <a:srgbClr val="0C6A87"/>
+            </a:solidFill>
+          </a:ln>
+          <a:effectLst/>
+        </p:spPr>
+        <p:style>
+          <a:lnRef idx="1">
+            <a:schemeClr val="accent1"/>
+          </a:lnRef>
+          <a:fillRef idx="3">
+            <a:schemeClr val="accent1"/>
+          </a:fillRef>
+          <a:effectRef idx="2">
+            <a:schemeClr val="accent1"/>
+          </a:effectRef>
+          <a:fontRef idx="minor">
+            <a:schemeClr val="lt1"/>
+          </a:fontRef>
+        </p:style>
+        <p:txBody>
+          <a:bodyPr rtlCol="0" anchor="ctr" lIns="0" rIns="0" tIns="0" bIns="0"/>
+          <a:lstStyle/>
+          <a:p>
+            <a:pPr algn="ctr"/>
+            <a:r>
+              <a:rPr sz="800" b="0">
+                <a:solidFill>
+                  <a:srgbClr val="0C6A87"/>
+                </a:solidFill>
+                <a:latin typeface="Open Sans"/>
+              </a:rPr>
+              <a:t/>
+            </a:r>
+          </a:p>
+        </p:txBody>
+      </p:sp>
+      <p:sp>
+        <p:nvSpPr>
+          <p:cNvPr id="80" name="Rectangle 79"/>
+          <p:cNvSpPr/>
+          <p:nvPr/>
+        </p:nvSpPr>
+        <p:spPr>
+          <a:xfrm>
+            <a:off x="7031736" y="2596896"/>
+            <a:ext cx="301751" cy="301751"/>
+          </a:xfrm>
+          <a:prstGeom prst="rect">
+            <a:avLst/>
+          </a:prstGeom>
+          <a:solidFill>
+            <a:srgbClr val="D7EAF0"/>
+          </a:solidFill>
+          <a:ln w="9525">
+            <a:solidFill>
+              <a:srgbClr val="0C6A87"/>
+            </a:solidFill>
+          </a:ln>
+          <a:effectLst/>
+        </p:spPr>
+        <p:style>
+          <a:lnRef idx="1">
+            <a:schemeClr val="accent1"/>
+          </a:lnRef>
+          <a:fillRef idx="3">
+            <a:schemeClr val="accent1"/>
+          </a:fillRef>
+          <a:effectRef idx="2">
+            <a:schemeClr val="accent1"/>
+          </a:effectRef>
+          <a:fontRef idx="minor">
+            <a:schemeClr val="lt1"/>
+          </a:fontRef>
+        </p:style>
+        <p:txBody>
+          <a:bodyPr rtlCol="0" anchor="ctr" lIns="0" rIns="0" tIns="0" bIns="0"/>
+          <a:lstStyle/>
+          <a:p>
+            <a:pPr algn="ctr"/>
+            <a:r>
+              <a:rPr sz="800" b="0">
+                <a:solidFill>
+                  <a:srgbClr val="0C6A87"/>
+                </a:solidFill>
+                <a:latin typeface="Open Sans"/>
+              </a:rPr>
+              <a:t/>
+            </a:r>
+          </a:p>
+        </p:txBody>
+      </p:sp>
+      <p:sp>
+        <p:nvSpPr>
+          <p:cNvPr id="81" name="Rectangle 80"/>
+          <p:cNvSpPr/>
+          <p:nvPr/>
+        </p:nvSpPr>
+        <p:spPr>
+          <a:xfrm>
+            <a:off x="7360920" y="2596896"/>
+            <a:ext cx="301751" cy="301751"/>
+          </a:xfrm>
+          <a:prstGeom prst="rect">
+            <a:avLst/>
+          </a:prstGeom>
+          <a:solidFill>
+            <a:srgbClr val="D7EAF0"/>
+          </a:solidFill>
+          <a:ln w="9525">
+            <a:solidFill>
+              <a:srgbClr val="0C6A87"/>
+            </a:solidFill>
+          </a:ln>
+          <a:effectLst/>
+        </p:spPr>
+        <p:style>
+          <a:lnRef idx="1">
+            <a:schemeClr val="accent1"/>
+          </a:lnRef>
+          <a:fillRef idx="3">
+            <a:schemeClr val="accent1"/>
+          </a:fillRef>
+          <a:effectRef idx="2">
+            <a:schemeClr val="accent1"/>
+          </a:effectRef>
+          <a:fontRef idx="minor">
+            <a:schemeClr val="lt1"/>
+          </a:fontRef>
+        </p:style>
+        <p:txBody>
+          <a:bodyPr rtlCol="0" anchor="ctr" lIns="0" rIns="0" tIns="0" bIns="0"/>
+          <a:lstStyle/>
+          <a:p>
+            <a:pPr algn="ctr"/>
+            <a:r>
+              <a:rPr sz="800" b="0">
+                <a:solidFill>
+                  <a:srgbClr val="0C6A87"/>
+                </a:solidFill>
+                <a:latin typeface="Open Sans"/>
+              </a:rPr>
+              <a:t/>
+            </a:r>
+          </a:p>
+        </p:txBody>
+      </p:sp>
+      <p:sp>
+        <p:nvSpPr>
+          <p:cNvPr id="82" name="Rectangle 81"/>
+          <p:cNvSpPr/>
+          <p:nvPr/>
+        </p:nvSpPr>
+        <p:spPr>
+          <a:xfrm>
+            <a:off x="7690104" y="2596896"/>
+            <a:ext cx="301751" cy="301751"/>
+          </a:xfrm>
+          <a:prstGeom prst="rect">
+            <a:avLst/>
+          </a:prstGeom>
+          <a:solidFill>
+            <a:srgbClr val="D7EAF0"/>
+          </a:solidFill>
+          <a:ln w="9525">
+            <a:solidFill>
+              <a:srgbClr val="0C6A87"/>
+            </a:solidFill>
+          </a:ln>
+          <a:effectLst/>
+        </p:spPr>
+        <p:style>
+          <a:lnRef idx="1">
+            <a:schemeClr val="accent1"/>
+          </a:lnRef>
+          <a:fillRef idx="3">
+            <a:schemeClr val="accent1"/>
+          </a:fillRef>
+          <a:effectRef idx="2">
+            <a:schemeClr val="accent1"/>
+          </a:effectRef>
+          <a:fontRef idx="minor">
+            <a:schemeClr val="lt1"/>
+          </a:fontRef>
+        </p:style>
+        <p:txBody>
+          <a:bodyPr rtlCol="0" anchor="ctr" lIns="0" rIns="0" tIns="0" bIns="0"/>
+          <a:lstStyle/>
+          <a:p>
+            <a:pPr algn="ctr"/>
+            <a:r>
+              <a:rPr sz="800" b="0">
+                <a:solidFill>
+                  <a:srgbClr val="0C6A87"/>
+                </a:solidFill>
+                <a:latin typeface="Open Sans"/>
+              </a:rPr>
+              <a:t/>
+            </a:r>
+          </a:p>
+        </p:txBody>
+      </p:sp>
+      <p:sp>
+        <p:nvSpPr>
+          <p:cNvPr id="83" name="Rectangle 82"/>
+          <p:cNvSpPr/>
+          <p:nvPr/>
+        </p:nvSpPr>
+        <p:spPr>
+          <a:xfrm>
+            <a:off x="8019288" y="2596896"/>
+            <a:ext cx="301751" cy="301751"/>
+          </a:xfrm>
+          <a:prstGeom prst="rect">
+            <a:avLst/>
+          </a:prstGeom>
+          <a:solidFill>
+            <a:srgbClr val="E6EBEE"/>
+          </a:solidFill>
+          <a:ln w="9525">
+            <a:solidFill>
+              <a:srgbClr val="6B7782"/>
+            </a:solidFill>
+          </a:ln>
+          <a:effectLst/>
+        </p:spPr>
+        <p:style>
+          <a:lnRef idx="1">
+            <a:schemeClr val="accent1"/>
+          </a:lnRef>
+          <a:fillRef idx="3">
+            <a:schemeClr val="accent1"/>
+          </a:fillRef>
+          <a:effectRef idx="2">
+            <a:schemeClr val="accent1"/>
+          </a:effectRef>
+          <a:fontRef idx="minor">
+            <a:schemeClr val="lt1"/>
+          </a:fontRef>
+        </p:style>
+        <p:txBody>
+          <a:bodyPr rtlCol="0" anchor="ctr" lIns="0" rIns="0" tIns="0" bIns="0"/>
+          <a:lstStyle/>
+          <a:p>
+            <a:pPr algn="ctr"/>
+            <a:r>
+              <a:rPr sz="800" b="0">
+                <a:solidFill>
+                  <a:srgbClr val="6B7782"/>
+                </a:solidFill>
+                <a:latin typeface="Open Sans"/>
+              </a:rPr>
+              <a:t>0</a:t>
+            </a:r>
+          </a:p>
+        </p:txBody>
+      </p:sp>
+      <p:sp>
+        <p:nvSpPr>
+          <p:cNvPr id="84" name="Rectangle 83"/>
+          <p:cNvSpPr/>
+          <p:nvPr/>
+        </p:nvSpPr>
+        <p:spPr>
+          <a:xfrm>
+            <a:off x="5715000" y="2926079"/>
+            <a:ext cx="301751" cy="301751"/>
+          </a:xfrm>
+          <a:prstGeom prst="rect">
+            <a:avLst/>
+          </a:prstGeom>
+          <a:solidFill>
+            <a:srgbClr val="E6EBEE"/>
+          </a:solidFill>
+          <a:ln w="9525">
+            <a:solidFill>
+              <a:srgbClr val="6B7782"/>
+            </a:solidFill>
+          </a:ln>
+          <a:effectLst/>
+        </p:spPr>
+        <p:style>
+          <a:lnRef idx="1">
+            <a:schemeClr val="accent1"/>
+          </a:lnRef>
+          <a:fillRef idx="3">
+            <a:schemeClr val="accent1"/>
+          </a:fillRef>
+          <a:effectRef idx="2">
+            <a:schemeClr val="accent1"/>
+          </a:effectRef>
+          <a:fontRef idx="minor">
+            <a:schemeClr val="lt1"/>
+          </a:fontRef>
+        </p:style>
+        <p:txBody>
+          <a:bodyPr rtlCol="0" anchor="ctr" lIns="0" rIns="0" tIns="0" bIns="0"/>
+          <a:lstStyle/>
+          <a:p>
+            <a:pPr algn="ctr"/>
+            <a:r>
+              <a:rPr sz="800" b="0">
+                <a:solidFill>
+                  <a:srgbClr val="6B7782"/>
+                </a:solidFill>
+                <a:latin typeface="Open Sans"/>
+              </a:rPr>
+              <a:t>0</a:t>
+            </a:r>
+          </a:p>
+        </p:txBody>
+      </p:sp>
+      <p:sp>
+        <p:nvSpPr>
+          <p:cNvPr id="85" name="Rectangle 84"/>
+          <p:cNvSpPr/>
+          <p:nvPr/>
+        </p:nvSpPr>
+        <p:spPr>
+          <a:xfrm>
+            <a:off x="6044184" y="2926079"/>
+            <a:ext cx="301751" cy="301751"/>
+          </a:xfrm>
+          <a:prstGeom prst="rect">
+            <a:avLst/>
+          </a:prstGeom>
+          <a:solidFill>
+            <a:srgbClr val="E6EBEE"/>
+          </a:solidFill>
+          <a:ln w="9525">
+            <a:solidFill>
+              <a:srgbClr val="6B7782"/>
+            </a:solidFill>
+          </a:ln>
+          <a:effectLst/>
+        </p:spPr>
+        <p:style>
+          <a:lnRef idx="1">
+            <a:schemeClr val="accent1"/>
+          </a:lnRef>
+          <a:fillRef idx="3">
+            <a:schemeClr val="accent1"/>
+          </a:fillRef>
+          <a:effectRef idx="2">
+            <a:schemeClr val="accent1"/>
+          </a:effectRef>
+          <a:fontRef idx="minor">
+            <a:schemeClr val="lt1"/>
+          </a:fontRef>
+        </p:style>
+        <p:txBody>
+          <a:bodyPr rtlCol="0" anchor="ctr" lIns="0" rIns="0" tIns="0" bIns="0"/>
+          <a:lstStyle/>
+          <a:p>
+            <a:pPr algn="ctr"/>
+            <a:r>
+              <a:rPr sz="800" b="0">
+                <a:solidFill>
+                  <a:srgbClr val="6B7782"/>
+                </a:solidFill>
+                <a:latin typeface="Open Sans"/>
+              </a:rPr>
+              <a:t>0</a:t>
+            </a:r>
+          </a:p>
+        </p:txBody>
+      </p:sp>
+      <p:sp>
+        <p:nvSpPr>
+          <p:cNvPr id="86" name="Rectangle 85"/>
+          <p:cNvSpPr/>
+          <p:nvPr/>
+        </p:nvSpPr>
+        <p:spPr>
+          <a:xfrm>
+            <a:off x="6373368" y="2926079"/>
+            <a:ext cx="301751" cy="301751"/>
+          </a:xfrm>
+          <a:prstGeom prst="rect">
+            <a:avLst/>
+          </a:prstGeom>
+          <a:solidFill>
+            <a:srgbClr val="E6EBEE"/>
+          </a:solidFill>
+          <a:ln w="9525">
+            <a:solidFill>
+              <a:srgbClr val="6B7782"/>
+            </a:solidFill>
+          </a:ln>
+          <a:effectLst/>
+        </p:spPr>
+        <p:style>
+          <a:lnRef idx="1">
+            <a:schemeClr val="accent1"/>
+          </a:lnRef>
+          <a:fillRef idx="3">
+            <a:schemeClr val="accent1"/>
+          </a:fillRef>
+          <a:effectRef idx="2">
+            <a:schemeClr val="accent1"/>
+          </a:effectRef>
+          <a:fontRef idx="minor">
+            <a:schemeClr val="lt1"/>
+          </a:fontRef>
+        </p:style>
+        <p:txBody>
+          <a:bodyPr rtlCol="0" anchor="ctr" lIns="0" rIns="0" tIns="0" bIns="0"/>
+          <a:lstStyle/>
+          <a:p>
+            <a:pPr algn="ctr"/>
+            <a:r>
+              <a:rPr sz="800" b="0">
+                <a:solidFill>
+                  <a:srgbClr val="6B7782"/>
+                </a:solidFill>
+                <a:latin typeface="Open Sans"/>
+              </a:rPr>
+              <a:t>0</a:t>
+            </a:r>
+          </a:p>
+        </p:txBody>
+      </p:sp>
+      <p:sp>
+        <p:nvSpPr>
+          <p:cNvPr id="87" name="Rectangle 86"/>
+          <p:cNvSpPr/>
+          <p:nvPr/>
+        </p:nvSpPr>
+        <p:spPr>
+          <a:xfrm>
+            <a:off x="6702552" y="2926079"/>
+            <a:ext cx="301751" cy="301751"/>
+          </a:xfrm>
+          <a:prstGeom prst="rect">
+            <a:avLst/>
+          </a:prstGeom>
+          <a:solidFill>
+            <a:srgbClr val="E6EBEE"/>
+          </a:solidFill>
+          <a:ln w="9525">
+            <a:solidFill>
+              <a:srgbClr val="6B7782"/>
+            </a:solidFill>
+          </a:ln>
+          <a:effectLst/>
+        </p:spPr>
+        <p:style>
+          <a:lnRef idx="1">
+            <a:schemeClr val="accent1"/>
+          </a:lnRef>
+          <a:fillRef idx="3">
+            <a:schemeClr val="accent1"/>
+          </a:fillRef>
+          <a:effectRef idx="2">
+            <a:schemeClr val="accent1"/>
+          </a:effectRef>
+          <a:fontRef idx="minor">
+            <a:schemeClr val="lt1"/>
+          </a:fontRef>
+        </p:style>
+        <p:txBody>
+          <a:bodyPr rtlCol="0" anchor="ctr" lIns="0" rIns="0" tIns="0" bIns="0"/>
+          <a:lstStyle/>
+          <a:p>
+            <a:pPr algn="ctr"/>
+            <a:r>
+              <a:rPr sz="800" b="0">
+                <a:solidFill>
+                  <a:srgbClr val="6B7782"/>
+                </a:solidFill>
+                <a:latin typeface="Open Sans"/>
+              </a:rPr>
+              <a:t>0</a:t>
+            </a:r>
+          </a:p>
+        </p:txBody>
+      </p:sp>
+      <p:sp>
+        <p:nvSpPr>
+          <p:cNvPr id="88" name="Rectangle 87"/>
+          <p:cNvSpPr/>
+          <p:nvPr/>
+        </p:nvSpPr>
+        <p:spPr>
+          <a:xfrm>
+            <a:off x="7031736" y="2926079"/>
+            <a:ext cx="301751" cy="301751"/>
+          </a:xfrm>
+          <a:prstGeom prst="rect">
+            <a:avLst/>
+          </a:prstGeom>
+          <a:solidFill>
+            <a:srgbClr val="E6EBEE"/>
+          </a:solidFill>
+          <a:ln w="9525">
+            <a:solidFill>
+              <a:srgbClr val="6B7782"/>
+            </a:solidFill>
+          </a:ln>
+          <a:effectLst/>
+        </p:spPr>
+        <p:style>
+          <a:lnRef idx="1">
+            <a:schemeClr val="accent1"/>
+          </a:lnRef>
+          <a:fillRef idx="3">
+            <a:schemeClr val="accent1"/>
+          </a:fillRef>
+          <a:effectRef idx="2">
+            <a:schemeClr val="accent1"/>
+          </a:effectRef>
+          <a:fontRef idx="minor">
+            <a:schemeClr val="lt1"/>
+          </a:fontRef>
+        </p:style>
+        <p:txBody>
+          <a:bodyPr rtlCol="0" anchor="ctr" lIns="0" rIns="0" tIns="0" bIns="0"/>
+          <a:lstStyle/>
+          <a:p>
+            <a:pPr algn="ctr"/>
+            <a:r>
+              <a:rPr sz="800" b="0">
+                <a:solidFill>
+                  <a:srgbClr val="6B7782"/>
+                </a:solidFill>
+                <a:latin typeface="Open Sans"/>
+              </a:rPr>
+              <a:t>0</a:t>
+            </a:r>
+          </a:p>
+        </p:txBody>
+      </p:sp>
+      <p:sp>
+        <p:nvSpPr>
+          <p:cNvPr id="89" name="Rectangle 88"/>
+          <p:cNvSpPr/>
+          <p:nvPr/>
+        </p:nvSpPr>
+        <p:spPr>
+          <a:xfrm>
+            <a:off x="7360920" y="2926079"/>
+            <a:ext cx="301751" cy="301751"/>
+          </a:xfrm>
+          <a:prstGeom prst="rect">
+            <a:avLst/>
+          </a:prstGeom>
+          <a:solidFill>
+            <a:srgbClr val="E6EBEE"/>
+          </a:solidFill>
+          <a:ln w="9525">
+            <a:solidFill>
+              <a:srgbClr val="6B7782"/>
+            </a:solidFill>
+          </a:ln>
+          <a:effectLst/>
+        </p:spPr>
+        <p:style>
+          <a:lnRef idx="1">
+            <a:schemeClr val="accent1"/>
+          </a:lnRef>
+          <a:fillRef idx="3">
+            <a:schemeClr val="accent1"/>
+          </a:fillRef>
+          <a:effectRef idx="2">
+            <a:schemeClr val="accent1"/>
+          </a:effectRef>
+          <a:fontRef idx="minor">
+            <a:schemeClr val="lt1"/>
+          </a:fontRef>
+        </p:style>
+        <p:txBody>
+          <a:bodyPr rtlCol="0" anchor="ctr" lIns="0" rIns="0" tIns="0" bIns="0"/>
+          <a:lstStyle/>
+          <a:p>
+            <a:pPr algn="ctr"/>
+            <a:r>
+              <a:rPr sz="800" b="0">
+                <a:solidFill>
+                  <a:srgbClr val="6B7782"/>
+                </a:solidFill>
+                <a:latin typeface="Open Sans"/>
+              </a:rPr>
+              <a:t>0</a:t>
+            </a:r>
+          </a:p>
+        </p:txBody>
+      </p:sp>
+      <p:sp>
+        <p:nvSpPr>
+          <p:cNvPr id="90" name="Rectangle 89"/>
+          <p:cNvSpPr/>
+          <p:nvPr/>
+        </p:nvSpPr>
+        <p:spPr>
+          <a:xfrm>
+            <a:off x="7690104" y="2926079"/>
+            <a:ext cx="301751" cy="301751"/>
+          </a:xfrm>
+          <a:prstGeom prst="rect">
+            <a:avLst/>
+          </a:prstGeom>
+          <a:solidFill>
+            <a:srgbClr val="E6EBEE"/>
+          </a:solidFill>
+          <a:ln w="9525">
+            <a:solidFill>
+              <a:srgbClr val="6B7782"/>
+            </a:solidFill>
+          </a:ln>
+          <a:effectLst/>
+        </p:spPr>
+        <p:style>
+          <a:lnRef idx="1">
+            <a:schemeClr val="accent1"/>
+          </a:lnRef>
+          <a:fillRef idx="3">
+            <a:schemeClr val="accent1"/>
+          </a:fillRef>
+          <a:effectRef idx="2">
+            <a:schemeClr val="accent1"/>
+          </a:effectRef>
+          <a:fontRef idx="minor">
+            <a:schemeClr val="lt1"/>
+          </a:fontRef>
+        </p:style>
+        <p:txBody>
+          <a:bodyPr rtlCol="0" anchor="ctr" lIns="0" rIns="0" tIns="0" bIns="0"/>
+          <a:lstStyle/>
+          <a:p>
+            <a:pPr algn="ctr"/>
+            <a:r>
+              <a:rPr sz="800" b="0">
+                <a:solidFill>
+                  <a:srgbClr val="6B7782"/>
+                </a:solidFill>
+                <a:latin typeface="Open Sans"/>
+              </a:rPr>
+              <a:t>0</a:t>
+            </a:r>
+          </a:p>
+        </p:txBody>
+      </p:sp>
+      <p:sp>
+        <p:nvSpPr>
+          <p:cNvPr id="91" name="Rectangle 90"/>
+          <p:cNvSpPr/>
+          <p:nvPr/>
+        </p:nvSpPr>
+        <p:spPr>
+          <a:xfrm>
+            <a:off x="8019288" y="2926079"/>
+            <a:ext cx="301751" cy="301751"/>
+          </a:xfrm>
+          <a:prstGeom prst="rect">
+            <a:avLst/>
+          </a:prstGeom>
+          <a:solidFill>
+            <a:srgbClr val="E6EBEE"/>
+          </a:solidFill>
+          <a:ln w="9525">
+            <a:solidFill>
+              <a:srgbClr val="6B7782"/>
+            </a:solidFill>
+          </a:ln>
+          <a:effectLst/>
+        </p:spPr>
+        <p:style>
+          <a:lnRef idx="1">
+            <a:schemeClr val="accent1"/>
+          </a:lnRef>
+          <a:fillRef idx="3">
+            <a:schemeClr val="accent1"/>
+          </a:fillRef>
+          <a:effectRef idx="2">
+            <a:schemeClr val="accent1"/>
+          </a:effectRef>
+          <a:fontRef idx="minor">
+            <a:schemeClr val="lt1"/>
+          </a:fontRef>
+        </p:style>
+        <p:txBody>
+          <a:bodyPr rtlCol="0" anchor="ctr" lIns="0" rIns="0" tIns="0" bIns="0"/>
+          <a:lstStyle/>
+          <a:p>
+            <a:pPr algn="ctr"/>
+            <a:r>
+              <a:rPr sz="800" b="0">
+                <a:solidFill>
+                  <a:srgbClr val="6B7782"/>
+                </a:solidFill>
+                <a:latin typeface="Open Sans"/>
+              </a:rPr>
+              <a:t>0</a:t>
+            </a:r>
+          </a:p>
+        </p:txBody>
+      </p:sp>
+      <p:sp>
+        <p:nvSpPr>
+          <p:cNvPr id="92" name="TextBox 91"/>
           <p:cNvSpPr txBox="1"/>
           <p:nvPr/>
         </p:nvSpPr>
         <p:spPr>
           <a:xfrm>
-            <a:off x="4727448" y="3483864"/>
-            <a:ext cx="3749039" cy="228600"/>
+            <a:off x="5623560" y="3337560"/>
+            <a:ext cx="3108960" cy="822960"/>
           </a:xfrm>
           <a:prstGeom prst="rect">
             <a:avLst/>
@@ -13263,40 +18028,14 @@
           <a:p>
             <a:pPr algn="l"/>
             <a:r>
-              <a:rPr sz="1150" b="1" i="0">
-                <a:solidFill>
-                  <a:srgbClr val="1B2630"/>
-                </a:solidFill>
-                <a:latin typeface="Open Sans"/>
-              </a:rPr>
-              <a:t>Baseline</a:t>
-            </a:r>
-          </a:p>
-        </p:txBody>
-      </p:sp>
-      <p:sp>
-        <p:nvSpPr>
-          <p:cNvPr id="26" name="TextBox 25"/>
-          <p:cNvSpPr txBox="1"/>
-          <p:nvPr/>
-        </p:nvSpPr>
-        <p:spPr>
-          <a:xfrm>
-            <a:off x="4727448" y="3721608"/>
-            <a:ext cx="3794760" cy="411480"/>
-          </a:xfrm>
-          <a:prstGeom prst="rect">
-            <a:avLst/>
-          </a:prstGeom>
-          <a:noFill/>
-        </p:spPr>
-        <p:txBody>
-          <a:bodyPr wrap="square" lIns="0" rIns="0" tIns="0" bIns="0" anchor="t">
-            <a:spAutoFit/>
-          </a:bodyPr>
-          <a:lstStyle/>
-          <a:p>
-            <a:pPr algn="l"/>
+              <a:rPr sz="950" b="1" i="0">
+                <a:solidFill>
+                  <a:srgbClr val="6B7782"/>
+                </a:solidFill>
+                <a:latin typeface="Open Sans"/>
+              </a:rPr>
+              <a:t>grey: </a:t>
+            </a:r>
             <a:r>
               <a:rPr sz="950" b="0" i="0">
                 <a:solidFill>
@@ -13304,7 +18043,57 @@
                 </a:solidFill>
                 <a:latin typeface="Open Sans"/>
               </a:rPr>
-              <a:t>OpenCV DNN on the same ONNX model, 1 thread, its own per-layer timer</a:t>
+              <a:t>stored zeros, 1 pixel wide</a:t>
+            </a:r>
+          </a:p>
+          <a:p>
+            <a:pPr algn="l">
+              <a:spcBef>
+                <a:spcPts val="600"/>
+              </a:spcBef>
+            </a:pPr>
+            <a:r>
+              <a:rPr sz="950" b="1" i="0">
+                <a:solidFill>
+                  <a:srgbClr val="B7731A"/>
+                </a:solidFill>
+                <a:latin typeface="Open Sans"/>
+              </a:rPr>
+              <a:t>amber: </a:t>
+            </a:r>
+            <a:r>
+              <a:rPr sz="950" b="0" i="0">
+                <a:solidFill>
+                  <a:srgbClr val="5A6875"/>
+                </a:solidFill>
+                <a:latin typeface="Open Sans"/>
+              </a:rPr>
+              <a:t>a 3×3 window at the corner reads zeros, no if-statement</a:t>
+            </a:r>
+          </a:p>
+          <a:p>
+            <a:pPr algn="l">
+              <a:spcBef>
+                <a:spcPts val="600"/>
+              </a:spcBef>
+            </a:pPr>
+            <a:r>
+              <a:rPr sz="950" b="1" i="0">
+                <a:solidFill>
+                  <a:srgbClr val="0C6A87"/>
+                </a:solidFill>
+                <a:latin typeface="Open Sans"/>
+              </a:rPr>
+              <a:t>teal: </a:t>
+            </a:r>
+            <a:r>
+              <a:rPr sz="950" b="0" i="0">
+                <a:solidFill>
+                  <a:srgbClr val="5A6875"/>
+                </a:solidFill>
+                <a:latin typeface="Open Sans"/>
+              </a:rPr>
+              <a:t>interior, the only part a kernel writes</a:t>
             </a:r>
           </a:p>
         </p:txBody>
@@ -13343,27 +18132,29 @@
           <a:lstStyle/>
           <a:p>
             <a:r>
-              <a:t>Four steps: ops → accumulators → tile → benchmark</a:t>
-            </a:r>
-          </a:p>
-        </p:txBody>
-      </p:sp>
-      <p:sp>
-        <p:nvSpPr>
-          <p:cNvPr id="3" name="Oval 2"/>
+              <a:t>Why this layout: one load, no branches</a:t>
+            </a:r>
+          </a:p>
+        </p:txBody>
+      </p:sp>
+      <p:sp>
+        <p:nvSpPr>
+          <p:cNvPr id="3" name="why-0"/>
           <p:cNvSpPr/>
           <p:nvPr/>
         </p:nvSpPr>
         <p:spPr>
           <a:xfrm>
-            <a:off x="457200" y="1069848"/>
-            <a:ext cx="329184" cy="329184"/>
-          </a:xfrm>
-          <a:prstGeom prst="ellipse">
-            <a:avLst/>
+            <a:off x="457200" y="1005840"/>
+            <a:ext cx="2267712" cy="1051560"/>
+          </a:xfrm>
+          <a:prstGeom prst="roundRect">
+            <a:avLst>
+              <a:gd name="adj" fmla="val 8000"/>
+            </a:avLst>
           </a:prstGeom>
           <a:solidFill>
-            <a:srgbClr val="BB0027"/>
+            <a:srgbClr val="F8E5E9"/>
           </a:solidFill>
           <a:ln>
             <a:noFill/>
@@ -13400,43 +18191,8 @@
         </p:nvSpPr>
         <p:spPr>
           <a:xfrm>
-            <a:off x="457200" y="1069848"/>
-            <a:ext cx="329184" cy="329184"/>
-          </a:xfrm>
-          <a:prstGeom prst="rect">
-            <a:avLst/>
-          </a:prstGeom>
-          <a:noFill/>
-        </p:spPr>
-        <p:txBody>
-          <a:bodyPr wrap="square" lIns="0" rIns="0" tIns="0" bIns="0" anchor="ctr">
-            <a:spAutoFit/>
-          </a:bodyPr>
-          <a:lstStyle/>
-          <a:p>
-            <a:pPr algn="ctr"/>
-            <a:r>
-              <a:rPr sz="1300" b="1" i="0">
-                <a:solidFill>
-                  <a:srgbClr val="FFFFFF"/>
-                </a:solidFill>
-                <a:latin typeface="Open Sans"/>
-              </a:rPr>
-              <a:t>1</a:t>
-            </a:r>
-          </a:p>
-        </p:txBody>
-      </p:sp>
-      <p:sp>
-        <p:nvSpPr>
-          <p:cNvPr id="5" name="TextBox 4"/>
-          <p:cNvSpPr txBox="1"/>
-          <p:nvPr/>
-        </p:nvSpPr>
-        <p:spPr>
-          <a:xfrm>
-            <a:off x="914400" y="1033271"/>
-            <a:ext cx="3291840" cy="256032"/>
+            <a:off x="548640" y="1069848"/>
+            <a:ext cx="2103120" cy="256032"/>
           </a:xfrm>
           <a:prstGeom prst="rect">
             <a:avLst/>
@@ -13451,27 +18207,27 @@
           <a:p>
             <a:pPr algn="l"/>
             <a:r>
-              <a:rPr sz="1300" b="1" i="0">
-                <a:solidFill>
-                  <a:srgbClr val="1B2630"/>
-                </a:solidFill>
-                <a:latin typeface="Open Sans"/>
-              </a:rPr>
-              <a:t>Independent ops</a:t>
-            </a:r>
-          </a:p>
-        </p:txBody>
-      </p:sp>
-      <p:sp>
-        <p:nvSpPr>
-          <p:cNvPr id="6" name="TextBox 5"/>
+              <a:rPr sz="1150" b="1" i="0">
+                <a:solidFill>
+                  <a:srgbClr val="BB0027"/>
+                </a:solidFill>
+                <a:latin typeface="Open Sans"/>
+              </a:rPr>
+              <a:t>One load per register</a:t>
+            </a:r>
+          </a:p>
+        </p:txBody>
+      </p:sp>
+      <p:sp>
+        <p:nvSpPr>
+          <p:cNvPr id="5" name="TextBox 4"/>
           <p:cNvSpPr txBox="1"/>
           <p:nvPr/>
         </p:nvSpPr>
         <p:spPr>
           <a:xfrm>
-            <a:off x="914400" y="1298448"/>
-            <a:ext cx="3291840" cy="475488"/>
+            <a:off x="548640" y="1335024"/>
+            <a:ext cx="2103120" cy="713232"/>
           </a:xfrm>
           <a:prstGeom prst="rect">
             <a:avLst/>
@@ -13486,33 +18242,35 @@
           <a:p>
             <a:pPr algn="l"/>
             <a:r>
-              <a:rPr sz="1050" b="0" i="0">
+              <a:rPr sz="900" b="0" i="0">
                 <a:solidFill>
                   <a:srgbClr val="5A6875"/>
                 </a:solidFill>
                 <a:latin typeface="Open Sans"/>
               </a:rPr>
-              <a:t>Each output is a dot product of length C × 9: 102,400 in a 40×40, 64-ch layer.</a:t>
-            </a:r>
-          </a:p>
-        </p:txBody>
-      </p:sp>
-      <p:sp>
-        <p:nvSpPr>
-          <p:cNvPr id="7" name="Oval 6"/>
+              <a:t>8 channels contiguous: weights and outputs are single aligned 32 B loads/stores. NCHW: 8 loads per vector.</a:t>
+            </a:r>
+          </a:p>
+        </p:txBody>
+      </p:sp>
+      <p:sp>
+        <p:nvSpPr>
+          <p:cNvPr id="6" name="why-1"/>
           <p:cNvSpPr/>
           <p:nvPr/>
         </p:nvSpPr>
         <p:spPr>
           <a:xfrm>
-            <a:off x="457200" y="1847088"/>
-            <a:ext cx="329184" cy="329184"/>
-          </a:xfrm>
-          <a:prstGeom prst="ellipse">
-            <a:avLst/>
+            <a:off x="2834640" y="1005840"/>
+            <a:ext cx="2267712" cy="1051560"/>
+          </a:xfrm>
+          <a:prstGeom prst="roundRect">
+            <a:avLst>
+              <a:gd name="adj" fmla="val 8000"/>
+            </a:avLst>
           </a:prstGeom>
           <a:solidFill>
-            <a:srgbClr val="BB0027"/>
+            <a:srgbClr val="F1F3F5"/>
           </a:solidFill>
           <a:ln>
             <a:noFill/>
@@ -13543,49 +18301,14 @@
       </p:sp>
       <p:sp>
         <p:nvSpPr>
-          <p:cNvPr id="8" name="TextBox 7"/>
+          <p:cNvPr id="7" name="TextBox 6"/>
           <p:cNvSpPr txBox="1"/>
           <p:nvPr/>
         </p:nvSpPr>
         <p:spPr>
           <a:xfrm>
-            <a:off x="457200" y="1847088"/>
-            <a:ext cx="329184" cy="329184"/>
-          </a:xfrm>
-          <a:prstGeom prst="rect">
-            <a:avLst/>
-          </a:prstGeom>
-          <a:noFill/>
-        </p:spPr>
-        <p:txBody>
-          <a:bodyPr wrap="square" lIns="0" rIns="0" tIns="0" bIns="0" anchor="ctr">
-            <a:spAutoFit/>
-          </a:bodyPr>
-          <a:lstStyle/>
-          <a:p>
-            <a:pPr algn="ctr"/>
-            <a:r>
-              <a:rPr sz="1300" b="1" i="0">
-                <a:solidFill>
-                  <a:srgbClr val="FFFFFF"/>
-                </a:solidFill>
-                <a:latin typeface="Open Sans"/>
-              </a:rPr>
-              <a:t>2</a:t>
-            </a:r>
-          </a:p>
-        </p:txBody>
-      </p:sp>
-      <p:sp>
-        <p:nvSpPr>
-          <p:cNvPr id="9" name="TextBox 8"/>
-          <p:cNvSpPr txBox="1"/>
-          <p:nvPr/>
-        </p:nvSpPr>
-        <p:spPr>
-          <a:xfrm>
-            <a:off x="914400" y="1810512"/>
-            <a:ext cx="3291840" cy="256032"/>
+            <a:off x="2926080" y="1069848"/>
+            <a:ext cx="2103120" cy="256032"/>
           </a:xfrm>
           <a:prstGeom prst="rect">
             <a:avLst/>
@@ -13600,27 +18323,27 @@
           <a:p>
             <a:pPr algn="l"/>
             <a:r>
-              <a:rPr sz="1300" b="1" i="0">
+              <a:rPr sz="1150" b="1" i="0">
                 <a:solidFill>
                   <a:srgbClr val="1B2630"/>
                 </a:solidFill>
                 <a:latin typeface="Open Sans"/>
               </a:rPr>
-              <a:t>Outputs in flight</a:t>
-            </a:r>
-          </a:p>
-        </p:txBody>
-      </p:sp>
-      <p:sp>
-        <p:nvSpPr>
-          <p:cNvPr id="10" name="TextBox 9"/>
+              <a:t>No branches</a:t>
+            </a:r>
+          </a:p>
+        </p:txBody>
+      </p:sp>
+      <p:sp>
+        <p:nvSpPr>
+          <p:cNvPr id="8" name="TextBox 7"/>
           <p:cNvSpPr txBox="1"/>
           <p:nvPr/>
         </p:nvSpPr>
         <p:spPr>
           <a:xfrm>
-            <a:off x="914400" y="2075688"/>
-            <a:ext cx="3291840" cy="475488"/>
+            <a:off x="2926080" y="1335024"/>
+            <a:ext cx="2103120" cy="713232"/>
           </a:xfrm>
           <a:prstGeom prst="rect">
             <a:avLst/>
@@ -13635,33 +18358,35 @@
           <a:p>
             <a:pPr algn="l"/>
             <a:r>
-              <a:rPr sz="1050" b="0" i="0">
+              <a:rPr sz="900" b="0" i="0">
                 <a:solidFill>
                   <a:srgbClr val="5A6875"/>
                 </a:solidFill>
                 <a:latin typeface="Open Sans"/>
               </a:rPr>
-              <a:t>5 × 2 FMA/cycle = 10 accumulators = 80 outputs; 1 accumulator = 10% of peak.</a:t>
-            </a:r>
-          </a:p>
-        </p:txBody>
-      </p:sp>
-      <p:sp>
-        <p:nvSpPr>
-          <p:cNvPr id="11" name="Oval 10"/>
+              <a:t>Padding is stored, so every call is identical, edges included. Cost: +2.5% memory at 160×160, +21% at 20×20.</a:t>
+            </a:r>
+          </a:p>
+        </p:txBody>
+      </p:sp>
+      <p:sp>
+        <p:nvSpPr>
+          <p:cNvPr id="9" name="why-2"/>
           <p:cNvSpPr/>
           <p:nvPr/>
         </p:nvSpPr>
         <p:spPr>
           <a:xfrm>
-            <a:off x="457200" y="2624327"/>
-            <a:ext cx="329184" cy="329184"/>
-          </a:xfrm>
-          <a:prstGeom prst="ellipse">
-            <a:avLst/>
+            <a:off x="457200" y="2148840"/>
+            <a:ext cx="2267712" cy="1051560"/>
+          </a:xfrm>
+          <a:prstGeom prst="roundRect">
+            <a:avLst>
+              <a:gd name="adj" fmla="val 8000"/>
+            </a:avLst>
           </a:prstGeom>
           <a:solidFill>
-            <a:srgbClr val="BB0027"/>
+            <a:srgbClr val="F1F3F5"/>
           </a:solidFill>
           <a:ln>
             <a:noFill/>
@@ -13692,49 +18417,14 @@
       </p:sp>
       <p:sp>
         <p:nvSpPr>
-          <p:cNvPr id="12" name="TextBox 11"/>
+          <p:cNvPr id="10" name="TextBox 9"/>
           <p:cNvSpPr txBox="1"/>
           <p:nvPr/>
         </p:nvSpPr>
         <p:spPr>
           <a:xfrm>
-            <a:off x="457200" y="2624327"/>
-            <a:ext cx="329184" cy="329184"/>
-          </a:xfrm>
-          <a:prstGeom prst="rect">
-            <a:avLst/>
-          </a:prstGeom>
-          <a:noFill/>
-        </p:spPr>
-        <p:txBody>
-          <a:bodyPr wrap="square" lIns="0" rIns="0" tIns="0" bIns="0" anchor="ctr">
-            <a:spAutoFit/>
-          </a:bodyPr>
-          <a:lstStyle/>
-          <a:p>
-            <a:pPr algn="ctr"/>
-            <a:r>
-              <a:rPr sz="1300" b="1" i="0">
-                <a:solidFill>
-                  <a:srgbClr val="FFFFFF"/>
-                </a:solidFill>
-                <a:latin typeface="Open Sans"/>
-              </a:rPr>
-              <a:t>3</a:t>
-            </a:r>
-          </a:p>
-        </p:txBody>
-      </p:sp>
-      <p:sp>
-        <p:nvSpPr>
-          <p:cNvPr id="13" name="TextBox 12"/>
-          <p:cNvSpPr txBox="1"/>
-          <p:nvPr/>
-        </p:nvSpPr>
-        <p:spPr>
-          <a:xfrm>
-            <a:off x="914400" y="2587751"/>
-            <a:ext cx="3291840" cy="256032"/>
+            <a:off x="548640" y="2212848"/>
+            <a:ext cx="2103120" cy="256032"/>
           </a:xfrm>
           <a:prstGeom prst="rect">
             <a:avLst/>
@@ -13749,27 +18439,27 @@
           <a:p>
             <a:pPr algn="l"/>
             <a:r>
-              <a:rPr sz="1300" b="1" i="0">
+              <a:rPr sz="1150" b="1" i="0">
                 <a:solidFill>
                   <a:srgbClr val="1B2630"/>
                 </a:solidFill>
                 <a:latin typeface="Open Sans"/>
               </a:rPr>
-              <a:t>Kernel size</a:t>
-            </a:r>
-          </a:p>
-        </p:txBody>
-      </p:sp>
-      <p:sp>
-        <p:nvSpPr>
-          <p:cNvPr id="14" name="TextBox 13"/>
+              <a:t>One layout, 3 kernels</a:t>
+            </a:r>
+          </a:p>
+        </p:txBody>
+      </p:sp>
+      <p:sp>
+        <p:nvSpPr>
+          <p:cNvPr id="11" name="TextBox 10"/>
           <p:cNvSpPr txBox="1"/>
           <p:nvPr/>
         </p:nvSpPr>
         <p:spPr>
           <a:xfrm>
-            <a:off x="914400" y="2852927"/>
-            <a:ext cx="3291840" cy="475488"/>
+            <a:off x="548640" y="2478024"/>
+            <a:ext cx="2103120" cy="713232"/>
           </a:xfrm>
           <a:prstGeom prst="rect">
             <a:avLst/>
@@ -13784,33 +18474,35 @@
           <a:p>
             <a:pPr algn="l"/>
             <a:r>
-              <a:rPr sz="1050" b="0" i="0">
+              <a:rPr sz="900" b="0" i="0">
                 <a:solidFill>
                   <a:srgbClr val="5A6875"/>
                 </a:solidFill>
                 <a:latin typeface="Open Sans"/>
               </a:rPr>
-              <a:t>2×5 tile: 10 acc + 2 weights + 1 broadcast = 13 regs; 7 loads per 10 FMAs.</a:t>
-            </a:r>
-          </a:p>
-        </p:txBody>
-      </p:sp>
-      <p:sp>
-        <p:nvSpPr>
-          <p:cNvPr id="15" name="Oval 14"/>
+              <a:t>Stride 1, stride 2 and 1×1 share it: no conversion between layers. Split = pointer offset, Concat = write into a slice.</a:t>
+            </a:r>
+          </a:p>
+        </p:txBody>
+      </p:sp>
+      <p:sp>
+        <p:nvSpPr>
+          <p:cNvPr id="12" name="why-3"/>
           <p:cNvSpPr/>
           <p:nvPr/>
         </p:nvSpPr>
         <p:spPr>
           <a:xfrm>
-            <a:off x="457200" y="3401568"/>
-            <a:ext cx="329184" cy="329184"/>
-          </a:xfrm>
-          <a:prstGeom prst="ellipse">
-            <a:avLst/>
+            <a:off x="2834640" y="2148840"/>
+            <a:ext cx="2267712" cy="1051560"/>
+          </a:xfrm>
+          <a:prstGeom prst="roundRect">
+            <a:avLst>
+              <a:gd name="adj" fmla="val 8000"/>
+            </a:avLst>
           </a:prstGeom>
           <a:solidFill>
-            <a:srgbClr val="BB0027"/>
+            <a:srgbClr val="F1F3F5"/>
           </a:solidFill>
           <a:ln>
             <a:noFill/>
@@ -13841,49 +18533,14 @@
       </p:sp>
       <p:sp>
         <p:nvSpPr>
-          <p:cNvPr id="16" name="TextBox 15"/>
+          <p:cNvPr id="13" name="TextBox 12"/>
           <p:cNvSpPr txBox="1"/>
           <p:nvPr/>
         </p:nvSpPr>
         <p:spPr>
           <a:xfrm>
-            <a:off x="457200" y="3401568"/>
-            <a:ext cx="329184" cy="329184"/>
-          </a:xfrm>
-          <a:prstGeom prst="rect">
-            <a:avLst/>
-          </a:prstGeom>
-          <a:noFill/>
-        </p:spPr>
-        <p:txBody>
-          <a:bodyPr wrap="square" lIns="0" rIns="0" tIns="0" bIns="0" anchor="ctr">
-            <a:spAutoFit/>
-          </a:bodyPr>
-          <a:lstStyle/>
-          <a:p>
-            <a:pPr algn="ctr"/>
-            <a:r>
-              <a:rPr sz="1300" b="1" i="0">
-                <a:solidFill>
-                  <a:srgbClr val="FFFFFF"/>
-                </a:solidFill>
-                <a:latin typeface="Open Sans"/>
-              </a:rPr>
-              <a:t>4</a:t>
-            </a:r>
-          </a:p>
-        </p:txBody>
-      </p:sp>
-      <p:sp>
-        <p:nvSpPr>
-          <p:cNvPr id="17" name="TextBox 16"/>
-          <p:cNvSpPr txBox="1"/>
-          <p:nvPr/>
-        </p:nvSpPr>
-        <p:spPr>
-          <a:xfrm>
-            <a:off x="914400" y="3364991"/>
-            <a:ext cx="3291840" cy="256032"/>
+            <a:off x="2926080" y="2212848"/>
+            <a:ext cx="2103120" cy="256032"/>
           </a:xfrm>
           <a:prstGeom prst="rect">
             <a:avLst/>
@@ -13898,27 +18555,27 @@
           <a:p>
             <a:pPr algn="l"/>
             <a:r>
-              <a:rPr sz="1300" b="1" i="0">
+              <a:rPr sz="1150" b="1" i="0">
                 <a:solidFill>
                   <a:srgbClr val="1B2630"/>
                 </a:solidFill>
                 <a:latin typeface="Open Sans"/>
               </a:rPr>
-              <a:t>Benchmark like A2</a:t>
-            </a:r>
-          </a:p>
-        </p:txBody>
-      </p:sp>
-      <p:sp>
-        <p:nvSpPr>
-          <p:cNvPr id="18" name="TextBox 17"/>
+              <a:t>Weights in loop order</a:t>
+            </a:r>
+          </a:p>
+        </p:txBody>
+      </p:sp>
+      <p:sp>
+        <p:nvSpPr>
+          <p:cNvPr id="14" name="TextBox 13"/>
           <p:cNvSpPr txBox="1"/>
           <p:nvPr/>
         </p:nvSpPr>
         <p:spPr>
           <a:xfrm>
-            <a:off x="914400" y="3630168"/>
-            <a:ext cx="3291840" cy="475488"/>
+            <a:off x="2926080" y="2478024"/>
+            <a:ext cx="2103120" cy="713232"/>
           </a:xfrm>
           <a:prstGeom prst="rect">
             <a:avLst/>
@@ -13933,35 +18590,556 @@
           <a:p>
             <a:pPr algn="l"/>
             <a:r>
-              <a:rPr sz="1050" b="0" i="0">
+              <a:rPr sz="900" b="0" i="0">
                 <a:solidFill>
                   <a:srgbClr val="5A6875"/>
                 </a:solidFill>
                 <a:latin typeface="Open Sans"/>
               </a:rPr>
-              <a:t>Kernel alone, k = 72 to 4608, 3 runs, 2 s warm-up, cycles at 3.4 GHz, checked.</a:t>
+              <a:t>Packed once offline; loads walk forward through memory, which the hardware prefetcher follows.</a:t>
+            </a:r>
+          </a:p>
+        </p:txBody>
+      </p:sp>
+      <p:sp>
+        <p:nvSpPr>
+          <p:cNvPr id="15" name="TextBox 14"/>
+          <p:cNvSpPr txBox="1"/>
+          <p:nvPr/>
+        </p:nvSpPr>
+        <p:spPr>
+          <a:xfrm>
+            <a:off x="5349240" y="960120"/>
+            <a:ext cx="3383280" cy="274320"/>
+          </a:xfrm>
+          <a:prstGeom prst="rect">
+            <a:avLst/>
+          </a:prstGeom>
+          <a:noFill/>
+        </p:spPr>
+        <p:txBody>
+          <a:bodyPr wrap="square" lIns="0" rIns="0" tIns="0" bIns="0" anchor="t">
+            <a:spAutoFit/>
+          </a:bodyPr>
+          <a:lstStyle/>
+          <a:p>
+            <a:pPr algn="l"/>
+            <a:r>
+              <a:rPr sz="1150" b="1" i="0">
+                <a:solidFill>
+                  <a:srgbClr val="1B2630"/>
+                </a:solidFill>
+                <a:latin typeface="Open Sans"/>
+              </a:rPr>
+              <a:t>Weights one 2×5 tile reads: 576 · C bytes</a:t>
             </a:r>
           </a:p>
         </p:txBody>
       </p:sp>
       <p:graphicFrame>
         <p:nvGraphicFramePr>
-          <p:cNvPr id="19" name="Chart 18"/>
+          <p:cNvPr id="16" name="Table 15"/>
           <p:cNvGraphicFramePr>
             <a:graphicFrameLocks noGrp="1"/>
           </p:cNvGraphicFramePr>
           <p:nvPr/>
         </p:nvGraphicFramePr>
         <p:xfrm>
-          <a:off x="4389120" y="960120"/>
-          <a:ext cx="4297680" cy="3246120"/>
+          <a:off x="5349240" y="1280160"/>
+          <a:ext cx="3337560" cy="1737360"/>
         </p:xfrm>
         <a:graphic>
-          <a:graphicData uri="http://schemas.openxmlformats.org/drawingml/2006/chart">
-            <c:chart xmlns:c="http://schemas.openxmlformats.org/drawingml/2006/chart" r:id="rId3"/>
+          <a:graphicData uri="http://schemas.openxmlformats.org/drawingml/2006/table">
+            <a:tbl>
+              <a:tblPr firstRow="1" bandRow="1">
+                <a:tableStyleId>{5C22544A-7EE6-4342-B048-85BDC9FD1C3A}</a:tableStyleId>
+              </a:tblPr>
+              <a:tblGrid>
+                <a:gridCol w="502920"/>
+                <a:gridCol w="777240"/>
+                <a:gridCol w="2057400"/>
+              </a:tblGrid>
+              <a:tr h="289560">
+                <a:tc>
+                  <a:txBody>
+                    <a:bodyPr/>
+                    <a:lstStyle/>
+                    <a:p>
+                      <a:r>
+                        <a:rPr sz="1050" b="1">
+                          <a:solidFill>
+                            <a:srgbClr val="1B2630"/>
+                          </a:solidFill>
+                          <a:latin typeface="Open Sans"/>
+                        </a:rPr>
+                        <a:t>C</a:t>
+                      </a:r>
+                    </a:p>
+                  </a:txBody>
+                  <a:tcPr marL="54864" marR="54864">
+                    <a:solidFill>
+                      <a:srgbClr val="F1F3F5"/>
+                    </a:solidFill>
+                  </a:tcPr>
+                </a:tc>
+                <a:tc>
+                  <a:txBody>
+                    <a:bodyPr/>
+                    <a:lstStyle/>
+                    <a:p>
+                      <a:r>
+                        <a:rPr sz="1050" b="1">
+                          <a:solidFill>
+                            <a:srgbClr val="1B2630"/>
+                          </a:solidFill>
+                          <a:latin typeface="Open Sans"/>
+                        </a:rPr>
+                        <a:t>Weights</a:t>
+                      </a:r>
+                    </a:p>
+                  </a:txBody>
+                  <a:tcPr marL="54864" marR="54864">
+                    <a:solidFill>
+                      <a:srgbClr val="F1F3F5"/>
+                    </a:solidFill>
+                  </a:tcPr>
+                </a:tc>
+                <a:tc>
+                  <a:txBody>
+                    <a:bodyPr/>
+                    <a:lstStyle/>
+                    <a:p>
+                      <a:r>
+                        <a:rPr sz="1050" b="1">
+                          <a:solidFill>
+                            <a:srgbClr val="1B2630"/>
+                          </a:solidFill>
+                          <a:latin typeface="Open Sans"/>
+                        </a:rPr>
+                        <a:t>Fits in</a:t>
+                      </a:r>
+                    </a:p>
+                  </a:txBody>
+                  <a:tcPr marL="54864" marR="54864">
+                    <a:solidFill>
+                      <a:srgbClr val="F1F3F5"/>
+                    </a:solidFill>
+                  </a:tcPr>
+                </a:tc>
+              </a:tr>
+              <a:tr h="289560">
+                <a:tc>
+                  <a:txBody>
+                    <a:bodyPr/>
+                    <a:lstStyle/>
+                    <a:p>
+                      <a:r>
+                        <a:rPr sz="1050" b="0">
+                          <a:solidFill>
+                            <a:srgbClr val="1B2630"/>
+                          </a:solidFill>
+                          <a:latin typeface="Open Sans"/>
+                        </a:rPr>
+                        <a:t>16</a:t>
+                      </a:r>
+                    </a:p>
+                  </a:txBody>
+                  <a:tcPr marL="54864" marR="54864">
+                    <a:solidFill>
+                      <a:srgbClr val="FFFFFF"/>
+                    </a:solidFill>
+                  </a:tcPr>
+                </a:tc>
+                <a:tc>
+                  <a:txBody>
+                    <a:bodyPr/>
+                    <a:lstStyle/>
+                    <a:p>
+                      <a:r>
+                        <a:rPr sz="1050" b="0">
+                          <a:solidFill>
+                            <a:srgbClr val="1B2630"/>
+                          </a:solidFill>
+                          <a:latin typeface="Open Sans"/>
+                        </a:rPr>
+                        <a:t>9 KB</a:t>
+                      </a:r>
+                    </a:p>
+                  </a:txBody>
+                  <a:tcPr marL="54864" marR="54864">
+                    <a:solidFill>
+                      <a:srgbClr val="FFFFFF"/>
+                    </a:solidFill>
+                  </a:tcPr>
+                </a:tc>
+                <a:tc>
+                  <a:txBody>
+                    <a:bodyPr/>
+                    <a:lstStyle/>
+                    <a:p>
+                      <a:r>
+                        <a:rPr sz="1050" b="0">
+                          <a:solidFill>
+                            <a:srgbClr val="1B2630"/>
+                          </a:solidFill>
+                          <a:latin typeface="Open Sans"/>
+                        </a:rPr>
+                        <a:t>L1 (32 KB)</a:t>
+                      </a:r>
+                    </a:p>
+                  </a:txBody>
+                  <a:tcPr marL="54864" marR="54864">
+                    <a:solidFill>
+                      <a:srgbClr val="FFFFFF"/>
+                    </a:solidFill>
+                  </a:tcPr>
+                </a:tc>
+              </a:tr>
+              <a:tr h="289560">
+                <a:tc>
+                  <a:txBody>
+                    <a:bodyPr/>
+                    <a:lstStyle/>
+                    <a:p>
+                      <a:r>
+                        <a:rPr sz="1050" b="0">
+                          <a:solidFill>
+                            <a:srgbClr val="1B2630"/>
+                          </a:solidFill>
+                          <a:latin typeface="Open Sans"/>
+                        </a:rPr>
+                        <a:t>32</a:t>
+                      </a:r>
+                    </a:p>
+                  </a:txBody>
+                  <a:tcPr marL="54864" marR="54864">
+                    <a:solidFill>
+                      <a:srgbClr val="FFFFFF"/>
+                    </a:solidFill>
+                  </a:tcPr>
+                </a:tc>
+                <a:tc>
+                  <a:txBody>
+                    <a:bodyPr/>
+                    <a:lstStyle/>
+                    <a:p>
+                      <a:r>
+                        <a:rPr sz="1050" b="0">
+                          <a:solidFill>
+                            <a:srgbClr val="1B2630"/>
+                          </a:solidFill>
+                          <a:latin typeface="Open Sans"/>
+                        </a:rPr>
+                        <a:t>18 KB</a:t>
+                      </a:r>
+                    </a:p>
+                  </a:txBody>
+                  <a:tcPr marL="54864" marR="54864">
+                    <a:solidFill>
+                      <a:srgbClr val="FFFFFF"/>
+                    </a:solidFill>
+                  </a:tcPr>
+                </a:tc>
+                <a:tc>
+                  <a:txBody>
+                    <a:bodyPr/>
+                    <a:lstStyle/>
+                    <a:p>
+                      <a:r>
+                        <a:rPr sz="1050" b="0">
+                          <a:solidFill>
+                            <a:srgbClr val="1B2630"/>
+                          </a:solidFill>
+                          <a:latin typeface="Open Sans"/>
+                        </a:rPr>
+                        <a:t>L1</a:t>
+                      </a:r>
+                    </a:p>
+                  </a:txBody>
+                  <a:tcPr marL="54864" marR="54864">
+                    <a:solidFill>
+                      <a:srgbClr val="FFFFFF"/>
+                    </a:solidFill>
+                  </a:tcPr>
+                </a:tc>
+              </a:tr>
+              <a:tr h="289560">
+                <a:tc>
+                  <a:txBody>
+                    <a:bodyPr/>
+                    <a:lstStyle/>
+                    <a:p>
+                      <a:r>
+                        <a:rPr sz="1050" b="0">
+                          <a:solidFill>
+                            <a:srgbClr val="1B2630"/>
+                          </a:solidFill>
+                          <a:latin typeface="Open Sans"/>
+                        </a:rPr>
+                        <a:t>64</a:t>
+                      </a:r>
+                    </a:p>
+                  </a:txBody>
+                  <a:tcPr marL="54864" marR="54864">
+                    <a:solidFill>
+                      <a:srgbClr val="FFFFFF"/>
+                    </a:solidFill>
+                  </a:tcPr>
+                </a:tc>
+                <a:tc>
+                  <a:txBody>
+                    <a:bodyPr/>
+                    <a:lstStyle/>
+                    <a:p>
+                      <a:r>
+                        <a:rPr sz="1050" b="0">
+                          <a:solidFill>
+                            <a:srgbClr val="1B2630"/>
+                          </a:solidFill>
+                          <a:latin typeface="Open Sans"/>
+                        </a:rPr>
+                        <a:t>37 KB</a:t>
+                      </a:r>
+                    </a:p>
+                  </a:txBody>
+                  <a:tcPr marL="54864" marR="54864">
+                    <a:solidFill>
+                      <a:srgbClr val="FFFFFF"/>
+                    </a:solidFill>
+                  </a:tcPr>
+                </a:tc>
+                <a:tc>
+                  <a:txBody>
+                    <a:bodyPr/>
+                    <a:lstStyle/>
+                    <a:p>
+                      <a:r>
+                        <a:rPr sz="1050" b="0">
+                          <a:solidFill>
+                            <a:srgbClr val="1B2630"/>
+                          </a:solidFill>
+                          <a:latin typeface="Open Sans"/>
+                        </a:rPr>
+                        <a:t>L2 (256 KB)</a:t>
+                      </a:r>
+                    </a:p>
+                  </a:txBody>
+                  <a:tcPr marL="54864" marR="54864">
+                    <a:solidFill>
+                      <a:srgbClr val="FFFFFF"/>
+                    </a:solidFill>
+                  </a:tcPr>
+                </a:tc>
+              </a:tr>
+              <a:tr h="289560">
+                <a:tc>
+                  <a:txBody>
+                    <a:bodyPr/>
+                    <a:lstStyle/>
+                    <a:p>
+                      <a:r>
+                        <a:rPr sz="1050" b="0">
+                          <a:solidFill>
+                            <a:srgbClr val="1B2630"/>
+                          </a:solidFill>
+                          <a:latin typeface="Open Sans"/>
+                        </a:rPr>
+                        <a:t>128</a:t>
+                      </a:r>
+                    </a:p>
+                  </a:txBody>
+                  <a:tcPr marL="54864" marR="54864">
+                    <a:solidFill>
+                      <a:srgbClr val="FFFFFF"/>
+                    </a:solidFill>
+                  </a:tcPr>
+                </a:tc>
+                <a:tc>
+                  <a:txBody>
+                    <a:bodyPr/>
+                    <a:lstStyle/>
+                    <a:p>
+                      <a:r>
+                        <a:rPr sz="1050" b="0">
+                          <a:solidFill>
+                            <a:srgbClr val="1B2630"/>
+                          </a:solidFill>
+                          <a:latin typeface="Open Sans"/>
+                        </a:rPr>
+                        <a:t>74 KB</a:t>
+                      </a:r>
+                    </a:p>
+                  </a:txBody>
+                  <a:tcPr marL="54864" marR="54864">
+                    <a:solidFill>
+                      <a:srgbClr val="FFFFFF"/>
+                    </a:solidFill>
+                  </a:tcPr>
+                </a:tc>
+                <a:tc>
+                  <a:txBody>
+                    <a:bodyPr/>
+                    <a:lstStyle/>
+                    <a:p>
+                      <a:r>
+                        <a:rPr sz="1050" b="0">
+                          <a:solidFill>
+                            <a:srgbClr val="1B2630"/>
+                          </a:solidFill>
+                          <a:latin typeface="Open Sans"/>
+                        </a:rPr>
+                        <a:t>L2</a:t>
+                      </a:r>
+                    </a:p>
+                  </a:txBody>
+                  <a:tcPr marL="54864" marR="54864">
+                    <a:solidFill>
+                      <a:srgbClr val="FFFFFF"/>
+                    </a:solidFill>
+                  </a:tcPr>
+                </a:tc>
+              </a:tr>
+              <a:tr h="289560">
+                <a:tc>
+                  <a:txBody>
+                    <a:bodyPr/>
+                    <a:lstStyle/>
+                    <a:p>
+                      <a:r>
+                        <a:rPr sz="1050" b="0">
+                          <a:solidFill>
+                            <a:srgbClr val="1B2630"/>
+                          </a:solidFill>
+                          <a:latin typeface="Open Sans"/>
+                        </a:rPr>
+                        <a:t>256</a:t>
+                      </a:r>
+                    </a:p>
+                  </a:txBody>
+                  <a:tcPr marL="54864" marR="54864">
+                    <a:solidFill>
+                      <a:srgbClr val="F8E5E9"/>
+                    </a:solidFill>
+                  </a:tcPr>
+                </a:tc>
+                <a:tc>
+                  <a:txBody>
+                    <a:bodyPr/>
+                    <a:lstStyle/>
+                    <a:p>
+                      <a:r>
+                        <a:rPr sz="1050" b="0">
+                          <a:solidFill>
+                            <a:srgbClr val="1B2630"/>
+                          </a:solidFill>
+                          <a:latin typeface="Open Sans"/>
+                        </a:rPr>
+                        <a:t>147 KB</a:t>
+                      </a:r>
+                    </a:p>
+                  </a:txBody>
+                  <a:tcPr marL="54864" marR="54864">
+                    <a:solidFill>
+                      <a:srgbClr val="F8E5E9"/>
+                    </a:solidFill>
+                  </a:tcPr>
+                </a:tc>
+                <a:tc>
+                  <a:txBody>
+                    <a:bodyPr/>
+                    <a:lstStyle/>
+                    <a:p>
+                      <a:r>
+                        <a:rPr sz="1050" b="0">
+                          <a:solidFill>
+                            <a:srgbClr val="1B2630"/>
+                          </a:solidFill>
+                          <a:latin typeface="Open Sans"/>
+                        </a:rPr>
+                        <a:t>L2, but + 400 KB input &gt; L2</a:t>
+                      </a:r>
+                    </a:p>
+                  </a:txBody>
+                  <a:tcPr marL="54864" marR="54864">
+                    <a:solidFill>
+                      <a:srgbClr val="F8E5E9"/>
+                    </a:solidFill>
+                  </a:tcPr>
+                </a:tc>
+              </a:tr>
+            </a:tbl>
           </a:graphicData>
         </a:graphic>
       </p:graphicFrame>
+      <p:sp>
+        <p:nvSpPr>
+          <p:cNvPr id="17" name="TextBox 16"/>
+          <p:cNvSpPr txBox="1"/>
+          <p:nvPr/>
+        </p:nvSpPr>
+        <p:spPr>
+          <a:xfrm>
+            <a:off x="5349240" y="3154680"/>
+            <a:ext cx="3337560" cy="1005840"/>
+          </a:xfrm>
+          <a:prstGeom prst="rect">
+            <a:avLst/>
+          </a:prstGeom>
+          <a:noFill/>
+        </p:spPr>
+        <p:txBody>
+          <a:bodyPr wrap="square" lIns="0" rIns="0" tIns="0" bIns="0" anchor="t">
+            <a:spAutoFit/>
+          </a:bodyPr>
+          <a:lstStyle/>
+          <a:p>
+            <a:pPr algn="l"/>
+            <a:r>
+              <a:rPr sz="1000" b="1" i="0">
+                <a:solidFill>
+                  <a:srgbClr val="1B2630"/>
+                </a:solidFill>
+                <a:latin typeface="Open Sans"/>
+              </a:rPr>
+              <a:t>Reused across the whole output plane, </a:t>
+            </a:r>
+            <a:r>
+              <a:rPr sz="1000" b="0" i="0">
+                <a:solidFill>
+                  <a:srgbClr val="5A6875"/>
+                </a:solidFill>
+                <a:latin typeface="Open Sans"/>
+              </a:rPr>
+              <a:t>so L2-resident layers still reach 73–80% of peak.</a:t>
+            </a:r>
+          </a:p>
+          <a:p>
+            <a:pPr algn="l">
+              <a:spcBef>
+                <a:spcPts val="600"/>
+              </a:spcBef>
+            </a:pPr>
+            <a:r>
+              <a:rPr sz="1000" b="1" i="0">
+                <a:solidFill>
+                  <a:srgbClr val="1B2630"/>
+                </a:solidFill>
+                <a:latin typeface="Open Sans"/>
+              </a:rPr>
+              <a:t>C = 256 head layers: 67–71%. </a:t>
+            </a:r>
+            <a:r>
+              <a:rPr sz="1000" b="0" i="0">
+                <a:solidFill>
+                  <a:srgbClr val="5A6875"/>
+                </a:solidFill>
+                <a:latin typeface="Open Sans"/>
+              </a:rPr>
+              <a:t>Next: input-channel blocking.</a:t>
+            </a:r>
+          </a:p>
+        </p:txBody>
+      </p:sp>
     </p:spTree>
   </p:cSld>
   <p:clrMapOvr>
@@ -13996,161 +19174,21 @@
           <a:lstStyle/>
           <a:p>
             <a:r>
-              <a:t>Same math, 50% to 86%: the tile and GCC's registers</a:t>
-            </a:r>
-          </a:p>
-        </p:txBody>
-      </p:sp>
-      <p:pic>
-        <p:nvPicPr>
-          <p:cNvPr id="3" name="Picture 2" descr="ukr_design_space_intrinsics.png"/>
-          <p:cNvPicPr>
-            <a:picLocks noChangeAspect="1"/>
-          </p:cNvPicPr>
-          <p:nvPr/>
-        </p:nvPicPr>
-        <p:blipFill>
-          <a:blip r:embed="rId3"/>
-          <a:stretch>
-            <a:fillRect/>
-          </a:stretch>
-        </p:blipFill>
+              <a:t>How the numbers are measured</a:t>
+            </a:r>
+          </a:p>
+        </p:txBody>
+      </p:sp>
+      <p:sp>
+        <p:nvSpPr>
+          <p:cNvPr id="3" name="assume-0"/>
+          <p:cNvSpPr/>
+          <p:nvPr/>
+        </p:nvSpPr>
         <p:spPr>
           <a:xfrm>
             <a:off x="457200" y="1005840"/>
-            <a:ext cx="5883088" cy="3200400"/>
-          </a:xfrm>
-          <a:prstGeom prst="rect">
-            <a:avLst/>
-          </a:prstGeom>
-        </p:spPr>
-      </p:pic>
-      <p:sp>
-        <p:nvSpPr>
-          <p:cNvPr id="4" name="ds-card-0"/>
-          <p:cNvSpPr/>
-          <p:nvPr/>
-        </p:nvSpPr>
-        <p:spPr>
-          <a:xfrm>
-            <a:off x="6446520" y="1005840"/>
-            <a:ext cx="2240280" cy="960120"/>
-          </a:xfrm>
-          <a:prstGeom prst="roundRect">
-            <a:avLst>
-              <a:gd name="adj" fmla="val 8000"/>
-            </a:avLst>
-          </a:prstGeom>
-          <a:solidFill>
-            <a:srgbClr val="F8E5E9"/>
-          </a:solidFill>
-          <a:ln>
-            <a:noFill/>
-          </a:ln>
-          <a:effectLst/>
-        </p:spPr>
-        <p:style>
-          <a:lnRef idx="1">
-            <a:schemeClr val="accent1"/>
-          </a:lnRef>
-          <a:fillRef idx="3">
-            <a:schemeClr val="accent1"/>
-          </a:fillRef>
-          <a:effectRef idx="2">
-            <a:schemeClr val="accent1"/>
-          </a:effectRef>
-          <a:fontRef idx="minor">
-            <a:schemeClr val="lt1"/>
-          </a:fontRef>
-        </p:style>
-        <p:txBody>
-          <a:bodyPr rtlCol="0" anchor="ctr"/>
-          <a:lstStyle/>
-          <a:p>
-            <a:pPr algn="ctr"/>
-          </a:p>
-        </p:txBody>
-      </p:sp>
-      <p:sp>
-        <p:nvSpPr>
-          <p:cNvPr id="5" name="TextBox 4"/>
-          <p:cNvSpPr txBox="1"/>
-          <p:nvPr/>
-        </p:nvSpPr>
-        <p:spPr>
-          <a:xfrm>
-            <a:off x="6556248" y="1078992"/>
-            <a:ext cx="2011680" cy="256032"/>
-          </a:xfrm>
-          <a:prstGeom prst="rect">
-            <a:avLst/>
-          </a:prstGeom>
-          <a:noFill/>
-        </p:spPr>
-        <p:txBody>
-          <a:bodyPr wrap="square" lIns="0" rIns="0" tIns="0" bIns="0" anchor="t">
-            <a:spAutoFit/>
-          </a:bodyPr>
-          <a:lstStyle/>
-          <a:p>
-            <a:pPr algn="l"/>
-            <a:r>
-              <a:rPr sz="1200" b="1" i="0">
-                <a:solidFill>
-                  <a:srgbClr val="BB0027"/>
-                </a:solidFill>
-                <a:latin typeface="Open Sans"/>
-              </a:rPr>
-              <a:t>Best: 2×5</a:t>
-            </a:r>
-          </a:p>
-        </p:txBody>
-      </p:sp>
-      <p:sp>
-        <p:nvSpPr>
-          <p:cNvPr id="6" name="TextBox 5"/>
-          <p:cNvSpPr txBox="1"/>
-          <p:nvPr/>
-        </p:nvSpPr>
-        <p:spPr>
-          <a:xfrm>
-            <a:off x="6556248" y="1353312"/>
-            <a:ext cx="2011680" cy="594360"/>
-          </a:xfrm>
-          <a:prstGeom prst="rect">
-            <a:avLst/>
-          </a:prstGeom>
-          <a:noFill/>
-        </p:spPr>
-        <p:txBody>
-          <a:bodyPr wrap="square" lIns="0" rIns="0" tIns="0" bIns="0" anchor="t">
-            <a:spAutoFit/>
-          </a:bodyPr>
-          <a:lstStyle/>
-          <a:p>
-            <a:pPr algn="l"/>
-            <a:r>
-              <a:rPr sz="1000" b="0" i="0">
-                <a:solidFill>
-                  <a:srgbClr val="5A6875"/>
-                </a:solidFill>
-                <a:latin typeface="Open Sans"/>
-              </a:rPr>
-              <a:t>13 registers, 85% alone, 77% in all 32 layers</a:t>
-            </a:r>
-          </a:p>
-        </p:txBody>
-      </p:sp>
-      <p:sp>
-        <p:nvSpPr>
-          <p:cNvPr id="7" name="ds-card-1"/>
-          <p:cNvSpPr/>
-          <p:nvPr/>
-        </p:nvSpPr>
-        <p:spPr>
-          <a:xfrm>
-            <a:off x="6446520" y="2084832"/>
-            <a:ext cx="2240280" cy="960120"/>
+            <a:ext cx="4023360" cy="713232"/>
           </a:xfrm>
           <a:prstGeom prst="roundRect">
             <a:avLst>
@@ -14189,14 +19227,14 @@
       </p:sp>
       <p:sp>
         <p:nvSpPr>
-          <p:cNvPr id="8" name="TextBox 7"/>
+          <p:cNvPr id="4" name="TextBox 3"/>
           <p:cNvSpPr txBox="1"/>
           <p:nvPr/>
         </p:nvSpPr>
         <p:spPr>
           <a:xfrm>
-            <a:off x="6556248" y="2157984"/>
-            <a:ext cx="2011680" cy="256032"/>
+            <a:off x="566928" y="1069848"/>
+            <a:ext cx="3749039" cy="228600"/>
           </a:xfrm>
           <a:prstGeom prst="rect">
             <a:avLst/>
@@ -14211,27 +19249,27 @@
           <a:p>
             <a:pPr algn="l"/>
             <a:r>
-              <a:rPr sz="1200" b="1" i="0">
+              <a:rPr sz="1150" b="1" i="0">
                 <a:solidFill>
                   <a:srgbClr val="1B2630"/>
                 </a:solidFill>
                 <a:latin typeface="Open Sans"/>
               </a:rPr>
-              <a:t>GCC's registers</a:t>
-            </a:r>
-          </a:p>
-        </p:txBody>
-      </p:sp>
-      <p:sp>
-        <p:nvSpPr>
-          <p:cNvPr id="9" name="TextBox 8"/>
+              <a:t>Machine and code</a:t>
+            </a:r>
+          </a:p>
+        </p:txBody>
+      </p:sp>
+      <p:sp>
+        <p:nvSpPr>
+          <p:cNvPr id="5" name="TextBox 4"/>
           <p:cNvSpPr txBox="1"/>
           <p:nvPr/>
         </p:nvSpPr>
         <p:spPr>
           <a:xfrm>
-            <a:off x="6556248" y="2432304"/>
-            <a:ext cx="2011680" cy="594360"/>
+            <a:off x="566928" y="1307592"/>
+            <a:ext cx="3794760" cy="411480"/>
           </a:xfrm>
           <a:prstGeom prst="rect">
             <a:avLst/>
@@ -14246,27 +19284,27 @@
           <a:p>
             <a:pPr algn="l"/>
             <a:r>
-              <a:rPr sz="1000" b="0" i="0">
+              <a:rPr sz="950" b="0" i="0">
                 <a:solidFill>
                   <a:srgbClr val="5A6875"/>
                 </a:solidFill>
                 <a:latin typeface="Open Sans"/>
               </a:rPr>
-              <a:t>clean at 13, 11 copies per tap at 15 (2×6), spills at 16 (4×3: 49%)</a:t>
-            </a:r>
-          </a:p>
-        </p:txBody>
-      </p:sp>
-      <p:sp>
-        <p:nvSpPr>
-          <p:cNvPr id="10" name="ds-card-2"/>
+              <a:t>ece028, Xeon E5-2640 v4, 1 core (taskset); C++ with AVX2 intrinsics only, GCC 8.5 -O3</a:t>
+            </a:r>
+          </a:p>
+        </p:txBody>
+      </p:sp>
+      <p:sp>
+        <p:nvSpPr>
+          <p:cNvPr id="6" name="assume-1"/>
           <p:cNvSpPr/>
           <p:nvPr/>
         </p:nvSpPr>
         <p:spPr>
           <a:xfrm>
-            <a:off x="6446520" y="3163824"/>
-            <a:ext cx="2240280" cy="960120"/>
+            <a:off x="4617720" y="1005840"/>
+            <a:ext cx="4023360" cy="713232"/>
           </a:xfrm>
           <a:prstGeom prst="roundRect">
             <a:avLst>
@@ -14305,14 +19343,14 @@
       </p:sp>
       <p:sp>
         <p:nvSpPr>
-          <p:cNvPr id="11" name="TextBox 10"/>
+          <p:cNvPr id="7" name="TextBox 6"/>
           <p:cNvSpPr txBox="1"/>
           <p:nvPr/>
         </p:nvSpPr>
         <p:spPr>
           <a:xfrm>
-            <a:off x="6556248" y="3236976"/>
-            <a:ext cx="2011680" cy="256032"/>
+            <a:off x="4727448" y="1069848"/>
+            <a:ext cx="3749039" cy="228600"/>
           </a:xfrm>
           <a:prstGeom prst="rect">
             <a:avLst/>
@@ -14327,27 +19365,27 @@
           <a:p>
             <a:pPr algn="l"/>
             <a:r>
-              <a:rPr sz="1200" b="1" i="0">
+              <a:rPr sz="1150" b="1" i="0">
                 <a:solidFill>
                   <a:srgbClr val="1B2630"/>
                 </a:solidFill>
                 <a:latin typeface="Open Sans"/>
               </a:rPr>
-              <a:t>Unroll, pipeline</a:t>
-            </a:r>
-          </a:p>
-        </p:txBody>
-      </p:sp>
-      <p:sp>
-        <p:nvSpPr>
-          <p:cNvPr id="12" name="TextBox 11"/>
+              <a:t>Peak</a:t>
+            </a:r>
+          </a:p>
+        </p:txBody>
+      </p:sp>
+      <p:sp>
+        <p:nvSpPr>
+          <p:cNvPr id="8" name="TextBox 7"/>
           <p:cNvSpPr txBox="1"/>
           <p:nvPr/>
         </p:nvSpPr>
         <p:spPr>
           <a:xfrm>
-            <a:off x="6556248" y="3511296"/>
-            <a:ext cx="2011680" cy="594360"/>
+            <a:off x="4727448" y="1307592"/>
+            <a:ext cx="3794760" cy="411480"/>
           </a:xfrm>
           <a:prstGeom prst="rect">
             <a:avLst/>
@@ -14362,13 +19400,709 @@
           <a:p>
             <a:pPr algn="l"/>
             <a:r>
-              <a:rPr sz="1000" b="0" i="0">
+              <a:rPr sz="950" b="0" i="0">
                 <a:solidFill>
                   <a:srgbClr val="5A6875"/>
                 </a:solidFill>
                 <a:latin typeface="Open Sans"/>
               </a:rPr>
-              <a:t>lost: uop cache overflow, spills</a:t>
+              <a:t>2 FMA units × 8 FP32 lanes × 2 FLOPs = 32 FLOPs/cycle per core (AVX2, no AVX-512)</a:t>
+            </a:r>
+          </a:p>
+        </p:txBody>
+      </p:sp>
+      <p:sp>
+        <p:nvSpPr>
+          <p:cNvPr id="9" name="assume-2"/>
+          <p:cNvSpPr/>
+          <p:nvPr/>
+        </p:nvSpPr>
+        <p:spPr>
+          <a:xfrm>
+            <a:off x="457200" y="1810512"/>
+            <a:ext cx="4023360" cy="713232"/>
+          </a:xfrm>
+          <a:prstGeom prst="roundRect">
+            <a:avLst>
+              <a:gd name="adj" fmla="val 8000"/>
+            </a:avLst>
+          </a:prstGeom>
+          <a:solidFill>
+            <a:srgbClr val="F1F3F5"/>
+          </a:solidFill>
+          <a:ln>
+            <a:noFill/>
+          </a:ln>
+          <a:effectLst/>
+        </p:spPr>
+        <p:style>
+          <a:lnRef idx="1">
+            <a:schemeClr val="accent1"/>
+          </a:lnRef>
+          <a:fillRef idx="3">
+            <a:schemeClr val="accent1"/>
+          </a:fillRef>
+          <a:effectRef idx="2">
+            <a:schemeClr val="accent1"/>
+          </a:effectRef>
+          <a:fontRef idx="minor">
+            <a:schemeClr val="lt1"/>
+          </a:fontRef>
+        </p:style>
+        <p:txBody>
+          <a:bodyPr rtlCol="0" anchor="ctr"/>
+          <a:lstStyle/>
+          <a:p>
+            <a:pPr algn="ctr"/>
+          </a:p>
+        </p:txBody>
+      </p:sp>
+      <p:sp>
+        <p:nvSpPr>
+          <p:cNvPr id="10" name="TextBox 9"/>
+          <p:cNvSpPr txBox="1"/>
+          <p:nvPr/>
+        </p:nvSpPr>
+        <p:spPr>
+          <a:xfrm>
+            <a:off x="566928" y="1874519"/>
+            <a:ext cx="3749039" cy="228600"/>
+          </a:xfrm>
+          <a:prstGeom prst="rect">
+            <a:avLst/>
+          </a:prstGeom>
+          <a:noFill/>
+        </p:spPr>
+        <p:txBody>
+          <a:bodyPr wrap="square" lIns="0" rIns="0" tIns="0" bIns="0" anchor="t">
+            <a:spAutoFit/>
+          </a:bodyPr>
+          <a:lstStyle/>
+          <a:p>
+            <a:pPr algn="l"/>
+            <a:r>
+              <a:rPr sz="1150" b="1" i="0">
+                <a:solidFill>
+                  <a:srgbClr val="BB0027"/>
+                </a:solidFill>
+                <a:latin typeface="Open Sans"/>
+              </a:rPr>
+              <a:t>Cycles</a:t>
+            </a:r>
+          </a:p>
+        </p:txBody>
+      </p:sp>
+      <p:sp>
+        <p:nvSpPr>
+          <p:cNvPr id="11" name="TextBox 10"/>
+          <p:cNvSpPr txBox="1"/>
+          <p:nvPr/>
+        </p:nvSpPr>
+        <p:spPr>
+          <a:xfrm>
+            <a:off x="566928" y="2112264"/>
+            <a:ext cx="3794760" cy="411480"/>
+          </a:xfrm>
+          <a:prstGeom prst="rect">
+            <a:avLst/>
+          </a:prstGeom>
+          <a:noFill/>
+        </p:spPr>
+        <p:txBody>
+          <a:bodyPr wrap="square" lIns="0" rIns="0" tIns="0" bIns="0" anchor="t">
+            <a:spAutoFit/>
+          </a:bodyPr>
+          <a:lstStyle/>
+          <a:p>
+            <a:pPr algn="l"/>
+            <a:r>
+              <a:rPr sz="950" b="0" i="0">
+                <a:solidFill>
+                  <a:srgbClr val="5A6875"/>
+                </a:solidFill>
+                <a:latin typeface="Open Sans"/>
+              </a:rPr>
+              <a:t>rdtsc ticks (fixed 2.4 GHz base) × 3.4 / 2.4 = cycles at max turbo, as in A2: can only understate</a:t>
+            </a:r>
+          </a:p>
+        </p:txBody>
+      </p:sp>
+      <p:sp>
+        <p:nvSpPr>
+          <p:cNvPr id="12" name="assume-3"/>
+          <p:cNvSpPr/>
+          <p:nvPr/>
+        </p:nvSpPr>
+        <p:spPr>
+          <a:xfrm>
+            <a:off x="4617720" y="1810512"/>
+            <a:ext cx="4023360" cy="713232"/>
+          </a:xfrm>
+          <a:prstGeom prst="roundRect">
+            <a:avLst>
+              <a:gd name="adj" fmla="val 8000"/>
+            </a:avLst>
+          </a:prstGeom>
+          <a:solidFill>
+            <a:srgbClr val="F1F3F5"/>
+          </a:solidFill>
+          <a:ln>
+            <a:noFill/>
+          </a:ln>
+          <a:effectLst/>
+        </p:spPr>
+        <p:style>
+          <a:lnRef idx="1">
+            <a:schemeClr val="accent1"/>
+          </a:lnRef>
+          <a:fillRef idx="3">
+            <a:schemeClr val="accent1"/>
+          </a:fillRef>
+          <a:effectRef idx="2">
+            <a:schemeClr val="accent1"/>
+          </a:effectRef>
+          <a:fontRef idx="minor">
+            <a:schemeClr val="lt1"/>
+          </a:fontRef>
+        </p:style>
+        <p:txBody>
+          <a:bodyPr rtlCol="0" anchor="ctr"/>
+          <a:lstStyle/>
+          <a:p>
+            <a:pPr algn="ctr"/>
+          </a:p>
+        </p:txBody>
+      </p:sp>
+      <p:sp>
+        <p:nvSpPr>
+          <p:cNvPr id="13" name="TextBox 12"/>
+          <p:cNvSpPr txBox="1"/>
+          <p:nvPr/>
+        </p:nvSpPr>
+        <p:spPr>
+          <a:xfrm>
+            <a:off x="4727448" y="1874519"/>
+            <a:ext cx="3749039" cy="228600"/>
+          </a:xfrm>
+          <a:prstGeom prst="rect">
+            <a:avLst/>
+          </a:prstGeom>
+          <a:noFill/>
+        </p:spPr>
+        <p:txBody>
+          <a:bodyPr wrap="square" lIns="0" rIns="0" tIns="0" bIns="0" anchor="t">
+            <a:spAutoFit/>
+          </a:bodyPr>
+          <a:lstStyle/>
+          <a:p>
+            <a:pPr algn="l"/>
+            <a:r>
+              <a:rPr sz="1150" b="1" i="0">
+                <a:solidFill>
+                  <a:srgbClr val="1B2630"/>
+                </a:solidFill>
+                <a:latin typeface="Open Sans"/>
+              </a:rPr>
+              <a:t>FLOPs</a:t>
+            </a:r>
+          </a:p>
+        </p:txBody>
+      </p:sp>
+      <p:sp>
+        <p:nvSpPr>
+          <p:cNvPr id="14" name="TextBox 13"/>
+          <p:cNvSpPr txBox="1"/>
+          <p:nvPr/>
+        </p:nvSpPr>
+        <p:spPr>
+          <a:xfrm>
+            <a:off x="4727448" y="2112264"/>
+            <a:ext cx="3794760" cy="411480"/>
+          </a:xfrm>
+          <a:prstGeom prst="rect">
+            <a:avLst/>
+          </a:prstGeom>
+          <a:noFill/>
+        </p:spPr>
+        <p:txBody>
+          <a:bodyPr wrap="square" lIns="0" rIns="0" tIns="0" bIns="0" anchor="t">
+            <a:spAutoFit/>
+          </a:bodyPr>
+          <a:lstStyle/>
+          <a:p>
+            <a:pPr algn="l"/>
+            <a:r>
+              <a:rPr sz="950" b="0" i="0">
+                <a:solidFill>
+                  <a:srgbClr val="5A6875"/>
+                </a:solidFill>
+                <a:latin typeface="Open Sans"/>
+              </a:rPr>
+              <a:t>2 × outputs × C × 9: only the convolution's multiply-adds; bias and SiLU count as zero</a:t>
+            </a:r>
+          </a:p>
+        </p:txBody>
+      </p:sp>
+      <p:sp>
+        <p:nvSpPr>
+          <p:cNvPr id="15" name="assume-4"/>
+          <p:cNvSpPr/>
+          <p:nvPr/>
+        </p:nvSpPr>
+        <p:spPr>
+          <a:xfrm>
+            <a:off x="457200" y="2615184"/>
+            <a:ext cx="4023360" cy="713232"/>
+          </a:xfrm>
+          <a:prstGeom prst="roundRect">
+            <a:avLst>
+              <a:gd name="adj" fmla="val 8000"/>
+            </a:avLst>
+          </a:prstGeom>
+          <a:solidFill>
+            <a:srgbClr val="F1F3F5"/>
+          </a:solidFill>
+          <a:ln>
+            <a:noFill/>
+          </a:ln>
+          <a:effectLst/>
+        </p:spPr>
+        <p:style>
+          <a:lnRef idx="1">
+            <a:schemeClr val="accent1"/>
+          </a:lnRef>
+          <a:fillRef idx="3">
+            <a:schemeClr val="accent1"/>
+          </a:fillRef>
+          <a:effectRef idx="2">
+            <a:schemeClr val="accent1"/>
+          </a:effectRef>
+          <a:fontRef idx="minor">
+            <a:schemeClr val="lt1"/>
+          </a:fontRef>
+        </p:style>
+        <p:txBody>
+          <a:bodyPr rtlCol="0" anchor="ctr"/>
+          <a:lstStyle/>
+          <a:p>
+            <a:pPr algn="ctr"/>
+          </a:p>
+        </p:txBody>
+      </p:sp>
+      <p:sp>
+        <p:nvSpPr>
+          <p:cNvPr id="16" name="TextBox 15"/>
+          <p:cNvSpPr txBox="1"/>
+          <p:nvPr/>
+        </p:nvSpPr>
+        <p:spPr>
+          <a:xfrm>
+            <a:off x="566928" y="2679192"/>
+            <a:ext cx="3749039" cy="228600"/>
+          </a:xfrm>
+          <a:prstGeom prst="rect">
+            <a:avLst/>
+          </a:prstGeom>
+          <a:noFill/>
+        </p:spPr>
+        <p:txBody>
+          <a:bodyPr wrap="square" lIns="0" rIns="0" tIns="0" bIns="0" anchor="t">
+            <a:spAutoFit/>
+          </a:bodyPr>
+          <a:lstStyle/>
+          <a:p>
+            <a:pPr algn="l"/>
+            <a:r>
+              <a:rPr sz="1150" b="1" i="0">
+                <a:solidFill>
+                  <a:srgbClr val="1B2630"/>
+                </a:solidFill>
+                <a:latin typeface="Open Sans"/>
+              </a:rPr>
+              <a:t>Microkernel alone</a:t>
+            </a:r>
+          </a:p>
+        </p:txBody>
+      </p:sp>
+      <p:sp>
+        <p:nvSpPr>
+          <p:cNvPr id="17" name="TextBox 16"/>
+          <p:cNvSpPr txBox="1"/>
+          <p:nvPr/>
+        </p:nvSpPr>
+        <p:spPr>
+          <a:xfrm>
+            <a:off x="566928" y="2916936"/>
+            <a:ext cx="3794760" cy="411480"/>
+          </a:xfrm>
+          <a:prstGeom prst="rect">
+            <a:avLst/>
+          </a:prstGeom>
+          <a:noFill/>
+        </p:spPr>
+        <p:txBody>
+          <a:bodyPr wrap="square" lIns="0" rIns="0" tIns="0" bIns="0" anchor="t">
+            <a:spAutoFit/>
+          </a:bodyPr>
+          <a:lstStyle/>
+          <a:p>
+            <a:pPr algn="l"/>
+            <a:r>
+              <a:rPr sz="950" b="0" i="0">
+                <a:solidFill>
+                  <a:srgbClr val="5A6875"/>
+                </a:solidFill>
+                <a:latin typeface="Open Sans"/>
+              </a:rPr>
+              <a:t>one tile of data reused (stays in L1/L2), 2 s warm-up, best of 3 runs, SiLU off</a:t>
+            </a:r>
+          </a:p>
+        </p:txBody>
+      </p:sp>
+      <p:sp>
+        <p:nvSpPr>
+          <p:cNvPr id="18" name="assume-5"/>
+          <p:cNvSpPr/>
+          <p:nvPr/>
+        </p:nvSpPr>
+        <p:spPr>
+          <a:xfrm>
+            <a:off x="4617720" y="2615184"/>
+            <a:ext cx="4023360" cy="713232"/>
+          </a:xfrm>
+          <a:prstGeom prst="roundRect">
+            <a:avLst>
+              <a:gd name="adj" fmla="val 8000"/>
+            </a:avLst>
+          </a:prstGeom>
+          <a:solidFill>
+            <a:srgbClr val="F1F3F5"/>
+          </a:solidFill>
+          <a:ln>
+            <a:noFill/>
+          </a:ln>
+          <a:effectLst/>
+        </p:spPr>
+        <p:style>
+          <a:lnRef idx="1">
+            <a:schemeClr val="accent1"/>
+          </a:lnRef>
+          <a:fillRef idx="3">
+            <a:schemeClr val="accent1"/>
+          </a:fillRef>
+          <a:effectRef idx="2">
+            <a:schemeClr val="accent1"/>
+          </a:effectRef>
+          <a:fontRef idx="minor">
+            <a:schemeClr val="lt1"/>
+          </a:fontRef>
+        </p:style>
+        <p:txBody>
+          <a:bodyPr rtlCol="0" anchor="ctr"/>
+          <a:lstStyle/>
+          <a:p>
+            <a:pPr algn="ctr"/>
+          </a:p>
+        </p:txBody>
+      </p:sp>
+      <p:sp>
+        <p:nvSpPr>
+          <p:cNvPr id="19" name="TextBox 18"/>
+          <p:cNvSpPr txBox="1"/>
+          <p:nvPr/>
+        </p:nvSpPr>
+        <p:spPr>
+          <a:xfrm>
+            <a:off x="4727448" y="2679192"/>
+            <a:ext cx="3749039" cy="228600"/>
+          </a:xfrm>
+          <a:prstGeom prst="rect">
+            <a:avLst/>
+          </a:prstGeom>
+          <a:noFill/>
+        </p:spPr>
+        <p:txBody>
+          <a:bodyPr wrap="square" lIns="0" rIns="0" tIns="0" bIns="0" anchor="t">
+            <a:spAutoFit/>
+          </a:bodyPr>
+          <a:lstStyle/>
+          <a:p>
+            <a:pPr algn="l"/>
+            <a:r>
+              <a:rPr sz="1150" b="1" i="0">
+                <a:solidFill>
+                  <a:srgbClr val="1B2630"/>
+                </a:solidFill>
+                <a:latin typeface="Open Sans"/>
+              </a:rPr>
+              <a:t>Full layers</a:t>
+            </a:r>
+          </a:p>
+        </p:txBody>
+      </p:sp>
+      <p:sp>
+        <p:nvSpPr>
+          <p:cNvPr id="20" name="TextBox 19"/>
+          <p:cNvSpPr txBox="1"/>
+          <p:nvPr/>
+        </p:nvSpPr>
+        <p:spPr>
+          <a:xfrm>
+            <a:off x="4727448" y="2916936"/>
+            <a:ext cx="3794760" cy="411480"/>
+          </a:xfrm>
+          <a:prstGeom prst="rect">
+            <a:avLst/>
+          </a:prstGeom>
+          <a:noFill/>
+        </p:spPr>
+        <p:txBody>
+          <a:bodyPr wrap="square" lIns="0" rIns="0" tIns="0" bIns="0" anchor="t">
+            <a:spAutoFit/>
+          </a:bodyPr>
+          <a:lstStyle/>
+          <a:p>
+            <a:pPr algn="l"/>
+            <a:r>
+              <a:rPr sz="950" b="0" i="0">
+                <a:solidFill>
+                  <a:srgbClr val="5A6875"/>
+                </a:solidFill>
+                <a:latin typeface="Open Sans"/>
+              </a:rPr>
+              <a:t>all 32 real YOLOv8n layers, batch 1, 640 × 640 image, FP32, SiLU on</a:t>
+            </a:r>
+          </a:p>
+        </p:txBody>
+      </p:sp>
+      <p:sp>
+        <p:nvSpPr>
+          <p:cNvPr id="21" name="assume-6"/>
+          <p:cNvSpPr/>
+          <p:nvPr/>
+        </p:nvSpPr>
+        <p:spPr>
+          <a:xfrm>
+            <a:off x="457200" y="3419856"/>
+            <a:ext cx="4023360" cy="713232"/>
+          </a:xfrm>
+          <a:prstGeom prst="roundRect">
+            <a:avLst>
+              <a:gd name="adj" fmla="val 8000"/>
+            </a:avLst>
+          </a:prstGeom>
+          <a:solidFill>
+            <a:srgbClr val="F1F3F5"/>
+          </a:solidFill>
+          <a:ln>
+            <a:noFill/>
+          </a:ln>
+          <a:effectLst/>
+        </p:spPr>
+        <p:style>
+          <a:lnRef idx="1">
+            <a:schemeClr val="accent1"/>
+          </a:lnRef>
+          <a:fillRef idx="3">
+            <a:schemeClr val="accent1"/>
+          </a:fillRef>
+          <a:effectRef idx="2">
+            <a:schemeClr val="accent1"/>
+          </a:effectRef>
+          <a:fontRef idx="minor">
+            <a:schemeClr val="lt1"/>
+          </a:fontRef>
+        </p:style>
+        <p:txBody>
+          <a:bodyPr rtlCol="0" anchor="ctr"/>
+          <a:lstStyle/>
+          <a:p>
+            <a:pPr algn="ctr"/>
+          </a:p>
+        </p:txBody>
+      </p:sp>
+      <p:sp>
+        <p:nvSpPr>
+          <p:cNvPr id="22" name="TextBox 21"/>
+          <p:cNvSpPr txBox="1"/>
+          <p:nvPr/>
+        </p:nvSpPr>
+        <p:spPr>
+          <a:xfrm>
+            <a:off x="566928" y="3483864"/>
+            <a:ext cx="3749039" cy="228600"/>
+          </a:xfrm>
+          <a:prstGeom prst="rect">
+            <a:avLst/>
+          </a:prstGeom>
+          <a:noFill/>
+        </p:spPr>
+        <p:txBody>
+          <a:bodyPr wrap="square" lIns="0" rIns="0" tIns="0" bIns="0" anchor="t">
+            <a:spAutoFit/>
+          </a:bodyPr>
+          <a:lstStyle/>
+          <a:p>
+            <a:pPr algn="l"/>
+            <a:r>
+              <a:rPr sz="1150" b="1" i="0">
+                <a:solidFill>
+                  <a:srgbClr val="1B2630"/>
+                </a:solidFill>
+                <a:latin typeface="Open Sans"/>
+              </a:rPr>
+              <a:t>Correct</a:t>
+            </a:r>
+          </a:p>
+        </p:txBody>
+      </p:sp>
+      <p:sp>
+        <p:nvSpPr>
+          <p:cNvPr id="23" name="TextBox 22"/>
+          <p:cNvSpPr txBox="1"/>
+          <p:nvPr/>
+        </p:nvSpPr>
+        <p:spPr>
+          <a:xfrm>
+            <a:off x="566928" y="3721608"/>
+            <a:ext cx="3794760" cy="411480"/>
+          </a:xfrm>
+          <a:prstGeom prst="rect">
+            <a:avLst/>
+          </a:prstGeom>
+          <a:noFill/>
+        </p:spPr>
+        <p:txBody>
+          <a:bodyPr wrap="square" lIns="0" rIns="0" tIns="0" bIns="0" anchor="t">
+            <a:spAutoFit/>
+          </a:bodyPr>
+          <a:lstStyle/>
+          <a:p>
+            <a:pPr algn="l"/>
+            <a:r>
+              <a:rPr sz="950" b="0" i="0">
+                <a:solidFill>
+                  <a:srgbClr val="5A6875"/>
+                </a:solidFill>
+                <a:latin typeface="Open Sans"/>
+              </a:rPr>
+              <a:t>every result checked: max relative error ≤ 1e-4 vs a scalar reference / OpenCV's real outputs</a:t>
+            </a:r>
+          </a:p>
+        </p:txBody>
+      </p:sp>
+      <p:sp>
+        <p:nvSpPr>
+          <p:cNvPr id="24" name="assume-7"/>
+          <p:cNvSpPr/>
+          <p:nvPr/>
+        </p:nvSpPr>
+        <p:spPr>
+          <a:xfrm>
+            <a:off x="4617720" y="3419856"/>
+            <a:ext cx="4023360" cy="713232"/>
+          </a:xfrm>
+          <a:prstGeom prst="roundRect">
+            <a:avLst>
+              <a:gd name="adj" fmla="val 8000"/>
+            </a:avLst>
+          </a:prstGeom>
+          <a:solidFill>
+            <a:srgbClr val="F1F3F5"/>
+          </a:solidFill>
+          <a:ln>
+            <a:noFill/>
+          </a:ln>
+          <a:effectLst/>
+        </p:spPr>
+        <p:style>
+          <a:lnRef idx="1">
+            <a:schemeClr val="accent1"/>
+          </a:lnRef>
+          <a:fillRef idx="3">
+            <a:schemeClr val="accent1"/>
+          </a:fillRef>
+          <a:effectRef idx="2">
+            <a:schemeClr val="accent1"/>
+          </a:effectRef>
+          <a:fontRef idx="minor">
+            <a:schemeClr val="lt1"/>
+          </a:fontRef>
+        </p:style>
+        <p:txBody>
+          <a:bodyPr rtlCol="0" anchor="ctr"/>
+          <a:lstStyle/>
+          <a:p>
+            <a:pPr algn="ctr"/>
+          </a:p>
+        </p:txBody>
+      </p:sp>
+      <p:sp>
+        <p:nvSpPr>
+          <p:cNvPr id="25" name="TextBox 24"/>
+          <p:cNvSpPr txBox="1"/>
+          <p:nvPr/>
+        </p:nvSpPr>
+        <p:spPr>
+          <a:xfrm>
+            <a:off x="4727448" y="3483864"/>
+            <a:ext cx="3749039" cy="228600"/>
+          </a:xfrm>
+          <a:prstGeom prst="rect">
+            <a:avLst/>
+          </a:prstGeom>
+          <a:noFill/>
+        </p:spPr>
+        <p:txBody>
+          <a:bodyPr wrap="square" lIns="0" rIns="0" tIns="0" bIns="0" anchor="t">
+            <a:spAutoFit/>
+          </a:bodyPr>
+          <a:lstStyle/>
+          <a:p>
+            <a:pPr algn="l"/>
+            <a:r>
+              <a:rPr sz="1150" b="1" i="0">
+                <a:solidFill>
+                  <a:srgbClr val="1B2630"/>
+                </a:solidFill>
+                <a:latin typeface="Open Sans"/>
+              </a:rPr>
+              <a:t>Baseline</a:t>
+            </a:r>
+          </a:p>
+        </p:txBody>
+      </p:sp>
+      <p:sp>
+        <p:nvSpPr>
+          <p:cNvPr id="26" name="TextBox 25"/>
+          <p:cNvSpPr txBox="1"/>
+          <p:nvPr/>
+        </p:nvSpPr>
+        <p:spPr>
+          <a:xfrm>
+            <a:off x="4727448" y="3721608"/>
+            <a:ext cx="3794760" cy="411480"/>
+          </a:xfrm>
+          <a:prstGeom prst="rect">
+            <a:avLst/>
+          </a:prstGeom>
+          <a:noFill/>
+        </p:spPr>
+        <p:txBody>
+          <a:bodyPr wrap="square" lIns="0" rIns="0" tIns="0" bIns="0" anchor="t">
+            <a:spAutoFit/>
+          </a:bodyPr>
+          <a:lstStyle/>
+          <a:p>
+            <a:pPr algn="l"/>
+            <a:r>
+              <a:rPr sz="950" b="0" i="0">
+                <a:solidFill>
+                  <a:srgbClr val="5A6875"/>
+                </a:solidFill>
+                <a:latin typeface="Open Sans"/>
+              </a:rPr>
+              <a:t>OpenCV DNN on the same ONNX model, 1 thread, its own per-layer timer</a:t>
             </a:r>
           </a:p>
         </p:txBody>
@@ -14407,35 +20141,55 @@
           <a:lstStyle/>
           <a:p>
             <a:r>
-              <a:t>Benchmarked like Assignment 2: FLOPs/cycle vs k</a:t>
-            </a:r>
-          </a:p>
-        </p:txBody>
-      </p:sp>
-      <p:pic>
-        <p:nvPicPr>
-          <p:cNvPr id="3" name="Picture 2" descr="ukr_sweep_nosilu_34_intrinsics.png"/>
-          <p:cNvPicPr>
-            <a:picLocks noChangeAspect="1"/>
-          </p:cNvPicPr>
-          <p:nvPr/>
-        </p:nvPicPr>
-        <p:blipFill>
-          <a:blip r:embed="rId3"/>
-          <a:stretch>
-            <a:fillRect/>
-          </a:stretch>
-        </p:blipFill>
-        <p:spPr>
-          <a:xfrm>
-            <a:off x="457200" y="960120"/>
-            <a:ext cx="5486400" cy="2926080"/>
-          </a:xfrm>
-          <a:prstGeom prst="rect">
-            <a:avLst/>
-          </a:prstGeom>
-        </p:spPr>
-      </p:pic>
+              <a:t>Four steps: ops → accumulators → tile → benchmark</a:t>
+            </a:r>
+          </a:p>
+        </p:txBody>
+      </p:sp>
+      <p:sp>
+        <p:nvSpPr>
+          <p:cNvPr id="3" name="Oval 2"/>
+          <p:cNvSpPr/>
+          <p:nvPr/>
+        </p:nvSpPr>
+        <p:spPr>
+          <a:xfrm>
+            <a:off x="457200" y="1069848"/>
+            <a:ext cx="329184" cy="329184"/>
+          </a:xfrm>
+          <a:prstGeom prst="ellipse">
+            <a:avLst/>
+          </a:prstGeom>
+          <a:solidFill>
+            <a:srgbClr val="BB0027"/>
+          </a:solidFill>
+          <a:ln>
+            <a:noFill/>
+          </a:ln>
+          <a:effectLst/>
+        </p:spPr>
+        <p:style>
+          <a:lnRef idx="1">
+            <a:schemeClr val="accent1"/>
+          </a:lnRef>
+          <a:fillRef idx="3">
+            <a:schemeClr val="accent1"/>
+          </a:fillRef>
+          <a:effectRef idx="2">
+            <a:schemeClr val="accent1"/>
+          </a:effectRef>
+          <a:fontRef idx="minor">
+            <a:schemeClr val="lt1"/>
+          </a:fontRef>
+        </p:style>
+        <p:txBody>
+          <a:bodyPr rtlCol="0" anchor="ctr"/>
+          <a:lstStyle/>
+          <a:p>
+            <a:pPr algn="ctr"/>
+          </a:p>
+        </p:txBody>
+      </p:sp>
       <p:sp>
         <p:nvSpPr>
           <p:cNvPr id="4" name="TextBox 3"/>
@@ -14444,8 +20198,43 @@
         </p:nvSpPr>
         <p:spPr>
           <a:xfrm>
-            <a:off x="457200" y="3931920"/>
-            <a:ext cx="5486400" cy="274320"/>
+            <a:off x="457200" y="1069848"/>
+            <a:ext cx="329184" cy="329184"/>
+          </a:xfrm>
+          <a:prstGeom prst="rect">
+            <a:avLst/>
+          </a:prstGeom>
+          <a:noFill/>
+        </p:spPr>
+        <p:txBody>
+          <a:bodyPr wrap="square" lIns="0" rIns="0" tIns="0" bIns="0" anchor="ctr">
+            <a:spAutoFit/>
+          </a:bodyPr>
+          <a:lstStyle/>
+          <a:p>
+            <a:pPr algn="ctr"/>
+            <a:r>
+              <a:rPr sz="1300" b="1" i="0">
+                <a:solidFill>
+                  <a:srgbClr val="FFFFFF"/>
+                </a:solidFill>
+                <a:latin typeface="Open Sans"/>
+              </a:rPr>
+              <a:t>1</a:t>
+            </a:r>
+          </a:p>
+        </p:txBody>
+      </p:sp>
+      <p:sp>
+        <p:nvSpPr>
+          <p:cNvPr id="5" name="TextBox 4"/>
+          <p:cNvSpPr txBox="1"/>
+          <p:nvPr/>
+        </p:nvSpPr>
+        <p:spPr>
+          <a:xfrm>
+            <a:off x="914400" y="1033271"/>
+            <a:ext cx="3291840" cy="256032"/>
           </a:xfrm>
           <a:prstGeom prst="rect">
             <a:avLst/>
@@ -14460,27 +20249,27 @@
           <a:p>
             <a:pPr algn="l"/>
             <a:r>
-              <a:rPr sz="1000" b="0" i="0">
-                <a:solidFill>
-                  <a:srgbClr val="5A6875"/>
-                </a:solidFill>
-                <a:latin typeface="Open Sans"/>
-              </a:rPr>
-              <a:t>SiLU off, cycles = time × 3.4 GHz, as in A2. 3 runs, every point checked (576 pass).</a:t>
-            </a:r>
-          </a:p>
-        </p:txBody>
-      </p:sp>
-      <p:sp>
-        <p:nvSpPr>
-          <p:cNvPr id="5" name="TextBox 4"/>
+              <a:rPr sz="1300" b="1" i="0">
+                <a:solidFill>
+                  <a:srgbClr val="1B2630"/>
+                </a:solidFill>
+                <a:latin typeface="Open Sans"/>
+              </a:rPr>
+              <a:t>Independent ops</a:t>
+            </a:r>
+          </a:p>
+        </p:txBody>
+      </p:sp>
+      <p:sp>
+        <p:nvSpPr>
+          <p:cNvPr id="6" name="TextBox 5"/>
           <p:cNvSpPr txBox="1"/>
           <p:nvPr/>
         </p:nvSpPr>
         <p:spPr>
           <a:xfrm>
-            <a:off x="6172200" y="960120"/>
-            <a:ext cx="2514600" cy="548640"/>
+            <a:off x="914400" y="1298448"/>
+            <a:ext cx="3291840" cy="475488"/>
           </a:xfrm>
           <a:prstGeom prst="rect">
             <a:avLst/>
@@ -14495,27 +20284,106 @@
           <a:p>
             <a:pPr algn="l"/>
             <a:r>
-              <a:rPr sz="3000" b="1" i="0">
-                <a:solidFill>
-                  <a:srgbClr val="BB0027"/>
-                </a:solidFill>
-                <a:latin typeface="Open Sans"/>
-              </a:rPr>
-              <a:t>83–89%</a:t>
-            </a:r>
-          </a:p>
-        </p:txBody>
-      </p:sp>
-      <p:sp>
-        <p:nvSpPr>
-          <p:cNvPr id="6" name="TextBox 5"/>
+              <a:rPr sz="1050" b="0" i="0">
+                <a:solidFill>
+                  <a:srgbClr val="5A6875"/>
+                </a:solidFill>
+                <a:latin typeface="Open Sans"/>
+              </a:rPr>
+              <a:t>Each output is a dot product of length C × 9: 102,400 in a 40×40, 64-ch layer.</a:t>
+            </a:r>
+          </a:p>
+        </p:txBody>
+      </p:sp>
+      <p:sp>
+        <p:nvSpPr>
+          <p:cNvPr id="7" name="Oval 6"/>
+          <p:cNvSpPr/>
+          <p:nvPr/>
+        </p:nvSpPr>
+        <p:spPr>
+          <a:xfrm>
+            <a:off x="457200" y="1847088"/>
+            <a:ext cx="329184" cy="329184"/>
+          </a:xfrm>
+          <a:prstGeom prst="ellipse">
+            <a:avLst/>
+          </a:prstGeom>
+          <a:solidFill>
+            <a:srgbClr val="BB0027"/>
+          </a:solidFill>
+          <a:ln>
+            <a:noFill/>
+          </a:ln>
+          <a:effectLst/>
+        </p:spPr>
+        <p:style>
+          <a:lnRef idx="1">
+            <a:schemeClr val="accent1"/>
+          </a:lnRef>
+          <a:fillRef idx="3">
+            <a:schemeClr val="accent1"/>
+          </a:fillRef>
+          <a:effectRef idx="2">
+            <a:schemeClr val="accent1"/>
+          </a:effectRef>
+          <a:fontRef idx="minor">
+            <a:schemeClr val="lt1"/>
+          </a:fontRef>
+        </p:style>
+        <p:txBody>
+          <a:bodyPr rtlCol="0" anchor="ctr"/>
+          <a:lstStyle/>
+          <a:p>
+            <a:pPr algn="ctr"/>
+          </a:p>
+        </p:txBody>
+      </p:sp>
+      <p:sp>
+        <p:nvSpPr>
+          <p:cNvPr id="8" name="TextBox 7"/>
           <p:cNvSpPr txBox="1"/>
           <p:nvPr/>
         </p:nvSpPr>
         <p:spPr>
           <a:xfrm>
-            <a:off x="6172200" y="1527048"/>
-            <a:ext cx="2514600" cy="548640"/>
+            <a:off x="457200" y="1847088"/>
+            <a:ext cx="329184" cy="329184"/>
+          </a:xfrm>
+          <a:prstGeom prst="rect">
+            <a:avLst/>
+          </a:prstGeom>
+          <a:noFill/>
+        </p:spPr>
+        <p:txBody>
+          <a:bodyPr wrap="square" lIns="0" rIns="0" tIns="0" bIns="0" anchor="ctr">
+            <a:spAutoFit/>
+          </a:bodyPr>
+          <a:lstStyle/>
+          <a:p>
+            <a:pPr algn="ctr"/>
+            <a:r>
+              <a:rPr sz="1300" b="1" i="0">
+                <a:solidFill>
+                  <a:srgbClr val="FFFFFF"/>
+                </a:solidFill>
+                <a:latin typeface="Open Sans"/>
+              </a:rPr>
+              <a:t>2</a:t>
+            </a:r>
+          </a:p>
+        </p:txBody>
+      </p:sp>
+      <p:sp>
+        <p:nvSpPr>
+          <p:cNvPr id="9" name="TextBox 8"/>
+          <p:cNvSpPr txBox="1"/>
+          <p:nvPr/>
+        </p:nvSpPr>
+        <p:spPr>
+          <a:xfrm>
+            <a:off x="914400" y="1810512"/>
+            <a:ext cx="3291840" cy="256032"/>
           </a:xfrm>
           <a:prstGeom prst="rect">
             <a:avLst/>
@@ -14530,27 +20398,27 @@
           <a:p>
             <a:pPr algn="l"/>
             <a:r>
-              <a:rPr sz="1200" b="0" i="0">
-                <a:solidFill>
-                  <a:srgbClr val="5A6875"/>
-                </a:solidFill>
-                <a:latin typeface="Open Sans"/>
-              </a:rPr>
-              <a:t>2×5 (v2's tile): 27–28.5 FLOPs/cycle, ~93 GFLOP/s on one core</a:t>
-            </a:r>
-          </a:p>
-        </p:txBody>
-      </p:sp>
-      <p:sp>
-        <p:nvSpPr>
-          <p:cNvPr id="7" name="TextBox 6"/>
+              <a:rPr sz="1300" b="1" i="0">
+                <a:solidFill>
+                  <a:srgbClr val="1B2630"/>
+                </a:solidFill>
+                <a:latin typeface="Open Sans"/>
+              </a:rPr>
+              <a:t>Outputs in flight</a:t>
+            </a:r>
+          </a:p>
+        </p:txBody>
+      </p:sp>
+      <p:sp>
+        <p:nvSpPr>
+          <p:cNvPr id="10" name="TextBox 9"/>
           <p:cNvSpPr txBox="1"/>
           <p:nvPr/>
         </p:nvSpPr>
         <p:spPr>
           <a:xfrm>
-            <a:off x="6172200" y="2011680"/>
-            <a:ext cx="2514600" cy="548640"/>
+            <a:off x="914400" y="2075688"/>
+            <a:ext cx="3291840" cy="475488"/>
           </a:xfrm>
           <a:prstGeom prst="rect">
             <a:avLst/>
@@ -14565,27 +20433,106 @@
           <a:p>
             <a:pPr algn="l"/>
             <a:r>
-              <a:rPr sz="3000" b="1" i="0">
-                <a:solidFill>
-                  <a:srgbClr val="6B7782"/>
-                </a:solidFill>
-                <a:latin typeface="Open Sans"/>
-              </a:rPr>
-              <a:t>80–83%</a:t>
-            </a:r>
-          </a:p>
-        </p:txBody>
-      </p:sp>
-      <p:sp>
-        <p:nvSpPr>
-          <p:cNvPr id="8" name="TextBox 7"/>
+              <a:rPr sz="1050" b="0" i="0">
+                <a:solidFill>
+                  <a:srgbClr val="5A6875"/>
+                </a:solidFill>
+                <a:latin typeface="Open Sans"/>
+              </a:rPr>
+              <a:t>5 × 2 FMA/cycle = 10 accumulators = 80 outputs; 1 accumulator = 10% of peak.</a:t>
+            </a:r>
+          </a:p>
+        </p:txBody>
+      </p:sp>
+      <p:sp>
+        <p:nvSpPr>
+          <p:cNvPr id="11" name="Oval 10"/>
+          <p:cNvSpPr/>
+          <p:nvPr/>
+        </p:nvSpPr>
+        <p:spPr>
+          <a:xfrm>
+            <a:off x="457200" y="2624327"/>
+            <a:ext cx="329184" cy="329184"/>
+          </a:xfrm>
+          <a:prstGeom prst="ellipse">
+            <a:avLst/>
+          </a:prstGeom>
+          <a:solidFill>
+            <a:srgbClr val="BB0027"/>
+          </a:solidFill>
+          <a:ln>
+            <a:noFill/>
+          </a:ln>
+          <a:effectLst/>
+        </p:spPr>
+        <p:style>
+          <a:lnRef idx="1">
+            <a:schemeClr val="accent1"/>
+          </a:lnRef>
+          <a:fillRef idx="3">
+            <a:schemeClr val="accent1"/>
+          </a:fillRef>
+          <a:effectRef idx="2">
+            <a:schemeClr val="accent1"/>
+          </a:effectRef>
+          <a:fontRef idx="minor">
+            <a:schemeClr val="lt1"/>
+          </a:fontRef>
+        </p:style>
+        <p:txBody>
+          <a:bodyPr rtlCol="0" anchor="ctr"/>
+          <a:lstStyle/>
+          <a:p>
+            <a:pPr algn="ctr"/>
+          </a:p>
+        </p:txBody>
+      </p:sp>
+      <p:sp>
+        <p:nvSpPr>
+          <p:cNvPr id="12" name="TextBox 11"/>
           <p:cNvSpPr txBox="1"/>
           <p:nvPr/>
         </p:nvSpPr>
         <p:spPr>
           <a:xfrm>
-            <a:off x="6172200" y="2578608"/>
-            <a:ext cx="2514600" cy="548640"/>
+            <a:off x="457200" y="2624327"/>
+            <a:ext cx="329184" cy="329184"/>
+          </a:xfrm>
+          <a:prstGeom prst="rect">
+            <a:avLst/>
+          </a:prstGeom>
+          <a:noFill/>
+        </p:spPr>
+        <p:txBody>
+          <a:bodyPr wrap="square" lIns="0" rIns="0" tIns="0" bIns="0" anchor="ctr">
+            <a:spAutoFit/>
+          </a:bodyPr>
+          <a:lstStyle/>
+          <a:p>
+            <a:pPr algn="ctr"/>
+            <a:r>
+              <a:rPr sz="1300" b="1" i="0">
+                <a:solidFill>
+                  <a:srgbClr val="FFFFFF"/>
+                </a:solidFill>
+                <a:latin typeface="Open Sans"/>
+              </a:rPr>
+              <a:t>3</a:t>
+            </a:r>
+          </a:p>
+        </p:txBody>
+      </p:sp>
+      <p:sp>
+        <p:nvSpPr>
+          <p:cNvPr id="13" name="TextBox 12"/>
+          <p:cNvSpPr txBox="1"/>
+          <p:nvPr/>
+        </p:nvSpPr>
+        <p:spPr>
+          <a:xfrm>
+            <a:off x="914400" y="2587751"/>
+            <a:ext cx="3291840" cy="256032"/>
           </a:xfrm>
           <a:prstGeom prst="rect">
             <a:avLst/>
@@ -14600,27 +20547,27 @@
           <a:p>
             <a:pPr algn="l"/>
             <a:r>
-              <a:rPr sz="1200" b="0" i="0">
-                <a:solidFill>
-                  <a:srgbClr val="5A6875"/>
-                </a:solidFill>
-                <a:latin typeface="Open Sans"/>
-              </a:rPr>
-              <a:t>2×6: GCC adds register copies at 15 live registers</a:t>
-            </a:r>
-          </a:p>
-        </p:txBody>
-      </p:sp>
-      <p:sp>
-        <p:nvSpPr>
-          <p:cNvPr id="9" name="TextBox 8"/>
+              <a:rPr sz="1300" b="1" i="0">
+                <a:solidFill>
+                  <a:srgbClr val="1B2630"/>
+                </a:solidFill>
+                <a:latin typeface="Open Sans"/>
+              </a:rPr>
+              <a:t>Kernel size</a:t>
+            </a:r>
+          </a:p>
+        </p:txBody>
+      </p:sp>
+      <p:sp>
+        <p:nvSpPr>
+          <p:cNvPr id="14" name="TextBox 13"/>
           <p:cNvSpPr txBox="1"/>
           <p:nvPr/>
         </p:nvSpPr>
         <p:spPr>
           <a:xfrm>
-            <a:off x="6172200" y="3063240"/>
-            <a:ext cx="2514600" cy="548640"/>
+            <a:off x="914400" y="2852927"/>
+            <a:ext cx="3291840" cy="475488"/>
           </a:xfrm>
           <a:prstGeom prst="rect">
             <a:avLst/>
@@ -14635,27 +20582,106 @@
           <a:p>
             <a:pPr algn="l"/>
             <a:r>
-              <a:rPr sz="3000" b="1" i="0">
-                <a:solidFill>
-                  <a:srgbClr val="B7731A"/>
-                </a:solidFill>
-                <a:latin typeface="Open Sans"/>
-              </a:rPr>
-              <a:t>k ≈ 500</a:t>
-            </a:r>
-          </a:p>
-        </p:txBody>
-      </p:sp>
-      <p:sp>
-        <p:nvSpPr>
-          <p:cNvPr id="10" name="TextBox 9"/>
+              <a:rPr sz="1050" b="0" i="0">
+                <a:solidFill>
+                  <a:srgbClr val="5A6875"/>
+                </a:solidFill>
+                <a:latin typeface="Open Sans"/>
+              </a:rPr>
+              <a:t>2×5 tile: 10 acc + 2 weights + 1 broadcast = 13 regs; 7 loads per 10 FMAs.</a:t>
+            </a:r>
+          </a:p>
+        </p:txBody>
+      </p:sp>
+      <p:sp>
+        <p:nvSpPr>
+          <p:cNvPr id="15" name="Oval 14"/>
+          <p:cNvSpPr/>
+          <p:nvPr/>
+        </p:nvSpPr>
+        <p:spPr>
+          <a:xfrm>
+            <a:off x="457200" y="3401568"/>
+            <a:ext cx="329184" cy="329184"/>
+          </a:xfrm>
+          <a:prstGeom prst="ellipse">
+            <a:avLst/>
+          </a:prstGeom>
+          <a:solidFill>
+            <a:srgbClr val="BB0027"/>
+          </a:solidFill>
+          <a:ln>
+            <a:noFill/>
+          </a:ln>
+          <a:effectLst/>
+        </p:spPr>
+        <p:style>
+          <a:lnRef idx="1">
+            <a:schemeClr val="accent1"/>
+          </a:lnRef>
+          <a:fillRef idx="3">
+            <a:schemeClr val="accent1"/>
+          </a:fillRef>
+          <a:effectRef idx="2">
+            <a:schemeClr val="accent1"/>
+          </a:effectRef>
+          <a:fontRef idx="minor">
+            <a:schemeClr val="lt1"/>
+          </a:fontRef>
+        </p:style>
+        <p:txBody>
+          <a:bodyPr rtlCol="0" anchor="ctr"/>
+          <a:lstStyle/>
+          <a:p>
+            <a:pPr algn="ctr"/>
+          </a:p>
+        </p:txBody>
+      </p:sp>
+      <p:sp>
+        <p:nvSpPr>
+          <p:cNvPr id="16" name="TextBox 15"/>
           <p:cNvSpPr txBox="1"/>
           <p:nvPr/>
         </p:nvSpPr>
         <p:spPr>
           <a:xfrm>
-            <a:off x="6172200" y="3630168"/>
-            <a:ext cx="2514600" cy="548640"/>
+            <a:off x="457200" y="3401568"/>
+            <a:ext cx="329184" cy="329184"/>
+          </a:xfrm>
+          <a:prstGeom prst="rect">
+            <a:avLst/>
+          </a:prstGeom>
+          <a:noFill/>
+        </p:spPr>
+        <p:txBody>
+          <a:bodyPr wrap="square" lIns="0" rIns="0" tIns="0" bIns="0" anchor="ctr">
+            <a:spAutoFit/>
+          </a:bodyPr>
+          <a:lstStyle/>
+          <a:p>
+            <a:pPr algn="ctr"/>
+            <a:r>
+              <a:rPr sz="1300" b="1" i="0">
+                <a:solidFill>
+                  <a:srgbClr val="FFFFFF"/>
+                </a:solidFill>
+                <a:latin typeface="Open Sans"/>
+              </a:rPr>
+              <a:t>4</a:t>
+            </a:r>
+          </a:p>
+        </p:txBody>
+      </p:sp>
+      <p:sp>
+        <p:nvSpPr>
+          <p:cNvPr id="17" name="TextBox 16"/>
+          <p:cNvSpPr txBox="1"/>
+          <p:nvPr/>
+        </p:nvSpPr>
+        <p:spPr>
+          <a:xfrm>
+            <a:off x="914400" y="3364991"/>
+            <a:ext cx="3291840" cy="256032"/>
           </a:xfrm>
           <a:prstGeom prst="rect">
             <a:avLst/>
@@ -14670,17 +20696,70 @@
           <a:p>
             <a:pPr algn="l"/>
             <a:r>
-              <a:rPr sz="1200" b="0" i="0">
+              <a:rPr sz="1300" b="1" i="0">
+                <a:solidFill>
+                  <a:srgbClr val="1B2630"/>
+                </a:solidFill>
+                <a:latin typeface="Open Sans"/>
+              </a:rPr>
+              <a:t>Benchmark like A2</a:t>
+            </a:r>
+          </a:p>
+        </p:txBody>
+      </p:sp>
+      <p:sp>
+        <p:nvSpPr>
+          <p:cNvPr id="18" name="TextBox 17"/>
+          <p:cNvSpPr txBox="1"/>
+          <p:nvPr/>
+        </p:nvSpPr>
+        <p:spPr>
+          <a:xfrm>
+            <a:off x="914400" y="3630168"/>
+            <a:ext cx="3291840" cy="475488"/>
+          </a:xfrm>
+          <a:prstGeom prst="rect">
+            <a:avLst/>
+          </a:prstGeom>
+          <a:noFill/>
+        </p:spPr>
+        <p:txBody>
+          <a:bodyPr wrap="square" lIns="0" rIns="0" tIns="0" bIns="0" anchor="t">
+            <a:spAutoFit/>
+          </a:bodyPr>
+          <a:lstStyle/>
+          <a:p>
+            <a:pPr algn="l"/>
+            <a:r>
+              <a:rPr sz="1050" b="0" i="0">
                 <a:solidFill>
                   <a:srgbClr val="5A6875"/>
                 </a:solidFill>
                 <a:latin typeface="Open Sans"/>
               </a:rPr>
-              <a:t>L1 dip: 2×5 weights pass 32 KB, like k ≈ 315 in A2</a:t>
-            </a:r>
-          </a:p>
-        </p:txBody>
-      </p:sp>
+              <a:t>Kernel alone, k = 72 to 4608, 3 runs, 2 s warm-up, cycles at 3.4 GHz, checked.</a:t>
+            </a:r>
+          </a:p>
+        </p:txBody>
+      </p:sp>
+      <p:graphicFrame>
+        <p:nvGraphicFramePr>
+          <p:cNvPr id="19" name="Chart 18"/>
+          <p:cNvGraphicFramePr>
+            <a:graphicFrameLocks noGrp="1"/>
+          </p:cNvGraphicFramePr>
+          <p:nvPr/>
+        </p:nvGraphicFramePr>
+        <p:xfrm>
+          <a:off x="4389120" y="960120"/>
+          <a:ext cx="4297680" cy="3246120"/>
+        </p:xfrm>
+        <a:graphic>
+          <a:graphicData uri="http://schemas.openxmlformats.org/drawingml/2006/chart">
+            <c:chart xmlns:c="http://schemas.openxmlformats.org/drawingml/2006/chart" r:id="rId3"/>
+          </a:graphicData>
+        </a:graphic>
+      </p:graphicFrame>
     </p:spTree>
   </p:cSld>
   <p:clrMapOvr>
